--- a/DATAS/GI - EDA Insights - By Nicole.pptx
+++ b/DATAS/GI - EDA Insights - By Nicole.pptx
@@ -200,3676 +200,6 @@
 <file path=ppt/changesInfos/changesInfo1.xml><?xml version="1.0" encoding="utf-8"?>
 <pc:chgInfo xmlns:a="http://schemas.openxmlformats.org/drawingml/2006/main" xmlns:r="http://schemas.openxmlformats.org/officeDocument/2006/relationships" xmlns:ac="http://schemas.microsoft.com/office/drawing/2013/main/command" xmlns:pc="http://schemas.microsoft.com/office/powerpoint/2013/main/command">
   <pc:docChgLst>
-    <pc:chgData name="AU Kelvin" userId="416e5d84-3133-4774-aa1a-290e1bef47d6" providerId="ADAL" clId="{9A4767C1-AA41-4A8F-91E9-F856893F4EE6}"/>
-    <pc:docChg chg="undo redo custSel addSld delSld modSld">
-      <pc:chgData name="AU Kelvin" userId="416e5d84-3133-4774-aa1a-290e1bef47d6" providerId="ADAL" clId="{9A4767C1-AA41-4A8F-91E9-F856893F4EE6}" dt="2023-03-10T10:09:57.225" v="2099" actId="20577"/>
-      <pc:docMkLst>
-        <pc:docMk/>
-      </pc:docMkLst>
-      <pc:sldChg chg="addSp modSp mod">
-        <pc:chgData name="AU Kelvin" userId="416e5d84-3133-4774-aa1a-290e1bef47d6" providerId="ADAL" clId="{9A4767C1-AA41-4A8F-91E9-F856893F4EE6}" dt="2023-03-10T10:07:58.867" v="2095" actId="13926"/>
-        <pc:sldMkLst>
-          <pc:docMk/>
-          <pc:sldMk cId="1028999168" sldId="260"/>
-        </pc:sldMkLst>
-        <pc:spChg chg="add mod">
-          <ac:chgData name="AU Kelvin" userId="416e5d84-3133-4774-aa1a-290e1bef47d6" providerId="ADAL" clId="{9A4767C1-AA41-4A8F-91E9-F856893F4EE6}" dt="2023-03-10T10:07:58.867" v="2095" actId="13926"/>
-          <ac:spMkLst>
-            <pc:docMk/>
-            <pc:sldMk cId="1028999168" sldId="260"/>
-            <ac:spMk id="3" creationId="{C78401F4-D234-4A7A-A0E3-62DD7C5EADD8}"/>
-          </ac:spMkLst>
-        </pc:spChg>
-      </pc:sldChg>
-      <pc:sldChg chg="addSp modSp mod">
-        <pc:chgData name="AU Kelvin" userId="416e5d84-3133-4774-aa1a-290e1bef47d6" providerId="ADAL" clId="{9A4767C1-AA41-4A8F-91E9-F856893F4EE6}" dt="2023-03-10T10:09:57.225" v="2099" actId="20577"/>
-        <pc:sldMkLst>
-          <pc:docMk/>
-          <pc:sldMk cId="95290033" sldId="261"/>
-        </pc:sldMkLst>
-        <pc:spChg chg="add mod">
-          <ac:chgData name="AU Kelvin" userId="416e5d84-3133-4774-aa1a-290e1bef47d6" providerId="ADAL" clId="{9A4767C1-AA41-4A8F-91E9-F856893F4EE6}" dt="2023-03-10T10:09:57.225" v="2099" actId="20577"/>
-          <ac:spMkLst>
-            <pc:docMk/>
-            <pc:sldMk cId="95290033" sldId="261"/>
-            <ac:spMk id="7" creationId="{EFEBA37C-E7C5-4525-B50F-4974565CCCEF}"/>
-          </ac:spMkLst>
-        </pc:spChg>
-      </pc:sldChg>
-      <pc:sldChg chg="addSp delSp modSp mod">
-        <pc:chgData name="AU Kelvin" userId="416e5d84-3133-4774-aa1a-290e1bef47d6" providerId="ADAL" clId="{9A4767C1-AA41-4A8F-91E9-F856893F4EE6}" dt="2023-03-10T07:41:28.694" v="1893" actId="1076"/>
-        <pc:sldMkLst>
-          <pc:docMk/>
-          <pc:sldMk cId="3442902861" sldId="266"/>
-        </pc:sldMkLst>
-        <pc:spChg chg="mod">
-          <ac:chgData name="AU Kelvin" userId="416e5d84-3133-4774-aa1a-290e1bef47d6" providerId="ADAL" clId="{9A4767C1-AA41-4A8F-91E9-F856893F4EE6}" dt="2023-03-10T02:25:16.168" v="1415" actId="20577"/>
-          <ac:spMkLst>
-            <pc:docMk/>
-            <pc:sldMk cId="3442902861" sldId="266"/>
-            <ac:spMk id="2" creationId="{D6124752-D21F-4C37-8C89-5A6D49E7D613}"/>
-          </ac:spMkLst>
-        </pc:spChg>
-        <pc:spChg chg="mod">
-          <ac:chgData name="AU Kelvin" userId="416e5d84-3133-4774-aa1a-290e1bef47d6" providerId="ADAL" clId="{9A4767C1-AA41-4A8F-91E9-F856893F4EE6}" dt="2023-03-10T07:27:05.538" v="1729" actId="20577"/>
-          <ac:spMkLst>
-            <pc:docMk/>
-            <pc:sldMk cId="3442902861" sldId="266"/>
-            <ac:spMk id="3" creationId="{0722FC5A-B29F-4C58-940E-4D925D707B51}"/>
-          </ac:spMkLst>
-        </pc:spChg>
-        <pc:spChg chg="add mod">
-          <ac:chgData name="AU Kelvin" userId="416e5d84-3133-4774-aa1a-290e1bef47d6" providerId="ADAL" clId="{9A4767C1-AA41-4A8F-91E9-F856893F4EE6}" dt="2023-03-10T07:28:42.138" v="1796" actId="1076"/>
-          <ac:spMkLst>
-            <pc:docMk/>
-            <pc:sldMk cId="3442902861" sldId="266"/>
-            <ac:spMk id="4" creationId="{C9D96347-781B-4E78-9CB8-564B28E36891}"/>
-          </ac:spMkLst>
-        </pc:spChg>
-        <pc:spChg chg="add mod">
-          <ac:chgData name="AU Kelvin" userId="416e5d84-3133-4774-aa1a-290e1bef47d6" providerId="ADAL" clId="{9A4767C1-AA41-4A8F-91E9-F856893F4EE6}" dt="2023-03-10T07:27:19.857" v="1734" actId="20577"/>
-          <ac:spMkLst>
-            <pc:docMk/>
-            <pc:sldMk cId="3442902861" sldId="266"/>
-            <ac:spMk id="9" creationId="{03273A91-309B-4236-B0B9-6383024BC413}"/>
-          </ac:spMkLst>
-        </pc:spChg>
-        <pc:spChg chg="add del mod">
-          <ac:chgData name="AU Kelvin" userId="416e5d84-3133-4774-aa1a-290e1bef47d6" providerId="ADAL" clId="{9A4767C1-AA41-4A8F-91E9-F856893F4EE6}" dt="2023-03-10T07:40:00.668" v="1876" actId="478"/>
-          <ac:spMkLst>
-            <pc:docMk/>
-            <pc:sldMk cId="3442902861" sldId="266"/>
-            <ac:spMk id="10" creationId="{7294E152-3A14-4081-B5F8-6F3C503CAA07}"/>
-          </ac:spMkLst>
-        </pc:spChg>
-        <pc:spChg chg="add mod">
-          <ac:chgData name="AU Kelvin" userId="416e5d84-3133-4774-aa1a-290e1bef47d6" providerId="ADAL" clId="{9A4767C1-AA41-4A8F-91E9-F856893F4EE6}" dt="2023-03-10T07:41:28.694" v="1893" actId="1076"/>
-          <ac:spMkLst>
-            <pc:docMk/>
-            <pc:sldMk cId="3442902861" sldId="266"/>
-            <ac:spMk id="11" creationId="{98EC32FC-078A-48E5-96F1-5E913CA7A096}"/>
-          </ac:spMkLst>
-        </pc:spChg>
-        <pc:picChg chg="mod">
-          <ac:chgData name="AU Kelvin" userId="416e5d84-3133-4774-aa1a-290e1bef47d6" providerId="ADAL" clId="{9A4767C1-AA41-4A8F-91E9-F856893F4EE6}" dt="2023-03-10T02:24:16.352" v="1351" actId="1076"/>
-          <ac:picMkLst>
-            <pc:docMk/>
-            <pc:sldMk cId="3442902861" sldId="266"/>
-            <ac:picMk id="5" creationId="{5A74EE3E-9A1E-4F94-BBA7-B2FF46777420}"/>
-          </ac:picMkLst>
-        </pc:picChg>
-        <pc:picChg chg="add del mod">
-          <ac:chgData name="AU Kelvin" userId="416e5d84-3133-4774-aa1a-290e1bef47d6" providerId="ADAL" clId="{9A4767C1-AA41-4A8F-91E9-F856893F4EE6}" dt="2023-03-10T02:23:49.564" v="1345"/>
-          <ac:picMkLst>
-            <pc:docMk/>
-            <pc:sldMk cId="3442902861" sldId="266"/>
-            <ac:picMk id="6" creationId="{ED35E859-5BD4-49BD-90EB-978DDA40D5EC}"/>
-          </ac:picMkLst>
-        </pc:picChg>
-        <pc:picChg chg="del">
-          <ac:chgData name="AU Kelvin" userId="416e5d84-3133-4774-aa1a-290e1bef47d6" providerId="ADAL" clId="{9A4767C1-AA41-4A8F-91E9-F856893F4EE6}" dt="2023-03-10T02:23:40.099" v="1340" actId="21"/>
-          <ac:picMkLst>
-            <pc:docMk/>
-            <pc:sldMk cId="3442902861" sldId="266"/>
-            <ac:picMk id="7" creationId="{7D11AFA2-FAE3-45D7-811D-958F565C4297}"/>
-          </ac:picMkLst>
-        </pc:picChg>
-        <pc:picChg chg="add mod">
-          <ac:chgData name="AU Kelvin" userId="416e5d84-3133-4774-aa1a-290e1bef47d6" providerId="ADAL" clId="{9A4767C1-AA41-4A8F-91E9-F856893F4EE6}" dt="2023-03-10T02:24:09.490" v="1350" actId="14100"/>
-          <ac:picMkLst>
-            <pc:docMk/>
-            <pc:sldMk cId="3442902861" sldId="266"/>
-            <ac:picMk id="8" creationId="{CD290223-998F-4D8F-9134-73173E05E5B3}"/>
-          </ac:picMkLst>
-        </pc:picChg>
-      </pc:sldChg>
-      <pc:sldChg chg="modSp new mod">
-        <pc:chgData name="AU Kelvin" userId="416e5d84-3133-4774-aa1a-290e1bef47d6" providerId="ADAL" clId="{9A4767C1-AA41-4A8F-91E9-F856893F4EE6}" dt="2023-03-09T06:30:41.661" v="37" actId="20577"/>
-        <pc:sldMkLst>
-          <pc:docMk/>
-          <pc:sldMk cId="689417263" sldId="267"/>
-        </pc:sldMkLst>
-        <pc:spChg chg="mod">
-          <ac:chgData name="AU Kelvin" userId="416e5d84-3133-4774-aa1a-290e1bef47d6" providerId="ADAL" clId="{9A4767C1-AA41-4A8F-91E9-F856893F4EE6}" dt="2023-03-09T06:30:41.661" v="37" actId="20577"/>
-          <ac:spMkLst>
-            <pc:docMk/>
-            <pc:sldMk cId="689417263" sldId="267"/>
-            <ac:spMk id="2" creationId="{A928EF97-08A3-4706-9D19-A326A68B2964}"/>
-          </ac:spMkLst>
-        </pc:spChg>
-      </pc:sldChg>
-      <pc:sldChg chg="addSp delSp modSp mod modShow">
-        <pc:chgData name="AU Kelvin" userId="416e5d84-3133-4774-aa1a-290e1bef47d6" providerId="ADAL" clId="{9A4767C1-AA41-4A8F-91E9-F856893F4EE6}" dt="2023-03-10T07:42:24.930" v="1896"/>
-        <pc:sldMkLst>
-          <pc:docMk/>
-          <pc:sldMk cId="2172804706" sldId="267"/>
-        </pc:sldMkLst>
-        <pc:spChg chg="add del mod">
-          <ac:chgData name="AU Kelvin" userId="416e5d84-3133-4774-aa1a-290e1bef47d6" providerId="ADAL" clId="{9A4767C1-AA41-4A8F-91E9-F856893F4EE6}" dt="2023-03-10T07:22:11.507" v="1663" actId="478"/>
-          <ac:spMkLst>
-            <pc:docMk/>
-            <pc:sldMk cId="2172804706" sldId="267"/>
-            <ac:spMk id="6" creationId="{F2E7320E-07AA-44CD-B53A-C4967E9D45FC}"/>
-          </ac:spMkLst>
-        </pc:spChg>
-        <pc:spChg chg="del">
-          <ac:chgData name="AU Kelvin" userId="416e5d84-3133-4774-aa1a-290e1bef47d6" providerId="ADAL" clId="{9A4767C1-AA41-4A8F-91E9-F856893F4EE6}" dt="2023-03-10T07:21:55.725" v="1643" actId="478"/>
-          <ac:spMkLst>
-            <pc:docMk/>
-            <pc:sldMk cId="2172804706" sldId="267"/>
-            <ac:spMk id="8" creationId="{4AC6116F-469F-4A0D-BD15-3D93A5ABDC3B}"/>
-          </ac:spMkLst>
-        </pc:spChg>
-        <pc:spChg chg="add mod">
-          <ac:chgData name="AU Kelvin" userId="416e5d84-3133-4774-aa1a-290e1bef47d6" providerId="ADAL" clId="{9A4767C1-AA41-4A8F-91E9-F856893F4EE6}" dt="2023-03-10T07:22:02.837" v="1662" actId="27636"/>
-          <ac:spMkLst>
-            <pc:docMk/>
-            <pc:sldMk cId="2172804706" sldId="267"/>
-            <ac:spMk id="10" creationId="{FF0B31A4-D45C-4380-81C8-B123342A71E6}"/>
-          </ac:spMkLst>
-        </pc:spChg>
-        <pc:spChg chg="add del mod">
-          <ac:chgData name="AU Kelvin" userId="416e5d84-3133-4774-aa1a-290e1bef47d6" providerId="ADAL" clId="{9A4767C1-AA41-4A8F-91E9-F856893F4EE6}" dt="2023-03-10T07:22:15.401" v="1664" actId="478"/>
-          <ac:spMkLst>
-            <pc:docMk/>
-            <pc:sldMk cId="2172804706" sldId="267"/>
-            <ac:spMk id="12" creationId="{F5D2A41A-8A30-41BB-AA31-F696FFFE3C91}"/>
-          </ac:spMkLst>
-        </pc:spChg>
-        <pc:spChg chg="add mod">
-          <ac:chgData name="AU Kelvin" userId="416e5d84-3133-4774-aa1a-290e1bef47d6" providerId="ADAL" clId="{9A4767C1-AA41-4A8F-91E9-F856893F4EE6}" dt="2023-03-10T07:41:03.804" v="1888" actId="20577"/>
-          <ac:spMkLst>
-            <pc:docMk/>
-            <pc:sldMk cId="2172804706" sldId="267"/>
-            <ac:spMk id="13" creationId="{CCDAA278-5CBF-4877-807C-C998CF5D670F}"/>
-          </ac:spMkLst>
-        </pc:spChg>
-        <pc:spChg chg="add mod">
-          <ac:chgData name="AU Kelvin" userId="416e5d84-3133-4774-aa1a-290e1bef47d6" providerId="ADAL" clId="{9A4767C1-AA41-4A8F-91E9-F856893F4EE6}" dt="2023-03-10T07:42:21.025" v="1895"/>
-          <ac:spMkLst>
-            <pc:docMk/>
-            <pc:sldMk cId="2172804706" sldId="267"/>
-            <ac:spMk id="14" creationId="{843880E1-89C4-441D-B393-B5D6DE0B89CD}"/>
-          </ac:spMkLst>
-        </pc:spChg>
-        <pc:spChg chg="add mod">
-          <ac:chgData name="AU Kelvin" userId="416e5d84-3133-4774-aa1a-290e1bef47d6" providerId="ADAL" clId="{9A4767C1-AA41-4A8F-91E9-F856893F4EE6}" dt="2023-03-10T07:42:24.930" v="1896"/>
-          <ac:spMkLst>
-            <pc:docMk/>
-            <pc:sldMk cId="2172804706" sldId="267"/>
-            <ac:spMk id="15" creationId="{DC29577F-9EF3-473A-AB68-7EF04F3E99D0}"/>
-          </ac:spMkLst>
-        </pc:spChg>
-        <pc:picChg chg="del">
-          <ac:chgData name="AU Kelvin" userId="416e5d84-3133-4774-aa1a-290e1bef47d6" providerId="ADAL" clId="{9A4767C1-AA41-4A8F-91E9-F856893F4EE6}" dt="2023-03-10T02:23:52.902" v="1347" actId="21"/>
-          <ac:picMkLst>
-            <pc:docMk/>
-            <pc:sldMk cId="2172804706" sldId="267"/>
-            <ac:picMk id="5" creationId="{C04A081E-9852-46B6-A49B-0E508ECE54F3}"/>
-          </ac:picMkLst>
-        </pc:picChg>
-        <pc:picChg chg="add del">
-          <ac:chgData name="AU Kelvin" userId="416e5d84-3133-4774-aa1a-290e1bef47d6" providerId="ADAL" clId="{9A4767C1-AA41-4A8F-91E9-F856893F4EE6}" dt="2023-03-10T02:23:51.901" v="1346" actId="21"/>
-          <ac:picMkLst>
-            <pc:docMk/>
-            <pc:sldMk cId="2172804706" sldId="267"/>
-            <ac:picMk id="7" creationId="{E1444774-6B0E-4908-860A-2618E04FA654}"/>
-          </ac:picMkLst>
-        </pc:picChg>
-        <pc:picChg chg="add mod">
-          <ac:chgData name="AU Kelvin" userId="416e5d84-3133-4774-aa1a-290e1bef47d6" providerId="ADAL" clId="{9A4767C1-AA41-4A8F-91E9-F856893F4EE6}" dt="2023-03-10T02:30:10.106" v="1417" actId="1076"/>
-          <ac:picMkLst>
-            <pc:docMk/>
-            <pc:sldMk cId="2172804706" sldId="267"/>
-            <ac:picMk id="9" creationId="{DDB5C4C2-E9D6-4638-909D-E3C64216015A}"/>
-          </ac:picMkLst>
-        </pc:picChg>
-      </pc:sldChg>
-      <pc:sldChg chg="mod modShow">
-        <pc:chgData name="AU Kelvin" userId="416e5d84-3133-4774-aa1a-290e1bef47d6" providerId="ADAL" clId="{9A4767C1-AA41-4A8F-91E9-F856893F4EE6}" dt="2023-03-10T07:25:25.841" v="1687" actId="729"/>
-        <pc:sldMkLst>
-          <pc:docMk/>
-          <pc:sldMk cId="3832514624" sldId="268"/>
-        </pc:sldMkLst>
-      </pc:sldChg>
-      <pc:sldChg chg="modSp mod modShow">
-        <pc:chgData name="AU Kelvin" userId="416e5d84-3133-4774-aa1a-290e1bef47d6" providerId="ADAL" clId="{9A4767C1-AA41-4A8F-91E9-F856893F4EE6}" dt="2023-03-10T07:25:31.476" v="1688" actId="729"/>
-        <pc:sldMkLst>
-          <pc:docMk/>
-          <pc:sldMk cId="3223329462" sldId="269"/>
-        </pc:sldMkLst>
-        <pc:spChg chg="mod">
-          <ac:chgData name="AU Kelvin" userId="416e5d84-3133-4774-aa1a-290e1bef47d6" providerId="ADAL" clId="{9A4767C1-AA41-4A8F-91E9-F856893F4EE6}" dt="2023-03-10T07:19:41.128" v="1636" actId="20577"/>
-          <ac:spMkLst>
-            <pc:docMk/>
-            <pc:sldMk cId="3223329462" sldId="269"/>
-            <ac:spMk id="3" creationId="{0722FC5A-B29F-4C58-940E-4D925D707B51}"/>
-          </ac:spMkLst>
-        </pc:spChg>
-      </pc:sldChg>
-      <pc:sldChg chg="add del">
-        <pc:chgData name="AU Kelvin" userId="416e5d84-3133-4774-aa1a-290e1bef47d6" providerId="ADAL" clId="{9A4767C1-AA41-4A8F-91E9-F856893F4EE6}" dt="2023-03-10T10:03:58.180" v="1963" actId="47"/>
-        <pc:sldMkLst>
-          <pc:docMk/>
-          <pc:sldMk cId="689417263" sldId="272"/>
-        </pc:sldMkLst>
-      </pc:sldChg>
-      <pc:sldChg chg="addSp delSp modSp mod">
-        <pc:chgData name="AU Kelvin" userId="416e5d84-3133-4774-aa1a-290e1bef47d6" providerId="ADAL" clId="{9A4767C1-AA41-4A8F-91E9-F856893F4EE6}" dt="2023-03-10T10:00:39.262" v="1959" actId="1076"/>
-        <pc:sldMkLst>
-          <pc:docMk/>
-          <pc:sldMk cId="689417263" sldId="273"/>
-        </pc:sldMkLst>
-        <pc:spChg chg="mod">
-          <ac:chgData name="AU Kelvin" userId="416e5d84-3133-4774-aa1a-290e1bef47d6" providerId="ADAL" clId="{9A4767C1-AA41-4A8F-91E9-F856893F4EE6}" dt="2023-03-09T06:42:05.707" v="111" actId="1076"/>
-          <ac:spMkLst>
-            <pc:docMk/>
-            <pc:sldMk cId="689417263" sldId="273"/>
-            <ac:spMk id="2" creationId="{A928EF97-08A3-4706-9D19-A326A68B2964}"/>
-          </ac:spMkLst>
-        </pc:spChg>
-        <pc:spChg chg="del">
-          <ac:chgData name="AU Kelvin" userId="416e5d84-3133-4774-aa1a-290e1bef47d6" providerId="ADAL" clId="{9A4767C1-AA41-4A8F-91E9-F856893F4EE6}" dt="2023-03-09T06:42:52.628" v="125"/>
-          <ac:spMkLst>
-            <pc:docMk/>
-            <pc:sldMk cId="689417263" sldId="273"/>
-            <ac:spMk id="3" creationId="{BDAF05D6-3AE1-4C81-8219-2233A6D15176}"/>
-          </ac:spMkLst>
-        </pc:spChg>
-        <pc:spChg chg="add del mod">
-          <ac:chgData name="AU Kelvin" userId="416e5d84-3133-4774-aa1a-290e1bef47d6" providerId="ADAL" clId="{9A4767C1-AA41-4A8F-91E9-F856893F4EE6}" dt="2023-03-09T10:24:40.510" v="134"/>
-          <ac:spMkLst>
-            <pc:docMk/>
-            <pc:sldMk cId="689417263" sldId="273"/>
-            <ac:spMk id="12" creationId="{999663E5-95E9-4025-A2F8-2D17A62A5F48}"/>
-          </ac:spMkLst>
-        </pc:spChg>
-        <pc:spChg chg="add mod">
-          <ac:chgData name="AU Kelvin" userId="416e5d84-3133-4774-aa1a-290e1bef47d6" providerId="ADAL" clId="{9A4767C1-AA41-4A8F-91E9-F856893F4EE6}" dt="2023-03-10T10:00:39.262" v="1959" actId="1076"/>
-          <ac:spMkLst>
-            <pc:docMk/>
-            <pc:sldMk cId="689417263" sldId="273"/>
-            <ac:spMk id="17" creationId="{AEF8B360-861D-4550-A7B7-8609D5C57817}"/>
-          </ac:spMkLst>
-        </pc:spChg>
-        <pc:spChg chg="add mod">
-          <ac:chgData name="AU Kelvin" userId="416e5d84-3133-4774-aa1a-290e1bef47d6" providerId="ADAL" clId="{9A4767C1-AA41-4A8F-91E9-F856893F4EE6}" dt="2023-03-09T11:07:35.117" v="1032" actId="404"/>
-          <ac:spMkLst>
-            <pc:docMk/>
-            <pc:sldMk cId="689417263" sldId="273"/>
-            <ac:spMk id="18" creationId="{777FEA76-3A62-4884-92A7-4E415DE0B425}"/>
-          </ac:spMkLst>
-        </pc:spChg>
-        <pc:picChg chg="add del mod">
-          <ac:chgData name="AU Kelvin" userId="416e5d84-3133-4774-aa1a-290e1bef47d6" providerId="ADAL" clId="{9A4767C1-AA41-4A8F-91E9-F856893F4EE6}" dt="2023-03-09T06:38:26.195" v="66" actId="478"/>
-          <ac:picMkLst>
-            <pc:docMk/>
-            <pc:sldMk cId="689417263" sldId="273"/>
-            <ac:picMk id="5" creationId="{F8FE3F41-FEDA-4EE0-B3DF-63EF93C9B42A}"/>
-          </ac:picMkLst>
-        </pc:picChg>
-        <pc:picChg chg="add del mod">
-          <ac:chgData name="AU Kelvin" userId="416e5d84-3133-4774-aa1a-290e1bef47d6" providerId="ADAL" clId="{9A4767C1-AA41-4A8F-91E9-F856893F4EE6}" dt="2023-03-09T06:42:51.527" v="124" actId="21"/>
-          <ac:picMkLst>
-            <pc:docMk/>
-            <pc:sldMk cId="689417263" sldId="273"/>
-            <ac:picMk id="7" creationId="{DD16E120-3B7C-43F5-B0E7-5CE28E99F67F}"/>
-          </ac:picMkLst>
-        </pc:picChg>
-        <pc:picChg chg="add del mod">
-          <ac:chgData name="AU Kelvin" userId="416e5d84-3133-4774-aa1a-290e1bef47d6" providerId="ADAL" clId="{9A4767C1-AA41-4A8F-91E9-F856893F4EE6}" dt="2023-03-09T06:42:03.658" v="107" actId="22"/>
-          <ac:picMkLst>
-            <pc:docMk/>
-            <pc:sldMk cId="689417263" sldId="273"/>
-            <ac:picMk id="9" creationId="{FBB65DB5-8EF8-40F8-AAF9-0E750BA34B27}"/>
-          </ac:picMkLst>
-        </pc:picChg>
-        <pc:picChg chg="add del mod">
-          <ac:chgData name="AU Kelvin" userId="416e5d84-3133-4774-aa1a-290e1bef47d6" providerId="ADAL" clId="{9A4767C1-AA41-4A8F-91E9-F856893F4EE6}" dt="2023-03-09T10:23:00.303" v="126" actId="478"/>
-          <ac:picMkLst>
-            <pc:docMk/>
-            <pc:sldMk cId="689417263" sldId="273"/>
-            <ac:picMk id="10" creationId="{42EA8F07-2F50-4052-9483-76603DD897E4}"/>
-          </ac:picMkLst>
-        </pc:picChg>
-        <pc:picChg chg="add mod">
-          <ac:chgData name="AU Kelvin" userId="416e5d84-3133-4774-aa1a-290e1bef47d6" providerId="ADAL" clId="{9A4767C1-AA41-4A8F-91E9-F856893F4EE6}" dt="2023-03-09T10:25:54.287" v="146" actId="14100"/>
-          <ac:picMkLst>
-            <pc:docMk/>
-            <pc:sldMk cId="689417263" sldId="273"/>
-            <ac:picMk id="14" creationId="{878E4CC8-620A-497E-B700-881EAFB778BC}"/>
-          </ac:picMkLst>
-        </pc:picChg>
-        <pc:picChg chg="add mod">
-          <ac:chgData name="AU Kelvin" userId="416e5d84-3133-4774-aa1a-290e1bef47d6" providerId="ADAL" clId="{9A4767C1-AA41-4A8F-91E9-F856893F4EE6}" dt="2023-03-09T10:35:45.475" v="257" actId="1076"/>
-          <ac:picMkLst>
-            <pc:docMk/>
-            <pc:sldMk cId="689417263" sldId="273"/>
-            <ac:picMk id="16" creationId="{37BE95A8-5A2E-4C43-8B97-4ED1ECAC824E}"/>
-          </ac:picMkLst>
-        </pc:picChg>
-      </pc:sldChg>
-      <pc:sldChg chg="addSp modSp mod">
-        <pc:chgData name="AU Kelvin" userId="416e5d84-3133-4774-aa1a-290e1bef47d6" providerId="ADAL" clId="{9A4767C1-AA41-4A8F-91E9-F856893F4EE6}" dt="2023-03-10T02:59:40.097" v="1554" actId="20577"/>
-        <pc:sldMkLst>
-          <pc:docMk/>
-          <pc:sldMk cId="4289746519" sldId="274"/>
-        </pc:sldMkLst>
-        <pc:spChg chg="add mod">
-          <ac:chgData name="AU Kelvin" userId="416e5d84-3133-4774-aa1a-290e1bef47d6" providerId="ADAL" clId="{9A4767C1-AA41-4A8F-91E9-F856893F4EE6}" dt="2023-03-10T02:59:15.985" v="1550" actId="1076"/>
-          <ac:spMkLst>
-            <pc:docMk/>
-            <pc:sldMk cId="4289746519" sldId="274"/>
-            <ac:spMk id="5" creationId="{F101B121-EACA-42C5-9A60-4D5C1E6BA197}"/>
-          </ac:spMkLst>
-        </pc:spChg>
-        <pc:spChg chg="add mod">
-          <ac:chgData name="AU Kelvin" userId="416e5d84-3133-4774-aa1a-290e1bef47d6" providerId="ADAL" clId="{9A4767C1-AA41-4A8F-91E9-F856893F4EE6}" dt="2023-03-10T02:59:40.097" v="1554" actId="20577"/>
-          <ac:spMkLst>
-            <pc:docMk/>
-            <pc:sldMk cId="4289746519" sldId="274"/>
-            <ac:spMk id="6" creationId="{5E3D5021-9FBF-4F93-8FF2-B272560A4AD1}"/>
-          </ac:spMkLst>
-        </pc:spChg>
-        <pc:picChg chg="mod">
-          <ac:chgData name="AU Kelvin" userId="416e5d84-3133-4774-aa1a-290e1bef47d6" providerId="ADAL" clId="{9A4767C1-AA41-4A8F-91E9-F856893F4EE6}" dt="2023-03-10T02:59:18.438" v="1551" actId="1076"/>
-          <ac:picMkLst>
-            <pc:docMk/>
-            <pc:sldMk cId="4289746519" sldId="274"/>
-            <ac:picMk id="4" creationId="{38ECB1B0-01D9-4425-9D79-48F72EC65172}"/>
-          </ac:picMkLst>
-        </pc:picChg>
-      </pc:sldChg>
-      <pc:sldChg chg="addSp delSp modSp add mod">
-        <pc:chgData name="AU Kelvin" userId="416e5d84-3133-4774-aa1a-290e1bef47d6" providerId="ADAL" clId="{9A4767C1-AA41-4A8F-91E9-F856893F4EE6}" dt="2023-03-09T11:08:16.796" v="1113" actId="20577"/>
-        <pc:sldMkLst>
-          <pc:docMk/>
-          <pc:sldMk cId="1139370413" sldId="277"/>
-        </pc:sldMkLst>
-        <pc:spChg chg="mod">
-          <ac:chgData name="AU Kelvin" userId="416e5d84-3133-4774-aa1a-290e1bef47d6" providerId="ADAL" clId="{9A4767C1-AA41-4A8F-91E9-F856893F4EE6}" dt="2023-03-09T06:42:19.095" v="121" actId="20577"/>
-          <ac:spMkLst>
-            <pc:docMk/>
-            <pc:sldMk cId="1139370413" sldId="277"/>
-            <ac:spMk id="2" creationId="{A928EF97-08A3-4706-9D19-A326A68B2964}"/>
-          </ac:spMkLst>
-        </pc:spChg>
-        <pc:spChg chg="del">
-          <ac:chgData name="AU Kelvin" userId="416e5d84-3133-4774-aa1a-290e1bef47d6" providerId="ADAL" clId="{9A4767C1-AA41-4A8F-91E9-F856893F4EE6}" dt="2023-03-09T06:42:45.085" v="123" actId="22"/>
-          <ac:spMkLst>
-            <pc:docMk/>
-            <pc:sldMk cId="1139370413" sldId="277"/>
-            <ac:spMk id="3" creationId="{BDAF05D6-3AE1-4C81-8219-2233A6D15176}"/>
-          </ac:spMkLst>
-        </pc:spChg>
-        <pc:spChg chg="add del mod">
-          <ac:chgData name="AU Kelvin" userId="416e5d84-3133-4774-aa1a-290e1bef47d6" providerId="ADAL" clId="{9A4767C1-AA41-4A8F-91E9-F856893F4EE6}" dt="2023-03-09T10:26:34.228" v="159" actId="478"/>
-          <ac:spMkLst>
-            <pc:docMk/>
-            <pc:sldMk cId="1139370413" sldId="277"/>
-            <ac:spMk id="8" creationId="{FDB032E2-5BB2-47B8-BD5D-3BB49C838EFD}"/>
-          </ac:spMkLst>
-        </pc:spChg>
-        <pc:spChg chg="add mod">
-          <ac:chgData name="AU Kelvin" userId="416e5d84-3133-4774-aa1a-290e1bef47d6" providerId="ADAL" clId="{9A4767C1-AA41-4A8F-91E9-F856893F4EE6}" dt="2023-03-09T10:45:16.084" v="718" actId="20577"/>
-          <ac:spMkLst>
-            <pc:docMk/>
-            <pc:sldMk cId="1139370413" sldId="277"/>
-            <ac:spMk id="22" creationId="{E92859DA-8069-43BD-AC6B-F3348E6A3643}"/>
-          </ac:spMkLst>
-        </pc:spChg>
-        <pc:spChg chg="add mod">
-          <ac:chgData name="AU Kelvin" userId="416e5d84-3133-4774-aa1a-290e1bef47d6" providerId="ADAL" clId="{9A4767C1-AA41-4A8F-91E9-F856893F4EE6}" dt="2023-03-09T10:49:29.376" v="791"/>
-          <ac:spMkLst>
-            <pc:docMk/>
-            <pc:sldMk cId="1139370413" sldId="277"/>
-            <ac:spMk id="23" creationId="{6BF817E3-3621-48DF-9CA4-318AC4FDB599}"/>
-          </ac:spMkLst>
-        </pc:spChg>
-        <pc:spChg chg="add mod">
-          <ac:chgData name="AU Kelvin" userId="416e5d84-3133-4774-aa1a-290e1bef47d6" providerId="ADAL" clId="{9A4767C1-AA41-4A8F-91E9-F856893F4EE6}" dt="2023-03-09T10:49:27.777" v="790"/>
-          <ac:spMkLst>
-            <pc:docMk/>
-            <pc:sldMk cId="1139370413" sldId="277"/>
-            <ac:spMk id="24" creationId="{FBB6F9B8-FFF0-4CB2-9892-18C2B4FBAC9F}"/>
-          </ac:spMkLst>
-        </pc:spChg>
-        <pc:spChg chg="add mod">
-          <ac:chgData name="AU Kelvin" userId="416e5d84-3133-4774-aa1a-290e1bef47d6" providerId="ADAL" clId="{9A4767C1-AA41-4A8F-91E9-F856893F4EE6}" dt="2023-03-09T10:49:19.333" v="788" actId="20577"/>
-          <ac:spMkLst>
-            <pc:docMk/>
-            <pc:sldMk cId="1139370413" sldId="277"/>
-            <ac:spMk id="25" creationId="{F5D23B51-F2B1-4C36-B518-AA2BFA4103EC}"/>
-          </ac:spMkLst>
-        </pc:spChg>
-        <pc:spChg chg="add mod">
-          <ac:chgData name="AU Kelvin" userId="416e5d84-3133-4774-aa1a-290e1bef47d6" providerId="ADAL" clId="{9A4767C1-AA41-4A8F-91E9-F856893F4EE6}" dt="2023-03-09T10:49:24.967" v="789"/>
-          <ac:spMkLst>
-            <pc:docMk/>
-            <pc:sldMk cId="1139370413" sldId="277"/>
-            <ac:spMk id="26" creationId="{80957EC0-D309-4965-A76F-B91F35621152}"/>
-          </ac:spMkLst>
-        </pc:spChg>
-        <pc:spChg chg="add del mod">
-          <ac:chgData name="AU Kelvin" userId="416e5d84-3133-4774-aa1a-290e1bef47d6" providerId="ADAL" clId="{9A4767C1-AA41-4A8F-91E9-F856893F4EE6}" dt="2023-03-09T11:00:57.523" v="823"/>
-          <ac:spMkLst>
-            <pc:docMk/>
-            <pc:sldMk cId="1139370413" sldId="277"/>
-            <ac:spMk id="27" creationId="{C589C402-B6A1-4B04-81D1-F9EC938C1D0E}"/>
-          </ac:spMkLst>
-        </pc:spChg>
-        <pc:spChg chg="add mod">
-          <ac:chgData name="AU Kelvin" userId="416e5d84-3133-4774-aa1a-290e1bef47d6" providerId="ADAL" clId="{9A4767C1-AA41-4A8F-91E9-F856893F4EE6}" dt="2023-03-09T10:53:54.156" v="820" actId="20577"/>
-          <ac:spMkLst>
-            <pc:docMk/>
-            <pc:sldMk cId="1139370413" sldId="277"/>
-            <ac:spMk id="28" creationId="{F0E57BF5-8015-48FB-AA5D-302052F4799B}"/>
-          </ac:spMkLst>
-        </pc:spChg>
-        <pc:spChg chg="add mod">
-          <ac:chgData name="AU Kelvin" userId="416e5d84-3133-4774-aa1a-290e1bef47d6" providerId="ADAL" clId="{9A4767C1-AA41-4A8F-91E9-F856893F4EE6}" dt="2023-03-09T10:53:57.438" v="821" actId="6549"/>
-          <ac:spMkLst>
-            <pc:docMk/>
-            <pc:sldMk cId="1139370413" sldId="277"/>
-            <ac:spMk id="29" creationId="{53BD28DB-A18C-4702-97E1-257E621A172C}"/>
-          </ac:spMkLst>
-        </pc:spChg>
-        <pc:spChg chg="add mod">
-          <ac:chgData name="AU Kelvin" userId="416e5d84-3133-4774-aa1a-290e1bef47d6" providerId="ADAL" clId="{9A4767C1-AA41-4A8F-91E9-F856893F4EE6}" dt="2023-03-09T11:08:16.796" v="1113" actId="20577"/>
-          <ac:spMkLst>
-            <pc:docMk/>
-            <pc:sldMk cId="1139370413" sldId="277"/>
-            <ac:spMk id="30" creationId="{D38B9A14-F122-40CB-B282-891C763A0B48}"/>
-          </ac:spMkLst>
-        </pc:spChg>
-        <pc:picChg chg="add del mod ord">
-          <ac:chgData name="AU Kelvin" userId="416e5d84-3133-4774-aa1a-290e1bef47d6" providerId="ADAL" clId="{9A4767C1-AA41-4A8F-91E9-F856893F4EE6}" dt="2023-03-09T10:23:01.489" v="127" actId="478"/>
-          <ac:picMkLst>
-            <pc:docMk/>
-            <pc:sldMk cId="1139370413" sldId="277"/>
-            <ac:picMk id="5" creationId="{2DE28BB4-8F54-4486-8A96-0678C30C1AC1}"/>
-          </ac:picMkLst>
-        </pc:picChg>
-        <pc:picChg chg="del">
-          <ac:chgData name="AU Kelvin" userId="416e5d84-3133-4774-aa1a-290e1bef47d6" providerId="ADAL" clId="{9A4767C1-AA41-4A8F-91E9-F856893F4EE6}" dt="2023-03-09T06:42:21.323" v="122" actId="478"/>
-          <ac:picMkLst>
-            <pc:docMk/>
-            <pc:sldMk cId="1139370413" sldId="277"/>
-            <ac:picMk id="7" creationId="{DD16E120-3B7C-43F5-B0E7-5CE28E99F67F}"/>
-          </ac:picMkLst>
-        </pc:picChg>
-        <pc:picChg chg="add del mod">
-          <ac:chgData name="AU Kelvin" userId="416e5d84-3133-4774-aa1a-290e1bef47d6" providerId="ADAL" clId="{9A4767C1-AA41-4A8F-91E9-F856893F4EE6}" dt="2023-03-09T10:26:30.042" v="153"/>
-          <ac:picMkLst>
-            <pc:docMk/>
-            <pc:sldMk cId="1139370413" sldId="277"/>
-            <ac:picMk id="10" creationId="{E546297E-4973-4F13-99C5-40411468512E}"/>
-          </ac:picMkLst>
-        </pc:picChg>
-        <pc:picChg chg="add del mod">
-          <ac:chgData name="AU Kelvin" userId="416e5d84-3133-4774-aa1a-290e1bef47d6" providerId="ADAL" clId="{9A4767C1-AA41-4A8F-91E9-F856893F4EE6}" dt="2023-03-09T10:26:31.506" v="158"/>
-          <ac:picMkLst>
-            <pc:docMk/>
-            <pc:sldMk cId="1139370413" sldId="277"/>
-            <ac:picMk id="12" creationId="{9244E89A-6389-4FE7-8338-8F2616A37B85}"/>
-          </ac:picMkLst>
-        </pc:picChg>
-        <pc:picChg chg="add mod">
-          <ac:chgData name="AU Kelvin" userId="416e5d84-3133-4774-aa1a-290e1bef47d6" providerId="ADAL" clId="{9A4767C1-AA41-4A8F-91E9-F856893F4EE6}" dt="2023-03-09T10:27:19.134" v="171" actId="1076"/>
-          <ac:picMkLst>
-            <pc:docMk/>
-            <pc:sldMk cId="1139370413" sldId="277"/>
-            <ac:picMk id="14" creationId="{0020203A-1F95-47D3-9237-D5AC4A11F220}"/>
-          </ac:picMkLst>
-        </pc:picChg>
-        <pc:picChg chg="add mod">
-          <ac:chgData name="AU Kelvin" userId="416e5d84-3133-4774-aa1a-290e1bef47d6" providerId="ADAL" clId="{9A4767C1-AA41-4A8F-91E9-F856893F4EE6}" dt="2023-03-09T10:27:29.470" v="172" actId="14100"/>
-          <ac:picMkLst>
-            <pc:docMk/>
-            <pc:sldMk cId="1139370413" sldId="277"/>
-            <ac:picMk id="16" creationId="{43A3199E-2E75-40B6-B853-66BDCD883227}"/>
-          </ac:picMkLst>
-        </pc:picChg>
-        <pc:picChg chg="add del mod">
-          <ac:chgData name="AU Kelvin" userId="416e5d84-3133-4774-aa1a-290e1bef47d6" providerId="ADAL" clId="{9A4767C1-AA41-4A8F-91E9-F856893F4EE6}" dt="2023-03-09T10:31:57.440" v="191" actId="478"/>
-          <ac:picMkLst>
-            <pc:docMk/>
-            <pc:sldMk cId="1139370413" sldId="277"/>
-            <ac:picMk id="18" creationId="{1805688C-C01E-4768-9527-744E453F2D8F}"/>
-          </ac:picMkLst>
-        </pc:picChg>
-        <pc:picChg chg="add mod">
-          <ac:chgData name="AU Kelvin" userId="416e5d84-3133-4774-aa1a-290e1bef47d6" providerId="ADAL" clId="{9A4767C1-AA41-4A8F-91E9-F856893F4EE6}" dt="2023-03-09T10:32:31.097" v="195" actId="1076"/>
-          <ac:picMkLst>
-            <pc:docMk/>
-            <pc:sldMk cId="1139370413" sldId="277"/>
-            <ac:picMk id="20" creationId="{486CFF3A-F9A1-4D44-A299-695666D488B5}"/>
-          </ac:picMkLst>
-        </pc:picChg>
-        <pc:picChg chg="add mod">
-          <ac:chgData name="AU Kelvin" userId="416e5d84-3133-4774-aa1a-290e1bef47d6" providerId="ADAL" clId="{9A4767C1-AA41-4A8F-91E9-F856893F4EE6}" dt="2023-03-09T10:32:42.243" v="197" actId="1076"/>
-          <ac:picMkLst>
-            <pc:docMk/>
-            <pc:sldMk cId="1139370413" sldId="277"/>
-            <ac:picMk id="21" creationId="{F0A9AD82-E8CE-4F73-B6F9-7B3C38F1CF0E}"/>
-          </ac:picMkLst>
-        </pc:picChg>
-      </pc:sldChg>
-      <pc:sldChg chg="addSp delSp modSp add mod">
-        <pc:chgData name="AU Kelvin" userId="416e5d84-3133-4774-aa1a-290e1bef47d6" providerId="ADAL" clId="{9A4767C1-AA41-4A8F-91E9-F856893F4EE6}" dt="2023-03-10T10:00:46.443" v="1961" actId="20577"/>
-        <pc:sldMkLst>
-          <pc:docMk/>
-          <pc:sldMk cId="3394698022" sldId="284"/>
-        </pc:sldMkLst>
-        <pc:spChg chg="mod">
-          <ac:chgData name="AU Kelvin" userId="416e5d84-3133-4774-aa1a-290e1bef47d6" providerId="ADAL" clId="{9A4767C1-AA41-4A8F-91E9-F856893F4EE6}" dt="2023-03-09T10:23:06.529" v="133" actId="20577"/>
-          <ac:spMkLst>
-            <pc:docMk/>
-            <pc:sldMk cId="3394698022" sldId="284"/>
-            <ac:spMk id="2" creationId="{A928EF97-08A3-4706-9D19-A326A68B2964}"/>
-          </ac:spMkLst>
-        </pc:spChg>
-        <pc:spChg chg="del">
-          <ac:chgData name="AU Kelvin" userId="416e5d84-3133-4774-aa1a-290e1bef47d6" providerId="ADAL" clId="{9A4767C1-AA41-4A8F-91E9-F856893F4EE6}" dt="2023-03-09T10:27:58.715" v="173" actId="478"/>
-          <ac:spMkLst>
-            <pc:docMk/>
-            <pc:sldMk cId="3394698022" sldId="284"/>
-            <ac:spMk id="8" creationId="{FDB032E2-5BB2-47B8-BD5D-3BB49C838EFD}"/>
-          </ac:spMkLst>
-        </pc:spChg>
-        <pc:spChg chg="add mod">
-          <ac:chgData name="AU Kelvin" userId="416e5d84-3133-4774-aa1a-290e1bef47d6" providerId="ADAL" clId="{9A4767C1-AA41-4A8F-91E9-F856893F4EE6}" dt="2023-03-09T11:08:37.568" v="1114"/>
-          <ac:spMkLst>
-            <pc:docMk/>
-            <pc:sldMk cId="3394698022" sldId="284"/>
-            <ac:spMk id="9" creationId="{7834B851-1529-423F-B2FA-E1B7171ED214}"/>
-          </ac:spMkLst>
-        </pc:spChg>
-        <pc:spChg chg="add mod">
-          <ac:chgData name="AU Kelvin" userId="416e5d84-3133-4774-aa1a-290e1bef47d6" providerId="ADAL" clId="{9A4767C1-AA41-4A8F-91E9-F856893F4EE6}" dt="2023-03-10T10:00:46.443" v="1961" actId="20577"/>
-          <ac:spMkLst>
-            <pc:docMk/>
-            <pc:sldMk cId="3394698022" sldId="284"/>
-            <ac:spMk id="10" creationId="{70262CB6-64E6-4698-A2A5-16CF79B1F737}"/>
-          </ac:spMkLst>
-        </pc:spChg>
-        <pc:picChg chg="add mod">
-          <ac:chgData name="AU Kelvin" userId="416e5d84-3133-4774-aa1a-290e1bef47d6" providerId="ADAL" clId="{9A4767C1-AA41-4A8F-91E9-F856893F4EE6}" dt="2023-03-09T10:28:35.063" v="185" actId="14100"/>
-          <ac:picMkLst>
-            <pc:docMk/>
-            <pc:sldMk cId="3394698022" sldId="284"/>
-            <ac:picMk id="4" creationId="{C2046B1F-78CE-4371-AA9C-12EC488A7ECF}"/>
-          </ac:picMkLst>
-        </pc:picChg>
-        <pc:picChg chg="add mod">
-          <ac:chgData name="AU Kelvin" userId="416e5d84-3133-4774-aa1a-290e1bef47d6" providerId="ADAL" clId="{9A4767C1-AA41-4A8F-91E9-F856893F4EE6}" dt="2023-03-09T10:28:28.831" v="184" actId="1076"/>
-          <ac:picMkLst>
-            <pc:docMk/>
-            <pc:sldMk cId="3394698022" sldId="284"/>
-            <ac:picMk id="6" creationId="{8FCF6D7B-D99E-4BAB-9D70-E9A16164D4EB}"/>
-          </ac:picMkLst>
-        </pc:picChg>
-      </pc:sldChg>
-      <pc:sldChg chg="addSp delSp modSp add mod modShow">
-        <pc:chgData name="AU Kelvin" userId="416e5d84-3133-4774-aa1a-290e1bef47d6" providerId="ADAL" clId="{9A4767C1-AA41-4A8F-91E9-F856893F4EE6}" dt="2023-03-10T07:42:50.849" v="1897"/>
-        <pc:sldMkLst>
-          <pc:docMk/>
-          <pc:sldMk cId="2077699479" sldId="291"/>
-        </pc:sldMkLst>
-        <pc:spChg chg="del">
-          <ac:chgData name="AU Kelvin" userId="416e5d84-3133-4774-aa1a-290e1bef47d6" providerId="ADAL" clId="{9A4767C1-AA41-4A8F-91E9-F856893F4EE6}" dt="2023-03-10T07:22:42.651" v="1665" actId="478"/>
-          <ac:spMkLst>
-            <pc:docMk/>
-            <pc:sldMk cId="2077699479" sldId="291"/>
-            <ac:spMk id="2" creationId="{D6124752-D21F-4C37-8C89-5A6D49E7D613}"/>
-          </ac:spMkLst>
-        </pc:spChg>
-        <pc:spChg chg="del">
-          <ac:chgData name="AU Kelvin" userId="416e5d84-3133-4774-aa1a-290e1bef47d6" providerId="ADAL" clId="{9A4767C1-AA41-4A8F-91E9-F856893F4EE6}" dt="2023-03-10T07:24:55.961" v="1685" actId="478"/>
-          <ac:spMkLst>
-            <pc:docMk/>
-            <pc:sldMk cId="2077699479" sldId="291"/>
-            <ac:spMk id="3" creationId="{0722FC5A-B29F-4C58-940E-4D925D707B51}"/>
-          </ac:spMkLst>
-        </pc:spChg>
-        <pc:spChg chg="add del mod">
-          <ac:chgData name="AU Kelvin" userId="416e5d84-3133-4774-aa1a-290e1bef47d6" providerId="ADAL" clId="{9A4767C1-AA41-4A8F-91E9-F856893F4EE6}" dt="2023-03-10T07:22:45.389" v="1667" actId="478"/>
-          <ac:spMkLst>
-            <pc:docMk/>
-            <pc:sldMk cId="2077699479" sldId="291"/>
-            <ac:spMk id="6" creationId="{8C92BA6A-2234-4F78-B545-FE36D4540067}"/>
-          </ac:spMkLst>
-        </pc:spChg>
-        <pc:spChg chg="add mod">
-          <ac:chgData name="AU Kelvin" userId="416e5d84-3133-4774-aa1a-290e1bef47d6" providerId="ADAL" clId="{9A4767C1-AA41-4A8F-91E9-F856893F4EE6}" dt="2023-03-10T07:22:55.679" v="1672"/>
-          <ac:spMkLst>
-            <pc:docMk/>
-            <pc:sldMk cId="2077699479" sldId="291"/>
-            <ac:spMk id="8" creationId="{982A48B3-7479-4CFD-8C66-62B2CE53B796}"/>
-          </ac:spMkLst>
-        </pc:spChg>
-        <pc:spChg chg="add mod">
-          <ac:chgData name="AU Kelvin" userId="416e5d84-3133-4774-aa1a-290e1bef47d6" providerId="ADAL" clId="{9A4767C1-AA41-4A8F-91E9-F856893F4EE6}" dt="2023-03-10T07:24:56.300" v="1686"/>
-          <ac:spMkLst>
-            <pc:docMk/>
-            <pc:sldMk cId="2077699479" sldId="291"/>
-            <ac:spMk id="10" creationId="{441E9043-238B-4820-A9B0-7E72A148164F}"/>
-          </ac:spMkLst>
-        </pc:spChg>
-        <pc:spChg chg="add mod">
-          <ac:chgData name="AU Kelvin" userId="416e5d84-3133-4774-aa1a-290e1bef47d6" providerId="ADAL" clId="{9A4767C1-AA41-4A8F-91E9-F856893F4EE6}" dt="2023-03-10T07:29:03.093" v="1797"/>
-          <ac:spMkLst>
-            <pc:docMk/>
-            <pc:sldMk cId="2077699479" sldId="291"/>
-            <ac:spMk id="11" creationId="{8513EA13-0220-44FD-9967-217A5509F3B7}"/>
-          </ac:spMkLst>
-        </pc:spChg>
-        <pc:spChg chg="add mod">
-          <ac:chgData name="AU Kelvin" userId="416e5d84-3133-4774-aa1a-290e1bef47d6" providerId="ADAL" clId="{9A4767C1-AA41-4A8F-91E9-F856893F4EE6}" dt="2023-03-10T07:42:50.849" v="1897"/>
-          <ac:spMkLst>
-            <pc:docMk/>
-            <pc:sldMk cId="2077699479" sldId="291"/>
-            <ac:spMk id="12" creationId="{B956803E-61F3-4C0A-9E7B-C518C9CFD560}"/>
-          </ac:spMkLst>
-        </pc:spChg>
-        <pc:picChg chg="del">
-          <ac:chgData name="AU Kelvin" userId="416e5d84-3133-4774-aa1a-290e1bef47d6" providerId="ADAL" clId="{9A4767C1-AA41-4A8F-91E9-F856893F4EE6}" dt="2023-03-10T07:23:02.341" v="1673" actId="21"/>
-          <ac:picMkLst>
-            <pc:docMk/>
-            <pc:sldMk cId="2077699479" sldId="291"/>
-            <ac:picMk id="7" creationId="{2E085EE4-FEA6-4368-8E94-85BDDBB7F64E}"/>
-          </ac:picMkLst>
-        </pc:picChg>
-        <pc:picChg chg="add mod">
-          <ac:chgData name="AU Kelvin" userId="416e5d84-3133-4774-aa1a-290e1bef47d6" providerId="ADAL" clId="{9A4767C1-AA41-4A8F-91E9-F856893F4EE6}" dt="2023-03-10T07:23:40.390" v="1680" actId="1076"/>
-          <ac:picMkLst>
-            <pc:docMk/>
-            <pc:sldMk cId="2077699479" sldId="291"/>
-            <ac:picMk id="9" creationId="{65887865-F5E7-4F32-B7B3-7828574BD415}"/>
-          </ac:picMkLst>
-        </pc:picChg>
-      </pc:sldChg>
-      <pc:sldChg chg="addSp delSp modSp add mod modShow">
-        <pc:chgData name="AU Kelvin" userId="416e5d84-3133-4774-aa1a-290e1bef47d6" providerId="ADAL" clId="{9A4767C1-AA41-4A8F-91E9-F856893F4EE6}" dt="2023-03-10T07:43:10.612" v="1899"/>
-        <pc:sldMkLst>
-          <pc:docMk/>
-          <pc:sldMk cId="1601178964" sldId="292"/>
-        </pc:sldMkLst>
-        <pc:spChg chg="del">
-          <ac:chgData name="AU Kelvin" userId="416e5d84-3133-4774-aa1a-290e1bef47d6" providerId="ADAL" clId="{9A4767C1-AA41-4A8F-91E9-F856893F4EE6}" dt="2023-03-10T07:29:33.168" v="1798" actId="478"/>
-          <ac:spMkLst>
-            <pc:docMk/>
-            <pc:sldMk cId="1601178964" sldId="292"/>
-            <ac:spMk id="3" creationId="{0722FC5A-B29F-4C58-940E-4D925D707B51}"/>
-          </ac:spMkLst>
-        </pc:spChg>
-        <pc:spChg chg="add del mod">
-          <ac:chgData name="AU Kelvin" userId="416e5d84-3133-4774-aa1a-290e1bef47d6" providerId="ADAL" clId="{9A4767C1-AA41-4A8F-91E9-F856893F4EE6}" dt="2023-03-10T07:24:29.779" v="1684" actId="478"/>
-          <ac:spMkLst>
-            <pc:docMk/>
-            <pc:sldMk cId="1601178964" sldId="292"/>
-            <ac:spMk id="4" creationId="{9E31117A-43C4-47F6-A01F-FA340647FB40}"/>
-          </ac:spMkLst>
-        </pc:spChg>
-        <pc:spChg chg="add mod">
-          <ac:chgData name="AU Kelvin" userId="416e5d84-3133-4774-aa1a-290e1bef47d6" providerId="ADAL" clId="{9A4767C1-AA41-4A8F-91E9-F856893F4EE6}" dt="2023-03-10T07:26:23.284" v="1710" actId="13926"/>
-          <ac:spMkLst>
-            <pc:docMk/>
-            <pc:sldMk cId="1601178964" sldId="292"/>
-            <ac:spMk id="5" creationId="{BA0CD18F-204C-4D36-8D38-C5663BAE40B6}"/>
-          </ac:spMkLst>
-        </pc:spChg>
-        <pc:spChg chg="del">
-          <ac:chgData name="AU Kelvin" userId="416e5d84-3133-4774-aa1a-290e1bef47d6" providerId="ADAL" clId="{9A4767C1-AA41-4A8F-91E9-F856893F4EE6}" dt="2023-03-10T07:24:25.780" v="1682" actId="478"/>
-          <ac:spMkLst>
-            <pc:docMk/>
-            <pc:sldMk cId="1601178964" sldId="292"/>
-            <ac:spMk id="6" creationId="{83861B73-95BF-4669-8FF5-2BBE57D09DFE}"/>
-          </ac:spMkLst>
-        </pc:spChg>
-        <pc:spChg chg="add mod">
-          <ac:chgData name="AU Kelvin" userId="416e5d84-3133-4774-aa1a-290e1bef47d6" providerId="ADAL" clId="{9A4767C1-AA41-4A8F-91E9-F856893F4EE6}" dt="2023-03-10T07:24:27.336" v="1683"/>
-          <ac:spMkLst>
-            <pc:docMk/>
-            <pc:sldMk cId="1601178964" sldId="292"/>
-            <ac:spMk id="9" creationId="{32E72F45-88B7-48EF-8899-109509120516}"/>
-          </ac:spMkLst>
-        </pc:spChg>
-        <pc:spChg chg="add del mod">
-          <ac:chgData name="AU Kelvin" userId="416e5d84-3133-4774-aa1a-290e1bef47d6" providerId="ADAL" clId="{9A4767C1-AA41-4A8F-91E9-F856893F4EE6}" dt="2023-03-10T07:29:35.613" v="1799" actId="478"/>
-          <ac:spMkLst>
-            <pc:docMk/>
-            <pc:sldMk cId="1601178964" sldId="292"/>
-            <ac:spMk id="12" creationId="{7A380A16-EC5A-4C83-9132-6DDA9AA533F6}"/>
-          </ac:spMkLst>
-        </pc:spChg>
-        <pc:spChg chg="add mod">
-          <ac:chgData name="AU Kelvin" userId="416e5d84-3133-4774-aa1a-290e1bef47d6" providerId="ADAL" clId="{9A4767C1-AA41-4A8F-91E9-F856893F4EE6}" dt="2023-03-10T07:30:11.075" v="1827"/>
-          <ac:spMkLst>
-            <pc:docMk/>
-            <pc:sldMk cId="1601178964" sldId="292"/>
-            <ac:spMk id="13" creationId="{E0B225A2-6DD1-4C47-BD87-0059102335A0}"/>
-          </ac:spMkLst>
-        </pc:spChg>
-        <pc:spChg chg="add del mod">
-          <ac:chgData name="AU Kelvin" userId="416e5d84-3133-4774-aa1a-290e1bef47d6" providerId="ADAL" clId="{9A4767C1-AA41-4A8F-91E9-F856893F4EE6}" dt="2023-03-10T07:43:10.444" v="1898" actId="478"/>
-          <ac:spMkLst>
-            <pc:docMk/>
-            <pc:sldMk cId="1601178964" sldId="292"/>
-            <ac:spMk id="14" creationId="{795D4ACA-B7BE-4C24-B3A0-6505BE7CDFB8}"/>
-          </ac:spMkLst>
-        </pc:spChg>
-        <pc:spChg chg="add mod">
-          <ac:chgData name="AU Kelvin" userId="416e5d84-3133-4774-aa1a-290e1bef47d6" providerId="ADAL" clId="{9A4767C1-AA41-4A8F-91E9-F856893F4EE6}" dt="2023-03-10T07:43:10.612" v="1899"/>
-          <ac:spMkLst>
-            <pc:docMk/>
-            <pc:sldMk cId="1601178964" sldId="292"/>
-            <ac:spMk id="15" creationId="{80001105-1374-432C-8FDD-D954D89771F9}"/>
-          </ac:spMkLst>
-        </pc:spChg>
-        <pc:picChg chg="add mod">
-          <ac:chgData name="AU Kelvin" userId="416e5d84-3133-4774-aa1a-290e1bef47d6" providerId="ADAL" clId="{9A4767C1-AA41-4A8F-91E9-F856893F4EE6}" dt="2023-03-10T07:24:15.241" v="1681" actId="1076"/>
-          <ac:picMkLst>
-            <pc:docMk/>
-            <pc:sldMk cId="1601178964" sldId="292"/>
-            <ac:picMk id="7" creationId="{AD71860E-DDC4-4E21-AFE7-604F1F5C2148}"/>
-          </ac:picMkLst>
-        </pc:picChg>
-        <pc:picChg chg="del">
-          <ac:chgData name="AU Kelvin" userId="416e5d84-3133-4774-aa1a-290e1bef47d6" providerId="ADAL" clId="{9A4767C1-AA41-4A8F-91E9-F856893F4EE6}" dt="2023-03-10T07:23:28.380" v="1676" actId="21"/>
-          <ac:picMkLst>
-            <pc:docMk/>
-            <pc:sldMk cId="1601178964" sldId="292"/>
-            <ac:picMk id="8" creationId="{4EAB1F09-034D-4FBE-B9A1-EEE1406402AA}"/>
-          </ac:picMkLst>
-        </pc:picChg>
-      </pc:sldChg>
-    </pc:docChg>
-  </pc:docChgLst>
-  <pc:docChgLst>
-    <pc:chgData name="LEUNG Nicole" userId="8ed04819-1a1c-42ab-ae09-44d42575f3a6" providerId="ADAL" clId="{46AED7F8-18BE-4C7E-B9AC-F4C2CA2D1D79}"/>
-    <pc:docChg chg="undo custSel addSld delSld modSld sldOrd">
-      <pc:chgData name="LEUNG Nicole" userId="8ed04819-1a1c-42ab-ae09-44d42575f3a6" providerId="ADAL" clId="{46AED7F8-18BE-4C7E-B9AC-F4C2CA2D1D79}" dt="2023-03-28T17:51:28.272" v="3443" actId="1076"/>
-      <pc:docMkLst>
-        <pc:docMk/>
-      </pc:docMkLst>
-      <pc:sldChg chg="delSp modSp mod">
-        <pc:chgData name="LEUNG Nicole" userId="8ed04819-1a1c-42ab-ae09-44d42575f3a6" providerId="ADAL" clId="{46AED7F8-18BE-4C7E-B9AC-F4C2CA2D1D79}" dt="2023-03-22T06:51:12.042" v="2203" actId="478"/>
-        <pc:sldMkLst>
-          <pc:docMk/>
-          <pc:sldMk cId="4093437428" sldId="256"/>
-        </pc:sldMkLst>
-        <pc:spChg chg="mod">
-          <ac:chgData name="LEUNG Nicole" userId="8ed04819-1a1c-42ab-ae09-44d42575f3a6" providerId="ADAL" clId="{46AED7F8-18BE-4C7E-B9AC-F4C2CA2D1D79}" dt="2023-03-22T03:10:47.039" v="1236" actId="20577"/>
-          <ac:spMkLst>
-            <pc:docMk/>
-            <pc:sldMk cId="4093437428" sldId="256"/>
-            <ac:spMk id="2" creationId="{266DFD87-74D9-478B-B7FE-8FBC975665C3}"/>
-          </ac:spMkLst>
-        </pc:spChg>
-        <pc:spChg chg="del mod">
-          <ac:chgData name="LEUNG Nicole" userId="8ed04819-1a1c-42ab-ae09-44d42575f3a6" providerId="ADAL" clId="{46AED7F8-18BE-4C7E-B9AC-F4C2CA2D1D79}" dt="2023-03-22T06:51:12.042" v="2203" actId="478"/>
-          <ac:spMkLst>
-            <pc:docMk/>
-            <pc:sldMk cId="4093437428" sldId="256"/>
-            <ac:spMk id="3" creationId="{951F69E3-81D8-4114-B10A-B5C6F26C7E71}"/>
-          </ac:spMkLst>
-        </pc:spChg>
-      </pc:sldChg>
-      <pc:sldChg chg="delSp modSp del mod">
-        <pc:chgData name="LEUNG Nicole" userId="8ed04819-1a1c-42ab-ae09-44d42575f3a6" providerId="ADAL" clId="{46AED7F8-18BE-4C7E-B9AC-F4C2CA2D1D79}" dt="2023-03-21T02:14:04.466" v="216" actId="47"/>
-        <pc:sldMkLst>
-          <pc:docMk/>
-          <pc:sldMk cId="1028999168" sldId="260"/>
-        </pc:sldMkLst>
-        <pc:spChg chg="del mod">
-          <ac:chgData name="LEUNG Nicole" userId="8ed04819-1a1c-42ab-ae09-44d42575f3a6" providerId="ADAL" clId="{46AED7F8-18BE-4C7E-B9AC-F4C2CA2D1D79}" dt="2023-03-21T02:11:21.330" v="123" actId="478"/>
-          <ac:spMkLst>
-            <pc:docMk/>
-            <pc:sldMk cId="1028999168" sldId="260"/>
-            <ac:spMk id="3" creationId="{C78401F4-D234-4A7A-A0E3-62DD7C5EADD8}"/>
-          </ac:spMkLst>
-        </pc:spChg>
-        <pc:spChg chg="mod">
-          <ac:chgData name="LEUNG Nicole" userId="8ed04819-1a1c-42ab-ae09-44d42575f3a6" providerId="ADAL" clId="{46AED7F8-18BE-4C7E-B9AC-F4C2CA2D1D79}" dt="2023-03-21T02:12:12.812" v="213" actId="20577"/>
-          <ac:spMkLst>
-            <pc:docMk/>
-            <pc:sldMk cId="1028999168" sldId="260"/>
-            <ac:spMk id="15" creationId="{8F59E620-E10D-4CBA-9DE1-3BD87A128217}"/>
-          </ac:spMkLst>
-        </pc:spChg>
-        <pc:picChg chg="mod">
-          <ac:chgData name="LEUNG Nicole" userId="8ed04819-1a1c-42ab-ae09-44d42575f3a6" providerId="ADAL" clId="{46AED7F8-18BE-4C7E-B9AC-F4C2CA2D1D79}" dt="2023-03-21T02:11:23.451" v="124" actId="1076"/>
-          <ac:picMkLst>
-            <pc:docMk/>
-            <pc:sldMk cId="1028999168" sldId="260"/>
-            <ac:picMk id="9" creationId="{D0C3EEC8-9ED8-481B-B458-07ADB548E10D}"/>
-          </ac:picMkLst>
-        </pc:picChg>
-      </pc:sldChg>
-      <pc:sldChg chg="delSp modSp del mod">
-        <pc:chgData name="LEUNG Nicole" userId="8ed04819-1a1c-42ab-ae09-44d42575f3a6" providerId="ADAL" clId="{46AED7F8-18BE-4C7E-B9AC-F4C2CA2D1D79}" dt="2023-03-22T07:06:52.800" v="2207" actId="2696"/>
-        <pc:sldMkLst>
-          <pc:docMk/>
-          <pc:sldMk cId="95290033" sldId="261"/>
-        </pc:sldMkLst>
-        <pc:spChg chg="del mod">
-          <ac:chgData name="LEUNG Nicole" userId="8ed04819-1a1c-42ab-ae09-44d42575f3a6" providerId="ADAL" clId="{46AED7F8-18BE-4C7E-B9AC-F4C2CA2D1D79}" dt="2023-03-21T02:13:21.363" v="215" actId="478"/>
-          <ac:spMkLst>
-            <pc:docMk/>
-            <pc:sldMk cId="95290033" sldId="261"/>
-            <ac:spMk id="7" creationId="{EFEBA37C-E7C5-4525-B50F-4974565CCCEF}"/>
-          </ac:spMkLst>
-        </pc:spChg>
-      </pc:sldChg>
-      <pc:sldChg chg="addSp delSp modSp mod">
-        <pc:chgData name="LEUNG Nicole" userId="8ed04819-1a1c-42ab-ae09-44d42575f3a6" providerId="ADAL" clId="{46AED7F8-18BE-4C7E-B9AC-F4C2CA2D1D79}" dt="2023-03-23T09:18:35.262" v="2651" actId="1076"/>
-        <pc:sldMkLst>
-          <pc:docMk/>
-          <pc:sldMk cId="3330272683" sldId="262"/>
-        </pc:sldMkLst>
-        <pc:spChg chg="mod">
-          <ac:chgData name="LEUNG Nicole" userId="8ed04819-1a1c-42ab-ae09-44d42575f3a6" providerId="ADAL" clId="{46AED7F8-18BE-4C7E-B9AC-F4C2CA2D1D79}" dt="2023-03-21T02:15:39.938" v="320" actId="1076"/>
-          <ac:spMkLst>
-            <pc:docMk/>
-            <pc:sldMk cId="3330272683" sldId="262"/>
-            <ac:spMk id="3" creationId="{0722FC5A-B29F-4C58-940E-4D925D707B51}"/>
-          </ac:spMkLst>
-        </pc:spChg>
-        <pc:picChg chg="add mod">
-          <ac:chgData name="LEUNG Nicole" userId="8ed04819-1a1c-42ab-ae09-44d42575f3a6" providerId="ADAL" clId="{46AED7F8-18BE-4C7E-B9AC-F4C2CA2D1D79}" dt="2023-03-23T09:18:27.855" v="2648" actId="1076"/>
-          <ac:picMkLst>
-            <pc:docMk/>
-            <pc:sldMk cId="3330272683" sldId="262"/>
-            <ac:picMk id="5" creationId="{09C5E102-79A3-4F70-98F0-320FA675A3B5}"/>
-          </ac:picMkLst>
-        </pc:picChg>
-        <pc:picChg chg="add mod">
-          <ac:chgData name="LEUNG Nicole" userId="8ed04819-1a1c-42ab-ae09-44d42575f3a6" providerId="ADAL" clId="{46AED7F8-18BE-4C7E-B9AC-F4C2CA2D1D79}" dt="2023-03-23T09:18:35.262" v="2651" actId="1076"/>
-          <ac:picMkLst>
-            <pc:docMk/>
-            <pc:sldMk cId="3330272683" sldId="262"/>
-            <ac:picMk id="7" creationId="{EF134503-1FA0-4564-B306-B785C791FD4D}"/>
-          </ac:picMkLst>
-        </pc:picChg>
-        <pc:picChg chg="del">
-          <ac:chgData name="LEUNG Nicole" userId="8ed04819-1a1c-42ab-ae09-44d42575f3a6" providerId="ADAL" clId="{46AED7F8-18BE-4C7E-B9AC-F4C2CA2D1D79}" dt="2023-03-23T09:18:32.892" v="2649" actId="478"/>
-          <ac:picMkLst>
-            <pc:docMk/>
-            <pc:sldMk cId="3330272683" sldId="262"/>
-            <ac:picMk id="19" creationId="{A9925FD3-3EA1-48B5-B575-8B2931BC9836}"/>
-          </ac:picMkLst>
-        </pc:picChg>
-        <pc:picChg chg="del">
-          <ac:chgData name="LEUNG Nicole" userId="8ed04819-1a1c-42ab-ae09-44d42575f3a6" providerId="ADAL" clId="{46AED7F8-18BE-4C7E-B9AC-F4C2CA2D1D79}" dt="2023-03-23T09:18:26.052" v="2647" actId="478"/>
-          <ac:picMkLst>
-            <pc:docMk/>
-            <pc:sldMk cId="3330272683" sldId="262"/>
-            <ac:picMk id="21" creationId="{EDD630A4-2DB9-4BCC-BE2D-2C106EED9673}"/>
-          </ac:picMkLst>
-        </pc:picChg>
-      </pc:sldChg>
-      <pc:sldChg chg="delSp modSp del mod">
-        <pc:chgData name="LEUNG Nicole" userId="8ed04819-1a1c-42ab-ae09-44d42575f3a6" providerId="ADAL" clId="{46AED7F8-18BE-4C7E-B9AC-F4C2CA2D1D79}" dt="2023-03-22T07:06:54.859" v="2208" actId="2696"/>
-        <pc:sldMkLst>
-          <pc:docMk/>
-          <pc:sldMk cId="1100559221" sldId="264"/>
-        </pc:sldMkLst>
-        <pc:spChg chg="del">
-          <ac:chgData name="LEUNG Nicole" userId="8ed04819-1a1c-42ab-ae09-44d42575f3a6" providerId="ADAL" clId="{46AED7F8-18BE-4C7E-B9AC-F4C2CA2D1D79}" dt="2023-03-22T07:06:17.335" v="2204" actId="478"/>
-          <ac:spMkLst>
-            <pc:docMk/>
-            <pc:sldMk cId="1100559221" sldId="264"/>
-            <ac:spMk id="3" creationId="{7E01052D-ECB1-4400-817C-E1F06F4E8705}"/>
-          </ac:spMkLst>
-        </pc:spChg>
-        <pc:picChg chg="mod">
-          <ac:chgData name="LEUNG Nicole" userId="8ed04819-1a1c-42ab-ae09-44d42575f3a6" providerId="ADAL" clId="{46AED7F8-18BE-4C7E-B9AC-F4C2CA2D1D79}" dt="2023-03-22T07:06:21.022" v="2205" actId="14100"/>
-          <ac:picMkLst>
-            <pc:docMk/>
-            <pc:sldMk cId="1100559221" sldId="264"/>
-            <ac:picMk id="15" creationId="{9168F329-27DA-4FBE-911E-C8E6EB7FFD47}"/>
-          </ac:picMkLst>
-        </pc:picChg>
-      </pc:sldChg>
-      <pc:sldChg chg="addSp delSp modSp mod">
-        <pc:chgData name="LEUNG Nicole" userId="8ed04819-1a1c-42ab-ae09-44d42575f3a6" providerId="ADAL" clId="{46AED7F8-18BE-4C7E-B9AC-F4C2CA2D1D79}" dt="2023-03-23T10:21:26.384" v="2766" actId="20577"/>
-        <pc:sldMkLst>
-          <pc:docMk/>
-          <pc:sldMk cId="3442902861" sldId="266"/>
-        </pc:sldMkLst>
-        <pc:spChg chg="mod">
-          <ac:chgData name="LEUNG Nicole" userId="8ed04819-1a1c-42ab-ae09-44d42575f3a6" providerId="ADAL" clId="{46AED7F8-18BE-4C7E-B9AC-F4C2CA2D1D79}" dt="2023-03-20T09:39:33.549" v="72" actId="20577"/>
-          <ac:spMkLst>
-            <pc:docMk/>
-            <pc:sldMk cId="3442902861" sldId="266"/>
-            <ac:spMk id="2" creationId="{D6124752-D21F-4C37-8C89-5A6D49E7D613}"/>
-          </ac:spMkLst>
-        </pc:spChg>
-        <pc:spChg chg="mod">
-          <ac:chgData name="LEUNG Nicole" userId="8ed04819-1a1c-42ab-ae09-44d42575f3a6" providerId="ADAL" clId="{46AED7F8-18BE-4C7E-B9AC-F4C2CA2D1D79}" dt="2023-03-23T10:21:26.384" v="2766" actId="20577"/>
-          <ac:spMkLst>
-            <pc:docMk/>
-            <pc:sldMk cId="3442902861" sldId="266"/>
-            <ac:spMk id="3" creationId="{0722FC5A-B29F-4C58-940E-4D925D707B51}"/>
-          </ac:spMkLst>
-        </pc:spChg>
-        <pc:spChg chg="del">
-          <ac:chgData name="LEUNG Nicole" userId="8ed04819-1a1c-42ab-ae09-44d42575f3a6" providerId="ADAL" clId="{46AED7F8-18BE-4C7E-B9AC-F4C2CA2D1D79}" dt="2023-03-21T02:07:57.466" v="74" actId="478"/>
-          <ac:spMkLst>
-            <pc:docMk/>
-            <pc:sldMk cId="3442902861" sldId="266"/>
-            <ac:spMk id="4" creationId="{C9D96347-781B-4E78-9CB8-564B28E36891}"/>
-          </ac:spMkLst>
-        </pc:spChg>
-        <pc:spChg chg="del">
-          <ac:chgData name="LEUNG Nicole" userId="8ed04819-1a1c-42ab-ae09-44d42575f3a6" providerId="ADAL" clId="{46AED7F8-18BE-4C7E-B9AC-F4C2CA2D1D79}" dt="2023-03-21T02:07:59.645" v="75" actId="478"/>
-          <ac:spMkLst>
-            <pc:docMk/>
-            <pc:sldMk cId="3442902861" sldId="266"/>
-            <ac:spMk id="9" creationId="{03273A91-309B-4236-B0B9-6383024BC413}"/>
-          </ac:spMkLst>
-        </pc:spChg>
-        <pc:spChg chg="mod">
-          <ac:chgData name="LEUNG Nicole" userId="8ed04819-1a1c-42ab-ae09-44d42575f3a6" providerId="ADAL" clId="{46AED7F8-18BE-4C7E-B9AC-F4C2CA2D1D79}" dt="2023-03-20T09:34:45.370" v="9" actId="1076"/>
-          <ac:spMkLst>
-            <pc:docMk/>
-            <pc:sldMk cId="3442902861" sldId="266"/>
-            <ac:spMk id="11" creationId="{98EC32FC-078A-48E5-96F1-5E913CA7A096}"/>
-          </ac:spMkLst>
-        </pc:spChg>
-        <pc:picChg chg="add mod">
-          <ac:chgData name="LEUNG Nicole" userId="8ed04819-1a1c-42ab-ae09-44d42575f3a6" providerId="ADAL" clId="{46AED7F8-18BE-4C7E-B9AC-F4C2CA2D1D79}" dt="2023-03-23T09:15:53.377" v="2617" actId="1076"/>
-          <ac:picMkLst>
-            <pc:docMk/>
-            <pc:sldMk cId="3442902861" sldId="266"/>
-            <ac:picMk id="5" creationId="{02F239AC-498C-4F57-8529-63C10EC5F795}"/>
-          </ac:picMkLst>
-        </pc:picChg>
-        <pc:picChg chg="del">
-          <ac:chgData name="LEUNG Nicole" userId="8ed04819-1a1c-42ab-ae09-44d42575f3a6" providerId="ADAL" clId="{46AED7F8-18BE-4C7E-B9AC-F4C2CA2D1D79}" dt="2023-03-20T09:34:27.329" v="3" actId="478"/>
-          <ac:picMkLst>
-            <pc:docMk/>
-            <pc:sldMk cId="3442902861" sldId="266"/>
-            <ac:picMk id="5" creationId="{5A74EE3E-9A1E-4F94-BBA7-B2FF46777420}"/>
-          </ac:picMkLst>
-        </pc:picChg>
-        <pc:picChg chg="add del mod">
-          <ac:chgData name="LEUNG Nicole" userId="8ed04819-1a1c-42ab-ae09-44d42575f3a6" providerId="ADAL" clId="{46AED7F8-18BE-4C7E-B9AC-F4C2CA2D1D79}" dt="2023-03-23T09:15:50.450" v="2615" actId="478"/>
-          <ac:picMkLst>
-            <pc:docMk/>
-            <pc:sldMk cId="3442902861" sldId="266"/>
-            <ac:picMk id="7" creationId="{7523DAA6-B424-4F4C-8905-266DC44A7B71}"/>
-          </ac:picMkLst>
-        </pc:picChg>
-        <pc:picChg chg="del">
-          <ac:chgData name="LEUNG Nicole" userId="8ed04819-1a1c-42ab-ae09-44d42575f3a6" providerId="ADAL" clId="{46AED7F8-18BE-4C7E-B9AC-F4C2CA2D1D79}" dt="2023-03-20T09:34:38.999" v="6" actId="478"/>
-          <ac:picMkLst>
-            <pc:docMk/>
-            <pc:sldMk cId="3442902861" sldId="266"/>
-            <ac:picMk id="8" creationId="{CD290223-998F-4D8F-9134-73173E05E5B3}"/>
-          </ac:picMkLst>
-        </pc:picChg>
-        <pc:picChg chg="add mod">
-          <ac:chgData name="LEUNG Nicole" userId="8ed04819-1a1c-42ab-ae09-44d42575f3a6" providerId="ADAL" clId="{46AED7F8-18BE-4C7E-B9AC-F4C2CA2D1D79}" dt="2023-03-23T09:16:33.394" v="2623" actId="1076"/>
-          <ac:picMkLst>
-            <pc:docMk/>
-            <pc:sldMk cId="3442902861" sldId="266"/>
-            <ac:picMk id="8" creationId="{DB8A69E8-CEEC-4BF7-AD67-4CFCB595910E}"/>
-          </ac:picMkLst>
-        </pc:picChg>
-        <pc:picChg chg="add del mod">
-          <ac:chgData name="LEUNG Nicole" userId="8ed04819-1a1c-42ab-ae09-44d42575f3a6" providerId="ADAL" clId="{46AED7F8-18BE-4C7E-B9AC-F4C2CA2D1D79}" dt="2023-03-23T09:16:29.394" v="2621" actId="478"/>
-          <ac:picMkLst>
-            <pc:docMk/>
-            <pc:sldMk cId="3442902861" sldId="266"/>
-            <ac:picMk id="12" creationId="{513F47FB-2D9D-4325-BA7C-95120D71F953}"/>
-          </ac:picMkLst>
-        </pc:picChg>
-      </pc:sldChg>
-      <pc:sldChg chg="delSp modSp del mod">
-        <pc:chgData name="LEUNG Nicole" userId="8ed04819-1a1c-42ab-ae09-44d42575f3a6" providerId="ADAL" clId="{46AED7F8-18BE-4C7E-B9AC-F4C2CA2D1D79}" dt="2023-03-21T02:09:59.881" v="116" actId="47"/>
-        <pc:sldMkLst>
-          <pc:docMk/>
-          <pc:sldMk cId="2172804706" sldId="267"/>
-        </pc:sldMkLst>
-        <pc:spChg chg="mod">
-          <ac:chgData name="LEUNG Nicole" userId="8ed04819-1a1c-42ab-ae09-44d42575f3a6" providerId="ADAL" clId="{46AED7F8-18BE-4C7E-B9AC-F4C2CA2D1D79}" dt="2023-03-20T09:35:59.790" v="33" actId="1076"/>
-          <ac:spMkLst>
-            <pc:docMk/>
-            <pc:sldMk cId="2172804706" sldId="267"/>
-            <ac:spMk id="10" creationId="{FF0B31A4-D45C-4380-81C8-B123342A71E6}"/>
-          </ac:spMkLst>
-        </pc:spChg>
-        <pc:spChg chg="del">
-          <ac:chgData name="LEUNG Nicole" userId="8ed04819-1a1c-42ab-ae09-44d42575f3a6" providerId="ADAL" clId="{46AED7F8-18BE-4C7E-B9AC-F4C2CA2D1D79}" dt="2023-03-21T02:08:57.242" v="97" actId="478"/>
-          <ac:spMkLst>
-            <pc:docMk/>
-            <pc:sldMk cId="2172804706" sldId="267"/>
-            <ac:spMk id="14" creationId="{843880E1-89C4-441D-B393-B5D6DE0B89CD}"/>
-          </ac:spMkLst>
-        </pc:spChg>
-        <pc:spChg chg="del mod">
-          <ac:chgData name="LEUNG Nicole" userId="8ed04819-1a1c-42ab-ae09-44d42575f3a6" providerId="ADAL" clId="{46AED7F8-18BE-4C7E-B9AC-F4C2CA2D1D79}" dt="2023-03-21T02:08:54.347" v="96" actId="478"/>
-          <ac:spMkLst>
-            <pc:docMk/>
-            <pc:sldMk cId="2172804706" sldId="267"/>
-            <ac:spMk id="15" creationId="{DC29577F-9EF3-473A-AB68-7EF04F3E99D0}"/>
-          </ac:spMkLst>
-        </pc:spChg>
-      </pc:sldChg>
-      <pc:sldChg chg="addSp delSp modSp mod ord">
-        <pc:chgData name="LEUNG Nicole" userId="8ed04819-1a1c-42ab-ae09-44d42575f3a6" providerId="ADAL" clId="{46AED7F8-18BE-4C7E-B9AC-F4C2CA2D1D79}" dt="2023-03-23T09:16:58.081" v="2632" actId="1076"/>
-        <pc:sldMkLst>
-          <pc:docMk/>
-          <pc:sldMk cId="3223329462" sldId="269"/>
-        </pc:sldMkLst>
-        <pc:spChg chg="mod">
-          <ac:chgData name="LEUNG Nicole" userId="8ed04819-1a1c-42ab-ae09-44d42575f3a6" providerId="ADAL" clId="{46AED7F8-18BE-4C7E-B9AC-F4C2CA2D1D79}" dt="2023-03-21T02:08:46.567" v="94" actId="20577"/>
-          <ac:spMkLst>
-            <pc:docMk/>
-            <pc:sldMk cId="3223329462" sldId="269"/>
-            <ac:spMk id="3" creationId="{0722FC5A-B29F-4C58-940E-4D925D707B51}"/>
-          </ac:spMkLst>
-        </pc:spChg>
-        <pc:picChg chg="add mod">
-          <ac:chgData name="LEUNG Nicole" userId="8ed04819-1a1c-42ab-ae09-44d42575f3a6" providerId="ADAL" clId="{46AED7F8-18BE-4C7E-B9AC-F4C2CA2D1D79}" dt="2023-03-23T09:16:51.711" v="2629" actId="1076"/>
-          <ac:picMkLst>
-            <pc:docMk/>
-            <pc:sldMk cId="3223329462" sldId="269"/>
-            <ac:picMk id="4" creationId="{70FCB9BE-470B-4C5A-AFC1-D994A3D784C5}"/>
-          </ac:picMkLst>
-        </pc:picChg>
-        <pc:picChg chg="add del mod">
-          <ac:chgData name="LEUNG Nicole" userId="8ed04819-1a1c-42ab-ae09-44d42575f3a6" providerId="ADAL" clId="{46AED7F8-18BE-4C7E-B9AC-F4C2CA2D1D79}" dt="2023-03-23T09:16:48.572" v="2627" actId="478"/>
-          <ac:picMkLst>
-            <pc:docMk/>
-            <pc:sldMk cId="3223329462" sldId="269"/>
-            <ac:picMk id="7" creationId="{D66CB167-B112-4E89-BAB7-163DA0F37A7A}"/>
-          </ac:picMkLst>
-        </pc:picChg>
-        <pc:picChg chg="del">
-          <ac:chgData name="LEUNG Nicole" userId="8ed04819-1a1c-42ab-ae09-44d42575f3a6" providerId="ADAL" clId="{46AED7F8-18BE-4C7E-B9AC-F4C2CA2D1D79}" dt="2023-03-22T09:58:43.484" v="2607" actId="478"/>
-          <ac:picMkLst>
-            <pc:docMk/>
-            <pc:sldMk cId="3223329462" sldId="269"/>
-            <ac:picMk id="8" creationId="{4EAB1F09-034D-4FBE-B9A1-EEE1406402AA}"/>
-          </ac:picMkLst>
-        </pc:picChg>
-        <pc:picChg chg="add del mod">
-          <ac:chgData name="LEUNG Nicole" userId="8ed04819-1a1c-42ab-ae09-44d42575f3a6" providerId="ADAL" clId="{46AED7F8-18BE-4C7E-B9AC-F4C2CA2D1D79}" dt="2023-03-23T09:16:55.105" v="2630" actId="478"/>
-          <ac:picMkLst>
-            <pc:docMk/>
-            <pc:sldMk cId="3223329462" sldId="269"/>
-            <ac:picMk id="9" creationId="{13DB1E8F-388B-4BC3-B1B9-406DD9E46839}"/>
-          </ac:picMkLst>
-        </pc:picChg>
-        <pc:picChg chg="del">
-          <ac:chgData name="LEUNG Nicole" userId="8ed04819-1a1c-42ab-ae09-44d42575f3a6" providerId="ADAL" clId="{46AED7F8-18BE-4C7E-B9AC-F4C2CA2D1D79}" dt="2023-03-22T09:59:00.981" v="2613" actId="478"/>
-          <ac:picMkLst>
-            <pc:docMk/>
-            <pc:sldMk cId="3223329462" sldId="269"/>
-            <ac:picMk id="10" creationId="{8728F3A2-6B75-49D6-BC9B-800F3AE9B5FD}"/>
-          </ac:picMkLst>
-        </pc:picChg>
-        <pc:picChg chg="add mod">
-          <ac:chgData name="LEUNG Nicole" userId="8ed04819-1a1c-42ab-ae09-44d42575f3a6" providerId="ADAL" clId="{46AED7F8-18BE-4C7E-B9AC-F4C2CA2D1D79}" dt="2023-03-23T09:16:58.081" v="2632" actId="1076"/>
-          <ac:picMkLst>
-            <pc:docMk/>
-            <pc:sldMk cId="3223329462" sldId="269"/>
-            <ac:picMk id="11" creationId="{B0CBAF88-14CA-4CDA-B13C-777E7C833B62}"/>
-          </ac:picMkLst>
-        </pc:picChg>
-      </pc:sldChg>
-      <pc:sldChg chg="addSp modSp mod">
-        <pc:chgData name="LEUNG Nicole" userId="8ed04819-1a1c-42ab-ae09-44d42575f3a6" providerId="ADAL" clId="{46AED7F8-18BE-4C7E-B9AC-F4C2CA2D1D79}" dt="2023-03-28T17:51:28.272" v="3443" actId="1076"/>
-        <pc:sldMkLst>
-          <pc:docMk/>
-          <pc:sldMk cId="148509534" sldId="271"/>
-        </pc:sldMkLst>
-        <pc:spChg chg="add mod">
-          <ac:chgData name="LEUNG Nicole" userId="8ed04819-1a1c-42ab-ae09-44d42575f3a6" providerId="ADAL" clId="{46AED7F8-18BE-4C7E-B9AC-F4C2CA2D1D79}" dt="2023-03-23T10:21:06.494" v="2740" actId="20577"/>
-          <ac:spMkLst>
-            <pc:docMk/>
-            <pc:sldMk cId="148509534" sldId="271"/>
-            <ac:spMk id="3" creationId="{134FAAA6-14F0-4BE8-8AB8-3516A7979DCB}"/>
-          </ac:spMkLst>
-        </pc:spChg>
-        <pc:spChg chg="mod">
-          <ac:chgData name="LEUNG Nicole" userId="8ed04819-1a1c-42ab-ae09-44d42575f3a6" providerId="ADAL" clId="{46AED7F8-18BE-4C7E-B9AC-F4C2CA2D1D79}" dt="2023-03-28T17:51:28.272" v="3443" actId="1076"/>
-          <ac:spMkLst>
-            <pc:docMk/>
-            <pc:sldMk cId="148509534" sldId="271"/>
-            <ac:spMk id="4" creationId="{8E3D1676-23E6-4E72-B18A-7D13DBAD6907}"/>
-          </ac:spMkLst>
-        </pc:spChg>
-        <pc:spChg chg="mod">
-          <ac:chgData name="LEUNG Nicole" userId="8ed04819-1a1c-42ab-ae09-44d42575f3a6" providerId="ADAL" clId="{46AED7F8-18BE-4C7E-B9AC-F4C2CA2D1D79}" dt="2023-03-27T03:15:53.493" v="3262" actId="20577"/>
-          <ac:spMkLst>
-            <pc:docMk/>
-            <pc:sldMk cId="148509534" sldId="271"/>
-            <ac:spMk id="10" creationId="{6FDF8BAA-5517-44E5-A349-459CB9334C39}"/>
-          </ac:spMkLst>
-        </pc:spChg>
-        <pc:picChg chg="mod">
-          <ac:chgData name="LEUNG Nicole" userId="8ed04819-1a1c-42ab-ae09-44d42575f3a6" providerId="ADAL" clId="{46AED7F8-18BE-4C7E-B9AC-F4C2CA2D1D79}" dt="2023-03-22T07:18:18.975" v="2218" actId="1076"/>
-          <ac:picMkLst>
-            <pc:docMk/>
-            <pc:sldMk cId="148509534" sldId="271"/>
-            <ac:picMk id="9" creationId="{3DA9B211-5337-4408-8A2D-37760443C69D}"/>
-          </ac:picMkLst>
-        </pc:picChg>
-      </pc:sldChg>
-      <pc:sldChg chg="del">
-        <pc:chgData name="LEUNG Nicole" userId="8ed04819-1a1c-42ab-ae09-44d42575f3a6" providerId="ADAL" clId="{46AED7F8-18BE-4C7E-B9AC-F4C2CA2D1D79}" dt="2023-03-21T02:09:16.470" v="98" actId="47"/>
-        <pc:sldMkLst>
-          <pc:docMk/>
-          <pc:sldMk cId="689417263" sldId="272"/>
-        </pc:sldMkLst>
-      </pc:sldChg>
-      <pc:sldChg chg="modSp del mod">
-        <pc:chgData name="LEUNG Nicole" userId="8ed04819-1a1c-42ab-ae09-44d42575f3a6" providerId="ADAL" clId="{46AED7F8-18BE-4C7E-B9AC-F4C2CA2D1D79}" dt="2023-03-21T02:11:10.125" v="121" actId="47"/>
-        <pc:sldMkLst>
-          <pc:docMk/>
-          <pc:sldMk cId="689417263" sldId="273"/>
-        </pc:sldMkLst>
-        <pc:spChg chg="mod">
-          <ac:chgData name="LEUNG Nicole" userId="8ed04819-1a1c-42ab-ae09-44d42575f3a6" providerId="ADAL" clId="{46AED7F8-18BE-4C7E-B9AC-F4C2CA2D1D79}" dt="2023-03-21T02:10:15.165" v="118" actId="1076"/>
-          <ac:spMkLst>
-            <pc:docMk/>
-            <pc:sldMk cId="689417263" sldId="273"/>
-            <ac:spMk id="18" creationId="{777FEA76-3A62-4884-92A7-4E415DE0B425}"/>
-          </ac:spMkLst>
-        </pc:spChg>
-      </pc:sldChg>
-      <pc:sldChg chg="del">
-        <pc:chgData name="LEUNG Nicole" userId="8ed04819-1a1c-42ab-ae09-44d42575f3a6" providerId="ADAL" clId="{46AED7F8-18BE-4C7E-B9AC-F4C2CA2D1D79}" dt="2023-03-20T09:33:51.319" v="0" actId="47"/>
-        <pc:sldMkLst>
-          <pc:docMk/>
-          <pc:sldMk cId="4289746519" sldId="274"/>
-        </pc:sldMkLst>
-      </pc:sldChg>
-      <pc:sldChg chg="addSp delSp modSp mod">
-        <pc:chgData name="LEUNG Nicole" userId="8ed04819-1a1c-42ab-ae09-44d42575f3a6" providerId="ADAL" clId="{46AED7F8-18BE-4C7E-B9AC-F4C2CA2D1D79}" dt="2023-03-24T10:30:57.073" v="3219" actId="14100"/>
-        <pc:sldMkLst>
-          <pc:docMk/>
-          <pc:sldMk cId="3717067589" sldId="275"/>
-        </pc:sldMkLst>
-        <pc:spChg chg="mod">
-          <ac:chgData name="LEUNG Nicole" userId="8ed04819-1a1c-42ab-ae09-44d42575f3a6" providerId="ADAL" clId="{46AED7F8-18BE-4C7E-B9AC-F4C2CA2D1D79}" dt="2023-03-24T09:36:24.721" v="2840" actId="14100"/>
-          <ac:spMkLst>
-            <pc:docMk/>
-            <pc:sldMk cId="3717067589" sldId="275"/>
-            <ac:spMk id="2" creationId="{50913557-26C6-4DE5-8056-31DE97D97CC8}"/>
-          </ac:spMkLst>
-        </pc:spChg>
-        <pc:spChg chg="add mod">
-          <ac:chgData name="LEUNG Nicole" userId="8ed04819-1a1c-42ab-ae09-44d42575f3a6" providerId="ADAL" clId="{46AED7F8-18BE-4C7E-B9AC-F4C2CA2D1D79}" dt="2023-03-22T07:45:32.015" v="2268" actId="20577"/>
-          <ac:spMkLst>
-            <pc:docMk/>
-            <pc:sldMk cId="3717067589" sldId="275"/>
-            <ac:spMk id="3" creationId="{33D7F15E-045B-4D7A-B4FB-C49D27CAAB81}"/>
-          </ac:spMkLst>
-        </pc:spChg>
-        <pc:spChg chg="add del mod">
-          <ac:chgData name="LEUNG Nicole" userId="8ed04819-1a1c-42ab-ae09-44d42575f3a6" providerId="ADAL" clId="{46AED7F8-18BE-4C7E-B9AC-F4C2CA2D1D79}" dt="2023-03-23T09:33:50.813" v="2733"/>
-          <ac:spMkLst>
-            <pc:docMk/>
-            <pc:sldMk cId="3717067589" sldId="275"/>
-            <ac:spMk id="6" creationId="{D43D46B1-30BE-4A29-A995-A46914A0400B}"/>
-          </ac:spMkLst>
-        </pc:spChg>
-        <pc:spChg chg="add del mod">
-          <ac:chgData name="LEUNG Nicole" userId="8ed04819-1a1c-42ab-ae09-44d42575f3a6" providerId="ADAL" clId="{46AED7F8-18BE-4C7E-B9AC-F4C2CA2D1D79}" dt="2023-03-24T03:35:08.515" v="2771" actId="478"/>
-          <ac:spMkLst>
-            <pc:docMk/>
-            <pc:sldMk cId="3717067589" sldId="275"/>
-            <ac:spMk id="8" creationId="{C78EB763-545F-4277-9073-990366E1E4D9}"/>
-          </ac:spMkLst>
-        </pc:spChg>
-        <pc:spChg chg="mod">
-          <ac:chgData name="LEUNG Nicole" userId="8ed04819-1a1c-42ab-ae09-44d42575f3a6" providerId="ADAL" clId="{46AED7F8-18BE-4C7E-B9AC-F4C2CA2D1D79}" dt="2023-03-24T10:30:50.623" v="3218" actId="20577"/>
-          <ac:spMkLst>
-            <pc:docMk/>
-            <pc:sldMk cId="3717067589" sldId="275"/>
-            <ac:spMk id="9" creationId="{AD07311F-AE2E-43BA-A80E-67FB67398EEF}"/>
-          </ac:spMkLst>
-        </pc:spChg>
-        <pc:picChg chg="mod">
-          <ac:chgData name="LEUNG Nicole" userId="8ed04819-1a1c-42ab-ae09-44d42575f3a6" providerId="ADAL" clId="{46AED7F8-18BE-4C7E-B9AC-F4C2CA2D1D79}" dt="2023-03-22T09:35:48.967" v="2437" actId="14100"/>
-          <ac:picMkLst>
-            <pc:docMk/>
-            <pc:sldMk cId="3717067589" sldId="275"/>
-            <ac:picMk id="4" creationId="{B67DCFD8-EE9F-412D-95FA-C460B28FF81D}"/>
-          </ac:picMkLst>
-        </pc:picChg>
-        <pc:picChg chg="mod">
-          <ac:chgData name="LEUNG Nicole" userId="8ed04819-1a1c-42ab-ae09-44d42575f3a6" providerId="ADAL" clId="{46AED7F8-18BE-4C7E-B9AC-F4C2CA2D1D79}" dt="2023-03-23T09:30:10.752" v="2705" actId="1076"/>
-          <ac:picMkLst>
-            <pc:docMk/>
-            <pc:sldMk cId="3717067589" sldId="275"/>
-            <ac:picMk id="5" creationId="{5C625D91-5548-47C6-A3B0-00336E786440}"/>
-          </ac:picMkLst>
-        </pc:picChg>
-        <pc:picChg chg="del">
-          <ac:chgData name="LEUNG Nicole" userId="8ed04819-1a1c-42ab-ae09-44d42575f3a6" providerId="ADAL" clId="{46AED7F8-18BE-4C7E-B9AC-F4C2CA2D1D79}" dt="2023-03-24T03:34:59.924" v="2767" actId="478"/>
-          <ac:picMkLst>
-            <pc:docMk/>
-            <pc:sldMk cId="3717067589" sldId="275"/>
-            <ac:picMk id="7" creationId="{AE40A6C8-D29D-4AAC-93E8-1762C83FF2C6}"/>
-          </ac:picMkLst>
-        </pc:picChg>
-        <pc:picChg chg="add mod">
-          <ac:chgData name="LEUNG Nicole" userId="8ed04819-1a1c-42ab-ae09-44d42575f3a6" providerId="ADAL" clId="{46AED7F8-18BE-4C7E-B9AC-F4C2CA2D1D79}" dt="2023-03-24T10:30:57.073" v="3219" actId="14100"/>
-          <ac:picMkLst>
-            <pc:docMk/>
-            <pc:sldMk cId="3717067589" sldId="275"/>
-            <ac:picMk id="11" creationId="{FD9D06BD-044B-4F71-B6BC-14D3B2D8920C}"/>
-          </ac:picMkLst>
-        </pc:picChg>
-      </pc:sldChg>
-      <pc:sldChg chg="modSp mod">
-        <pc:chgData name="LEUNG Nicole" userId="8ed04819-1a1c-42ab-ae09-44d42575f3a6" providerId="ADAL" clId="{46AED7F8-18BE-4C7E-B9AC-F4C2CA2D1D79}" dt="2023-03-21T02:25:45.474" v="721" actId="20577"/>
-        <pc:sldMkLst>
-          <pc:docMk/>
-          <pc:sldMk cId="2242469584" sldId="276"/>
-        </pc:sldMkLst>
-        <pc:spChg chg="mod">
-          <ac:chgData name="LEUNG Nicole" userId="8ed04819-1a1c-42ab-ae09-44d42575f3a6" providerId="ADAL" clId="{46AED7F8-18BE-4C7E-B9AC-F4C2CA2D1D79}" dt="2023-03-21T02:25:45.474" v="721" actId="20577"/>
-          <ac:spMkLst>
-            <pc:docMk/>
-            <pc:sldMk cId="2242469584" sldId="276"/>
-            <ac:spMk id="2" creationId="{BB99FB79-BD8B-40B3-9C9A-C89EF3809370}"/>
-          </ac:spMkLst>
-        </pc:spChg>
-        <pc:picChg chg="mod">
-          <ac:chgData name="LEUNG Nicole" userId="8ed04819-1a1c-42ab-ae09-44d42575f3a6" providerId="ADAL" clId="{46AED7F8-18BE-4C7E-B9AC-F4C2CA2D1D79}" dt="2023-03-21T02:24:28.358" v="666" actId="1076"/>
-          <ac:picMkLst>
-            <pc:docMk/>
-            <pc:sldMk cId="2242469584" sldId="276"/>
-            <ac:picMk id="4" creationId="{52188A1D-31D7-4244-B882-F33431080577}"/>
-          </ac:picMkLst>
-        </pc:picChg>
-      </pc:sldChg>
-      <pc:sldChg chg="del">
-        <pc:chgData name="LEUNG Nicole" userId="8ed04819-1a1c-42ab-ae09-44d42575f3a6" providerId="ADAL" clId="{46AED7F8-18BE-4C7E-B9AC-F4C2CA2D1D79}" dt="2023-03-21T02:11:08.420" v="120" actId="47"/>
-        <pc:sldMkLst>
-          <pc:docMk/>
-          <pc:sldMk cId="1139370413" sldId="277"/>
-        </pc:sldMkLst>
-      </pc:sldChg>
-      <pc:sldChg chg="del">
-        <pc:chgData name="LEUNG Nicole" userId="8ed04819-1a1c-42ab-ae09-44d42575f3a6" providerId="ADAL" clId="{46AED7F8-18BE-4C7E-B9AC-F4C2CA2D1D79}" dt="2023-03-22T07:06:50.411" v="2206" actId="2696"/>
-        <pc:sldMkLst>
-          <pc:docMk/>
-          <pc:sldMk cId="1173804814" sldId="279"/>
-        </pc:sldMkLst>
-      </pc:sldChg>
-      <pc:sldChg chg="modSp del mod">
-        <pc:chgData name="LEUNG Nicole" userId="8ed04819-1a1c-42ab-ae09-44d42575f3a6" providerId="ADAL" clId="{46AED7F8-18BE-4C7E-B9AC-F4C2CA2D1D79}" dt="2023-03-22T07:06:59.729" v="2209" actId="2696"/>
-        <pc:sldMkLst>
-          <pc:docMk/>
-          <pc:sldMk cId="3426910520" sldId="280"/>
-        </pc:sldMkLst>
-        <pc:spChg chg="mod">
-          <ac:chgData name="LEUNG Nicole" userId="8ed04819-1a1c-42ab-ae09-44d42575f3a6" providerId="ADAL" clId="{46AED7F8-18BE-4C7E-B9AC-F4C2CA2D1D79}" dt="2023-03-21T02:14:23.252" v="241" actId="20577"/>
-          <ac:spMkLst>
-            <pc:docMk/>
-            <pc:sldMk cId="3426910520" sldId="280"/>
-            <ac:spMk id="2" creationId="{37702A86-600A-4100-A556-60DB9834732A}"/>
-          </ac:spMkLst>
-        </pc:spChg>
-        <pc:spChg chg="mod">
-          <ac:chgData name="LEUNG Nicole" userId="8ed04819-1a1c-42ab-ae09-44d42575f3a6" providerId="ADAL" clId="{46AED7F8-18BE-4C7E-B9AC-F4C2CA2D1D79}" dt="2023-03-21T02:15:14.678" v="319" actId="20577"/>
-          <ac:spMkLst>
-            <pc:docMk/>
-            <pc:sldMk cId="3426910520" sldId="280"/>
-            <ac:spMk id="3" creationId="{9A6BB529-0666-4400-9FE6-534F0544F88F}"/>
-          </ac:spMkLst>
-        </pc:spChg>
-      </pc:sldChg>
-      <pc:sldChg chg="modSp mod">
-        <pc:chgData name="LEUNG Nicole" userId="8ed04819-1a1c-42ab-ae09-44d42575f3a6" providerId="ADAL" clId="{46AED7F8-18BE-4C7E-B9AC-F4C2CA2D1D79}" dt="2023-03-24T10:31:20.194" v="3220" actId="14100"/>
-        <pc:sldMkLst>
-          <pc:docMk/>
-          <pc:sldMk cId="2849692965" sldId="281"/>
-        </pc:sldMkLst>
-        <pc:picChg chg="mod">
-          <ac:chgData name="LEUNG Nicole" userId="8ed04819-1a1c-42ab-ae09-44d42575f3a6" providerId="ADAL" clId="{46AED7F8-18BE-4C7E-B9AC-F4C2CA2D1D79}" dt="2023-03-24T10:31:20.194" v="3220" actId="14100"/>
-          <ac:picMkLst>
-            <pc:docMk/>
-            <pc:sldMk cId="2849692965" sldId="281"/>
-            <ac:picMk id="4" creationId="{7239D268-D566-4448-A0B5-C4223FAAE021}"/>
-          </ac:picMkLst>
-        </pc:picChg>
-        <pc:picChg chg="mod">
-          <ac:chgData name="LEUNG Nicole" userId="8ed04819-1a1c-42ab-ae09-44d42575f3a6" providerId="ADAL" clId="{46AED7F8-18BE-4C7E-B9AC-F4C2CA2D1D79}" dt="2023-03-21T02:23:52.119" v="660" actId="1076"/>
-          <ac:picMkLst>
-            <pc:docMk/>
-            <pc:sldMk cId="2849692965" sldId="281"/>
-            <ac:picMk id="5" creationId="{80A5A896-78E0-4FB9-8FCB-AEBA436DB3C4}"/>
-          </ac:picMkLst>
-        </pc:picChg>
-      </pc:sldChg>
-      <pc:sldChg chg="addSp delSp modSp mod setBg">
-        <pc:chgData name="LEUNG Nicole" userId="8ed04819-1a1c-42ab-ae09-44d42575f3a6" providerId="ADAL" clId="{46AED7F8-18BE-4C7E-B9AC-F4C2CA2D1D79}" dt="2023-03-27T08:52:07.705" v="3388" actId="1076"/>
-        <pc:sldMkLst>
-          <pc:docMk/>
-          <pc:sldMk cId="4159790325" sldId="283"/>
-        </pc:sldMkLst>
-        <pc:spChg chg="mod">
-          <ac:chgData name="LEUNG Nicole" userId="8ed04819-1a1c-42ab-ae09-44d42575f3a6" providerId="ADAL" clId="{46AED7F8-18BE-4C7E-B9AC-F4C2CA2D1D79}" dt="2023-03-22T09:54:36.137" v="2479" actId="26606"/>
-          <ac:spMkLst>
-            <pc:docMk/>
-            <pc:sldMk cId="4159790325" sldId="283"/>
-            <ac:spMk id="2" creationId="{AED9B812-38EB-43A9-861B-E84234C0DD61}"/>
-          </ac:spMkLst>
-        </pc:spChg>
-        <pc:spChg chg="mod">
-          <ac:chgData name="LEUNG Nicole" userId="8ed04819-1a1c-42ab-ae09-44d42575f3a6" providerId="ADAL" clId="{46AED7F8-18BE-4C7E-B9AC-F4C2CA2D1D79}" dt="2023-03-22T09:54:36.137" v="2479" actId="26606"/>
-          <ac:spMkLst>
-            <pc:docMk/>
-            <pc:sldMk cId="4159790325" sldId="283"/>
-            <ac:spMk id="3" creationId="{6094BA60-024E-4F66-AC74-E5CC6ADC6BE8}"/>
-          </ac:spMkLst>
-        </pc:spChg>
-        <pc:spChg chg="add del mod">
-          <ac:chgData name="LEUNG Nicole" userId="8ed04819-1a1c-42ab-ae09-44d42575f3a6" providerId="ADAL" clId="{46AED7F8-18BE-4C7E-B9AC-F4C2CA2D1D79}" dt="2023-03-24T03:41:57.202" v="2776" actId="478"/>
-          <ac:spMkLst>
-            <pc:docMk/>
-            <pc:sldMk cId="4159790325" sldId="283"/>
-            <ac:spMk id="6" creationId="{8173C2E9-2205-4B3E-9D6E-814EBAA2E878}"/>
-          </ac:spMkLst>
-        </pc:spChg>
-        <pc:spChg chg="add del mod">
-          <ac:chgData name="LEUNG Nicole" userId="8ed04819-1a1c-42ab-ae09-44d42575f3a6" providerId="ADAL" clId="{46AED7F8-18BE-4C7E-B9AC-F4C2CA2D1D79}" dt="2023-03-24T03:59:51.725" v="2838" actId="478"/>
-          <ac:spMkLst>
-            <pc:docMk/>
-            <pc:sldMk cId="4159790325" sldId="283"/>
-            <ac:spMk id="9" creationId="{F23D2C2A-A09E-414D-BCBA-CD9238DC0E93}"/>
-          </ac:spMkLst>
-        </pc:spChg>
-        <pc:spChg chg="add del">
-          <ac:chgData name="LEUNG Nicole" userId="8ed04819-1a1c-42ab-ae09-44d42575f3a6" providerId="ADAL" clId="{46AED7F8-18BE-4C7E-B9AC-F4C2CA2D1D79}" dt="2023-03-22T09:54:36.137" v="2479" actId="26606"/>
-          <ac:spMkLst>
-            <pc:docMk/>
-            <pc:sldMk cId="4159790325" sldId="283"/>
-            <ac:spMk id="13" creationId="{8761DDFE-071F-4200-B0AA-394476C2D2D6}"/>
-          </ac:spMkLst>
-        </pc:spChg>
-        <pc:picChg chg="add del mod">
-          <ac:chgData name="LEUNG Nicole" userId="8ed04819-1a1c-42ab-ae09-44d42575f3a6" providerId="ADAL" clId="{46AED7F8-18BE-4C7E-B9AC-F4C2CA2D1D79}" dt="2023-03-27T08:52:03.263" v="3386" actId="478"/>
-          <ac:picMkLst>
-            <pc:docMk/>
-            <pc:sldMk cId="4159790325" sldId="283"/>
-            <ac:picMk id="5" creationId="{3062CA2E-5E35-45C3-A270-4238BB09F41B}"/>
-          </ac:picMkLst>
-        </pc:picChg>
-        <pc:picChg chg="add mod">
-          <ac:chgData name="LEUNG Nicole" userId="8ed04819-1a1c-42ab-ae09-44d42575f3a6" providerId="ADAL" clId="{46AED7F8-18BE-4C7E-B9AC-F4C2CA2D1D79}" dt="2023-03-27T08:52:07.705" v="3388" actId="1076"/>
-          <ac:picMkLst>
-            <pc:docMk/>
-            <pc:sldMk cId="4159790325" sldId="283"/>
-            <ac:picMk id="6" creationId="{FA529496-14EB-4AE3-8F03-54BE3BBA74A6}"/>
-          </ac:picMkLst>
-        </pc:picChg>
-        <pc:picChg chg="add mod">
-          <ac:chgData name="LEUNG Nicole" userId="8ed04819-1a1c-42ab-ae09-44d42575f3a6" providerId="ADAL" clId="{46AED7F8-18BE-4C7E-B9AC-F4C2CA2D1D79}" dt="2023-03-24T03:42:38.274" v="2778" actId="14100"/>
-          <ac:picMkLst>
-            <pc:docMk/>
-            <pc:sldMk cId="4159790325" sldId="283"/>
-            <ac:picMk id="7" creationId="{30EB559E-CB5D-4B80-B48B-54A453329AA2}"/>
-          </ac:picMkLst>
-        </pc:picChg>
-        <pc:picChg chg="del mod ord">
-          <ac:chgData name="LEUNG Nicole" userId="8ed04819-1a1c-42ab-ae09-44d42575f3a6" providerId="ADAL" clId="{46AED7F8-18BE-4C7E-B9AC-F4C2CA2D1D79}" dt="2023-03-24T03:41:50.967" v="2772" actId="478"/>
-          <ac:picMkLst>
-            <pc:docMk/>
-            <pc:sldMk cId="4159790325" sldId="283"/>
-            <ac:picMk id="8" creationId="{0EB9A571-C79B-404A-B530-1AEBE84475F6}"/>
-          </ac:picMkLst>
-        </pc:picChg>
-        <pc:picChg chg="del mod">
-          <ac:chgData name="LEUNG Nicole" userId="8ed04819-1a1c-42ab-ae09-44d42575f3a6" providerId="ADAL" clId="{46AED7F8-18BE-4C7E-B9AC-F4C2CA2D1D79}" dt="2023-03-22T09:54:24.967" v="2470" actId="478"/>
-          <ac:picMkLst>
-            <pc:docMk/>
-            <pc:sldMk cId="4159790325" sldId="283"/>
-            <ac:picMk id="9" creationId="{F26DD8D8-9976-4726-9BE3-41B1321FE1C1}"/>
-          </ac:picMkLst>
-        </pc:picChg>
-      </pc:sldChg>
-      <pc:sldChg chg="del">
-        <pc:chgData name="LEUNG Nicole" userId="8ed04819-1a1c-42ab-ae09-44d42575f3a6" providerId="ADAL" clId="{46AED7F8-18BE-4C7E-B9AC-F4C2CA2D1D79}" dt="2023-03-21T02:11:05.469" v="119" actId="47"/>
-        <pc:sldMkLst>
-          <pc:docMk/>
-          <pc:sldMk cId="3394698022" sldId="284"/>
-        </pc:sldMkLst>
-      </pc:sldChg>
-      <pc:sldChg chg="addSp delSp modSp mod">
-        <pc:chgData name="LEUNG Nicole" userId="8ed04819-1a1c-42ab-ae09-44d42575f3a6" providerId="ADAL" clId="{46AED7F8-18BE-4C7E-B9AC-F4C2CA2D1D79}" dt="2023-03-24T10:31:52.681" v="3235" actId="20577"/>
-        <pc:sldMkLst>
-          <pc:docMk/>
-          <pc:sldMk cId="1739127976" sldId="285"/>
-        </pc:sldMkLst>
-        <pc:spChg chg="mod">
-          <ac:chgData name="LEUNG Nicole" userId="8ed04819-1a1c-42ab-ae09-44d42575f3a6" providerId="ADAL" clId="{46AED7F8-18BE-4C7E-B9AC-F4C2CA2D1D79}" dt="2023-03-22T03:17:20.433" v="1254" actId="20577"/>
-          <ac:spMkLst>
-            <pc:docMk/>
-            <pc:sldMk cId="1739127976" sldId="285"/>
-            <ac:spMk id="2" creationId="{B1748EFC-037C-4D62-BA8D-09FD14A862CD}"/>
-          </ac:spMkLst>
-        </pc:spChg>
-        <pc:spChg chg="mod">
-          <ac:chgData name="LEUNG Nicole" userId="8ed04819-1a1c-42ab-ae09-44d42575f3a6" providerId="ADAL" clId="{46AED7F8-18BE-4C7E-B9AC-F4C2CA2D1D79}" dt="2023-03-24T10:31:52.681" v="3235" actId="20577"/>
-          <ac:spMkLst>
-            <pc:docMk/>
-            <pc:sldMk cId="1739127976" sldId="285"/>
-            <ac:spMk id="3" creationId="{E1D53481-D0F7-4989-AE93-2EC86E926AEF}"/>
-          </ac:spMkLst>
-        </pc:spChg>
-        <pc:picChg chg="add mod">
-          <ac:chgData name="LEUNG Nicole" userId="8ed04819-1a1c-42ab-ae09-44d42575f3a6" providerId="ADAL" clId="{46AED7F8-18BE-4C7E-B9AC-F4C2CA2D1D79}" dt="2023-03-23T09:19:47.505" v="2654" actId="1076"/>
-          <ac:picMkLst>
-            <pc:docMk/>
-            <pc:sldMk cId="1739127976" sldId="285"/>
-            <ac:picMk id="5" creationId="{84B89F66-48E2-4291-B991-55E17AF995D8}"/>
-          </ac:picMkLst>
-        </pc:picChg>
-        <pc:picChg chg="del">
-          <ac:chgData name="LEUNG Nicole" userId="8ed04819-1a1c-42ab-ae09-44d42575f3a6" providerId="ADAL" clId="{46AED7F8-18BE-4C7E-B9AC-F4C2CA2D1D79}" dt="2023-03-22T03:32:08.828" v="1255" actId="478"/>
-          <ac:picMkLst>
-            <pc:docMk/>
-            <pc:sldMk cId="1739127976" sldId="285"/>
-            <ac:picMk id="5" creationId="{BA50BCDC-823C-4383-96A6-D171EE293D0F}"/>
-          </ac:picMkLst>
-        </pc:picChg>
-        <pc:picChg chg="add del mod">
-          <ac:chgData name="LEUNG Nicole" userId="8ed04819-1a1c-42ab-ae09-44d42575f3a6" providerId="ADAL" clId="{46AED7F8-18BE-4C7E-B9AC-F4C2CA2D1D79}" dt="2023-03-23T09:19:44.580" v="2652" actId="478"/>
-          <ac:picMkLst>
-            <pc:docMk/>
-            <pc:sldMk cId="1739127976" sldId="285"/>
-            <ac:picMk id="6" creationId="{F99A1DBB-DB58-458F-976F-F8E8D9474BB6}"/>
-          </ac:picMkLst>
-        </pc:picChg>
-        <pc:picChg chg="del">
-          <ac:chgData name="LEUNG Nicole" userId="8ed04819-1a1c-42ab-ae09-44d42575f3a6" providerId="ADAL" clId="{46AED7F8-18BE-4C7E-B9AC-F4C2CA2D1D79}" dt="2023-03-22T03:33:31.448" v="1258" actId="478"/>
-          <ac:picMkLst>
-            <pc:docMk/>
-            <pc:sldMk cId="1739127976" sldId="285"/>
-            <ac:picMk id="7" creationId="{720C46F9-6FA2-490F-902F-209B26BFE1BB}"/>
-          </ac:picMkLst>
-        </pc:picChg>
-        <pc:picChg chg="add mod">
-          <ac:chgData name="LEUNG Nicole" userId="8ed04819-1a1c-42ab-ae09-44d42575f3a6" providerId="ADAL" clId="{46AED7F8-18BE-4C7E-B9AC-F4C2CA2D1D79}" dt="2023-03-23T09:20:04.053" v="2657" actId="1076"/>
-          <ac:picMkLst>
-            <pc:docMk/>
-            <pc:sldMk cId="1739127976" sldId="285"/>
-            <ac:picMk id="8" creationId="{8346D190-0508-44DF-B71A-4892DE43BF64}"/>
-          </ac:picMkLst>
-        </pc:picChg>
-        <pc:picChg chg="add del mod">
-          <ac:chgData name="LEUNG Nicole" userId="8ed04819-1a1c-42ab-ae09-44d42575f3a6" providerId="ADAL" clId="{46AED7F8-18BE-4C7E-B9AC-F4C2CA2D1D79}" dt="2023-03-23T09:20:00.918" v="2655" actId="478"/>
-          <ac:picMkLst>
-            <pc:docMk/>
-            <pc:sldMk cId="1739127976" sldId="285"/>
-            <ac:picMk id="9" creationId="{08390D6F-CDAB-4CB4-A655-65C9976FCC8A}"/>
-          </ac:picMkLst>
-        </pc:picChg>
-      </pc:sldChg>
-      <pc:sldChg chg="delSp modSp mod">
-        <pc:chgData name="LEUNG Nicole" userId="8ed04819-1a1c-42ab-ae09-44d42575f3a6" providerId="ADAL" clId="{46AED7F8-18BE-4C7E-B9AC-F4C2CA2D1D79}" dt="2023-03-22T07:20:47.934" v="2220" actId="14734"/>
-        <pc:sldMkLst>
-          <pc:docMk/>
-          <pc:sldMk cId="2244824" sldId="289"/>
-        </pc:sldMkLst>
-        <pc:spChg chg="del">
-          <ac:chgData name="LEUNG Nicole" userId="8ed04819-1a1c-42ab-ae09-44d42575f3a6" providerId="ADAL" clId="{46AED7F8-18BE-4C7E-B9AC-F4C2CA2D1D79}" dt="2023-03-21T02:29:18.918" v="931" actId="478"/>
-          <ac:spMkLst>
-            <pc:docMk/>
-            <pc:sldMk cId="2244824" sldId="289"/>
-            <ac:spMk id="6" creationId="{2033B45C-581A-4A1D-A145-DD2275726760}"/>
-          </ac:spMkLst>
-        </pc:spChg>
-        <pc:graphicFrameChg chg="modGraphic">
-          <ac:chgData name="LEUNG Nicole" userId="8ed04819-1a1c-42ab-ae09-44d42575f3a6" providerId="ADAL" clId="{46AED7F8-18BE-4C7E-B9AC-F4C2CA2D1D79}" dt="2023-03-22T07:20:47.934" v="2220" actId="14734"/>
-          <ac:graphicFrameMkLst>
-            <pc:docMk/>
-            <pc:sldMk cId="2244824" sldId="289"/>
-            <ac:graphicFrameMk id="5" creationId="{896A0D97-381C-44E5-A277-977F62E1C1DE}"/>
-          </ac:graphicFrameMkLst>
-        </pc:graphicFrameChg>
-      </pc:sldChg>
-      <pc:sldChg chg="modSp mod">
-        <pc:chgData name="LEUNG Nicole" userId="8ed04819-1a1c-42ab-ae09-44d42575f3a6" providerId="ADAL" clId="{46AED7F8-18BE-4C7E-B9AC-F4C2CA2D1D79}" dt="2023-03-24T10:00:38.636" v="2953" actId="1076"/>
-        <pc:sldMkLst>
-          <pc:docMk/>
-          <pc:sldMk cId="2506668147" sldId="290"/>
-        </pc:sldMkLst>
-        <pc:spChg chg="mod">
-          <ac:chgData name="LEUNG Nicole" userId="8ed04819-1a1c-42ab-ae09-44d42575f3a6" providerId="ADAL" clId="{46AED7F8-18BE-4C7E-B9AC-F4C2CA2D1D79}" dt="2023-03-22T02:42:03.989" v="1226" actId="14100"/>
-          <ac:spMkLst>
-            <pc:docMk/>
-            <pc:sldMk cId="2506668147" sldId="290"/>
-            <ac:spMk id="2" creationId="{EC523B02-5F95-4633-8AAA-EFDF6751F9AC}"/>
-          </ac:spMkLst>
-        </pc:spChg>
-        <pc:picChg chg="mod">
-          <ac:chgData name="LEUNG Nicole" userId="8ed04819-1a1c-42ab-ae09-44d42575f3a6" providerId="ADAL" clId="{46AED7F8-18BE-4C7E-B9AC-F4C2CA2D1D79}" dt="2023-03-24T10:00:38.636" v="2953" actId="1076"/>
-          <ac:picMkLst>
-            <pc:docMk/>
-            <pc:sldMk cId="2506668147" sldId="290"/>
-            <ac:picMk id="5" creationId="{31A9851F-C57C-4CA1-98C5-EB6157295172}"/>
-          </ac:picMkLst>
-        </pc:picChg>
-        <pc:picChg chg="mod">
-          <ac:chgData name="LEUNG Nicole" userId="8ed04819-1a1c-42ab-ae09-44d42575f3a6" providerId="ADAL" clId="{46AED7F8-18BE-4C7E-B9AC-F4C2CA2D1D79}" dt="2023-03-24T10:00:36.428" v="2952" actId="1076"/>
-          <ac:picMkLst>
-            <pc:docMk/>
-            <pc:sldMk cId="2506668147" sldId="290"/>
-            <ac:picMk id="8" creationId="{EC20F656-3AE7-4635-AF55-0272180D0E2A}"/>
-          </ac:picMkLst>
-        </pc:picChg>
-      </pc:sldChg>
-      <pc:sldChg chg="modSp add del mod ord">
-        <pc:chgData name="LEUNG Nicole" userId="8ed04819-1a1c-42ab-ae09-44d42575f3a6" providerId="ADAL" clId="{46AED7F8-18BE-4C7E-B9AC-F4C2CA2D1D79}" dt="2023-03-20T09:38:30.509" v="40" actId="47"/>
-        <pc:sldMkLst>
-          <pc:docMk/>
-          <pc:sldMk cId="2077699479" sldId="291"/>
-        </pc:sldMkLst>
-        <pc:spChg chg="mod">
-          <ac:chgData name="LEUNG Nicole" userId="8ed04819-1a1c-42ab-ae09-44d42575f3a6" providerId="ADAL" clId="{46AED7F8-18BE-4C7E-B9AC-F4C2CA2D1D79}" dt="2023-03-20T09:38:06.304" v="37"/>
-          <ac:spMkLst>
-            <pc:docMk/>
-            <pc:sldMk cId="2077699479" sldId="291"/>
-            <ac:spMk id="10" creationId="{441E9043-238B-4820-A9B0-7E72A148164F}"/>
-          </ac:spMkLst>
-        </pc:spChg>
-      </pc:sldChg>
-      <pc:sldChg chg="addSp delSp modSp mod ord modShow">
-        <pc:chgData name="LEUNG Nicole" userId="8ed04819-1a1c-42ab-ae09-44d42575f3a6" providerId="ADAL" clId="{46AED7F8-18BE-4C7E-B9AC-F4C2CA2D1D79}" dt="2023-03-23T09:16:41.746" v="2626" actId="1076"/>
-        <pc:sldMkLst>
-          <pc:docMk/>
-          <pc:sldMk cId="1601178964" sldId="292"/>
-        </pc:sldMkLst>
-        <pc:spChg chg="del">
-          <ac:chgData name="LEUNG Nicole" userId="8ed04819-1a1c-42ab-ae09-44d42575f3a6" providerId="ADAL" clId="{46AED7F8-18BE-4C7E-B9AC-F4C2CA2D1D79}" dt="2023-03-21T02:08:03.425" v="76" actId="478"/>
-          <ac:spMkLst>
-            <pc:docMk/>
-            <pc:sldMk cId="1601178964" sldId="292"/>
-            <ac:spMk id="5" creationId="{BA0CD18F-204C-4D36-8D38-C5663BAE40B6}"/>
-          </ac:spMkLst>
-        </pc:spChg>
-        <pc:spChg chg="mod">
-          <ac:chgData name="LEUNG Nicole" userId="8ed04819-1a1c-42ab-ae09-44d42575f3a6" providerId="ADAL" clId="{46AED7F8-18BE-4C7E-B9AC-F4C2CA2D1D79}" dt="2023-03-21T02:09:55.384" v="115" actId="20577"/>
-          <ac:spMkLst>
-            <pc:docMk/>
-            <pc:sldMk cId="1601178964" sldId="292"/>
-            <ac:spMk id="9" creationId="{32E72F45-88B7-48EF-8899-109509120516}"/>
-          </ac:spMkLst>
-        </pc:spChg>
-        <pc:spChg chg="mod">
-          <ac:chgData name="LEUNG Nicole" userId="8ed04819-1a1c-42ab-ae09-44d42575f3a6" providerId="ADAL" clId="{46AED7F8-18BE-4C7E-B9AC-F4C2CA2D1D79}" dt="2023-03-22T09:33:04.518" v="2433" actId="14100"/>
-          <ac:spMkLst>
-            <pc:docMk/>
-            <pc:sldMk cId="1601178964" sldId="292"/>
-            <ac:spMk id="15" creationId="{80001105-1374-432C-8FDD-D954D89771F9}"/>
-          </ac:spMkLst>
-        </pc:spChg>
-        <pc:picChg chg="add del mod">
-          <ac:chgData name="LEUNG Nicole" userId="8ed04819-1a1c-42ab-ae09-44d42575f3a6" providerId="ADAL" clId="{46AED7F8-18BE-4C7E-B9AC-F4C2CA2D1D79}" dt="2023-03-23T09:16:01.576" v="2618" actId="478"/>
-          <ac:picMkLst>
-            <pc:docMk/>
-            <pc:sldMk cId="1601178964" sldId="292"/>
-            <ac:picMk id="3" creationId="{FBFCF111-359A-440D-9574-83FB522B89CD}"/>
-          </ac:picMkLst>
-        </pc:picChg>
-        <pc:picChg chg="add del mod">
-          <ac:chgData name="LEUNG Nicole" userId="8ed04819-1a1c-42ab-ae09-44d42575f3a6" providerId="ADAL" clId="{46AED7F8-18BE-4C7E-B9AC-F4C2CA2D1D79}" dt="2023-03-23T09:16:38.435" v="2624" actId="478"/>
-          <ac:picMkLst>
-            <pc:docMk/>
-            <pc:sldMk cId="1601178964" sldId="292"/>
-            <ac:picMk id="5" creationId="{5796704A-51B9-4A2E-BFC6-861AE28D0DEC}"/>
-          </ac:picMkLst>
-        </pc:picChg>
-        <pc:picChg chg="del">
-          <ac:chgData name="LEUNG Nicole" userId="8ed04819-1a1c-42ab-ae09-44d42575f3a6" providerId="ADAL" clId="{46AED7F8-18BE-4C7E-B9AC-F4C2CA2D1D79}" dt="2023-03-22T09:57:37.133" v="2601" actId="478"/>
-          <ac:picMkLst>
-            <pc:docMk/>
-            <pc:sldMk cId="1601178964" sldId="292"/>
-            <ac:picMk id="7" creationId="{AD71860E-DDC4-4E21-AFE7-604F1F5C2148}"/>
-          </ac:picMkLst>
-        </pc:picChg>
-        <pc:picChg chg="add mod">
-          <ac:chgData name="LEUNG Nicole" userId="8ed04819-1a1c-42ab-ae09-44d42575f3a6" providerId="ADAL" clId="{46AED7F8-18BE-4C7E-B9AC-F4C2CA2D1D79}" dt="2023-03-23T09:16:04.731" v="2620" actId="1076"/>
-          <ac:picMkLst>
-            <pc:docMk/>
-            <pc:sldMk cId="1601178964" sldId="292"/>
-            <ac:picMk id="8" creationId="{77AD99B5-8F17-4373-90C1-4AFEE51401EC}"/>
-          </ac:picMkLst>
-        </pc:picChg>
-        <pc:picChg chg="del">
-          <ac:chgData name="LEUNG Nicole" userId="8ed04819-1a1c-42ab-ae09-44d42575f3a6" providerId="ADAL" clId="{46AED7F8-18BE-4C7E-B9AC-F4C2CA2D1D79}" dt="2023-03-22T09:57:54.954" v="2604" actId="478"/>
-          <ac:picMkLst>
-            <pc:docMk/>
-            <pc:sldMk cId="1601178964" sldId="292"/>
-            <ac:picMk id="10" creationId="{8728F3A2-6B75-49D6-BC9B-800F3AE9B5FD}"/>
-          </ac:picMkLst>
-        </pc:picChg>
-        <pc:picChg chg="add mod">
-          <ac:chgData name="LEUNG Nicole" userId="8ed04819-1a1c-42ab-ae09-44d42575f3a6" providerId="ADAL" clId="{46AED7F8-18BE-4C7E-B9AC-F4C2CA2D1D79}" dt="2023-03-23T09:16:41.746" v="2626" actId="1076"/>
-          <ac:picMkLst>
-            <pc:docMk/>
-            <pc:sldMk cId="1601178964" sldId="292"/>
-            <ac:picMk id="12" creationId="{A697BC1F-C270-4B22-A6C9-3DCDD4988815}"/>
-          </ac:picMkLst>
-        </pc:picChg>
-      </pc:sldChg>
-      <pc:sldChg chg="modSp mod">
-        <pc:chgData name="LEUNG Nicole" userId="8ed04819-1a1c-42ab-ae09-44d42575f3a6" providerId="ADAL" clId="{46AED7F8-18BE-4C7E-B9AC-F4C2CA2D1D79}" dt="2023-03-21T02:37:27.404" v="1008" actId="14100"/>
-        <pc:sldMkLst>
-          <pc:docMk/>
-          <pc:sldMk cId="2645904127" sldId="293"/>
-        </pc:sldMkLst>
-        <pc:spChg chg="mod">
-          <ac:chgData name="LEUNG Nicole" userId="8ed04819-1a1c-42ab-ae09-44d42575f3a6" providerId="ADAL" clId="{46AED7F8-18BE-4C7E-B9AC-F4C2CA2D1D79}" dt="2023-03-21T02:30:48.433" v="1006" actId="20577"/>
-          <ac:spMkLst>
-            <pc:docMk/>
-            <pc:sldMk cId="2645904127" sldId="293"/>
-            <ac:spMk id="2" creationId="{EC523B02-5F95-4633-8AAA-EFDF6751F9AC}"/>
-          </ac:spMkLst>
-        </pc:spChg>
-        <pc:spChg chg="mod">
-          <ac:chgData name="LEUNG Nicole" userId="8ed04819-1a1c-42ab-ae09-44d42575f3a6" providerId="ADAL" clId="{46AED7F8-18BE-4C7E-B9AC-F4C2CA2D1D79}" dt="2023-03-21T02:37:27.404" v="1008" actId="14100"/>
-          <ac:spMkLst>
-            <pc:docMk/>
-            <pc:sldMk cId="2645904127" sldId="293"/>
-            <ac:spMk id="3" creationId="{C4E4A81A-FF7F-43AE-905F-910C1DE44062}"/>
-          </ac:spMkLst>
-        </pc:spChg>
-      </pc:sldChg>
-      <pc:sldChg chg="modSp mod">
-        <pc:chgData name="LEUNG Nicole" userId="8ed04819-1a1c-42ab-ae09-44d42575f3a6" providerId="ADAL" clId="{46AED7F8-18BE-4C7E-B9AC-F4C2CA2D1D79}" dt="2023-03-21T02:39:56.558" v="1206" actId="33524"/>
-        <pc:sldMkLst>
-          <pc:docMk/>
-          <pc:sldMk cId="3602892782" sldId="294"/>
-        </pc:sldMkLst>
-        <pc:spChg chg="mod">
-          <ac:chgData name="LEUNG Nicole" userId="8ed04819-1a1c-42ab-ae09-44d42575f3a6" providerId="ADAL" clId="{46AED7F8-18BE-4C7E-B9AC-F4C2CA2D1D79}" dt="2023-03-21T02:39:56.558" v="1206" actId="33524"/>
-          <ac:spMkLst>
-            <pc:docMk/>
-            <pc:sldMk cId="3602892782" sldId="294"/>
-            <ac:spMk id="3" creationId="{C4E4A81A-FF7F-43AE-905F-910C1DE44062}"/>
-          </ac:spMkLst>
-        </pc:spChg>
-      </pc:sldChg>
-      <pc:sldChg chg="addSp delSp modSp mod">
-        <pc:chgData name="LEUNG Nicole" userId="8ed04819-1a1c-42ab-ae09-44d42575f3a6" providerId="ADAL" clId="{46AED7F8-18BE-4C7E-B9AC-F4C2CA2D1D79}" dt="2023-03-23T09:21:07.708" v="2663" actId="1076"/>
-        <pc:sldMkLst>
-          <pc:docMk/>
-          <pc:sldMk cId="1455654293" sldId="295"/>
-        </pc:sldMkLst>
-        <pc:picChg chg="del">
-          <ac:chgData name="LEUNG Nicole" userId="8ed04819-1a1c-42ab-ae09-44d42575f3a6" providerId="ADAL" clId="{46AED7F8-18BE-4C7E-B9AC-F4C2CA2D1D79}" dt="2023-03-23T09:20:55.903" v="2658" actId="478"/>
-          <ac:picMkLst>
-            <pc:docMk/>
-            <pc:sldMk cId="1455654293" sldId="295"/>
-            <ac:picMk id="5" creationId="{15C938E3-EC16-41DB-8A20-E6C1BB21F1D2}"/>
-          </ac:picMkLst>
-        </pc:picChg>
-        <pc:picChg chg="add mod">
-          <ac:chgData name="LEUNG Nicole" userId="8ed04819-1a1c-42ab-ae09-44d42575f3a6" providerId="ADAL" clId="{46AED7F8-18BE-4C7E-B9AC-F4C2CA2D1D79}" dt="2023-03-23T09:21:00.074" v="2660" actId="1076"/>
-          <ac:picMkLst>
-            <pc:docMk/>
-            <pc:sldMk cId="1455654293" sldId="295"/>
-            <ac:picMk id="6" creationId="{1EC6700F-C9D7-493D-9D22-AA06E3B385BD}"/>
-          </ac:picMkLst>
-        </pc:picChg>
-        <pc:picChg chg="del">
-          <ac:chgData name="LEUNG Nicole" userId="8ed04819-1a1c-42ab-ae09-44d42575f3a6" providerId="ADAL" clId="{46AED7F8-18BE-4C7E-B9AC-F4C2CA2D1D79}" dt="2023-03-23T09:21:04.221" v="2661" actId="478"/>
-          <ac:picMkLst>
-            <pc:docMk/>
-            <pc:sldMk cId="1455654293" sldId="295"/>
-            <ac:picMk id="8" creationId="{B6EDF51D-501E-455D-BA67-1A3BD08EB015}"/>
-          </ac:picMkLst>
-        </pc:picChg>
-        <pc:picChg chg="add mod">
-          <ac:chgData name="LEUNG Nicole" userId="8ed04819-1a1c-42ab-ae09-44d42575f3a6" providerId="ADAL" clId="{46AED7F8-18BE-4C7E-B9AC-F4C2CA2D1D79}" dt="2023-03-23T09:21:07.708" v="2663" actId="1076"/>
-          <ac:picMkLst>
-            <pc:docMk/>
-            <pc:sldMk cId="1455654293" sldId="295"/>
-            <ac:picMk id="9" creationId="{59561249-32BC-4A5A-A93E-D9831124BC4C}"/>
-          </ac:picMkLst>
-        </pc:picChg>
-      </pc:sldChg>
-      <pc:sldChg chg="addSp delSp modSp mod">
-        <pc:chgData name="LEUNG Nicole" userId="8ed04819-1a1c-42ab-ae09-44d42575f3a6" providerId="ADAL" clId="{46AED7F8-18BE-4C7E-B9AC-F4C2CA2D1D79}" dt="2023-03-23T09:21:32.314" v="2669" actId="1076"/>
-        <pc:sldMkLst>
-          <pc:docMk/>
-          <pc:sldMk cId="3145441901" sldId="296"/>
-        </pc:sldMkLst>
-        <pc:picChg chg="del">
-          <ac:chgData name="LEUNG Nicole" userId="8ed04819-1a1c-42ab-ae09-44d42575f3a6" providerId="ADAL" clId="{46AED7F8-18BE-4C7E-B9AC-F4C2CA2D1D79}" dt="2023-03-23T09:21:21.182" v="2664" actId="478"/>
-          <ac:picMkLst>
-            <pc:docMk/>
-            <pc:sldMk cId="3145441901" sldId="296"/>
-            <ac:picMk id="5" creationId="{A1C26CA2-0287-45F1-99A4-5AA5EEC4DC5A}"/>
-          </ac:picMkLst>
-        </pc:picChg>
-        <pc:picChg chg="add mod">
-          <ac:chgData name="LEUNG Nicole" userId="8ed04819-1a1c-42ab-ae09-44d42575f3a6" providerId="ADAL" clId="{46AED7F8-18BE-4C7E-B9AC-F4C2CA2D1D79}" dt="2023-03-23T09:21:24.566" v="2666" actId="1076"/>
-          <ac:picMkLst>
-            <pc:docMk/>
-            <pc:sldMk cId="3145441901" sldId="296"/>
-            <ac:picMk id="6" creationId="{8DD6FAF5-24B3-48E9-B58E-5B6723FED0B6}"/>
-          </ac:picMkLst>
-        </pc:picChg>
-        <pc:picChg chg="del">
-          <ac:chgData name="LEUNG Nicole" userId="8ed04819-1a1c-42ab-ae09-44d42575f3a6" providerId="ADAL" clId="{46AED7F8-18BE-4C7E-B9AC-F4C2CA2D1D79}" dt="2023-03-23T09:21:28.954" v="2667" actId="478"/>
-          <ac:picMkLst>
-            <pc:docMk/>
-            <pc:sldMk cId="3145441901" sldId="296"/>
-            <ac:picMk id="7" creationId="{3E4D60EE-3F1E-45A7-9F75-077CF313EA91}"/>
-          </ac:picMkLst>
-        </pc:picChg>
-        <pc:picChg chg="add mod">
-          <ac:chgData name="LEUNG Nicole" userId="8ed04819-1a1c-42ab-ae09-44d42575f3a6" providerId="ADAL" clId="{46AED7F8-18BE-4C7E-B9AC-F4C2CA2D1D79}" dt="2023-03-23T09:21:32.314" v="2669" actId="1076"/>
-          <ac:picMkLst>
-            <pc:docMk/>
-            <pc:sldMk cId="3145441901" sldId="296"/>
-            <ac:picMk id="9" creationId="{5C3542E3-F7B7-4984-A6F2-790813568661}"/>
-          </ac:picMkLst>
-        </pc:picChg>
-      </pc:sldChg>
-      <pc:sldChg chg="addSp delSp modSp mod">
-        <pc:chgData name="LEUNG Nicole" userId="8ed04819-1a1c-42ab-ae09-44d42575f3a6" providerId="ADAL" clId="{46AED7F8-18BE-4C7E-B9AC-F4C2CA2D1D79}" dt="2023-03-23T09:21:57.090" v="2676" actId="1076"/>
-        <pc:sldMkLst>
-          <pc:docMk/>
-          <pc:sldMk cId="851749145" sldId="297"/>
-        </pc:sldMkLst>
-        <pc:picChg chg="del">
-          <ac:chgData name="LEUNG Nicole" userId="8ed04819-1a1c-42ab-ae09-44d42575f3a6" providerId="ADAL" clId="{46AED7F8-18BE-4C7E-B9AC-F4C2CA2D1D79}" dt="2023-03-23T09:21:46.166" v="2670" actId="478"/>
-          <ac:picMkLst>
-            <pc:docMk/>
-            <pc:sldMk cId="851749145" sldId="297"/>
-            <ac:picMk id="5" creationId="{6D311F15-EAB3-450C-B9CD-D91F16765136}"/>
-          </ac:picMkLst>
-        </pc:picChg>
-        <pc:picChg chg="del mod">
-          <ac:chgData name="LEUNG Nicole" userId="8ed04819-1a1c-42ab-ae09-44d42575f3a6" providerId="ADAL" clId="{46AED7F8-18BE-4C7E-B9AC-F4C2CA2D1D79}" dt="2023-03-23T09:21:53.051" v="2673" actId="478"/>
-          <ac:picMkLst>
-            <pc:docMk/>
-            <pc:sldMk cId="851749145" sldId="297"/>
-            <ac:picMk id="6" creationId="{B95EBAE5-4566-400E-8D78-C5A7247771AC}"/>
-          </ac:picMkLst>
-        </pc:picChg>
-        <pc:picChg chg="add mod">
-          <ac:chgData name="LEUNG Nicole" userId="8ed04819-1a1c-42ab-ae09-44d42575f3a6" providerId="ADAL" clId="{46AED7F8-18BE-4C7E-B9AC-F4C2CA2D1D79}" dt="2023-03-23T09:21:49.185" v="2672" actId="1076"/>
-          <ac:picMkLst>
-            <pc:docMk/>
-            <pc:sldMk cId="851749145" sldId="297"/>
-            <ac:picMk id="7" creationId="{3E3F3997-FDD7-4E02-ADC7-CECA46E73028}"/>
-          </ac:picMkLst>
-        </pc:picChg>
-        <pc:picChg chg="add mod">
-          <ac:chgData name="LEUNG Nicole" userId="8ed04819-1a1c-42ab-ae09-44d42575f3a6" providerId="ADAL" clId="{46AED7F8-18BE-4C7E-B9AC-F4C2CA2D1D79}" dt="2023-03-23T09:21:57.090" v="2676" actId="1076"/>
-          <ac:picMkLst>
-            <pc:docMk/>
-            <pc:sldMk cId="851749145" sldId="297"/>
-            <ac:picMk id="9" creationId="{BAE76938-5887-4499-8A0A-4E9D29CFCE24}"/>
-          </ac:picMkLst>
-        </pc:picChg>
-      </pc:sldChg>
-      <pc:sldChg chg="delSp add setBg delDesignElem">
-        <pc:chgData name="LEUNG Nicole" userId="8ed04819-1a1c-42ab-ae09-44d42575f3a6" providerId="ADAL" clId="{46AED7F8-18BE-4C7E-B9AC-F4C2CA2D1D79}" dt="2023-03-22T07:07:44.961" v="2213"/>
-        <pc:sldMkLst>
-          <pc:docMk/>
-          <pc:sldMk cId="1524054791" sldId="299"/>
-        </pc:sldMkLst>
-        <pc:spChg chg="del">
-          <ac:chgData name="LEUNG Nicole" userId="8ed04819-1a1c-42ab-ae09-44d42575f3a6" providerId="ADAL" clId="{46AED7F8-18BE-4C7E-B9AC-F4C2CA2D1D79}" dt="2023-03-22T07:07:44.961" v="2213"/>
-          <ac:spMkLst>
-            <pc:docMk/>
-            <pc:sldMk cId="1524054791" sldId="299"/>
-            <ac:spMk id="58" creationId="{42D91A80-424C-43FF-B36B-58B851DC5EB1}"/>
-          </ac:spMkLst>
-        </pc:spChg>
-        <pc:spChg chg="del">
-          <ac:chgData name="LEUNG Nicole" userId="8ed04819-1a1c-42ab-ae09-44d42575f3a6" providerId="ADAL" clId="{46AED7F8-18BE-4C7E-B9AC-F4C2CA2D1D79}" dt="2023-03-22T07:07:44.961" v="2213"/>
-          <ac:spMkLst>
-            <pc:docMk/>
-            <pc:sldMk cId="1524054791" sldId="299"/>
-            <ac:spMk id="59" creationId="{99413ED5-9ED4-4772-BCE4-2BCAE6B12E35}"/>
-          </ac:spMkLst>
-        </pc:spChg>
-        <pc:spChg chg="del">
-          <ac:chgData name="LEUNG Nicole" userId="8ed04819-1a1c-42ab-ae09-44d42575f3a6" providerId="ADAL" clId="{46AED7F8-18BE-4C7E-B9AC-F4C2CA2D1D79}" dt="2023-03-22T07:07:44.961" v="2213"/>
-          <ac:spMkLst>
-            <pc:docMk/>
-            <pc:sldMk cId="1524054791" sldId="299"/>
-            <ac:spMk id="60" creationId="{04357C93-F0CB-4A1C-8F77-4E9063789819}"/>
-          </ac:spMkLst>
-        </pc:spChg>
-        <pc:spChg chg="del">
-          <ac:chgData name="LEUNG Nicole" userId="8ed04819-1a1c-42ab-ae09-44d42575f3a6" providerId="ADAL" clId="{46AED7F8-18BE-4C7E-B9AC-F4C2CA2D1D79}" dt="2023-03-22T07:07:44.961" v="2213"/>
-          <ac:spMkLst>
-            <pc:docMk/>
-            <pc:sldMk cId="1524054791" sldId="299"/>
-            <ac:spMk id="61" creationId="{90F533E9-6690-41A8-A372-4C6C622D028D}"/>
-          </ac:spMkLst>
-        </pc:spChg>
-      </pc:sldChg>
-      <pc:sldChg chg="addSp delSp modSp del mod setBg">
-        <pc:chgData name="LEUNG Nicole" userId="8ed04819-1a1c-42ab-ae09-44d42575f3a6" providerId="ADAL" clId="{46AED7F8-18BE-4C7E-B9AC-F4C2CA2D1D79}" dt="2023-03-22T07:07:39.550" v="2210" actId="2696"/>
-        <pc:sldMkLst>
-          <pc:docMk/>
-          <pc:sldMk cId="2796572706" sldId="299"/>
-        </pc:sldMkLst>
-        <pc:spChg chg="mod">
-          <ac:chgData name="LEUNG Nicole" userId="8ed04819-1a1c-42ab-ae09-44d42575f3a6" providerId="ADAL" clId="{46AED7F8-18BE-4C7E-B9AC-F4C2CA2D1D79}" dt="2023-03-22T05:28:36.537" v="1611" actId="26606"/>
-          <ac:spMkLst>
-            <pc:docMk/>
-            <pc:sldMk cId="2796572706" sldId="299"/>
-            <ac:spMk id="2" creationId="{EC523B02-5F95-4633-8AAA-EFDF6751F9AC}"/>
-          </ac:spMkLst>
-        </pc:spChg>
-        <pc:spChg chg="mod ord">
-          <ac:chgData name="LEUNG Nicole" userId="8ed04819-1a1c-42ab-ae09-44d42575f3a6" providerId="ADAL" clId="{46AED7F8-18BE-4C7E-B9AC-F4C2CA2D1D79}" dt="2023-03-22T05:29:07.235" v="1621" actId="1076"/>
-          <ac:spMkLst>
-            <pc:docMk/>
-            <pc:sldMk cId="2796572706" sldId="299"/>
-            <ac:spMk id="3" creationId="{C4E4A81A-FF7F-43AE-905F-910C1DE44062}"/>
-          </ac:spMkLst>
-        </pc:spChg>
-        <pc:spChg chg="add del">
-          <ac:chgData name="LEUNG Nicole" userId="8ed04819-1a1c-42ab-ae09-44d42575f3a6" providerId="ADAL" clId="{46AED7F8-18BE-4C7E-B9AC-F4C2CA2D1D79}" dt="2023-03-22T05:28:27.329" v="1596" actId="26606"/>
-          <ac:spMkLst>
-            <pc:docMk/>
-            <pc:sldMk cId="2796572706" sldId="299"/>
-            <ac:spMk id="15" creationId="{42D91A80-424C-43FF-B36B-58B851DC5EB1}"/>
-          </ac:spMkLst>
-        </pc:spChg>
-        <pc:spChg chg="add del">
-          <ac:chgData name="LEUNG Nicole" userId="8ed04819-1a1c-42ab-ae09-44d42575f3a6" providerId="ADAL" clId="{46AED7F8-18BE-4C7E-B9AC-F4C2CA2D1D79}" dt="2023-03-22T05:28:27.329" v="1596" actId="26606"/>
-          <ac:spMkLst>
-            <pc:docMk/>
-            <pc:sldMk cId="2796572706" sldId="299"/>
-            <ac:spMk id="17" creationId="{99413ED5-9ED4-4772-BCE4-2BCAE6B12E35}"/>
-          </ac:spMkLst>
-        </pc:spChg>
-        <pc:spChg chg="add del">
-          <ac:chgData name="LEUNG Nicole" userId="8ed04819-1a1c-42ab-ae09-44d42575f3a6" providerId="ADAL" clId="{46AED7F8-18BE-4C7E-B9AC-F4C2CA2D1D79}" dt="2023-03-22T05:28:27.329" v="1596" actId="26606"/>
-          <ac:spMkLst>
-            <pc:docMk/>
-            <pc:sldMk cId="2796572706" sldId="299"/>
-            <ac:spMk id="19" creationId="{04357C93-F0CB-4A1C-8F77-4E9063789819}"/>
-          </ac:spMkLst>
-        </pc:spChg>
-        <pc:spChg chg="add del">
-          <ac:chgData name="LEUNG Nicole" userId="8ed04819-1a1c-42ab-ae09-44d42575f3a6" providerId="ADAL" clId="{46AED7F8-18BE-4C7E-B9AC-F4C2CA2D1D79}" dt="2023-03-22T05:28:27.329" v="1596" actId="26606"/>
-          <ac:spMkLst>
-            <pc:docMk/>
-            <pc:sldMk cId="2796572706" sldId="299"/>
-            <ac:spMk id="21" creationId="{90F533E9-6690-41A8-A372-4C6C622D028D}"/>
-          </ac:spMkLst>
-        </pc:spChg>
-        <pc:spChg chg="add del">
-          <ac:chgData name="LEUNG Nicole" userId="8ed04819-1a1c-42ab-ae09-44d42575f3a6" providerId="ADAL" clId="{46AED7F8-18BE-4C7E-B9AC-F4C2CA2D1D79}" dt="2023-03-22T05:28:28.196" v="1598" actId="26606"/>
-          <ac:spMkLst>
-            <pc:docMk/>
-            <pc:sldMk cId="2796572706" sldId="299"/>
-            <ac:spMk id="23" creationId="{0855A890-B60B-4670-9DC2-69DC05015AB3}"/>
-          </ac:spMkLst>
-        </pc:spChg>
-        <pc:spChg chg="add del">
-          <ac:chgData name="LEUNG Nicole" userId="8ed04819-1a1c-42ab-ae09-44d42575f3a6" providerId="ADAL" clId="{46AED7F8-18BE-4C7E-B9AC-F4C2CA2D1D79}" dt="2023-03-22T05:28:28.196" v="1598" actId="26606"/>
-          <ac:spMkLst>
-            <pc:docMk/>
-            <pc:sldMk cId="2796572706" sldId="299"/>
-            <ac:spMk id="24" creationId="{90F533E9-6690-41A8-A372-4C6C622D028D}"/>
-          </ac:spMkLst>
-        </pc:spChg>
-        <pc:spChg chg="add del">
-          <ac:chgData name="LEUNG Nicole" userId="8ed04819-1a1c-42ab-ae09-44d42575f3a6" providerId="ADAL" clId="{46AED7F8-18BE-4C7E-B9AC-F4C2CA2D1D79}" dt="2023-03-22T05:28:28.196" v="1598" actId="26606"/>
-          <ac:spMkLst>
-            <pc:docMk/>
-            <pc:sldMk cId="2796572706" sldId="299"/>
-            <ac:spMk id="25" creationId="{99413ED5-9ED4-4772-BCE4-2BCAE6B12E35}"/>
-          </ac:spMkLst>
-        </pc:spChg>
-        <pc:spChg chg="add del">
-          <ac:chgData name="LEUNG Nicole" userId="8ed04819-1a1c-42ab-ae09-44d42575f3a6" providerId="ADAL" clId="{46AED7F8-18BE-4C7E-B9AC-F4C2CA2D1D79}" dt="2023-03-22T05:28:28.196" v="1598" actId="26606"/>
-          <ac:spMkLst>
-            <pc:docMk/>
-            <pc:sldMk cId="2796572706" sldId="299"/>
-            <ac:spMk id="26" creationId="{04357C93-F0CB-4A1C-8F77-4E9063789819}"/>
-          </ac:spMkLst>
-        </pc:spChg>
-        <pc:spChg chg="add del">
-          <ac:chgData name="LEUNG Nicole" userId="8ed04819-1a1c-42ab-ae09-44d42575f3a6" providerId="ADAL" clId="{46AED7F8-18BE-4C7E-B9AC-F4C2CA2D1D79}" dt="2023-03-22T05:28:30.427" v="1600" actId="26606"/>
-          <ac:spMkLst>
-            <pc:docMk/>
-            <pc:sldMk cId="2796572706" sldId="299"/>
-            <ac:spMk id="28" creationId="{A3C210E6-A35A-4F68-8D60-801A019C75B8}"/>
-          </ac:spMkLst>
-        </pc:spChg>
-        <pc:spChg chg="add del">
-          <ac:chgData name="LEUNG Nicole" userId="8ed04819-1a1c-42ab-ae09-44d42575f3a6" providerId="ADAL" clId="{46AED7F8-18BE-4C7E-B9AC-F4C2CA2D1D79}" dt="2023-03-22T05:28:30.427" v="1600" actId="26606"/>
-          <ac:spMkLst>
-            <pc:docMk/>
-            <pc:sldMk cId="2796572706" sldId="299"/>
-            <ac:spMk id="29" creationId="{AC0D06B0-F19C-459E-B221-A34B506FB5E3}"/>
-          </ac:spMkLst>
-        </pc:spChg>
-        <pc:spChg chg="add del">
-          <ac:chgData name="LEUNG Nicole" userId="8ed04819-1a1c-42ab-ae09-44d42575f3a6" providerId="ADAL" clId="{46AED7F8-18BE-4C7E-B9AC-F4C2CA2D1D79}" dt="2023-03-22T05:28:30.427" v="1600" actId="26606"/>
-          <ac:spMkLst>
-            <pc:docMk/>
-            <pc:sldMk cId="2796572706" sldId="299"/>
-            <ac:spMk id="30" creationId="{345B26DA-1C6B-4C66-81C9-9C1877FC2DB1}"/>
-          </ac:spMkLst>
-        </pc:spChg>
-        <pc:spChg chg="add del">
-          <ac:chgData name="LEUNG Nicole" userId="8ed04819-1a1c-42ab-ae09-44d42575f3a6" providerId="ADAL" clId="{46AED7F8-18BE-4C7E-B9AC-F4C2CA2D1D79}" dt="2023-03-22T05:28:30.427" v="1600" actId="26606"/>
-          <ac:spMkLst>
-            <pc:docMk/>
-            <pc:sldMk cId="2796572706" sldId="299"/>
-            <ac:spMk id="31" creationId="{98DE6C44-43F8-4DE4-AB81-66853FFEA09A}"/>
-          </ac:spMkLst>
-        </pc:spChg>
-        <pc:spChg chg="add del">
-          <ac:chgData name="LEUNG Nicole" userId="8ed04819-1a1c-42ab-ae09-44d42575f3a6" providerId="ADAL" clId="{46AED7F8-18BE-4C7E-B9AC-F4C2CA2D1D79}" dt="2023-03-22T05:28:30.427" v="1600" actId="26606"/>
-          <ac:spMkLst>
-            <pc:docMk/>
-            <pc:sldMk cId="2796572706" sldId="299"/>
-            <ac:spMk id="32" creationId="{2409529B-9B56-4F10-BE4D-F934DB89E57E}"/>
-          </ac:spMkLst>
-        </pc:spChg>
-        <pc:spChg chg="add del">
-          <ac:chgData name="LEUNG Nicole" userId="8ed04819-1a1c-42ab-ae09-44d42575f3a6" providerId="ADAL" clId="{46AED7F8-18BE-4C7E-B9AC-F4C2CA2D1D79}" dt="2023-03-22T05:28:31.439" v="1602" actId="26606"/>
-          <ac:spMkLst>
-            <pc:docMk/>
-            <pc:sldMk cId="2796572706" sldId="299"/>
-            <ac:spMk id="34" creationId="{0855A890-B60B-4670-9DC2-69DC05015AB3}"/>
-          </ac:spMkLst>
-        </pc:spChg>
-        <pc:spChg chg="add del">
-          <ac:chgData name="LEUNG Nicole" userId="8ed04819-1a1c-42ab-ae09-44d42575f3a6" providerId="ADAL" clId="{46AED7F8-18BE-4C7E-B9AC-F4C2CA2D1D79}" dt="2023-03-22T05:28:31.439" v="1602" actId="26606"/>
-          <ac:spMkLst>
-            <pc:docMk/>
-            <pc:sldMk cId="2796572706" sldId="299"/>
-            <ac:spMk id="35" creationId="{90F533E9-6690-41A8-A372-4C6C622D028D}"/>
-          </ac:spMkLst>
-        </pc:spChg>
-        <pc:spChg chg="add del">
-          <ac:chgData name="LEUNG Nicole" userId="8ed04819-1a1c-42ab-ae09-44d42575f3a6" providerId="ADAL" clId="{46AED7F8-18BE-4C7E-B9AC-F4C2CA2D1D79}" dt="2023-03-22T05:28:31.439" v="1602" actId="26606"/>
-          <ac:spMkLst>
-            <pc:docMk/>
-            <pc:sldMk cId="2796572706" sldId="299"/>
-            <ac:spMk id="36" creationId="{99413ED5-9ED4-4772-BCE4-2BCAE6B12E35}"/>
-          </ac:spMkLst>
-        </pc:spChg>
-        <pc:spChg chg="add del">
-          <ac:chgData name="LEUNG Nicole" userId="8ed04819-1a1c-42ab-ae09-44d42575f3a6" providerId="ADAL" clId="{46AED7F8-18BE-4C7E-B9AC-F4C2CA2D1D79}" dt="2023-03-22T05:28:31.439" v="1602" actId="26606"/>
-          <ac:spMkLst>
-            <pc:docMk/>
-            <pc:sldMk cId="2796572706" sldId="299"/>
-            <ac:spMk id="37" creationId="{04357C93-F0CB-4A1C-8F77-4E9063789819}"/>
-          </ac:spMkLst>
-        </pc:spChg>
-        <pc:spChg chg="add del">
-          <ac:chgData name="LEUNG Nicole" userId="8ed04819-1a1c-42ab-ae09-44d42575f3a6" providerId="ADAL" clId="{46AED7F8-18BE-4C7E-B9AC-F4C2CA2D1D79}" dt="2023-03-22T05:28:33.168" v="1604" actId="26606"/>
-          <ac:spMkLst>
-            <pc:docMk/>
-            <pc:sldMk cId="2796572706" sldId="299"/>
-            <ac:spMk id="39" creationId="{6EAFBB7C-BA65-4034-8F52-32E6C514E7FA}"/>
-          </ac:spMkLst>
-        </pc:spChg>
-        <pc:spChg chg="add del">
-          <ac:chgData name="LEUNG Nicole" userId="8ed04819-1a1c-42ab-ae09-44d42575f3a6" providerId="ADAL" clId="{46AED7F8-18BE-4C7E-B9AC-F4C2CA2D1D79}" dt="2023-03-22T05:28:33.168" v="1604" actId="26606"/>
-          <ac:spMkLst>
-            <pc:docMk/>
-            <pc:sldMk cId="2796572706" sldId="299"/>
-            <ac:spMk id="40" creationId="{B9D56ACA-1E9F-4685-8853-D3A4777AC060}"/>
-          </ac:spMkLst>
-        </pc:spChg>
-        <pc:spChg chg="add del">
-          <ac:chgData name="LEUNG Nicole" userId="8ed04819-1a1c-42ab-ae09-44d42575f3a6" providerId="ADAL" clId="{46AED7F8-18BE-4C7E-B9AC-F4C2CA2D1D79}" dt="2023-03-22T05:28:34.130" v="1606" actId="26606"/>
-          <ac:spMkLst>
-            <pc:docMk/>
-            <pc:sldMk cId="2796572706" sldId="299"/>
-            <ac:spMk id="42" creationId="{D898B8EB-E53C-4E72-9817-B4BFCAD73600}"/>
-          </ac:spMkLst>
-        </pc:spChg>
-        <pc:spChg chg="add del">
-          <ac:chgData name="LEUNG Nicole" userId="8ed04819-1a1c-42ab-ae09-44d42575f3a6" providerId="ADAL" clId="{46AED7F8-18BE-4C7E-B9AC-F4C2CA2D1D79}" dt="2023-03-22T05:28:34.130" v="1606" actId="26606"/>
-          <ac:spMkLst>
-            <pc:docMk/>
-            <pc:sldMk cId="2796572706" sldId="299"/>
-            <ac:spMk id="43" creationId="{4E130362-2F35-4AB7-9EA5-DBC0F771A58D}"/>
-          </ac:spMkLst>
-        </pc:spChg>
-        <pc:spChg chg="add del">
-          <ac:chgData name="LEUNG Nicole" userId="8ed04819-1a1c-42ab-ae09-44d42575f3a6" providerId="ADAL" clId="{46AED7F8-18BE-4C7E-B9AC-F4C2CA2D1D79}" dt="2023-03-22T05:28:34.130" v="1606" actId="26606"/>
-          <ac:spMkLst>
-            <pc:docMk/>
-            <pc:sldMk cId="2796572706" sldId="299"/>
-            <ac:spMk id="44" creationId="{56BE988C-7A5B-41EC-A46C-AEA93D8D32FD}"/>
-          </ac:spMkLst>
-        </pc:spChg>
-        <pc:spChg chg="add del">
-          <ac:chgData name="LEUNG Nicole" userId="8ed04819-1a1c-42ab-ae09-44d42575f3a6" providerId="ADAL" clId="{46AED7F8-18BE-4C7E-B9AC-F4C2CA2D1D79}" dt="2023-03-22T05:28:34.130" v="1606" actId="26606"/>
-          <ac:spMkLst>
-            <pc:docMk/>
-            <pc:sldMk cId="2796572706" sldId="299"/>
-            <ac:spMk id="45" creationId="{E3CB1EC0-40A9-4D5E-B7E2-6E3423CE28B2}"/>
-          </ac:spMkLst>
-        </pc:spChg>
-        <pc:spChg chg="add del">
-          <ac:chgData name="LEUNG Nicole" userId="8ed04819-1a1c-42ab-ae09-44d42575f3a6" providerId="ADAL" clId="{46AED7F8-18BE-4C7E-B9AC-F4C2CA2D1D79}" dt="2023-03-22T05:28:34.130" v="1606" actId="26606"/>
-          <ac:spMkLst>
-            <pc:docMk/>
-            <pc:sldMk cId="2796572706" sldId="299"/>
-            <ac:spMk id="46" creationId="{DCBE52EF-2889-423F-947C-0E44A760D696}"/>
-          </ac:spMkLst>
-        </pc:spChg>
-        <pc:spChg chg="add del">
-          <ac:chgData name="LEUNG Nicole" userId="8ed04819-1a1c-42ab-ae09-44d42575f3a6" providerId="ADAL" clId="{46AED7F8-18BE-4C7E-B9AC-F4C2CA2D1D79}" dt="2023-03-22T05:28:35.741" v="1608" actId="26606"/>
-          <ac:spMkLst>
-            <pc:docMk/>
-            <pc:sldMk cId="2796572706" sldId="299"/>
-            <ac:spMk id="48" creationId="{B4059D9B-2E55-47FE-A188-0F9BD734E0A0}"/>
-          </ac:spMkLst>
-        </pc:spChg>
-        <pc:spChg chg="add del">
-          <ac:chgData name="LEUNG Nicole" userId="8ed04819-1a1c-42ab-ae09-44d42575f3a6" providerId="ADAL" clId="{46AED7F8-18BE-4C7E-B9AC-F4C2CA2D1D79}" dt="2023-03-22T05:28:36.528" v="1610" actId="26606"/>
-          <ac:spMkLst>
-            <pc:docMk/>
-            <pc:sldMk cId="2796572706" sldId="299"/>
-            <ac:spMk id="52" creationId="{3611733F-E5BD-49F1-953E-8029C6596AF2}"/>
-          </ac:spMkLst>
-        </pc:spChg>
-        <pc:spChg chg="add del">
-          <ac:chgData name="LEUNG Nicole" userId="8ed04819-1a1c-42ab-ae09-44d42575f3a6" providerId="ADAL" clId="{46AED7F8-18BE-4C7E-B9AC-F4C2CA2D1D79}" dt="2023-03-22T05:28:36.528" v="1610" actId="26606"/>
-          <ac:spMkLst>
-            <pc:docMk/>
-            <pc:sldMk cId="2796572706" sldId="299"/>
-            <ac:spMk id="53" creationId="{6EA0003C-06B7-4E3A-9E9A-2DA8CA829F71}"/>
-          </ac:spMkLst>
-        </pc:spChg>
-        <pc:spChg chg="add">
-          <ac:chgData name="LEUNG Nicole" userId="8ed04819-1a1c-42ab-ae09-44d42575f3a6" providerId="ADAL" clId="{46AED7F8-18BE-4C7E-B9AC-F4C2CA2D1D79}" dt="2023-03-22T05:28:36.537" v="1611" actId="26606"/>
-          <ac:spMkLst>
-            <pc:docMk/>
-            <pc:sldMk cId="2796572706" sldId="299"/>
-            <ac:spMk id="58" creationId="{42D91A80-424C-43FF-B36B-58B851DC5EB1}"/>
-          </ac:spMkLst>
-        </pc:spChg>
-        <pc:spChg chg="add">
-          <ac:chgData name="LEUNG Nicole" userId="8ed04819-1a1c-42ab-ae09-44d42575f3a6" providerId="ADAL" clId="{46AED7F8-18BE-4C7E-B9AC-F4C2CA2D1D79}" dt="2023-03-22T05:28:36.537" v="1611" actId="26606"/>
-          <ac:spMkLst>
-            <pc:docMk/>
-            <pc:sldMk cId="2796572706" sldId="299"/>
-            <ac:spMk id="59" creationId="{99413ED5-9ED4-4772-BCE4-2BCAE6B12E35}"/>
-          </ac:spMkLst>
-        </pc:spChg>
-        <pc:spChg chg="add">
-          <ac:chgData name="LEUNG Nicole" userId="8ed04819-1a1c-42ab-ae09-44d42575f3a6" providerId="ADAL" clId="{46AED7F8-18BE-4C7E-B9AC-F4C2CA2D1D79}" dt="2023-03-22T05:28:36.537" v="1611" actId="26606"/>
-          <ac:spMkLst>
-            <pc:docMk/>
-            <pc:sldMk cId="2796572706" sldId="299"/>
-            <ac:spMk id="60" creationId="{04357C93-F0CB-4A1C-8F77-4E9063789819}"/>
-          </ac:spMkLst>
-        </pc:spChg>
-        <pc:spChg chg="add">
-          <ac:chgData name="LEUNG Nicole" userId="8ed04819-1a1c-42ab-ae09-44d42575f3a6" providerId="ADAL" clId="{46AED7F8-18BE-4C7E-B9AC-F4C2CA2D1D79}" dt="2023-03-22T05:28:36.537" v="1611" actId="26606"/>
-          <ac:spMkLst>
-            <pc:docMk/>
-            <pc:sldMk cId="2796572706" sldId="299"/>
-            <ac:spMk id="61" creationId="{90F533E9-6690-41A8-A372-4C6C622D028D}"/>
-          </ac:spMkLst>
-        </pc:spChg>
-        <pc:grpChg chg="add del">
-          <ac:chgData name="LEUNG Nicole" userId="8ed04819-1a1c-42ab-ae09-44d42575f3a6" providerId="ADAL" clId="{46AED7F8-18BE-4C7E-B9AC-F4C2CA2D1D79}" dt="2023-03-22T05:28:35.741" v="1608" actId="26606"/>
-          <ac:grpSpMkLst>
-            <pc:docMk/>
-            <pc:sldMk cId="2796572706" sldId="299"/>
-            <ac:grpSpMk id="49" creationId="{F938B951-7EFC-40A2-B198-E73D39DFB3FC}"/>
-          </ac:grpSpMkLst>
-        </pc:grpChg>
-        <pc:grpChg chg="add del">
-          <ac:chgData name="LEUNG Nicole" userId="8ed04819-1a1c-42ab-ae09-44d42575f3a6" providerId="ADAL" clId="{46AED7F8-18BE-4C7E-B9AC-F4C2CA2D1D79}" dt="2023-03-22T05:28:36.528" v="1610" actId="26606"/>
-          <ac:grpSpMkLst>
-            <pc:docMk/>
-            <pc:sldMk cId="2796572706" sldId="299"/>
-            <ac:grpSpMk id="54" creationId="{8A01F592-3A3D-4FF0-BA89-6141201456E8}"/>
-          </ac:grpSpMkLst>
-        </pc:grpChg>
-        <pc:picChg chg="mod ord">
-          <ac:chgData name="LEUNG Nicole" userId="8ed04819-1a1c-42ab-ae09-44d42575f3a6" providerId="ADAL" clId="{46AED7F8-18BE-4C7E-B9AC-F4C2CA2D1D79}" dt="2023-03-22T05:28:36.537" v="1611" actId="26606"/>
-          <ac:picMkLst>
-            <pc:docMk/>
-            <pc:sldMk cId="2796572706" sldId="299"/>
-            <ac:picMk id="5" creationId="{79A4E094-2C35-46E0-805B-1975E62169F8}"/>
-          </ac:picMkLst>
-        </pc:picChg>
-        <pc:picChg chg="add mod ord">
-          <ac:chgData name="LEUNG Nicole" userId="8ed04819-1a1c-42ab-ae09-44d42575f3a6" providerId="ADAL" clId="{46AED7F8-18BE-4C7E-B9AC-F4C2CA2D1D79}" dt="2023-03-22T05:28:36.537" v="1611" actId="26606"/>
-          <ac:picMkLst>
-            <pc:docMk/>
-            <pc:sldMk cId="2796572706" sldId="299"/>
-            <ac:picMk id="6" creationId="{3065AC14-10BD-401A-A1D5-4D20279A4AD0}"/>
-          </ac:picMkLst>
-        </pc:picChg>
-        <pc:picChg chg="add mod ord">
-          <ac:chgData name="LEUNG Nicole" userId="8ed04819-1a1c-42ab-ae09-44d42575f3a6" providerId="ADAL" clId="{46AED7F8-18BE-4C7E-B9AC-F4C2CA2D1D79}" dt="2023-03-22T05:28:57.785" v="1614" actId="14100"/>
-          <ac:picMkLst>
-            <pc:docMk/>
-            <pc:sldMk cId="2796572706" sldId="299"/>
-            <ac:picMk id="8" creationId="{BA95CE92-D262-4898-87DA-51FC2D84BC6F}"/>
-          </ac:picMkLst>
-        </pc:picChg>
-        <pc:picChg chg="add mod ord">
-          <ac:chgData name="LEUNG Nicole" userId="8ed04819-1a1c-42ab-ae09-44d42575f3a6" providerId="ADAL" clId="{46AED7F8-18BE-4C7E-B9AC-F4C2CA2D1D79}" dt="2023-03-22T05:28:36.537" v="1611" actId="26606"/>
-          <ac:picMkLst>
-            <pc:docMk/>
-            <pc:sldMk cId="2796572706" sldId="299"/>
-            <ac:picMk id="10" creationId="{0E044CB9-4522-40F5-8767-3697A9C38D62}"/>
-          </ac:picMkLst>
-        </pc:picChg>
-      </pc:sldChg>
-      <pc:sldChg chg="modSp mod">
-        <pc:chgData name="LEUNG Nicole" userId="8ed04819-1a1c-42ab-ae09-44d42575f3a6" providerId="ADAL" clId="{46AED7F8-18BE-4C7E-B9AC-F4C2CA2D1D79}" dt="2023-03-28T17:33:04.179" v="3439" actId="20577"/>
-        <pc:sldMkLst>
-          <pc:docMk/>
-          <pc:sldMk cId="1343742741" sldId="300"/>
-        </pc:sldMkLst>
-        <pc:spChg chg="mod">
-          <ac:chgData name="LEUNG Nicole" userId="8ed04819-1a1c-42ab-ae09-44d42575f3a6" providerId="ADAL" clId="{46AED7F8-18BE-4C7E-B9AC-F4C2CA2D1D79}" dt="2023-03-24T10:01:07.075" v="2959" actId="1076"/>
-          <ac:spMkLst>
-            <pc:docMk/>
-            <pc:sldMk cId="1343742741" sldId="300"/>
-            <ac:spMk id="2" creationId="{EC523B02-5F95-4633-8AAA-EFDF6751F9AC}"/>
-          </ac:spMkLst>
-        </pc:spChg>
-        <pc:spChg chg="mod">
-          <ac:chgData name="LEUNG Nicole" userId="8ed04819-1a1c-42ab-ae09-44d42575f3a6" providerId="ADAL" clId="{46AED7F8-18BE-4C7E-B9AC-F4C2CA2D1D79}" dt="2023-03-28T17:33:04.179" v="3439" actId="20577"/>
-          <ac:spMkLst>
-            <pc:docMk/>
-            <pc:sldMk cId="1343742741" sldId="300"/>
-            <ac:spMk id="12" creationId="{BA0395D4-DD9F-4206-88E4-0B5C7127FE91}"/>
-          </ac:spMkLst>
-        </pc:spChg>
-        <pc:picChg chg="mod">
-          <ac:chgData name="LEUNG Nicole" userId="8ed04819-1a1c-42ab-ae09-44d42575f3a6" providerId="ADAL" clId="{46AED7F8-18BE-4C7E-B9AC-F4C2CA2D1D79}" dt="2023-03-24T10:01:13.801" v="2961" actId="1076"/>
-          <ac:picMkLst>
-            <pc:docMk/>
-            <pc:sldMk cId="1343742741" sldId="300"/>
-            <ac:picMk id="17" creationId="{D29E8FA9-9AF0-4CBD-8158-733113781A20}"/>
-          </ac:picMkLst>
-        </pc:picChg>
-        <pc:picChg chg="mod">
-          <ac:chgData name="LEUNG Nicole" userId="8ed04819-1a1c-42ab-ae09-44d42575f3a6" providerId="ADAL" clId="{46AED7F8-18BE-4C7E-B9AC-F4C2CA2D1D79}" dt="2023-03-24T10:01:17.057" v="2962" actId="1076"/>
-          <ac:picMkLst>
-            <pc:docMk/>
-            <pc:sldMk cId="1343742741" sldId="300"/>
-            <ac:picMk id="20" creationId="{CF080999-89D2-4835-BC6C-4BBE3BF7EA4C}"/>
-          </ac:picMkLst>
-        </pc:picChg>
-      </pc:sldChg>
-      <pc:sldChg chg="addSp delSp modSp mod">
-        <pc:chgData name="LEUNG Nicole" userId="8ed04819-1a1c-42ab-ae09-44d42575f3a6" providerId="ADAL" clId="{46AED7F8-18BE-4C7E-B9AC-F4C2CA2D1D79}" dt="2023-03-28T17:34:21.293" v="3442" actId="1076"/>
-        <pc:sldMkLst>
-          <pc:docMk/>
-          <pc:sldMk cId="2029018428" sldId="302"/>
-        </pc:sldMkLst>
-        <pc:picChg chg="add del mod">
-          <ac:chgData name="LEUNG Nicole" userId="8ed04819-1a1c-42ab-ae09-44d42575f3a6" providerId="ADAL" clId="{46AED7F8-18BE-4C7E-B9AC-F4C2CA2D1D79}" dt="2023-03-23T09:25:59.692" v="2686" actId="478"/>
-          <ac:picMkLst>
-            <pc:docMk/>
-            <pc:sldMk cId="2029018428" sldId="302"/>
-            <ac:picMk id="5" creationId="{4161EA41-5495-4744-AD6A-D2A4B7DFE7CB}"/>
-          </ac:picMkLst>
-        </pc:picChg>
-        <pc:picChg chg="del">
-          <ac:chgData name="LEUNG Nicole" userId="8ed04819-1a1c-42ab-ae09-44d42575f3a6" providerId="ADAL" clId="{46AED7F8-18BE-4C7E-B9AC-F4C2CA2D1D79}" dt="2023-03-23T09:25:35.043" v="2680" actId="478"/>
-          <ac:picMkLst>
-            <pc:docMk/>
-            <pc:sldMk cId="2029018428" sldId="302"/>
-            <ac:picMk id="7" creationId="{A8772CB6-83AC-464C-825D-DC0E6EFAF8B0}"/>
-          </ac:picMkLst>
-        </pc:picChg>
-        <pc:picChg chg="del mod">
-          <ac:chgData name="LEUNG Nicole" userId="8ed04819-1a1c-42ab-ae09-44d42575f3a6" providerId="ADAL" clId="{46AED7F8-18BE-4C7E-B9AC-F4C2CA2D1D79}" dt="2023-03-23T09:25:28.556" v="2677" actId="478"/>
-          <ac:picMkLst>
-            <pc:docMk/>
-            <pc:sldMk cId="2029018428" sldId="302"/>
-            <ac:picMk id="8" creationId="{ABCAB96B-7833-4E92-A0B2-55C84B0EDF04}"/>
-          </ac:picMkLst>
-        </pc:picChg>
-        <pc:picChg chg="add del mod">
-          <ac:chgData name="LEUNG Nicole" userId="8ed04819-1a1c-42ab-ae09-44d42575f3a6" providerId="ADAL" clId="{46AED7F8-18BE-4C7E-B9AC-F4C2CA2D1D79}" dt="2023-03-23T09:25:53.036" v="2683" actId="478"/>
-          <ac:picMkLst>
-            <pc:docMk/>
-            <pc:sldMk cId="2029018428" sldId="302"/>
-            <ac:picMk id="9" creationId="{31E63E3A-DEBF-4C13-813B-F9EB96A9DF7C}"/>
-          </ac:picMkLst>
-        </pc:picChg>
-        <pc:picChg chg="add del mod">
-          <ac:chgData name="LEUNG Nicole" userId="8ed04819-1a1c-42ab-ae09-44d42575f3a6" providerId="ADAL" clId="{46AED7F8-18BE-4C7E-B9AC-F4C2CA2D1D79}" dt="2023-03-23T09:26:48.316" v="2695" actId="478"/>
-          <ac:picMkLst>
-            <pc:docMk/>
-            <pc:sldMk cId="2029018428" sldId="302"/>
-            <ac:picMk id="12" creationId="{510DFA2A-92E1-4576-A4DE-CAA57C94F00A}"/>
-          </ac:picMkLst>
-        </pc:picChg>
-        <pc:picChg chg="add del mod">
-          <ac:chgData name="LEUNG Nicole" userId="8ed04819-1a1c-42ab-ae09-44d42575f3a6" providerId="ADAL" clId="{46AED7F8-18BE-4C7E-B9AC-F4C2CA2D1D79}" dt="2023-03-23T09:26:53.315" v="2698" actId="478"/>
-          <ac:picMkLst>
-            <pc:docMk/>
-            <pc:sldMk cId="2029018428" sldId="302"/>
-            <ac:picMk id="14" creationId="{2F01AB5F-3BB4-453E-874B-667CA8E50CBE}"/>
-          </ac:picMkLst>
-        </pc:picChg>
-        <pc:picChg chg="add mod">
-          <ac:chgData name="LEUNG Nicole" userId="8ed04819-1a1c-42ab-ae09-44d42575f3a6" providerId="ADAL" clId="{46AED7F8-18BE-4C7E-B9AC-F4C2CA2D1D79}" dt="2023-03-28T17:34:21.293" v="3442" actId="1076"/>
-          <ac:picMkLst>
-            <pc:docMk/>
-            <pc:sldMk cId="2029018428" sldId="302"/>
-            <ac:picMk id="16" creationId="{114B15C8-2019-497A-B666-31C071882E97}"/>
-          </ac:picMkLst>
-        </pc:picChg>
-        <pc:picChg chg="add mod">
-          <ac:chgData name="LEUNG Nicole" userId="8ed04819-1a1c-42ab-ae09-44d42575f3a6" providerId="ADAL" clId="{46AED7F8-18BE-4C7E-B9AC-F4C2CA2D1D79}" dt="2023-03-28T17:34:05.180" v="3440" actId="1076"/>
-          <ac:picMkLst>
-            <pc:docMk/>
-            <pc:sldMk cId="2029018428" sldId="302"/>
-            <ac:picMk id="18" creationId="{735C8ED6-74B5-4806-8A40-81F8E51F2A12}"/>
-          </ac:picMkLst>
-        </pc:picChg>
-      </pc:sldChg>
-      <pc:sldChg chg="modSp mod">
-        <pc:chgData name="LEUNG Nicole" userId="8ed04819-1a1c-42ab-ae09-44d42575f3a6" providerId="ADAL" clId="{46AED7F8-18BE-4C7E-B9AC-F4C2CA2D1D79}" dt="2023-03-24T03:43:18.161" v="2779" actId="255"/>
-        <pc:sldMkLst>
-          <pc:docMk/>
-          <pc:sldMk cId="1724655501" sldId="303"/>
-        </pc:sldMkLst>
-        <pc:graphicFrameChg chg="modGraphic">
-          <ac:chgData name="LEUNG Nicole" userId="8ed04819-1a1c-42ab-ae09-44d42575f3a6" providerId="ADAL" clId="{46AED7F8-18BE-4C7E-B9AC-F4C2CA2D1D79}" dt="2023-03-24T03:43:18.161" v="2779" actId="255"/>
-          <ac:graphicFrameMkLst>
-            <pc:docMk/>
-            <pc:sldMk cId="1724655501" sldId="303"/>
-            <ac:graphicFrameMk id="4" creationId="{329D30CB-4423-42B7-9BF7-1D854680E175}"/>
-          </ac:graphicFrameMkLst>
-        </pc:graphicFrameChg>
-      </pc:sldChg>
-      <pc:sldChg chg="del">
-        <pc:chgData name="LEUNG Nicole" userId="8ed04819-1a1c-42ab-ae09-44d42575f3a6" providerId="ADAL" clId="{46AED7F8-18BE-4C7E-B9AC-F4C2CA2D1D79}" dt="2023-03-20T09:33:52.118" v="1" actId="47"/>
-        <pc:sldMkLst>
-          <pc:docMk/>
-          <pc:sldMk cId="834880465" sldId="305"/>
-        </pc:sldMkLst>
-      </pc:sldChg>
-      <pc:sldChg chg="del">
-        <pc:chgData name="LEUNG Nicole" userId="8ed04819-1a1c-42ab-ae09-44d42575f3a6" providerId="ADAL" clId="{46AED7F8-18BE-4C7E-B9AC-F4C2CA2D1D79}" dt="2023-03-21T02:17:40.951" v="457" actId="47"/>
-        <pc:sldMkLst>
-          <pc:docMk/>
-          <pc:sldMk cId="1660519983" sldId="306"/>
-        </pc:sldMkLst>
-      </pc:sldChg>
-      <pc:sldChg chg="modSp mod">
-        <pc:chgData name="LEUNG Nicole" userId="8ed04819-1a1c-42ab-ae09-44d42575f3a6" providerId="ADAL" clId="{46AED7F8-18BE-4C7E-B9AC-F4C2CA2D1D79}" dt="2023-03-22T07:27:11.285" v="2224" actId="1076"/>
-        <pc:sldMkLst>
-          <pc:docMk/>
-          <pc:sldMk cId="2696944007" sldId="308"/>
-        </pc:sldMkLst>
-        <pc:spChg chg="mod">
-          <ac:chgData name="LEUNG Nicole" userId="8ed04819-1a1c-42ab-ae09-44d42575f3a6" providerId="ADAL" clId="{46AED7F8-18BE-4C7E-B9AC-F4C2CA2D1D79}" dt="2023-03-22T07:10:49.832" v="2214" actId="14100"/>
-          <ac:spMkLst>
-            <pc:docMk/>
-            <pc:sldMk cId="2696944007" sldId="308"/>
-            <ac:spMk id="3" creationId="{BBFE9126-C565-4E94-82E9-A88FDB40D813}"/>
-          </ac:spMkLst>
-        </pc:spChg>
-        <pc:spChg chg="mod">
-          <ac:chgData name="LEUNG Nicole" userId="8ed04819-1a1c-42ab-ae09-44d42575f3a6" providerId="ADAL" clId="{46AED7F8-18BE-4C7E-B9AC-F4C2CA2D1D79}" dt="2023-03-22T07:27:11.285" v="2224" actId="1076"/>
-          <ac:spMkLst>
-            <pc:docMk/>
-            <pc:sldMk cId="2696944007" sldId="308"/>
-            <ac:spMk id="4" creationId="{579FCE5E-8E3A-4AC7-824D-AF7C0D0C7F6C}"/>
-          </ac:spMkLst>
-        </pc:spChg>
-      </pc:sldChg>
-      <pc:sldChg chg="modSp mod">
-        <pc:chgData name="LEUNG Nicole" userId="8ed04819-1a1c-42ab-ae09-44d42575f3a6" providerId="ADAL" clId="{46AED7F8-18BE-4C7E-B9AC-F4C2CA2D1D79}" dt="2023-03-21T03:23:35.276" v="1207" actId="14100"/>
-        <pc:sldMkLst>
-          <pc:docMk/>
-          <pc:sldMk cId="1583066299" sldId="309"/>
-        </pc:sldMkLst>
-        <pc:spChg chg="mod">
-          <ac:chgData name="LEUNG Nicole" userId="8ed04819-1a1c-42ab-ae09-44d42575f3a6" providerId="ADAL" clId="{46AED7F8-18BE-4C7E-B9AC-F4C2CA2D1D79}" dt="2023-03-21T03:23:35.276" v="1207" actId="14100"/>
-          <ac:spMkLst>
-            <pc:docMk/>
-            <pc:sldMk cId="1583066299" sldId="309"/>
-            <ac:spMk id="2" creationId="{B4E32D6D-1A3A-481F-BADE-19C45032D059}"/>
-          </ac:spMkLst>
-        </pc:spChg>
-      </pc:sldChg>
-      <pc:sldChg chg="del">
-        <pc:chgData name="LEUNG Nicole" userId="8ed04819-1a1c-42ab-ae09-44d42575f3a6" providerId="ADAL" clId="{46AED7F8-18BE-4C7E-B9AC-F4C2CA2D1D79}" dt="2023-03-22T03:46:19.641" v="1376" actId="2696"/>
-        <pc:sldMkLst>
-          <pc:docMk/>
-          <pc:sldMk cId="4036466995" sldId="310"/>
-        </pc:sldMkLst>
-      </pc:sldChg>
-      <pc:sldChg chg="modSp mod">
-        <pc:chgData name="LEUNG Nicole" userId="8ed04819-1a1c-42ab-ae09-44d42575f3a6" providerId="ADAL" clId="{46AED7F8-18BE-4C7E-B9AC-F4C2CA2D1D79}" dt="2023-03-22T02:40:46.314" v="1212" actId="20577"/>
-        <pc:sldMkLst>
-          <pc:docMk/>
-          <pc:sldMk cId="3937487968" sldId="311"/>
-        </pc:sldMkLst>
-        <pc:spChg chg="mod">
-          <ac:chgData name="LEUNG Nicole" userId="8ed04819-1a1c-42ab-ae09-44d42575f3a6" providerId="ADAL" clId="{46AED7F8-18BE-4C7E-B9AC-F4C2CA2D1D79}" dt="2023-03-22T02:40:46.314" v="1212" actId="20577"/>
-          <ac:spMkLst>
-            <pc:docMk/>
-            <pc:sldMk cId="3937487968" sldId="311"/>
-            <ac:spMk id="3" creationId="{1DC33D17-7259-4D64-AF40-41E27B5308F1}"/>
-          </ac:spMkLst>
-        </pc:spChg>
-      </pc:sldChg>
-      <pc:sldChg chg="addSp delSp modSp mod">
-        <pc:chgData name="LEUNG Nicole" userId="8ed04819-1a1c-42ab-ae09-44d42575f3a6" providerId="ADAL" clId="{46AED7F8-18BE-4C7E-B9AC-F4C2CA2D1D79}" dt="2023-03-23T09:26:36.488" v="2694" actId="1076"/>
-        <pc:sldMkLst>
-          <pc:docMk/>
-          <pc:sldMk cId="1724579227" sldId="312"/>
-        </pc:sldMkLst>
-        <pc:picChg chg="del">
-          <ac:chgData name="LEUNG Nicole" userId="8ed04819-1a1c-42ab-ae09-44d42575f3a6" providerId="ADAL" clId="{46AED7F8-18BE-4C7E-B9AC-F4C2CA2D1D79}" dt="2023-03-23T09:26:34.379" v="2692" actId="478"/>
-          <ac:picMkLst>
-            <pc:docMk/>
-            <pc:sldMk cId="1724579227" sldId="312"/>
-            <ac:picMk id="5" creationId="{52509BCC-F558-4469-A901-56EB010F716C}"/>
-          </ac:picMkLst>
-        </pc:picChg>
-        <pc:picChg chg="add mod">
-          <ac:chgData name="LEUNG Nicole" userId="8ed04819-1a1c-42ab-ae09-44d42575f3a6" providerId="ADAL" clId="{46AED7F8-18BE-4C7E-B9AC-F4C2CA2D1D79}" dt="2023-03-23T09:26:29.670" v="2691" actId="1076"/>
-          <ac:picMkLst>
-            <pc:docMk/>
-            <pc:sldMk cId="1724579227" sldId="312"/>
-            <ac:picMk id="6" creationId="{308BCAB9-FAED-4CA3-83A1-DFEB7564ECBF}"/>
-          </ac:picMkLst>
-        </pc:picChg>
-        <pc:picChg chg="del">
-          <ac:chgData name="LEUNG Nicole" userId="8ed04819-1a1c-42ab-ae09-44d42575f3a6" providerId="ADAL" clId="{46AED7F8-18BE-4C7E-B9AC-F4C2CA2D1D79}" dt="2023-03-23T09:26:26.350" v="2689" actId="478"/>
-          <ac:picMkLst>
-            <pc:docMk/>
-            <pc:sldMk cId="1724579227" sldId="312"/>
-            <ac:picMk id="7" creationId="{1C18B887-2293-41A7-8E7F-E7D25F1DE81E}"/>
-          </ac:picMkLst>
-        </pc:picChg>
-        <pc:picChg chg="add mod">
-          <ac:chgData name="LEUNG Nicole" userId="8ed04819-1a1c-42ab-ae09-44d42575f3a6" providerId="ADAL" clId="{46AED7F8-18BE-4C7E-B9AC-F4C2CA2D1D79}" dt="2023-03-23T09:26:36.488" v="2694" actId="1076"/>
-          <ac:picMkLst>
-            <pc:docMk/>
-            <pc:sldMk cId="1724579227" sldId="312"/>
-            <ac:picMk id="9" creationId="{EE0CFF38-5A03-49EE-B40E-8B364C3F0431}"/>
-          </ac:picMkLst>
-        </pc:picChg>
-      </pc:sldChg>
-      <pc:sldChg chg="del">
-        <pc:chgData name="LEUNG Nicole" userId="8ed04819-1a1c-42ab-ae09-44d42575f3a6" providerId="ADAL" clId="{46AED7F8-18BE-4C7E-B9AC-F4C2CA2D1D79}" dt="2023-03-23T09:27:31.188" v="2701" actId="2696"/>
-        <pc:sldMkLst>
-          <pc:docMk/>
-          <pc:sldMk cId="379772369" sldId="313"/>
-        </pc:sldMkLst>
-      </pc:sldChg>
-      <pc:sldChg chg="modSp add mod">
-        <pc:chgData name="LEUNG Nicole" userId="8ed04819-1a1c-42ab-ae09-44d42575f3a6" providerId="ADAL" clId="{46AED7F8-18BE-4C7E-B9AC-F4C2CA2D1D79}" dt="2023-03-22T09:21:27.648" v="2304" actId="20577"/>
-        <pc:sldMkLst>
-          <pc:docMk/>
-          <pc:sldMk cId="3390811765" sldId="315"/>
-        </pc:sldMkLst>
-        <pc:spChg chg="mod">
-          <ac:chgData name="LEUNG Nicole" userId="8ed04819-1a1c-42ab-ae09-44d42575f3a6" providerId="ADAL" clId="{46AED7F8-18BE-4C7E-B9AC-F4C2CA2D1D79}" dt="2023-03-22T09:21:27.648" v="2304" actId="20577"/>
-          <ac:spMkLst>
-            <pc:docMk/>
-            <pc:sldMk cId="3390811765" sldId="315"/>
-            <ac:spMk id="3" creationId="{38279423-2A7B-42E7-9AAD-819A01DEF59F}"/>
-          </ac:spMkLst>
-        </pc:spChg>
-      </pc:sldChg>
-      <pc:sldChg chg="modSp add mod">
-        <pc:chgData name="LEUNG Nicole" userId="8ed04819-1a1c-42ab-ae09-44d42575f3a6" providerId="ADAL" clId="{46AED7F8-18BE-4C7E-B9AC-F4C2CA2D1D79}" dt="2023-03-22T09:22:44.171" v="2311" actId="13926"/>
-        <pc:sldMkLst>
-          <pc:docMk/>
-          <pc:sldMk cId="3217505827" sldId="316"/>
-        </pc:sldMkLst>
-        <pc:spChg chg="mod">
-          <ac:chgData name="LEUNG Nicole" userId="8ed04819-1a1c-42ab-ae09-44d42575f3a6" providerId="ADAL" clId="{46AED7F8-18BE-4C7E-B9AC-F4C2CA2D1D79}" dt="2023-03-22T09:22:44.171" v="2311" actId="13926"/>
-          <ac:spMkLst>
-            <pc:docMk/>
-            <pc:sldMk cId="3217505827" sldId="316"/>
-            <ac:spMk id="3" creationId="{16DF9936-5C66-4D34-A98D-6A0722AE50E0}"/>
-          </ac:spMkLst>
-        </pc:spChg>
-      </pc:sldChg>
-      <pc:sldChg chg="modSp new mod">
-        <pc:chgData name="LEUNG Nicole" userId="8ed04819-1a1c-42ab-ae09-44d42575f3a6" providerId="ADAL" clId="{46AED7F8-18BE-4C7E-B9AC-F4C2CA2D1D79}" dt="2023-03-22T06:34:04.240" v="2196" actId="313"/>
-        <pc:sldMkLst>
-          <pc:docMk/>
-          <pc:sldMk cId="2343557002" sldId="317"/>
-        </pc:sldMkLst>
-        <pc:spChg chg="mod">
-          <ac:chgData name="LEUNG Nicole" userId="8ed04819-1a1c-42ab-ae09-44d42575f3a6" providerId="ADAL" clId="{46AED7F8-18BE-4C7E-B9AC-F4C2CA2D1D79}" dt="2023-03-22T05:24:34.036" v="1580" actId="20577"/>
-          <ac:spMkLst>
-            <pc:docMk/>
-            <pc:sldMk cId="2343557002" sldId="317"/>
-            <ac:spMk id="2" creationId="{67EBEA2C-9D3F-451F-B2CF-5E072A61EA51}"/>
-          </ac:spMkLst>
-        </pc:spChg>
-        <pc:spChg chg="mod">
-          <ac:chgData name="LEUNG Nicole" userId="8ed04819-1a1c-42ab-ae09-44d42575f3a6" providerId="ADAL" clId="{46AED7F8-18BE-4C7E-B9AC-F4C2CA2D1D79}" dt="2023-03-22T06:34:04.240" v="2196" actId="313"/>
-          <ac:spMkLst>
-            <pc:docMk/>
-            <pc:sldMk cId="2343557002" sldId="317"/>
-            <ac:spMk id="3" creationId="{9342268B-A687-4F1D-8190-3F35F31E4B51}"/>
-          </ac:spMkLst>
-        </pc:spChg>
-      </pc:sldChg>
-      <pc:sldChg chg="add">
-        <pc:chgData name="LEUNG Nicole" userId="8ed04819-1a1c-42ab-ae09-44d42575f3a6" providerId="ADAL" clId="{46AED7F8-18BE-4C7E-B9AC-F4C2CA2D1D79}" dt="2023-03-22T07:07:44.961" v="2213"/>
-        <pc:sldMkLst>
-          <pc:docMk/>
-          <pc:sldMk cId="1565561515" sldId="318"/>
-        </pc:sldMkLst>
-      </pc:sldChg>
-      <pc:sldChg chg="addSp delSp modSp new del mod">
-        <pc:chgData name="LEUNG Nicole" userId="8ed04819-1a1c-42ab-ae09-44d42575f3a6" providerId="ADAL" clId="{46AED7F8-18BE-4C7E-B9AC-F4C2CA2D1D79}" dt="2023-03-22T07:07:39.550" v="2210" actId="2696"/>
-        <pc:sldMkLst>
-          <pc:docMk/>
-          <pc:sldMk cId="2975975160" sldId="318"/>
-        </pc:sldMkLst>
-        <pc:spChg chg="mod">
-          <ac:chgData name="LEUNG Nicole" userId="8ed04819-1a1c-42ab-ae09-44d42575f3a6" providerId="ADAL" clId="{46AED7F8-18BE-4C7E-B9AC-F4C2CA2D1D79}" dt="2023-03-22T05:44:34.270" v="1632" actId="20577"/>
-          <ac:spMkLst>
-            <pc:docMk/>
-            <pc:sldMk cId="2975975160" sldId="318"/>
-            <ac:spMk id="2" creationId="{164F2797-9A88-4DC8-A740-847E5C61C5E0}"/>
-          </ac:spMkLst>
-        </pc:spChg>
-        <pc:spChg chg="del">
-          <ac:chgData name="LEUNG Nicole" userId="8ed04819-1a1c-42ab-ae09-44d42575f3a6" providerId="ADAL" clId="{46AED7F8-18BE-4C7E-B9AC-F4C2CA2D1D79}" dt="2023-03-22T05:44:52.947" v="1635" actId="478"/>
-          <ac:spMkLst>
-            <pc:docMk/>
-            <pc:sldMk cId="2975975160" sldId="318"/>
-            <ac:spMk id="3" creationId="{413F9A91-551F-47DB-8AA8-8EFC6B10B354}"/>
-          </ac:spMkLst>
-        </pc:spChg>
-        <pc:picChg chg="add mod">
-          <ac:chgData name="LEUNG Nicole" userId="8ed04819-1a1c-42ab-ae09-44d42575f3a6" providerId="ADAL" clId="{46AED7F8-18BE-4C7E-B9AC-F4C2CA2D1D79}" dt="2023-03-22T06:03:32.848" v="1699" actId="1076"/>
-          <ac:picMkLst>
-            <pc:docMk/>
-            <pc:sldMk cId="2975975160" sldId="318"/>
-            <ac:picMk id="5" creationId="{C43E2393-659D-447A-8DB8-76508D89D65D}"/>
-          </ac:picMkLst>
-        </pc:picChg>
-        <pc:picChg chg="add del mod">
-          <ac:chgData name="LEUNG Nicole" userId="8ed04819-1a1c-42ab-ae09-44d42575f3a6" providerId="ADAL" clId="{46AED7F8-18BE-4C7E-B9AC-F4C2CA2D1D79}" dt="2023-03-22T05:45:07.077" v="1638" actId="478"/>
-          <ac:picMkLst>
-            <pc:docMk/>
-            <pc:sldMk cId="2975975160" sldId="318"/>
-            <ac:picMk id="7" creationId="{59DC28C3-5167-4851-AF18-2DA1D2007536}"/>
-          </ac:picMkLst>
-        </pc:picChg>
-        <pc:picChg chg="add del mod">
-          <ac:chgData name="LEUNG Nicole" userId="8ed04819-1a1c-42ab-ae09-44d42575f3a6" providerId="ADAL" clId="{46AED7F8-18BE-4C7E-B9AC-F4C2CA2D1D79}" dt="2023-03-22T05:48:34.148" v="1643" actId="478"/>
-          <ac:picMkLst>
-            <pc:docMk/>
-            <pc:sldMk cId="2975975160" sldId="318"/>
-            <ac:picMk id="9" creationId="{C5893FAE-FA89-4AC1-83A9-733AF6819E3F}"/>
-          </ac:picMkLst>
-        </pc:picChg>
-        <pc:picChg chg="add del mod">
-          <ac:chgData name="LEUNG Nicole" userId="8ed04819-1a1c-42ab-ae09-44d42575f3a6" providerId="ADAL" clId="{46AED7F8-18BE-4C7E-B9AC-F4C2CA2D1D79}" dt="2023-03-22T05:48:40.004" v="1646" actId="478"/>
-          <ac:picMkLst>
-            <pc:docMk/>
-            <pc:sldMk cId="2975975160" sldId="318"/>
-            <ac:picMk id="11" creationId="{72B94089-D1AF-4680-B724-BB9E725F0686}"/>
-          </ac:picMkLst>
-        </pc:picChg>
-        <pc:picChg chg="add del mod">
-          <ac:chgData name="LEUNG Nicole" userId="8ed04819-1a1c-42ab-ae09-44d42575f3a6" providerId="ADAL" clId="{46AED7F8-18BE-4C7E-B9AC-F4C2CA2D1D79}" dt="2023-03-22T05:57:53.309" v="1664" actId="21"/>
-          <ac:picMkLst>
-            <pc:docMk/>
-            <pc:sldMk cId="2975975160" sldId="318"/>
-            <ac:picMk id="13" creationId="{FC9B3889-4141-4C8E-90F4-F22305C668D8}"/>
-          </ac:picMkLst>
-        </pc:picChg>
-      </pc:sldChg>
-      <pc:sldChg chg="delSp add setBg delDesignElem">
-        <pc:chgData name="LEUNG Nicole" userId="8ed04819-1a1c-42ab-ae09-44d42575f3a6" providerId="ADAL" clId="{46AED7F8-18BE-4C7E-B9AC-F4C2CA2D1D79}" dt="2023-03-22T07:07:44.961" v="2213"/>
-        <pc:sldMkLst>
-          <pc:docMk/>
-          <pc:sldMk cId="1059160177" sldId="319"/>
-        </pc:sldMkLst>
-        <pc:spChg chg="del">
-          <ac:chgData name="LEUNG Nicole" userId="8ed04819-1a1c-42ab-ae09-44d42575f3a6" providerId="ADAL" clId="{46AED7F8-18BE-4C7E-B9AC-F4C2CA2D1D79}" dt="2023-03-22T07:07:44.961" v="2213"/>
-          <ac:spMkLst>
-            <pc:docMk/>
-            <pc:sldMk cId="1059160177" sldId="319"/>
-            <ac:spMk id="10" creationId="{1A95671B-3CC6-4792-9114-B74FAEA224E6}"/>
-          </ac:spMkLst>
-        </pc:spChg>
-      </pc:sldChg>
-      <pc:sldChg chg="addSp delSp modSp new del mod setBg">
-        <pc:chgData name="LEUNG Nicole" userId="8ed04819-1a1c-42ab-ae09-44d42575f3a6" providerId="ADAL" clId="{46AED7F8-18BE-4C7E-B9AC-F4C2CA2D1D79}" dt="2023-03-22T07:07:39.550" v="2210" actId="2696"/>
-        <pc:sldMkLst>
-          <pc:docMk/>
-          <pc:sldMk cId="3076973922" sldId="319"/>
-        </pc:sldMkLst>
-        <pc:spChg chg="del mod">
-          <ac:chgData name="LEUNG Nicole" userId="8ed04819-1a1c-42ab-ae09-44d42575f3a6" providerId="ADAL" clId="{46AED7F8-18BE-4C7E-B9AC-F4C2CA2D1D79}" dt="2023-03-22T06:04:01.011" v="1701" actId="478"/>
-          <ac:spMkLst>
-            <pc:docMk/>
-            <pc:sldMk cId="3076973922" sldId="319"/>
-            <ac:spMk id="2" creationId="{C7784F2D-B30F-49BF-9434-1FBE1A3160F7}"/>
-          </ac:spMkLst>
-        </pc:spChg>
-        <pc:spChg chg="del mod">
-          <ac:chgData name="LEUNG Nicole" userId="8ed04819-1a1c-42ab-ae09-44d42575f3a6" providerId="ADAL" clId="{46AED7F8-18BE-4C7E-B9AC-F4C2CA2D1D79}" dt="2023-03-22T05:57:36.032" v="1662" actId="478"/>
-          <ac:spMkLst>
-            <pc:docMk/>
-            <pc:sldMk cId="3076973922" sldId="319"/>
-            <ac:spMk id="3" creationId="{06082541-86C6-4034-9B5E-0A0F3A8597C8}"/>
-          </ac:spMkLst>
-        </pc:spChg>
-        <pc:spChg chg="add del">
-          <ac:chgData name="LEUNG Nicole" userId="8ed04819-1a1c-42ab-ae09-44d42575f3a6" providerId="ADAL" clId="{46AED7F8-18BE-4C7E-B9AC-F4C2CA2D1D79}" dt="2023-03-22T05:58:57.563" v="1679" actId="26606"/>
-          <ac:spMkLst>
-            <pc:docMk/>
-            <pc:sldMk cId="3076973922" sldId="319"/>
-            <ac:spMk id="10" creationId="{1A95671B-3CC6-4792-9114-B74FAEA224E6}"/>
-          </ac:spMkLst>
-        </pc:spChg>
-        <pc:spChg chg="add del">
-          <ac:chgData name="LEUNG Nicole" userId="8ed04819-1a1c-42ab-ae09-44d42575f3a6" providerId="ADAL" clId="{46AED7F8-18BE-4C7E-B9AC-F4C2CA2D1D79}" dt="2023-03-22T05:58:57.563" v="1679" actId="26606"/>
-          <ac:spMkLst>
-            <pc:docMk/>
-            <pc:sldMk cId="3076973922" sldId="319"/>
-            <ac:spMk id="16" creationId="{7C98A213-5994-475E-B327-DC6EC27FBA8B}"/>
-          </ac:spMkLst>
-        </pc:spChg>
-        <pc:spChg chg="add del">
-          <ac:chgData name="LEUNG Nicole" userId="8ed04819-1a1c-42ab-ae09-44d42575f3a6" providerId="ADAL" clId="{46AED7F8-18BE-4C7E-B9AC-F4C2CA2D1D79}" dt="2023-03-22T05:58:57.563" v="1679" actId="26606"/>
-          <ac:spMkLst>
-            <pc:docMk/>
-            <pc:sldMk cId="3076973922" sldId="319"/>
-            <ac:spMk id="18" creationId="{4B030A0D-0DAD-4A99-89BB-419527D6A64B}"/>
-          </ac:spMkLst>
-        </pc:spChg>
-        <pc:picChg chg="add del mod">
-          <ac:chgData name="LEUNG Nicole" userId="8ed04819-1a1c-42ab-ae09-44d42575f3a6" providerId="ADAL" clId="{46AED7F8-18BE-4C7E-B9AC-F4C2CA2D1D79}" dt="2023-03-22T05:57:28.947" v="1659" actId="478"/>
-          <ac:picMkLst>
-            <pc:docMk/>
-            <pc:sldMk cId="3076973922" sldId="319"/>
-            <ac:picMk id="5" creationId="{370FE495-7A12-47A7-A820-E11E3C22C9F3}"/>
-          </ac:picMkLst>
-        </pc:picChg>
-        <pc:picChg chg="add mod">
-          <ac:chgData name="LEUNG Nicole" userId="8ed04819-1a1c-42ab-ae09-44d42575f3a6" providerId="ADAL" clId="{46AED7F8-18BE-4C7E-B9AC-F4C2CA2D1D79}" dt="2023-03-22T06:31:28.421" v="2186" actId="14100"/>
-          <ac:picMkLst>
-            <pc:docMk/>
-            <pc:sldMk cId="3076973922" sldId="319"/>
-            <ac:picMk id="7" creationId="{4F2D8885-2879-4021-AD25-3AE9A8096843}"/>
-          </ac:picMkLst>
-        </pc:picChg>
-        <pc:picChg chg="add mod ord">
-          <ac:chgData name="LEUNG Nicole" userId="8ed04819-1a1c-42ab-ae09-44d42575f3a6" providerId="ADAL" clId="{46AED7F8-18BE-4C7E-B9AC-F4C2CA2D1D79}" dt="2023-03-22T06:04:10.933" v="1704" actId="1076"/>
-          <ac:picMkLst>
-            <pc:docMk/>
-            <pc:sldMk cId="3076973922" sldId="319"/>
-            <ac:picMk id="9" creationId="{176CF9F8-6084-48D4-BA3C-4D1C0346C9D5}"/>
-          </ac:picMkLst>
-        </pc:picChg>
-        <pc:picChg chg="add mod">
-          <ac:chgData name="LEUNG Nicole" userId="8ed04819-1a1c-42ab-ae09-44d42575f3a6" providerId="ADAL" clId="{46AED7F8-18BE-4C7E-B9AC-F4C2CA2D1D79}" dt="2023-03-22T06:04:19.637" v="1706" actId="1076"/>
-          <ac:picMkLst>
-            <pc:docMk/>
-            <pc:sldMk cId="3076973922" sldId="319"/>
-            <ac:picMk id="11" creationId="{F7FF54D0-84C9-4483-AE8F-198B5CF48592}"/>
-          </ac:picMkLst>
-        </pc:picChg>
-        <pc:picChg chg="add mod">
-          <ac:chgData name="LEUNG Nicole" userId="8ed04819-1a1c-42ab-ae09-44d42575f3a6" providerId="ADAL" clId="{46AED7F8-18BE-4C7E-B9AC-F4C2CA2D1D79}" dt="2023-03-22T06:04:06.242" v="1703" actId="1076"/>
-          <ac:picMkLst>
-            <pc:docMk/>
-            <pc:sldMk cId="3076973922" sldId="319"/>
-            <ac:picMk id="13" creationId="{97A1868A-B8CD-4FC7-9EB6-7A0CD4210F49}"/>
-          </ac:picMkLst>
-        </pc:picChg>
-      </pc:sldChg>
-      <pc:sldChg chg="new del">
-        <pc:chgData name="LEUNG Nicole" userId="8ed04819-1a1c-42ab-ae09-44d42575f3a6" providerId="ADAL" clId="{46AED7F8-18BE-4C7E-B9AC-F4C2CA2D1D79}" dt="2023-03-22T06:03:27.404" v="1697" actId="2696"/>
-        <pc:sldMkLst>
-          <pc:docMk/>
-          <pc:sldMk cId="3225223899" sldId="320"/>
-        </pc:sldMkLst>
-      </pc:sldChg>
-      <pc:sldChg chg="add">
-        <pc:chgData name="LEUNG Nicole" userId="8ed04819-1a1c-42ab-ae09-44d42575f3a6" providerId="ADAL" clId="{46AED7F8-18BE-4C7E-B9AC-F4C2CA2D1D79}" dt="2023-03-22T07:07:44.961" v="2213"/>
-        <pc:sldMkLst>
-          <pc:docMk/>
-          <pc:sldMk cId="755391499" sldId="321"/>
-        </pc:sldMkLst>
-      </pc:sldChg>
-      <pc:sldChg chg="addSp delSp modSp new del mod">
-        <pc:chgData name="LEUNG Nicole" userId="8ed04819-1a1c-42ab-ae09-44d42575f3a6" providerId="ADAL" clId="{46AED7F8-18BE-4C7E-B9AC-F4C2CA2D1D79}" dt="2023-03-22T07:07:39.550" v="2210" actId="2696"/>
-        <pc:sldMkLst>
-          <pc:docMk/>
-          <pc:sldMk cId="3016156902" sldId="321"/>
-        </pc:sldMkLst>
-        <pc:spChg chg="del">
-          <ac:chgData name="LEUNG Nicole" userId="8ed04819-1a1c-42ab-ae09-44d42575f3a6" providerId="ADAL" clId="{46AED7F8-18BE-4C7E-B9AC-F4C2CA2D1D79}" dt="2023-03-22T06:11:32.511" v="2167" actId="478"/>
-          <ac:spMkLst>
-            <pc:docMk/>
-            <pc:sldMk cId="3016156902" sldId="321"/>
-            <ac:spMk id="2" creationId="{4D15E652-1958-42A2-8C54-C1280982E655}"/>
-          </ac:spMkLst>
-        </pc:spChg>
-        <pc:spChg chg="mod ord">
-          <ac:chgData name="LEUNG Nicole" userId="8ed04819-1a1c-42ab-ae09-44d42575f3a6" providerId="ADAL" clId="{46AED7F8-18BE-4C7E-B9AC-F4C2CA2D1D79}" dt="2023-03-22T06:12:16.896" v="2182" actId="20577"/>
-          <ac:spMkLst>
-            <pc:docMk/>
-            <pc:sldMk cId="3016156902" sldId="321"/>
-            <ac:spMk id="3" creationId="{EB57EC2E-D10C-4115-A6AF-5B5EE6482C00}"/>
-          </ac:spMkLst>
-        </pc:spChg>
-        <pc:picChg chg="add mod">
-          <ac:chgData name="LEUNG Nicole" userId="8ed04819-1a1c-42ab-ae09-44d42575f3a6" providerId="ADAL" clId="{46AED7F8-18BE-4C7E-B9AC-F4C2CA2D1D79}" dt="2023-03-22T06:11:31.094" v="2166" actId="14100"/>
-          <ac:picMkLst>
-            <pc:docMk/>
-            <pc:sldMk cId="3016156902" sldId="321"/>
-            <ac:picMk id="5" creationId="{93A6E2F8-D542-45A6-830D-1BFD1DA2FCAE}"/>
-          </ac:picMkLst>
-        </pc:picChg>
-        <pc:picChg chg="add mod">
-          <ac:chgData name="LEUNG Nicole" userId="8ed04819-1a1c-42ab-ae09-44d42575f3a6" providerId="ADAL" clId="{46AED7F8-18BE-4C7E-B9AC-F4C2CA2D1D79}" dt="2023-03-22T06:11:40.326" v="2169" actId="14100"/>
-          <ac:picMkLst>
-            <pc:docMk/>
-            <pc:sldMk cId="3016156902" sldId="321"/>
-            <ac:picMk id="7" creationId="{35F07CFD-DA67-44B3-9388-695B3D565255}"/>
-          </ac:picMkLst>
-        </pc:picChg>
-        <pc:picChg chg="add mod">
-          <ac:chgData name="LEUNG Nicole" userId="8ed04819-1a1c-42ab-ae09-44d42575f3a6" providerId="ADAL" clId="{46AED7F8-18BE-4C7E-B9AC-F4C2CA2D1D79}" dt="2023-03-22T06:11:47.739" v="2172" actId="1076"/>
-          <ac:picMkLst>
-            <pc:docMk/>
-            <pc:sldMk cId="3016156902" sldId="321"/>
-            <ac:picMk id="9" creationId="{08B27B97-2012-40EF-AFF2-8BE74590E570}"/>
-          </ac:picMkLst>
-        </pc:picChg>
-        <pc:picChg chg="add mod">
-          <ac:chgData name="LEUNG Nicole" userId="8ed04819-1a1c-42ab-ae09-44d42575f3a6" providerId="ADAL" clId="{46AED7F8-18BE-4C7E-B9AC-F4C2CA2D1D79}" dt="2023-03-22T06:11:56.891" v="2176" actId="14100"/>
-          <ac:picMkLst>
-            <pc:docMk/>
-            <pc:sldMk cId="3016156902" sldId="321"/>
-            <ac:picMk id="11" creationId="{B59BF4F0-F592-438C-8D21-A1904B8908FB}"/>
-          </ac:picMkLst>
-        </pc:picChg>
-      </pc:sldChg>
-      <pc:sldChg chg="new del">
-        <pc:chgData name="LEUNG Nicole" userId="8ed04819-1a1c-42ab-ae09-44d42575f3a6" providerId="ADAL" clId="{46AED7F8-18BE-4C7E-B9AC-F4C2CA2D1D79}" dt="2023-03-23T09:18:14.480" v="2645" actId="2696"/>
-        <pc:sldMkLst>
-          <pc:docMk/>
-          <pc:sldMk cId="3752621791" sldId="322"/>
-        </pc:sldMkLst>
-      </pc:sldChg>
-      <pc:sldChg chg="addSp delSp modSp new mod ord">
-        <pc:chgData name="LEUNG Nicole" userId="8ed04819-1a1c-42ab-ae09-44d42575f3a6" providerId="ADAL" clId="{46AED7F8-18BE-4C7E-B9AC-F4C2CA2D1D79}" dt="2023-03-23T09:17:44.090" v="2644"/>
-        <pc:sldMkLst>
-          <pc:docMk/>
-          <pc:sldMk cId="3138354313" sldId="323"/>
-        </pc:sldMkLst>
-        <pc:spChg chg="del">
-          <ac:chgData name="LEUNG Nicole" userId="8ed04819-1a1c-42ab-ae09-44d42575f3a6" providerId="ADAL" clId="{46AED7F8-18BE-4C7E-B9AC-F4C2CA2D1D79}" dt="2023-03-23T09:17:36.373" v="2642" actId="478"/>
-          <ac:spMkLst>
-            <pc:docMk/>
-            <pc:sldMk cId="3138354313" sldId="323"/>
-            <ac:spMk id="2" creationId="{BC32BAFC-9449-4227-B728-501DAF51AF88}"/>
-          </ac:spMkLst>
-        </pc:spChg>
-        <pc:spChg chg="del">
-          <ac:chgData name="LEUNG Nicole" userId="8ed04819-1a1c-42ab-ae09-44d42575f3a6" providerId="ADAL" clId="{46AED7F8-18BE-4C7E-B9AC-F4C2CA2D1D79}" dt="2023-03-23T09:17:35.138" v="2641" actId="478"/>
-          <ac:spMkLst>
-            <pc:docMk/>
-            <pc:sldMk cId="3138354313" sldId="323"/>
-            <ac:spMk id="3" creationId="{E2695FCF-E8CF-4B83-9EF8-8F5311F6AC71}"/>
-          </ac:spMkLst>
-        </pc:spChg>
-        <pc:picChg chg="add mod">
-          <ac:chgData name="LEUNG Nicole" userId="8ed04819-1a1c-42ab-ae09-44d42575f3a6" providerId="ADAL" clId="{46AED7F8-18BE-4C7E-B9AC-F4C2CA2D1D79}" dt="2023-03-23T09:17:29.461" v="2639" actId="14100"/>
-          <ac:picMkLst>
-            <pc:docMk/>
-            <pc:sldMk cId="3138354313" sldId="323"/>
-            <ac:picMk id="5" creationId="{ED433F08-4168-407A-9984-7AD5B6044148}"/>
-          </ac:picMkLst>
-        </pc:picChg>
-        <pc:picChg chg="add mod">
-          <ac:chgData name="LEUNG Nicole" userId="8ed04819-1a1c-42ab-ae09-44d42575f3a6" providerId="ADAL" clId="{46AED7F8-18BE-4C7E-B9AC-F4C2CA2D1D79}" dt="2023-03-23T09:17:32.309" v="2640" actId="14100"/>
-          <ac:picMkLst>
-            <pc:docMk/>
-            <pc:sldMk cId="3138354313" sldId="323"/>
-            <ac:picMk id="7" creationId="{D8385936-414D-4CD3-87C3-322F7081F59E}"/>
-          </ac:picMkLst>
-        </pc:picChg>
-      </pc:sldChg>
-      <pc:sldChg chg="addSp delSp modSp mod">
-        <pc:chgData name="LEUNG Nicole" userId="8ed04819-1a1c-42ab-ae09-44d42575f3a6" providerId="ADAL" clId="{46AED7F8-18BE-4C7E-B9AC-F4C2CA2D1D79}" dt="2023-03-27T03:30:21.004" v="3264" actId="20577"/>
-        <pc:sldMkLst>
-          <pc:docMk/>
-          <pc:sldMk cId="685052390" sldId="324"/>
-        </pc:sldMkLst>
-        <pc:spChg chg="add mod">
-          <ac:chgData name="LEUNG Nicole" userId="8ed04819-1a1c-42ab-ae09-44d42575f3a6" providerId="ADAL" clId="{46AED7F8-18BE-4C7E-B9AC-F4C2CA2D1D79}" dt="2023-03-24T10:12:32.655" v="3014" actId="1076"/>
-          <ac:spMkLst>
-            <pc:docMk/>
-            <pc:sldMk cId="685052390" sldId="324"/>
-            <ac:spMk id="7" creationId="{1C923572-75D1-4013-BD55-03F47BADD876}"/>
-          </ac:spMkLst>
-        </pc:spChg>
-        <pc:spChg chg="mod">
-          <ac:chgData name="LEUNG Nicole" userId="8ed04819-1a1c-42ab-ae09-44d42575f3a6" providerId="ADAL" clId="{46AED7F8-18BE-4C7E-B9AC-F4C2CA2D1D79}" dt="2023-03-27T03:29:57.510" v="3263" actId="1076"/>
-          <ac:spMkLst>
-            <pc:docMk/>
-            <pc:sldMk cId="685052390" sldId="324"/>
-            <ac:spMk id="8" creationId="{ACACAFAB-4930-4CFE-AD1A-44985FAC3B14}"/>
-          </ac:spMkLst>
-        </pc:spChg>
-        <pc:spChg chg="add mod">
-          <ac:chgData name="LEUNG Nicole" userId="8ed04819-1a1c-42ab-ae09-44d42575f3a6" providerId="ADAL" clId="{46AED7F8-18BE-4C7E-B9AC-F4C2CA2D1D79}" dt="2023-03-27T02:52:44.254" v="3240" actId="1076"/>
-          <ac:spMkLst>
-            <pc:docMk/>
-            <pc:sldMk cId="685052390" sldId="324"/>
-            <ac:spMk id="9" creationId="{9B610A0A-A807-4235-8BB1-F0CB168CB21A}"/>
-          </ac:spMkLst>
-        </pc:spChg>
-        <pc:spChg chg="add mod">
-          <ac:chgData name="LEUNG Nicole" userId="8ed04819-1a1c-42ab-ae09-44d42575f3a6" providerId="ADAL" clId="{46AED7F8-18BE-4C7E-B9AC-F4C2CA2D1D79}" dt="2023-03-24T10:19:31.679" v="3094" actId="688"/>
-          <ac:spMkLst>
-            <pc:docMk/>
-            <pc:sldMk cId="685052390" sldId="324"/>
-            <ac:spMk id="10" creationId="{998ACEB0-0BC7-4E30-A153-38F9EA57121C}"/>
-          </ac:spMkLst>
-        </pc:spChg>
-        <pc:spChg chg="add mod">
-          <ac:chgData name="LEUNG Nicole" userId="8ed04819-1a1c-42ab-ae09-44d42575f3a6" providerId="ADAL" clId="{46AED7F8-18BE-4C7E-B9AC-F4C2CA2D1D79}" dt="2023-03-24T10:19:17.470" v="3089" actId="1076"/>
-          <ac:spMkLst>
-            <pc:docMk/>
-            <pc:sldMk cId="685052390" sldId="324"/>
-            <ac:spMk id="14" creationId="{2B06C150-EBE6-483B-B164-9DADAA66B82A}"/>
-          </ac:spMkLst>
-        </pc:spChg>
-        <pc:spChg chg="mod">
-          <ac:chgData name="LEUNG Nicole" userId="8ed04819-1a1c-42ab-ae09-44d42575f3a6" providerId="ADAL" clId="{46AED7F8-18BE-4C7E-B9AC-F4C2CA2D1D79}" dt="2023-03-24T10:26:47.919" v="3203" actId="1076"/>
-          <ac:spMkLst>
-            <pc:docMk/>
-            <pc:sldMk cId="685052390" sldId="324"/>
-            <ac:spMk id="15" creationId="{FE01B4FE-6411-477A-998F-2C14F0F7DD43}"/>
-          </ac:spMkLst>
-        </pc:spChg>
-        <pc:spChg chg="add del">
-          <ac:chgData name="LEUNG Nicole" userId="8ed04819-1a1c-42ab-ae09-44d42575f3a6" providerId="ADAL" clId="{46AED7F8-18BE-4C7E-B9AC-F4C2CA2D1D79}" dt="2023-03-24T10:13:18.032" v="3016" actId="478"/>
-          <ac:spMkLst>
-            <pc:docMk/>
-            <pc:sldMk cId="685052390" sldId="324"/>
-            <ac:spMk id="20" creationId="{3FF0E947-3263-4834-8B48-CBA67C4E3350}"/>
-          </ac:spMkLst>
-        </pc:spChg>
-        <pc:spChg chg="add mod">
-          <ac:chgData name="LEUNG Nicole" userId="8ed04819-1a1c-42ab-ae09-44d42575f3a6" providerId="ADAL" clId="{46AED7F8-18BE-4C7E-B9AC-F4C2CA2D1D79}" dt="2023-03-24T10:15:09.833" v="3028" actId="14100"/>
-          <ac:spMkLst>
-            <pc:docMk/>
-            <pc:sldMk cId="685052390" sldId="324"/>
-            <ac:spMk id="24" creationId="{5AB93E4E-E4F3-45EF-B769-F80A40A3D317}"/>
-          </ac:spMkLst>
-        </pc:spChg>
-        <pc:spChg chg="add mod">
-          <ac:chgData name="LEUNG Nicole" userId="8ed04819-1a1c-42ab-ae09-44d42575f3a6" providerId="ADAL" clId="{46AED7F8-18BE-4C7E-B9AC-F4C2CA2D1D79}" dt="2023-03-27T03:30:21.004" v="3264" actId="20577"/>
-          <ac:spMkLst>
-            <pc:docMk/>
-            <pc:sldMk cId="685052390" sldId="324"/>
-            <ac:spMk id="26" creationId="{818922C5-BB94-4905-B298-6AE31E0E1A7F}"/>
-          </ac:spMkLst>
-        </pc:spChg>
-        <pc:spChg chg="add del mod">
-          <ac:chgData name="LEUNG Nicole" userId="8ed04819-1a1c-42ab-ae09-44d42575f3a6" providerId="ADAL" clId="{46AED7F8-18BE-4C7E-B9AC-F4C2CA2D1D79}" dt="2023-03-24T10:25:59.070" v="3162" actId="478"/>
-          <ac:spMkLst>
-            <pc:docMk/>
-            <pc:sldMk cId="685052390" sldId="324"/>
-            <ac:spMk id="27" creationId="{1A9ED5E1-48FD-4185-BF99-8F8E0B7BBA88}"/>
-          </ac:spMkLst>
-        </pc:spChg>
-        <pc:spChg chg="add del mod">
-          <ac:chgData name="LEUNG Nicole" userId="8ed04819-1a1c-42ab-ae09-44d42575f3a6" providerId="ADAL" clId="{46AED7F8-18BE-4C7E-B9AC-F4C2CA2D1D79}" dt="2023-03-24T10:25:57.401" v="3161" actId="478"/>
-          <ac:spMkLst>
-            <pc:docMk/>
-            <pc:sldMk cId="685052390" sldId="324"/>
-            <ac:spMk id="28" creationId="{4F0027DD-ABC7-4AF4-BFC4-F9FB5711F997}"/>
-          </ac:spMkLst>
-        </pc:spChg>
-        <pc:spChg chg="add mod">
-          <ac:chgData name="LEUNG Nicole" userId="8ed04819-1a1c-42ab-ae09-44d42575f3a6" providerId="ADAL" clId="{46AED7F8-18BE-4C7E-B9AC-F4C2CA2D1D79}" dt="2023-03-24T10:21:33.213" v="3131" actId="1076"/>
-          <ac:spMkLst>
-            <pc:docMk/>
-            <pc:sldMk cId="685052390" sldId="324"/>
-            <ac:spMk id="29" creationId="{B1D27924-AF5D-4649-B780-A5D4918CA5C0}"/>
-          </ac:spMkLst>
-        </pc:spChg>
-        <pc:spChg chg="add mod">
-          <ac:chgData name="LEUNG Nicole" userId="8ed04819-1a1c-42ab-ae09-44d42575f3a6" providerId="ADAL" clId="{46AED7F8-18BE-4C7E-B9AC-F4C2CA2D1D79}" dt="2023-03-24T10:19:28.220" v="3093" actId="1076"/>
-          <ac:spMkLst>
-            <pc:docMk/>
-            <pc:sldMk cId="685052390" sldId="324"/>
-            <ac:spMk id="30" creationId="{A99FE39C-236C-4D51-8C3D-5233222958F0}"/>
-          </ac:spMkLst>
-        </pc:spChg>
-        <pc:spChg chg="add">
-          <ac:chgData name="LEUNG Nicole" userId="8ed04819-1a1c-42ab-ae09-44d42575f3a6" providerId="ADAL" clId="{46AED7F8-18BE-4C7E-B9AC-F4C2CA2D1D79}" dt="2023-03-24T10:24:57.909" v="3149" actId="11529"/>
-          <ac:spMkLst>
-            <pc:docMk/>
-            <pc:sldMk cId="685052390" sldId="324"/>
-            <ac:spMk id="32" creationId="{A8B24CE1-1381-4D59-A4C4-3AD4D3968F47}"/>
-          </ac:spMkLst>
-        </pc:spChg>
-        <pc:spChg chg="add mod">
-          <ac:chgData name="LEUNG Nicole" userId="8ed04819-1a1c-42ab-ae09-44d42575f3a6" providerId="ADAL" clId="{46AED7F8-18BE-4C7E-B9AC-F4C2CA2D1D79}" dt="2023-03-24T10:26:51.672" v="3204" actId="14100"/>
-          <ac:spMkLst>
-            <pc:docMk/>
-            <pc:sldMk cId="685052390" sldId="324"/>
-            <ac:spMk id="33" creationId="{5CF35FAB-F10C-47EA-8B85-33301370A547}"/>
-          </ac:spMkLst>
-        </pc:spChg>
-        <pc:picChg chg="del mod">
-          <ac:chgData name="LEUNG Nicole" userId="8ed04819-1a1c-42ab-ae09-44d42575f3a6" providerId="ADAL" clId="{46AED7F8-18BE-4C7E-B9AC-F4C2CA2D1D79}" dt="2023-03-24T09:55:13.108" v="2909" actId="21"/>
-          <ac:picMkLst>
-            <pc:docMk/>
-            <pc:sldMk cId="685052390" sldId="324"/>
-            <ac:picMk id="3" creationId="{9F83FB1F-6BD8-4C48-8818-02A6418D222B}"/>
-          </ac:picMkLst>
-        </pc:picChg>
-        <pc:picChg chg="del mod">
-          <ac:chgData name="LEUNG Nicole" userId="8ed04819-1a1c-42ab-ae09-44d42575f3a6" providerId="ADAL" clId="{46AED7F8-18BE-4C7E-B9AC-F4C2CA2D1D79}" dt="2023-03-24T10:26:00.252" v="3163" actId="478"/>
-          <ac:picMkLst>
-            <pc:docMk/>
-            <pc:sldMk cId="685052390" sldId="324"/>
-            <ac:picMk id="4" creationId="{3593EE09-63A8-47A5-812D-AFFE796AB757}"/>
-          </ac:picMkLst>
-        </pc:picChg>
-        <pc:picChg chg="mod">
-          <ac:chgData name="LEUNG Nicole" userId="8ed04819-1a1c-42ab-ae09-44d42575f3a6" providerId="ADAL" clId="{46AED7F8-18BE-4C7E-B9AC-F4C2CA2D1D79}" dt="2023-03-24T10:12:06.940" v="3008" actId="1076"/>
-          <ac:picMkLst>
-            <pc:docMk/>
-            <pc:sldMk cId="685052390" sldId="324"/>
-            <ac:picMk id="5" creationId="{714BE021-93C7-4C60-BD25-550C2F0AB1AD}"/>
-          </ac:picMkLst>
-        </pc:picChg>
-        <pc:picChg chg="mod">
-          <ac:chgData name="LEUNG Nicole" userId="8ed04819-1a1c-42ab-ae09-44d42575f3a6" providerId="ADAL" clId="{46AED7F8-18BE-4C7E-B9AC-F4C2CA2D1D79}" dt="2023-03-24T10:21:50.428" v="3136" actId="14100"/>
-          <ac:picMkLst>
-            <pc:docMk/>
-            <pc:sldMk cId="685052390" sldId="324"/>
-            <ac:picMk id="6" creationId="{E02C09AD-179E-463D-ABB4-5F3E636BE935}"/>
-          </ac:picMkLst>
-        </pc:picChg>
-        <pc:picChg chg="add mod">
-          <ac:chgData name="LEUNG Nicole" userId="8ed04819-1a1c-42ab-ae09-44d42575f3a6" providerId="ADAL" clId="{46AED7F8-18BE-4C7E-B9AC-F4C2CA2D1D79}" dt="2023-03-24T09:55:24.529" v="2913" actId="1076"/>
-          <ac:picMkLst>
-            <pc:docMk/>
-            <pc:sldMk cId="685052390" sldId="324"/>
-            <ac:picMk id="11" creationId="{FD5C0C17-4E61-490B-8288-D4424E1F336B}"/>
-          </ac:picMkLst>
-        </pc:picChg>
-        <pc:picChg chg="add del mod">
-          <ac:chgData name="LEUNG Nicole" userId="8ed04819-1a1c-42ab-ae09-44d42575f3a6" providerId="ADAL" clId="{46AED7F8-18BE-4C7E-B9AC-F4C2CA2D1D79}" dt="2023-03-24T09:55:21.407" v="2912" actId="478"/>
-          <ac:picMkLst>
-            <pc:docMk/>
-            <pc:sldMk cId="685052390" sldId="324"/>
-            <ac:picMk id="12" creationId="{DFB73717-4F8B-4595-A3D3-DC315645610F}"/>
-          </ac:picMkLst>
-        </pc:picChg>
-        <pc:picChg chg="add mod">
-          <ac:chgData name="LEUNG Nicole" userId="8ed04819-1a1c-42ab-ae09-44d42575f3a6" providerId="ADAL" clId="{46AED7F8-18BE-4C7E-B9AC-F4C2CA2D1D79}" dt="2023-03-24T10:16:54.587" v="3050" actId="1076"/>
-          <ac:picMkLst>
-            <pc:docMk/>
-            <pc:sldMk cId="685052390" sldId="324"/>
-            <ac:picMk id="13" creationId="{BC052B5A-861C-4229-8BCE-1EA21AC9A22F}"/>
-          </ac:picMkLst>
-        </pc:picChg>
-        <pc:picChg chg="add del mod">
-          <ac:chgData name="LEUNG Nicole" userId="8ed04819-1a1c-42ab-ae09-44d42575f3a6" providerId="ADAL" clId="{46AED7F8-18BE-4C7E-B9AC-F4C2CA2D1D79}" dt="2023-03-24T10:09:55.733" v="2988" actId="478"/>
-          <ac:picMkLst>
-            <pc:docMk/>
-            <pc:sldMk cId="685052390" sldId="324"/>
-            <ac:picMk id="17" creationId="{0D33EF9B-5D92-45B8-BFD3-53B7FBB9C279}"/>
-          </ac:picMkLst>
-        </pc:picChg>
-        <pc:picChg chg="add del mod">
-          <ac:chgData name="LEUNG Nicole" userId="8ed04819-1a1c-42ab-ae09-44d42575f3a6" providerId="ADAL" clId="{46AED7F8-18BE-4C7E-B9AC-F4C2CA2D1D79}" dt="2023-03-24T10:08:38.175" v="2971" actId="478"/>
-          <ac:picMkLst>
-            <pc:docMk/>
-            <pc:sldMk cId="685052390" sldId="324"/>
-            <ac:picMk id="19" creationId="{9A6A468E-4F27-4BF6-BEAC-E9C3D1CE94D3}"/>
-          </ac:picMkLst>
-        </pc:picChg>
-        <pc:picChg chg="add mod">
-          <ac:chgData name="LEUNG Nicole" userId="8ed04819-1a1c-42ab-ae09-44d42575f3a6" providerId="ADAL" clId="{46AED7F8-18BE-4C7E-B9AC-F4C2CA2D1D79}" dt="2023-03-24T10:19:22.776" v="3091" actId="1076"/>
-          <ac:picMkLst>
-            <pc:docMk/>
-            <pc:sldMk cId="685052390" sldId="324"/>
-            <ac:picMk id="25" creationId="{7FB1C738-5C43-48C6-AF12-E64712FDCE39}"/>
-          </ac:picMkLst>
-        </pc:picChg>
-        <pc:picChg chg="add mod">
-          <ac:chgData name="LEUNG Nicole" userId="8ed04819-1a1c-42ab-ae09-44d42575f3a6" providerId="ADAL" clId="{46AED7F8-18BE-4C7E-B9AC-F4C2CA2D1D79}" dt="2023-03-24T10:20:21.363" v="3109" actId="1076"/>
-          <ac:picMkLst>
-            <pc:docMk/>
-            <pc:sldMk cId="685052390" sldId="324"/>
-            <ac:picMk id="31" creationId="{4E4690F8-7D4F-4CA7-A1A4-91EE49E599BD}"/>
-          </ac:picMkLst>
-        </pc:picChg>
-        <pc:picChg chg="add mod">
-          <ac:chgData name="LEUNG Nicole" userId="8ed04819-1a1c-42ab-ae09-44d42575f3a6" providerId="ADAL" clId="{46AED7F8-18BE-4C7E-B9AC-F4C2CA2D1D79}" dt="2023-03-24T10:26:44.644" v="3202" actId="1076"/>
-          <ac:picMkLst>
-            <pc:docMk/>
-            <pc:sldMk cId="685052390" sldId="324"/>
-            <ac:picMk id="34" creationId="{01164368-3CD4-4688-B754-E7302AEB6463}"/>
-          </ac:picMkLst>
-        </pc:picChg>
-        <pc:cxnChg chg="add del mod">
-          <ac:chgData name="LEUNG Nicole" userId="8ed04819-1a1c-42ab-ae09-44d42575f3a6" providerId="ADAL" clId="{46AED7F8-18BE-4C7E-B9AC-F4C2CA2D1D79}" dt="2023-03-24T10:13:56.462" v="3019" actId="478"/>
-          <ac:cxnSpMkLst>
-            <pc:docMk/>
-            <pc:sldMk cId="685052390" sldId="324"/>
-            <ac:cxnSpMk id="22" creationId="{88FDC431-C57F-4E02-A077-41D44BA209C5}"/>
-          </ac:cxnSpMkLst>
-        </pc:cxnChg>
-      </pc:sldChg>
-      <pc:sldChg chg="addSp delSp modSp new mod">
-        <pc:chgData name="LEUNG Nicole" userId="8ed04819-1a1c-42ab-ae09-44d42575f3a6" providerId="ADAL" clId="{46AED7F8-18BE-4C7E-B9AC-F4C2CA2D1D79}" dt="2023-03-27T07:11:14.333" v="3279" actId="478"/>
-        <pc:sldMkLst>
-          <pc:docMk/>
-          <pc:sldMk cId="4051684265" sldId="328"/>
-        </pc:sldMkLst>
-        <pc:spChg chg="del mod">
-          <ac:chgData name="LEUNG Nicole" userId="8ed04819-1a1c-42ab-ae09-44d42575f3a6" providerId="ADAL" clId="{46AED7F8-18BE-4C7E-B9AC-F4C2CA2D1D79}" dt="2023-03-27T07:11:06.750" v="3278" actId="478"/>
-          <ac:spMkLst>
-            <pc:docMk/>
-            <pc:sldMk cId="4051684265" sldId="328"/>
-            <ac:spMk id="2" creationId="{401AFF46-3395-4ACF-9AB7-F4F8DFD6FC95}"/>
-          </ac:spMkLst>
-        </pc:spChg>
-        <pc:spChg chg="del">
-          <ac:chgData name="LEUNG Nicole" userId="8ed04819-1a1c-42ab-ae09-44d42575f3a6" providerId="ADAL" clId="{46AED7F8-18BE-4C7E-B9AC-F4C2CA2D1D79}" dt="2023-03-27T07:10:55.226" v="3276" actId="478"/>
-          <ac:spMkLst>
-            <pc:docMk/>
-            <pc:sldMk cId="4051684265" sldId="328"/>
-            <ac:spMk id="3" creationId="{6D45CDE9-646F-4A92-8758-51203A92682E}"/>
-          </ac:spMkLst>
-        </pc:spChg>
-        <pc:spChg chg="add del mod">
-          <ac:chgData name="LEUNG Nicole" userId="8ed04819-1a1c-42ab-ae09-44d42575f3a6" providerId="ADAL" clId="{46AED7F8-18BE-4C7E-B9AC-F4C2CA2D1D79}" dt="2023-03-27T07:11:14.333" v="3279" actId="478"/>
-          <ac:spMkLst>
-            <pc:docMk/>
-            <pc:sldMk cId="4051684265" sldId="328"/>
-            <ac:spMk id="7" creationId="{8DD55ACF-CFAD-4575-9B5C-7EA50594794E}"/>
-          </ac:spMkLst>
-        </pc:spChg>
-        <pc:picChg chg="add mod">
-          <ac:chgData name="LEUNG Nicole" userId="8ed04819-1a1c-42ab-ae09-44d42575f3a6" providerId="ADAL" clId="{46AED7F8-18BE-4C7E-B9AC-F4C2CA2D1D79}" dt="2023-03-27T07:02:36.108" v="3271" actId="1076"/>
-          <ac:picMkLst>
-            <pc:docMk/>
-            <pc:sldMk cId="4051684265" sldId="328"/>
-            <ac:picMk id="5" creationId="{599AA1E7-AFCC-45AE-9BEF-3FBB15E2E165}"/>
-          </ac:picMkLst>
-        </pc:picChg>
-      </pc:sldChg>
-      <pc:sldChg chg="addSp delSp modSp new mod ord">
-        <pc:chgData name="LEUNG Nicole" userId="8ed04819-1a1c-42ab-ae09-44d42575f3a6" providerId="ADAL" clId="{46AED7F8-18BE-4C7E-B9AC-F4C2CA2D1D79}" dt="2023-03-27T08:08:59.674" v="3356"/>
-        <pc:sldMkLst>
-          <pc:docMk/>
-          <pc:sldMk cId="1680002346" sldId="329"/>
-        </pc:sldMkLst>
-        <pc:spChg chg="del">
-          <ac:chgData name="LEUNG Nicole" userId="8ed04819-1a1c-42ab-ae09-44d42575f3a6" providerId="ADAL" clId="{46AED7F8-18BE-4C7E-B9AC-F4C2CA2D1D79}" dt="2023-03-27T07:13:26.820" v="3285" actId="478"/>
-          <ac:spMkLst>
-            <pc:docMk/>
-            <pc:sldMk cId="1680002346" sldId="329"/>
-            <ac:spMk id="2" creationId="{D556A4C1-B1D5-41A8-AFFD-F4465CE841C5}"/>
-          </ac:spMkLst>
-        </pc:spChg>
-        <pc:spChg chg="del">
-          <ac:chgData name="LEUNG Nicole" userId="8ed04819-1a1c-42ab-ae09-44d42575f3a6" providerId="ADAL" clId="{46AED7F8-18BE-4C7E-B9AC-F4C2CA2D1D79}" dt="2023-03-27T07:13:28.931" v="3286" actId="478"/>
-          <ac:spMkLst>
-            <pc:docMk/>
-            <pc:sldMk cId="1680002346" sldId="329"/>
-            <ac:spMk id="3" creationId="{23EBE132-2B39-4C18-AF01-D6345F481804}"/>
-          </ac:spMkLst>
-        </pc:spChg>
-        <pc:spChg chg="add mod">
-          <ac:chgData name="LEUNG Nicole" userId="8ed04819-1a1c-42ab-ae09-44d42575f3a6" providerId="ADAL" clId="{46AED7F8-18BE-4C7E-B9AC-F4C2CA2D1D79}" dt="2023-03-27T07:13:24.785" v="3284" actId="1076"/>
-          <ac:spMkLst>
-            <pc:docMk/>
-            <pc:sldMk cId="1680002346" sldId="329"/>
-            <ac:spMk id="6" creationId="{B48B13D0-6CBE-4360-BDD5-D11037B19CF9}"/>
-          </ac:spMkLst>
-        </pc:spChg>
-        <pc:picChg chg="add mod">
-          <ac:chgData name="LEUNG Nicole" userId="8ed04819-1a1c-42ab-ae09-44d42575f3a6" providerId="ADAL" clId="{46AED7F8-18BE-4C7E-B9AC-F4C2CA2D1D79}" dt="2023-03-27T08:06:58.212" v="3348" actId="1076"/>
-          <ac:picMkLst>
-            <pc:docMk/>
-            <pc:sldMk cId="1680002346" sldId="329"/>
-            <ac:picMk id="5" creationId="{04F15152-2C0C-4230-8C26-EE79745FAFA3}"/>
-          </ac:picMkLst>
-        </pc:picChg>
-        <pc:picChg chg="add mod">
-          <ac:chgData name="LEUNG Nicole" userId="8ed04819-1a1c-42ab-ae09-44d42575f3a6" providerId="ADAL" clId="{46AED7F8-18BE-4C7E-B9AC-F4C2CA2D1D79}" dt="2023-03-27T08:06:55.969" v="3347" actId="14100"/>
-          <ac:picMkLst>
-            <pc:docMk/>
-            <pc:sldMk cId="1680002346" sldId="329"/>
-            <ac:picMk id="7" creationId="{4ECEBB5A-382C-48A1-A362-96EE731A4B2C}"/>
-          </ac:picMkLst>
-        </pc:picChg>
-      </pc:sldChg>
-      <pc:sldChg chg="addSp delSp modSp new mod">
-        <pc:chgData name="LEUNG Nicole" userId="8ed04819-1a1c-42ab-ae09-44d42575f3a6" providerId="ADAL" clId="{46AED7F8-18BE-4C7E-B9AC-F4C2CA2D1D79}" dt="2023-03-27T07:42:24.476" v="3313" actId="1076"/>
-        <pc:sldMkLst>
-          <pc:docMk/>
-          <pc:sldMk cId="2074922080" sldId="330"/>
-        </pc:sldMkLst>
-        <pc:spChg chg="del">
-          <ac:chgData name="LEUNG Nicole" userId="8ed04819-1a1c-42ab-ae09-44d42575f3a6" providerId="ADAL" clId="{46AED7F8-18BE-4C7E-B9AC-F4C2CA2D1D79}" dt="2023-03-27T07:38:11.184" v="3302" actId="478"/>
-          <ac:spMkLst>
-            <pc:docMk/>
-            <pc:sldMk cId="2074922080" sldId="330"/>
-            <ac:spMk id="2" creationId="{527BF387-9D19-465A-AD31-702E485927BF}"/>
-          </ac:spMkLst>
-        </pc:spChg>
-        <pc:spChg chg="del">
-          <ac:chgData name="LEUNG Nicole" userId="8ed04819-1a1c-42ab-ae09-44d42575f3a6" providerId="ADAL" clId="{46AED7F8-18BE-4C7E-B9AC-F4C2CA2D1D79}" dt="2023-03-27T07:38:07.636" v="3301" actId="478"/>
-          <ac:spMkLst>
-            <pc:docMk/>
-            <pc:sldMk cId="2074922080" sldId="330"/>
-            <ac:spMk id="3" creationId="{29344073-8376-4C02-AF18-C2FD08BF6D76}"/>
-          </ac:spMkLst>
-        </pc:spChg>
-        <pc:spChg chg="add mod">
-          <ac:chgData name="LEUNG Nicole" userId="8ed04819-1a1c-42ab-ae09-44d42575f3a6" providerId="ADAL" clId="{46AED7F8-18BE-4C7E-B9AC-F4C2CA2D1D79}" dt="2023-03-27T07:42:11.979" v="3308" actId="1076"/>
-          <ac:spMkLst>
-            <pc:docMk/>
-            <pc:sldMk cId="2074922080" sldId="330"/>
-            <ac:spMk id="6" creationId="{D88ED61B-BFD5-408F-9584-EA14267C9EF8}"/>
-          </ac:spMkLst>
-        </pc:spChg>
-        <pc:picChg chg="add mod">
-          <ac:chgData name="LEUNG Nicole" userId="8ed04819-1a1c-42ab-ae09-44d42575f3a6" providerId="ADAL" clId="{46AED7F8-18BE-4C7E-B9AC-F4C2CA2D1D79}" dt="2023-03-27T07:42:24.476" v="3313" actId="1076"/>
-          <ac:picMkLst>
-            <pc:docMk/>
-            <pc:sldMk cId="2074922080" sldId="330"/>
-            <ac:picMk id="5" creationId="{92D01027-C164-42F7-8BEA-7D6084349477}"/>
-          </ac:picMkLst>
-        </pc:picChg>
-        <pc:picChg chg="add mod">
-          <ac:chgData name="LEUNG Nicole" userId="8ed04819-1a1c-42ab-ae09-44d42575f3a6" providerId="ADAL" clId="{46AED7F8-18BE-4C7E-B9AC-F4C2CA2D1D79}" dt="2023-03-27T07:42:19.729" v="3311" actId="1076"/>
-          <ac:picMkLst>
-            <pc:docMk/>
-            <pc:sldMk cId="2074922080" sldId="330"/>
-            <ac:picMk id="8" creationId="{19473CB5-78D4-44CA-9A05-EB6467B59BC8}"/>
-          </ac:picMkLst>
-        </pc:picChg>
-      </pc:sldChg>
-      <pc:sldChg chg="addSp delSp modSp new mod">
-        <pc:chgData name="LEUNG Nicole" userId="8ed04819-1a1c-42ab-ae09-44d42575f3a6" providerId="ADAL" clId="{46AED7F8-18BE-4C7E-B9AC-F4C2CA2D1D79}" dt="2023-03-27T07:38:25.554" v="3303"/>
-        <pc:sldMkLst>
-          <pc:docMk/>
-          <pc:sldMk cId="3008568549" sldId="331"/>
-        </pc:sldMkLst>
-        <pc:spChg chg="del">
-          <ac:chgData name="LEUNG Nicole" userId="8ed04819-1a1c-42ab-ae09-44d42575f3a6" providerId="ADAL" clId="{46AED7F8-18BE-4C7E-B9AC-F4C2CA2D1D79}" dt="2023-03-27T07:37:20.036" v="3295" actId="478"/>
-          <ac:spMkLst>
-            <pc:docMk/>
-            <pc:sldMk cId="3008568549" sldId="331"/>
-            <ac:spMk id="2" creationId="{327AA829-6AE4-479F-8585-89645312E8FD}"/>
-          </ac:spMkLst>
-        </pc:spChg>
-        <pc:spChg chg="del">
-          <ac:chgData name="LEUNG Nicole" userId="8ed04819-1a1c-42ab-ae09-44d42575f3a6" providerId="ADAL" clId="{46AED7F8-18BE-4C7E-B9AC-F4C2CA2D1D79}" dt="2023-03-27T07:37:21.520" v="3296" actId="478"/>
-          <ac:spMkLst>
-            <pc:docMk/>
-            <pc:sldMk cId="3008568549" sldId="331"/>
-            <ac:spMk id="3" creationId="{9A5EFF58-6CBC-4554-8CB1-A07B5997AE88}"/>
-          </ac:spMkLst>
-        </pc:spChg>
-        <pc:spChg chg="add mod">
-          <ac:chgData name="LEUNG Nicole" userId="8ed04819-1a1c-42ab-ae09-44d42575f3a6" providerId="ADAL" clId="{46AED7F8-18BE-4C7E-B9AC-F4C2CA2D1D79}" dt="2023-03-27T07:38:25.554" v="3303"/>
-          <ac:spMkLst>
-            <pc:docMk/>
-            <pc:sldMk cId="3008568549" sldId="331"/>
-            <ac:spMk id="8" creationId="{32942D70-8DC4-4123-8886-A9A19585D2B0}"/>
-          </ac:spMkLst>
-        </pc:spChg>
-        <pc:picChg chg="add mod">
-          <ac:chgData name="LEUNG Nicole" userId="8ed04819-1a1c-42ab-ae09-44d42575f3a6" providerId="ADAL" clId="{46AED7F8-18BE-4C7E-B9AC-F4C2CA2D1D79}" dt="2023-03-27T07:37:23.217" v="3297" actId="1076"/>
-          <ac:picMkLst>
-            <pc:docMk/>
-            <pc:sldMk cId="3008568549" sldId="331"/>
-            <ac:picMk id="5" creationId="{04B91270-73AC-4DE4-BD3E-A4D06FFAACC9}"/>
-          </ac:picMkLst>
-        </pc:picChg>
-        <pc:picChg chg="add mod">
-          <ac:chgData name="LEUNG Nicole" userId="8ed04819-1a1c-42ab-ae09-44d42575f3a6" providerId="ADAL" clId="{46AED7F8-18BE-4C7E-B9AC-F4C2CA2D1D79}" dt="2023-03-27T07:37:36.762" v="3300" actId="1076"/>
-          <ac:picMkLst>
-            <pc:docMk/>
-            <pc:sldMk cId="3008568549" sldId="331"/>
-            <ac:picMk id="7" creationId="{3081D0B5-DCE0-4339-89B0-693435AAA750}"/>
-          </ac:picMkLst>
-        </pc:picChg>
-      </pc:sldChg>
-      <pc:sldChg chg="addSp delSp modSp new mod">
-        <pc:chgData name="LEUNG Nicole" userId="8ed04819-1a1c-42ab-ae09-44d42575f3a6" providerId="ADAL" clId="{46AED7F8-18BE-4C7E-B9AC-F4C2CA2D1D79}" dt="2023-03-27T08:07:29.271" v="3351" actId="21"/>
-        <pc:sldMkLst>
-          <pc:docMk/>
-          <pc:sldMk cId="493213936" sldId="332"/>
-        </pc:sldMkLst>
-        <pc:spChg chg="del">
-          <ac:chgData name="LEUNG Nicole" userId="8ed04819-1a1c-42ab-ae09-44d42575f3a6" providerId="ADAL" clId="{46AED7F8-18BE-4C7E-B9AC-F4C2CA2D1D79}" dt="2023-03-27T07:44:33.928" v="3317" actId="478"/>
-          <ac:spMkLst>
-            <pc:docMk/>
-            <pc:sldMk cId="493213936" sldId="332"/>
-            <ac:spMk id="2" creationId="{D579119B-2DC0-4F3C-BF01-5479A781FDEB}"/>
-          </ac:spMkLst>
-        </pc:spChg>
-        <pc:spChg chg="del mod">
-          <ac:chgData name="LEUNG Nicole" userId="8ed04819-1a1c-42ab-ae09-44d42575f3a6" providerId="ADAL" clId="{46AED7F8-18BE-4C7E-B9AC-F4C2CA2D1D79}" dt="2023-03-27T07:44:30.044" v="3316" actId="478"/>
-          <ac:spMkLst>
-            <pc:docMk/>
-            <pc:sldMk cId="493213936" sldId="332"/>
-            <ac:spMk id="3" creationId="{4BBFCD58-8D9F-44C6-A02A-68E4299EF6D5}"/>
-          </ac:spMkLst>
-        </pc:spChg>
-        <pc:spChg chg="add mod">
-          <ac:chgData name="LEUNG Nicole" userId="8ed04819-1a1c-42ab-ae09-44d42575f3a6" providerId="ADAL" clId="{46AED7F8-18BE-4C7E-B9AC-F4C2CA2D1D79}" dt="2023-03-27T07:44:48.372" v="3323" actId="1076"/>
-          <ac:spMkLst>
-            <pc:docMk/>
-            <pc:sldMk cId="493213936" sldId="332"/>
-            <ac:spMk id="6" creationId="{CD382307-32E6-460A-8790-29FB25CD29C7}"/>
-          </ac:spMkLst>
-        </pc:spChg>
-        <pc:picChg chg="add del mod">
-          <ac:chgData name="LEUNG Nicole" userId="8ed04819-1a1c-42ab-ae09-44d42575f3a6" providerId="ADAL" clId="{46AED7F8-18BE-4C7E-B9AC-F4C2CA2D1D79}" dt="2023-03-27T08:06:51.284" v="3345" actId="21"/>
-          <ac:picMkLst>
-            <pc:docMk/>
-            <pc:sldMk cId="493213936" sldId="332"/>
-            <ac:picMk id="5" creationId="{678CDE12-202F-40DC-B359-9FF6F44E04CF}"/>
-          </ac:picMkLst>
-        </pc:picChg>
-        <pc:picChg chg="add del mod">
-          <ac:chgData name="LEUNG Nicole" userId="8ed04819-1a1c-42ab-ae09-44d42575f3a6" providerId="ADAL" clId="{46AED7F8-18BE-4C7E-B9AC-F4C2CA2D1D79}" dt="2023-03-27T08:07:29.271" v="3351" actId="21"/>
-          <ac:picMkLst>
-            <pc:docMk/>
-            <pc:sldMk cId="493213936" sldId="332"/>
-            <ac:picMk id="8" creationId="{C7B11C78-96A4-4D12-A53E-3F8D3A3368E6}"/>
-          </ac:picMkLst>
-        </pc:picChg>
-        <pc:picChg chg="add mod">
-          <ac:chgData name="LEUNG Nicole" userId="8ed04819-1a1c-42ab-ae09-44d42575f3a6" providerId="ADAL" clId="{46AED7F8-18BE-4C7E-B9AC-F4C2CA2D1D79}" dt="2023-03-27T08:07:06.408" v="3350" actId="1076"/>
-          <ac:picMkLst>
-            <pc:docMk/>
-            <pc:sldMk cId="493213936" sldId="332"/>
-            <ac:picMk id="10" creationId="{DE47D5DB-580C-4A04-83CA-DF713714EB0D}"/>
-          </ac:picMkLst>
-        </pc:picChg>
-      </pc:sldChg>
-      <pc:sldChg chg="addSp delSp modSp new mod">
-        <pc:chgData name="LEUNG Nicole" userId="8ed04819-1a1c-42ab-ae09-44d42575f3a6" providerId="ADAL" clId="{46AED7F8-18BE-4C7E-B9AC-F4C2CA2D1D79}" dt="2023-03-27T08:19:20.131" v="3370" actId="1076"/>
-        <pc:sldMkLst>
-          <pc:docMk/>
-          <pc:sldMk cId="3822795629" sldId="333"/>
-        </pc:sldMkLst>
-        <pc:spChg chg="del">
-          <ac:chgData name="LEUNG Nicole" userId="8ed04819-1a1c-42ab-ae09-44d42575f3a6" providerId="ADAL" clId="{46AED7F8-18BE-4C7E-B9AC-F4C2CA2D1D79}" dt="2023-03-27T07:51:13.436" v="3327" actId="478"/>
-          <ac:spMkLst>
-            <pc:docMk/>
-            <pc:sldMk cId="3822795629" sldId="333"/>
-            <ac:spMk id="2" creationId="{B495BCCC-C12C-4662-A22D-9C617EFAC5C0}"/>
-          </ac:spMkLst>
-        </pc:spChg>
-        <pc:spChg chg="del">
-          <ac:chgData name="LEUNG Nicole" userId="8ed04819-1a1c-42ab-ae09-44d42575f3a6" providerId="ADAL" clId="{46AED7F8-18BE-4C7E-B9AC-F4C2CA2D1D79}" dt="2023-03-27T07:51:12.714" v="3326" actId="478"/>
-          <ac:spMkLst>
-            <pc:docMk/>
-            <pc:sldMk cId="3822795629" sldId="333"/>
-            <ac:spMk id="3" creationId="{AD0B78CB-5864-4426-AB05-BE461634774B}"/>
-          </ac:spMkLst>
-        </pc:spChg>
-        <pc:spChg chg="add mod">
-          <ac:chgData name="LEUNG Nicole" userId="8ed04819-1a1c-42ab-ae09-44d42575f3a6" providerId="ADAL" clId="{46AED7F8-18BE-4C7E-B9AC-F4C2CA2D1D79}" dt="2023-03-27T08:13:24.221" v="3359" actId="1076"/>
-          <ac:spMkLst>
-            <pc:docMk/>
-            <pc:sldMk cId="3822795629" sldId="333"/>
-            <ac:spMk id="4" creationId="{F6AA7075-6E85-4823-BBF1-E2792B252A0B}"/>
-          </ac:spMkLst>
-        </pc:spChg>
-        <pc:picChg chg="add mod">
-          <ac:chgData name="LEUNG Nicole" userId="8ed04819-1a1c-42ab-ae09-44d42575f3a6" providerId="ADAL" clId="{46AED7F8-18BE-4C7E-B9AC-F4C2CA2D1D79}" dt="2023-03-27T08:13:26.168" v="3360" actId="1076"/>
-          <ac:picMkLst>
-            <pc:docMk/>
-            <pc:sldMk cId="3822795629" sldId="333"/>
-            <ac:picMk id="6" creationId="{01BB05F4-9B0D-42A4-AAF2-B9148F87FB2D}"/>
-          </ac:picMkLst>
-        </pc:picChg>
-        <pc:picChg chg="add mod">
-          <ac:chgData name="LEUNG Nicole" userId="8ed04819-1a1c-42ab-ae09-44d42575f3a6" providerId="ADAL" clId="{46AED7F8-18BE-4C7E-B9AC-F4C2CA2D1D79}" dt="2023-03-27T08:19:20.131" v="3370" actId="1076"/>
-          <ac:picMkLst>
-            <pc:docMk/>
-            <pc:sldMk cId="3822795629" sldId="333"/>
-            <ac:picMk id="8" creationId="{0D495F12-9668-4BB1-94BE-085E806F2107}"/>
-          </ac:picMkLst>
-        </pc:picChg>
-      </pc:sldChg>
-      <pc:sldChg chg="addSp delSp modSp new del mod ord">
-        <pc:chgData name="LEUNG Nicole" userId="8ed04819-1a1c-42ab-ae09-44d42575f3a6" providerId="ADAL" clId="{46AED7F8-18BE-4C7E-B9AC-F4C2CA2D1D79}" dt="2023-03-27T08:00:35.966" v="3339" actId="47"/>
-        <pc:sldMkLst>
-          <pc:docMk/>
-          <pc:sldMk cId="1833922371" sldId="334"/>
-        </pc:sldMkLst>
-        <pc:spChg chg="del">
-          <ac:chgData name="LEUNG Nicole" userId="8ed04819-1a1c-42ab-ae09-44d42575f3a6" providerId="ADAL" clId="{46AED7F8-18BE-4C7E-B9AC-F4C2CA2D1D79}" dt="2023-03-27T07:59:33.080" v="3329" actId="478"/>
-          <ac:spMkLst>
-            <pc:docMk/>
-            <pc:sldMk cId="1833922371" sldId="334"/>
-            <ac:spMk id="2" creationId="{906EAAAC-ABCC-4739-A8B3-A94CC01796C7}"/>
-          </ac:spMkLst>
-        </pc:spChg>
-        <pc:spChg chg="del">
-          <ac:chgData name="LEUNG Nicole" userId="8ed04819-1a1c-42ab-ae09-44d42575f3a6" providerId="ADAL" clId="{46AED7F8-18BE-4C7E-B9AC-F4C2CA2D1D79}" dt="2023-03-27T07:59:35.775" v="3330" actId="478"/>
-          <ac:spMkLst>
-            <pc:docMk/>
-            <pc:sldMk cId="1833922371" sldId="334"/>
-            <ac:spMk id="3" creationId="{F1E7CD4E-8E24-41CE-8511-C1A890142391}"/>
-          </ac:spMkLst>
-        </pc:spChg>
-        <pc:spChg chg="add mod">
-          <ac:chgData name="LEUNG Nicole" userId="8ed04819-1a1c-42ab-ae09-44d42575f3a6" providerId="ADAL" clId="{46AED7F8-18BE-4C7E-B9AC-F4C2CA2D1D79}" dt="2023-03-27T07:59:58.642" v="3336"/>
-          <ac:spMkLst>
-            <pc:docMk/>
-            <pc:sldMk cId="1833922371" sldId="334"/>
-            <ac:spMk id="8" creationId="{60E782C1-0976-44A2-B0FF-597E10105C76}"/>
-          </ac:spMkLst>
-        </pc:spChg>
-        <pc:picChg chg="add mod">
-          <ac:chgData name="LEUNG Nicole" userId="8ed04819-1a1c-42ab-ae09-44d42575f3a6" providerId="ADAL" clId="{46AED7F8-18BE-4C7E-B9AC-F4C2CA2D1D79}" dt="2023-03-27T07:59:39.182" v="3333" actId="1076"/>
-          <ac:picMkLst>
-            <pc:docMk/>
-            <pc:sldMk cId="1833922371" sldId="334"/>
-            <ac:picMk id="5" creationId="{D275D455-9BC0-4D6E-9485-845AE21BFBDC}"/>
-          </ac:picMkLst>
-        </pc:picChg>
-        <pc:picChg chg="add mod">
-          <ac:chgData name="LEUNG Nicole" userId="8ed04819-1a1c-42ab-ae09-44d42575f3a6" providerId="ADAL" clId="{46AED7F8-18BE-4C7E-B9AC-F4C2CA2D1D79}" dt="2023-03-27T07:59:44.120" v="3335" actId="1076"/>
-          <ac:picMkLst>
-            <pc:docMk/>
-            <pc:sldMk cId="1833922371" sldId="334"/>
-            <ac:picMk id="7" creationId="{6B703526-66D7-4639-B4C2-F5FA2B97789A}"/>
-          </ac:picMkLst>
-        </pc:picChg>
-      </pc:sldChg>
-      <pc:sldChg chg="addSp delSp modSp new mod">
-        <pc:chgData name="LEUNG Nicole" userId="8ed04819-1a1c-42ab-ae09-44d42575f3a6" providerId="ADAL" clId="{46AED7F8-18BE-4C7E-B9AC-F4C2CA2D1D79}" dt="2023-03-27T08:07:36.290" v="3354" actId="1076"/>
-        <pc:sldMkLst>
-          <pc:docMk/>
-          <pc:sldMk cId="4177304750" sldId="334"/>
-        </pc:sldMkLst>
-        <pc:spChg chg="del">
-          <ac:chgData name="LEUNG Nicole" userId="8ed04819-1a1c-42ab-ae09-44d42575f3a6" providerId="ADAL" clId="{46AED7F8-18BE-4C7E-B9AC-F4C2CA2D1D79}" dt="2023-03-27T08:01:57.602" v="3342" actId="478"/>
-          <ac:spMkLst>
-            <pc:docMk/>
-            <pc:sldMk cId="4177304750" sldId="334"/>
-            <ac:spMk id="2" creationId="{8C32AA81-C39A-45D4-932D-F63C367BB29C}"/>
-          </ac:spMkLst>
-        </pc:spChg>
-        <pc:spChg chg="del">
-          <ac:chgData name="LEUNG Nicole" userId="8ed04819-1a1c-42ab-ae09-44d42575f3a6" providerId="ADAL" clId="{46AED7F8-18BE-4C7E-B9AC-F4C2CA2D1D79}" dt="2023-03-27T08:01:52.497" v="3341" actId="478"/>
-          <ac:spMkLst>
-            <pc:docMk/>
-            <pc:sldMk cId="4177304750" sldId="334"/>
-            <ac:spMk id="3" creationId="{D51D6E97-ACC9-4F48-9D37-020DD8BD5C5B}"/>
-          </ac:spMkLst>
-        </pc:spChg>
-        <pc:spChg chg="add mod">
-          <ac:chgData name="LEUNG Nicole" userId="8ed04819-1a1c-42ab-ae09-44d42575f3a6" providerId="ADAL" clId="{46AED7F8-18BE-4C7E-B9AC-F4C2CA2D1D79}" dt="2023-03-27T08:07:34.735" v="3353"/>
-          <ac:spMkLst>
-            <pc:docMk/>
-            <pc:sldMk cId="4177304750" sldId="334"/>
-            <ac:spMk id="5" creationId="{CDC5E63F-ED25-4732-B364-5A0DB1B47116}"/>
-          </ac:spMkLst>
-        </pc:spChg>
-        <pc:picChg chg="add mod">
-          <ac:chgData name="LEUNG Nicole" userId="8ed04819-1a1c-42ab-ae09-44d42575f3a6" providerId="ADAL" clId="{46AED7F8-18BE-4C7E-B9AC-F4C2CA2D1D79}" dt="2023-03-27T08:07:36.290" v="3354" actId="1076"/>
-          <ac:picMkLst>
-            <pc:docMk/>
-            <pc:sldMk cId="4177304750" sldId="334"/>
-            <ac:picMk id="4" creationId="{FD37A0B0-4E50-42AF-8108-912C5D3A0922}"/>
-          </ac:picMkLst>
-        </pc:picChg>
-      </pc:sldChg>
-      <pc:sldChg chg="addSp delSp modSp new mod">
-        <pc:chgData name="LEUNG Nicole" userId="8ed04819-1a1c-42ab-ae09-44d42575f3a6" providerId="ADAL" clId="{46AED7F8-18BE-4C7E-B9AC-F4C2CA2D1D79}" dt="2023-03-27T08:19:28.517" v="3372" actId="1076"/>
-        <pc:sldMkLst>
-          <pc:docMk/>
-          <pc:sldMk cId="1239691435" sldId="335"/>
-        </pc:sldMkLst>
-        <pc:spChg chg="del mod">
-          <ac:chgData name="LEUNG Nicole" userId="8ed04819-1a1c-42ab-ae09-44d42575f3a6" providerId="ADAL" clId="{46AED7F8-18BE-4C7E-B9AC-F4C2CA2D1D79}" dt="2023-03-27T08:19:08.089" v="3366" actId="478"/>
-          <ac:spMkLst>
-            <pc:docMk/>
-            <pc:sldMk cId="1239691435" sldId="335"/>
-            <ac:spMk id="2" creationId="{40735847-EAE3-4EC5-9AC1-B0D133B52E60}"/>
-          </ac:spMkLst>
-        </pc:spChg>
-        <pc:spChg chg="del">
-          <ac:chgData name="LEUNG Nicole" userId="8ed04819-1a1c-42ab-ae09-44d42575f3a6" providerId="ADAL" clId="{46AED7F8-18BE-4C7E-B9AC-F4C2CA2D1D79}" dt="2023-03-27T08:19:06.064" v="3363"/>
-          <ac:spMkLst>
-            <pc:docMk/>
-            <pc:sldMk cId="1239691435" sldId="335"/>
-            <ac:spMk id="3" creationId="{F07D33DD-F4B7-44C8-8B19-6E587CDA6B0B}"/>
-          </ac:spMkLst>
-        </pc:spChg>
-        <pc:spChg chg="add mod">
-          <ac:chgData name="LEUNG Nicole" userId="8ed04819-1a1c-42ab-ae09-44d42575f3a6" providerId="ADAL" clId="{46AED7F8-18BE-4C7E-B9AC-F4C2CA2D1D79}" dt="2023-03-27T08:19:28.517" v="3372" actId="1076"/>
-          <ac:spMkLst>
-            <pc:docMk/>
-            <pc:sldMk cId="1239691435" sldId="335"/>
-            <ac:spMk id="6" creationId="{993A98B5-EEDD-4C89-92DF-9FB01693CAB0}"/>
-          </ac:spMkLst>
-        </pc:spChg>
-        <pc:picChg chg="add mod">
-          <ac:chgData name="LEUNG Nicole" userId="8ed04819-1a1c-42ab-ae09-44d42575f3a6" providerId="ADAL" clId="{46AED7F8-18BE-4C7E-B9AC-F4C2CA2D1D79}" dt="2023-03-27T08:19:14.327" v="3369" actId="1076"/>
-          <ac:picMkLst>
-            <pc:docMk/>
-            <pc:sldMk cId="1239691435" sldId="335"/>
-            <ac:picMk id="5" creationId="{20881464-6419-4FB8-97D2-F5843AB2C2D8}"/>
-          </ac:picMkLst>
-        </pc:picChg>
-      </pc:sldChg>
-      <pc:sldChg chg="addSp delSp modSp new mod">
-        <pc:chgData name="LEUNG Nicole" userId="8ed04819-1a1c-42ab-ae09-44d42575f3a6" providerId="ADAL" clId="{46AED7F8-18BE-4C7E-B9AC-F4C2CA2D1D79}" dt="2023-03-27T09:51:31.358" v="3437" actId="1076"/>
-        <pc:sldMkLst>
-          <pc:docMk/>
-          <pc:sldMk cId="2823189888" sldId="336"/>
-        </pc:sldMkLst>
-        <pc:spChg chg="del">
-          <ac:chgData name="LEUNG Nicole" userId="8ed04819-1a1c-42ab-ae09-44d42575f3a6" providerId="ADAL" clId="{46AED7F8-18BE-4C7E-B9AC-F4C2CA2D1D79}" dt="2023-03-27T08:33:39.195" v="3375" actId="478"/>
-          <ac:spMkLst>
-            <pc:docMk/>
-            <pc:sldMk cId="2823189888" sldId="336"/>
-            <ac:spMk id="2" creationId="{838B94DE-9D8B-4D0E-94F9-8AC3EF47A60E}"/>
-          </ac:spMkLst>
-        </pc:spChg>
-        <pc:spChg chg="del">
-          <ac:chgData name="LEUNG Nicole" userId="8ed04819-1a1c-42ab-ae09-44d42575f3a6" providerId="ADAL" clId="{46AED7F8-18BE-4C7E-B9AC-F4C2CA2D1D79}" dt="2023-03-27T08:33:34.386" v="3374" actId="478"/>
-          <ac:spMkLst>
-            <pc:docMk/>
-            <pc:sldMk cId="2823189888" sldId="336"/>
-            <ac:spMk id="3" creationId="{FC4CEB9D-23A3-4AED-9FAF-7596CE8CD960}"/>
-          </ac:spMkLst>
-        </pc:spChg>
-        <pc:spChg chg="add mod">
-          <ac:chgData name="LEUNG Nicole" userId="8ed04819-1a1c-42ab-ae09-44d42575f3a6" providerId="ADAL" clId="{46AED7F8-18BE-4C7E-B9AC-F4C2CA2D1D79}" dt="2023-03-27T08:33:44.843" v="3377"/>
-          <ac:spMkLst>
-            <pc:docMk/>
-            <pc:sldMk cId="2823189888" sldId="336"/>
-            <ac:spMk id="6" creationId="{F8583A3D-E8AD-42AF-8EC4-39E5911B1170}"/>
-          </ac:spMkLst>
-        </pc:spChg>
-        <pc:picChg chg="add mod">
-          <ac:chgData name="LEUNG Nicole" userId="8ed04819-1a1c-42ab-ae09-44d42575f3a6" providerId="ADAL" clId="{46AED7F8-18BE-4C7E-B9AC-F4C2CA2D1D79}" dt="2023-03-27T09:51:31.358" v="3437" actId="1076"/>
-          <ac:picMkLst>
-            <pc:docMk/>
-            <pc:sldMk cId="2823189888" sldId="336"/>
-            <ac:picMk id="5" creationId="{9C9B5533-E273-4894-BD98-15C20F57FAF5}"/>
-          </ac:picMkLst>
-        </pc:picChg>
-      </pc:sldChg>
-      <pc:sldChg chg="addSp delSp modSp new mod">
-        <pc:chgData name="LEUNG Nicole" userId="8ed04819-1a1c-42ab-ae09-44d42575f3a6" providerId="ADAL" clId="{46AED7F8-18BE-4C7E-B9AC-F4C2CA2D1D79}" dt="2023-03-27T09:08:55.405" v="3427" actId="1076"/>
-        <pc:sldMkLst>
-          <pc:docMk/>
-          <pc:sldMk cId="274734294" sldId="337"/>
-        </pc:sldMkLst>
-        <pc:spChg chg="del">
-          <ac:chgData name="LEUNG Nicole" userId="8ed04819-1a1c-42ab-ae09-44d42575f3a6" providerId="ADAL" clId="{46AED7F8-18BE-4C7E-B9AC-F4C2CA2D1D79}" dt="2023-03-27T08:44:46.406" v="3381" actId="478"/>
-          <ac:spMkLst>
-            <pc:docMk/>
-            <pc:sldMk cId="274734294" sldId="337"/>
-            <ac:spMk id="2" creationId="{AB1719C8-5EB3-4778-A56C-0DD31EBFE7F3}"/>
-          </ac:spMkLst>
-        </pc:spChg>
-        <pc:spChg chg="del">
-          <ac:chgData name="LEUNG Nicole" userId="8ed04819-1a1c-42ab-ae09-44d42575f3a6" providerId="ADAL" clId="{46AED7F8-18BE-4C7E-B9AC-F4C2CA2D1D79}" dt="2023-03-27T08:44:43.102" v="3380" actId="478"/>
-          <ac:spMkLst>
-            <pc:docMk/>
-            <pc:sldMk cId="274734294" sldId="337"/>
-            <ac:spMk id="3" creationId="{B51466F0-D047-47BD-AA35-4A5F6C5ADA05}"/>
-          </ac:spMkLst>
-        </pc:spChg>
-        <pc:spChg chg="add mod">
-          <ac:chgData name="LEUNG Nicole" userId="8ed04819-1a1c-42ab-ae09-44d42575f3a6" providerId="ADAL" clId="{46AED7F8-18BE-4C7E-B9AC-F4C2CA2D1D79}" dt="2023-03-27T09:08:55.405" v="3427" actId="1076"/>
-          <ac:spMkLst>
-            <pc:docMk/>
-            <pc:sldMk cId="274734294" sldId="337"/>
-            <ac:spMk id="8" creationId="{E0DE995A-7B98-4302-9C3F-CD796EB54B27}"/>
-          </ac:spMkLst>
-        </pc:spChg>
-        <pc:picChg chg="add mod">
-          <ac:chgData name="LEUNG Nicole" userId="8ed04819-1a1c-42ab-ae09-44d42575f3a6" providerId="ADAL" clId="{46AED7F8-18BE-4C7E-B9AC-F4C2CA2D1D79}" dt="2023-03-27T08:50:01.517" v="3383" actId="1076"/>
-          <ac:picMkLst>
-            <pc:docMk/>
-            <pc:sldMk cId="274734294" sldId="337"/>
-            <ac:picMk id="5" creationId="{60CFA0D4-00AD-49AB-B6DD-C6E6C42EEC32}"/>
-          </ac:picMkLst>
-        </pc:picChg>
-        <pc:picChg chg="add mod">
-          <ac:chgData name="LEUNG Nicole" userId="8ed04819-1a1c-42ab-ae09-44d42575f3a6" providerId="ADAL" clId="{46AED7F8-18BE-4C7E-B9AC-F4C2CA2D1D79}" dt="2023-03-27T08:50:05.691" v="3385" actId="1076"/>
-          <ac:picMkLst>
-            <pc:docMk/>
-            <pc:sldMk cId="274734294" sldId="337"/>
-            <ac:picMk id="7" creationId="{7E93C875-3909-4BD1-8AF0-DD324F7BC111}"/>
-          </ac:picMkLst>
-        </pc:picChg>
-      </pc:sldChg>
-      <pc:sldChg chg="addSp delSp modSp new mod">
-        <pc:chgData name="LEUNG Nicole" userId="8ed04819-1a1c-42ab-ae09-44d42575f3a6" providerId="ADAL" clId="{46AED7F8-18BE-4C7E-B9AC-F4C2CA2D1D79}" dt="2023-03-27T08:55:07.538" v="3400" actId="1076"/>
-        <pc:sldMkLst>
-          <pc:docMk/>
-          <pc:sldMk cId="1780598910" sldId="338"/>
-        </pc:sldMkLst>
-        <pc:spChg chg="del">
-          <ac:chgData name="LEUNG Nicole" userId="8ed04819-1a1c-42ab-ae09-44d42575f3a6" providerId="ADAL" clId="{46AED7F8-18BE-4C7E-B9AC-F4C2CA2D1D79}" dt="2023-03-27T08:53:00.125" v="3391" actId="478"/>
-          <ac:spMkLst>
-            <pc:docMk/>
-            <pc:sldMk cId="1780598910" sldId="338"/>
-            <ac:spMk id="2" creationId="{7C4369D1-5C17-4E23-9CEB-549B1823EFDC}"/>
-          </ac:spMkLst>
-        </pc:spChg>
-        <pc:spChg chg="del">
-          <ac:chgData name="LEUNG Nicole" userId="8ed04819-1a1c-42ab-ae09-44d42575f3a6" providerId="ADAL" clId="{46AED7F8-18BE-4C7E-B9AC-F4C2CA2D1D79}" dt="2023-03-27T08:53:01.143" v="3392" actId="478"/>
-          <ac:spMkLst>
-            <pc:docMk/>
-            <pc:sldMk cId="1780598910" sldId="338"/>
-            <ac:spMk id="3" creationId="{C68AA953-374A-4041-B55D-0D6C8B27B0E1}"/>
-          </ac:spMkLst>
-        </pc:spChg>
-        <pc:spChg chg="add mod">
-          <ac:chgData name="LEUNG Nicole" userId="8ed04819-1a1c-42ab-ae09-44d42575f3a6" providerId="ADAL" clId="{46AED7F8-18BE-4C7E-B9AC-F4C2CA2D1D79}" dt="2023-03-27T08:54:36.534" v="3398"/>
-          <ac:spMkLst>
-            <pc:docMk/>
-            <pc:sldMk cId="1780598910" sldId="338"/>
-            <ac:spMk id="8" creationId="{2E1F91EA-6721-4003-A5C7-EBCB0ACD83AE}"/>
-          </ac:spMkLst>
-        </pc:spChg>
-        <pc:picChg chg="add mod">
-          <ac:chgData name="LEUNG Nicole" userId="8ed04819-1a1c-42ab-ae09-44d42575f3a6" providerId="ADAL" clId="{46AED7F8-18BE-4C7E-B9AC-F4C2CA2D1D79}" dt="2023-03-27T08:54:28.590" v="3397" actId="1076"/>
-          <ac:picMkLst>
-            <pc:docMk/>
-            <pc:sldMk cId="1780598910" sldId="338"/>
-            <ac:picMk id="5" creationId="{0EFB74E2-841D-4205-A280-1D444B3E98BC}"/>
-          </ac:picMkLst>
-        </pc:picChg>
-        <pc:picChg chg="add mod">
-          <ac:chgData name="LEUNG Nicole" userId="8ed04819-1a1c-42ab-ae09-44d42575f3a6" providerId="ADAL" clId="{46AED7F8-18BE-4C7E-B9AC-F4C2CA2D1D79}" dt="2023-03-27T08:54:25.994" v="3396" actId="1076"/>
-          <ac:picMkLst>
-            <pc:docMk/>
-            <pc:sldMk cId="1780598910" sldId="338"/>
-            <ac:picMk id="7" creationId="{5B77B50F-D9BA-4EEC-B301-573B75527749}"/>
-          </ac:picMkLst>
-        </pc:picChg>
-        <pc:picChg chg="add mod">
-          <ac:chgData name="LEUNG Nicole" userId="8ed04819-1a1c-42ab-ae09-44d42575f3a6" providerId="ADAL" clId="{46AED7F8-18BE-4C7E-B9AC-F4C2CA2D1D79}" dt="2023-03-27T08:55:07.538" v="3400" actId="1076"/>
-          <ac:picMkLst>
-            <pc:docMk/>
-            <pc:sldMk cId="1780598910" sldId="338"/>
-            <ac:picMk id="9" creationId="{82594EB5-2401-4098-8317-151F18F94C90}"/>
-          </ac:picMkLst>
-        </pc:picChg>
-      </pc:sldChg>
-      <pc:sldChg chg="addSp delSp modSp new mod">
-        <pc:chgData name="LEUNG Nicole" userId="8ed04819-1a1c-42ab-ae09-44d42575f3a6" providerId="ADAL" clId="{46AED7F8-18BE-4C7E-B9AC-F4C2CA2D1D79}" dt="2023-03-27T09:08:33.078" v="3425" actId="1076"/>
-        <pc:sldMkLst>
-          <pc:docMk/>
-          <pc:sldMk cId="1093346677" sldId="339"/>
-        </pc:sldMkLst>
-        <pc:spChg chg="del">
-          <ac:chgData name="LEUNG Nicole" userId="8ed04819-1a1c-42ab-ae09-44d42575f3a6" providerId="ADAL" clId="{46AED7F8-18BE-4C7E-B9AC-F4C2CA2D1D79}" dt="2023-03-27T09:04:15.477" v="3404" actId="478"/>
-          <ac:spMkLst>
-            <pc:docMk/>
-            <pc:sldMk cId="1093346677" sldId="339"/>
-            <ac:spMk id="2" creationId="{5434FDCF-2D4D-454D-B33E-70CA1F8F0770}"/>
-          </ac:spMkLst>
-        </pc:spChg>
-        <pc:spChg chg="del mod">
-          <ac:chgData name="LEUNG Nicole" userId="8ed04819-1a1c-42ab-ae09-44d42575f3a6" providerId="ADAL" clId="{46AED7F8-18BE-4C7E-B9AC-F4C2CA2D1D79}" dt="2023-03-27T09:04:14.722" v="3403" actId="478"/>
-          <ac:spMkLst>
-            <pc:docMk/>
-            <pc:sldMk cId="1093346677" sldId="339"/>
-            <ac:spMk id="3" creationId="{74F104B7-C65E-4FE6-A810-CB598A857BE2}"/>
-          </ac:spMkLst>
-        </pc:spChg>
-        <pc:spChg chg="add mod">
-          <ac:chgData name="LEUNG Nicole" userId="8ed04819-1a1c-42ab-ae09-44d42575f3a6" providerId="ADAL" clId="{46AED7F8-18BE-4C7E-B9AC-F4C2CA2D1D79}" dt="2023-03-27T09:05:17.688" v="3408" actId="1076"/>
-          <ac:spMkLst>
-            <pc:docMk/>
-            <pc:sldMk cId="1093346677" sldId="339"/>
-            <ac:spMk id="6" creationId="{C1302919-9F2E-4926-8B9D-EB6B36C2C84D}"/>
-          </ac:spMkLst>
-        </pc:spChg>
-        <pc:picChg chg="add mod">
-          <ac:chgData name="LEUNG Nicole" userId="8ed04819-1a1c-42ab-ae09-44d42575f3a6" providerId="ADAL" clId="{46AED7F8-18BE-4C7E-B9AC-F4C2CA2D1D79}" dt="2023-03-27T09:04:19.016" v="3406" actId="1076"/>
-          <ac:picMkLst>
-            <pc:docMk/>
-            <pc:sldMk cId="1093346677" sldId="339"/>
-            <ac:picMk id="5" creationId="{67FDCC08-279E-4D33-8196-420D44D231B6}"/>
-          </ac:picMkLst>
-        </pc:picChg>
-        <pc:picChg chg="add mod">
-          <ac:chgData name="LEUNG Nicole" userId="8ed04819-1a1c-42ab-ae09-44d42575f3a6" providerId="ADAL" clId="{46AED7F8-18BE-4C7E-B9AC-F4C2CA2D1D79}" dt="2023-03-27T09:07:59.296" v="3411" actId="14100"/>
-          <ac:picMkLst>
-            <pc:docMk/>
-            <pc:sldMk cId="1093346677" sldId="339"/>
-            <ac:picMk id="8" creationId="{1E25BEE8-4A13-4383-9420-20836482A0C6}"/>
-          </ac:picMkLst>
-        </pc:picChg>
-        <pc:picChg chg="add mod">
-          <ac:chgData name="LEUNG Nicole" userId="8ed04819-1a1c-42ab-ae09-44d42575f3a6" providerId="ADAL" clId="{46AED7F8-18BE-4C7E-B9AC-F4C2CA2D1D79}" dt="2023-03-27T09:08:09.013" v="3415" actId="1076"/>
-          <ac:picMkLst>
-            <pc:docMk/>
-            <pc:sldMk cId="1093346677" sldId="339"/>
-            <ac:picMk id="10" creationId="{52FCE676-1089-4634-A467-37E0673165E0}"/>
-          </ac:picMkLst>
-        </pc:picChg>
-        <pc:picChg chg="add mod">
-          <ac:chgData name="LEUNG Nicole" userId="8ed04819-1a1c-42ab-ae09-44d42575f3a6" providerId="ADAL" clId="{46AED7F8-18BE-4C7E-B9AC-F4C2CA2D1D79}" dt="2023-03-27T09:08:15.420" v="3418" actId="1076"/>
-          <ac:picMkLst>
-            <pc:docMk/>
-            <pc:sldMk cId="1093346677" sldId="339"/>
-            <ac:picMk id="12" creationId="{454BE514-4D0B-4E3D-AE78-A00E945E46B0}"/>
-          </ac:picMkLst>
-        </pc:picChg>
-        <pc:picChg chg="add mod">
-          <ac:chgData name="LEUNG Nicole" userId="8ed04819-1a1c-42ab-ae09-44d42575f3a6" providerId="ADAL" clId="{46AED7F8-18BE-4C7E-B9AC-F4C2CA2D1D79}" dt="2023-03-27T09:08:24.529" v="3421" actId="1076"/>
-          <ac:picMkLst>
-            <pc:docMk/>
-            <pc:sldMk cId="1093346677" sldId="339"/>
-            <ac:picMk id="14" creationId="{03A92E60-D9CF-44EE-89CA-C1EFC6C458F7}"/>
-          </ac:picMkLst>
-        </pc:picChg>
-        <pc:picChg chg="add mod">
-          <ac:chgData name="LEUNG Nicole" userId="8ed04819-1a1c-42ab-ae09-44d42575f3a6" providerId="ADAL" clId="{46AED7F8-18BE-4C7E-B9AC-F4C2CA2D1D79}" dt="2023-03-27T09:08:33.078" v="3425" actId="1076"/>
-          <ac:picMkLst>
-            <pc:docMk/>
-            <pc:sldMk cId="1093346677" sldId="339"/>
-            <ac:picMk id="16" creationId="{E1A556CC-6544-4A87-9AE6-438805FB3962}"/>
-          </ac:picMkLst>
-        </pc:picChg>
-      </pc:sldChg>
-      <pc:sldChg chg="addSp delSp modSp new mod">
-        <pc:chgData name="LEUNG Nicole" userId="8ed04819-1a1c-42ab-ae09-44d42575f3a6" providerId="ADAL" clId="{46AED7F8-18BE-4C7E-B9AC-F4C2CA2D1D79}" dt="2023-03-27T09:11:35.231" v="3436" actId="1076"/>
-        <pc:sldMkLst>
-          <pc:docMk/>
-          <pc:sldMk cId="3817614916" sldId="340"/>
-        </pc:sldMkLst>
-        <pc:spChg chg="del">
-          <ac:chgData name="LEUNG Nicole" userId="8ed04819-1a1c-42ab-ae09-44d42575f3a6" providerId="ADAL" clId="{46AED7F8-18BE-4C7E-B9AC-F4C2CA2D1D79}" dt="2023-03-27T09:10:46.696" v="3430" actId="478"/>
-          <ac:spMkLst>
-            <pc:docMk/>
-            <pc:sldMk cId="3817614916" sldId="340"/>
-            <ac:spMk id="2" creationId="{884E7016-F359-4D8C-8591-B35937571AB7}"/>
-          </ac:spMkLst>
-        </pc:spChg>
-        <pc:spChg chg="del">
-          <ac:chgData name="LEUNG Nicole" userId="8ed04819-1a1c-42ab-ae09-44d42575f3a6" providerId="ADAL" clId="{46AED7F8-18BE-4C7E-B9AC-F4C2CA2D1D79}" dt="2023-03-27T09:10:45.484" v="3429" actId="478"/>
-          <ac:spMkLst>
-            <pc:docMk/>
-            <pc:sldMk cId="3817614916" sldId="340"/>
-            <ac:spMk id="3" creationId="{6543C81E-C997-40A2-8635-D72C4728F77E}"/>
-          </ac:spMkLst>
-        </pc:spChg>
-        <pc:spChg chg="add mod">
-          <ac:chgData name="LEUNG Nicole" userId="8ed04819-1a1c-42ab-ae09-44d42575f3a6" providerId="ADAL" clId="{46AED7F8-18BE-4C7E-B9AC-F4C2CA2D1D79}" dt="2023-03-27T09:11:35.231" v="3436" actId="1076"/>
-          <ac:spMkLst>
-            <pc:docMk/>
-            <pc:sldMk cId="3817614916" sldId="340"/>
-            <ac:spMk id="8" creationId="{797D2667-6440-4655-93A1-9BDB80A4E6E5}"/>
-          </ac:spMkLst>
-        </pc:spChg>
-        <pc:picChg chg="add mod">
-          <ac:chgData name="LEUNG Nicole" userId="8ed04819-1a1c-42ab-ae09-44d42575f3a6" providerId="ADAL" clId="{46AED7F8-18BE-4C7E-B9AC-F4C2CA2D1D79}" dt="2023-03-27T09:10:50.050" v="3432" actId="1076"/>
-          <ac:picMkLst>
-            <pc:docMk/>
-            <pc:sldMk cId="3817614916" sldId="340"/>
-            <ac:picMk id="5" creationId="{A1A8C9C0-8AFD-4B99-9547-FA940C986EDC}"/>
-          </ac:picMkLst>
-        </pc:picChg>
-        <pc:picChg chg="add mod">
-          <ac:chgData name="LEUNG Nicole" userId="8ed04819-1a1c-42ab-ae09-44d42575f3a6" providerId="ADAL" clId="{46AED7F8-18BE-4C7E-B9AC-F4C2CA2D1D79}" dt="2023-03-27T09:10:54.992" v="3434" actId="1076"/>
-          <ac:picMkLst>
-            <pc:docMk/>
-            <pc:sldMk cId="3817614916" sldId="340"/>
-            <ac:picMk id="7" creationId="{583448FA-47BE-4992-B381-E2290FC660D5}"/>
-          </ac:picMkLst>
-        </pc:picChg>
-      </pc:sldChg>
-    </pc:docChg>
-  </pc:docChgLst>
-  <pc:docChgLst>
     <pc:chgData name="AU Kelvin" userId="416e5d84-3133-4774-aa1a-290e1bef47d6" providerId="ADAL" clId="{A135B165-5CC7-47FE-8662-5B5D4DA7B5EA}"/>
     <pc:docChg chg="custSel modSld">
       <pc:chgData name="AU Kelvin" userId="416e5d84-3133-4774-aa1a-290e1bef47d6" providerId="ADAL" clId="{A135B165-5CC7-47FE-8662-5B5D4DA7B5EA}" dt="2023-03-27T07:56:43.527" v="33" actId="1076"/>
@@ -3967,6 +297,3963 @@
     </pc:docChg>
   </pc:docChgLst>
   <pc:docChgLst>
+    <pc:chgData name="LEUNG Nicole" userId="8ed04819-1a1c-42ab-ae09-44d42575f3a6" providerId="ADAL" clId="{46AED7F8-18BE-4C7E-B9AC-F4C2CA2D1D79}"/>
+    <pc:docChg chg="undo custSel addSld delSld modSld sldOrd">
+      <pc:chgData name="LEUNG Nicole" userId="8ed04819-1a1c-42ab-ae09-44d42575f3a6" providerId="ADAL" clId="{46AED7F8-18BE-4C7E-B9AC-F4C2CA2D1D79}" dt="2023-03-28T17:51:28.272" v="3443" actId="1076"/>
+      <pc:docMkLst>
+        <pc:docMk/>
+      </pc:docMkLst>
+      <pc:sldChg chg="delSp modSp mod">
+        <pc:chgData name="LEUNG Nicole" userId="8ed04819-1a1c-42ab-ae09-44d42575f3a6" providerId="ADAL" clId="{46AED7F8-18BE-4C7E-B9AC-F4C2CA2D1D79}" dt="2023-03-22T06:51:12.042" v="2203" actId="478"/>
+        <pc:sldMkLst>
+          <pc:docMk/>
+          <pc:sldMk cId="4093437428" sldId="256"/>
+        </pc:sldMkLst>
+        <pc:spChg chg="mod">
+          <ac:chgData name="LEUNG Nicole" userId="8ed04819-1a1c-42ab-ae09-44d42575f3a6" providerId="ADAL" clId="{46AED7F8-18BE-4C7E-B9AC-F4C2CA2D1D79}" dt="2023-03-22T03:10:47.039" v="1236" actId="20577"/>
+          <ac:spMkLst>
+            <pc:docMk/>
+            <pc:sldMk cId="4093437428" sldId="256"/>
+            <ac:spMk id="2" creationId="{266DFD87-74D9-478B-B7FE-8FBC975665C3}"/>
+          </ac:spMkLst>
+        </pc:spChg>
+        <pc:spChg chg="del mod">
+          <ac:chgData name="LEUNG Nicole" userId="8ed04819-1a1c-42ab-ae09-44d42575f3a6" providerId="ADAL" clId="{46AED7F8-18BE-4C7E-B9AC-F4C2CA2D1D79}" dt="2023-03-22T06:51:12.042" v="2203" actId="478"/>
+          <ac:spMkLst>
+            <pc:docMk/>
+            <pc:sldMk cId="4093437428" sldId="256"/>
+            <ac:spMk id="3" creationId="{951F69E3-81D8-4114-B10A-B5C6F26C7E71}"/>
+          </ac:spMkLst>
+        </pc:spChg>
+      </pc:sldChg>
+      <pc:sldChg chg="delSp modSp del mod">
+        <pc:chgData name="LEUNG Nicole" userId="8ed04819-1a1c-42ab-ae09-44d42575f3a6" providerId="ADAL" clId="{46AED7F8-18BE-4C7E-B9AC-F4C2CA2D1D79}" dt="2023-03-21T02:14:04.466" v="216" actId="47"/>
+        <pc:sldMkLst>
+          <pc:docMk/>
+          <pc:sldMk cId="1028999168" sldId="260"/>
+        </pc:sldMkLst>
+        <pc:spChg chg="del mod">
+          <ac:chgData name="LEUNG Nicole" userId="8ed04819-1a1c-42ab-ae09-44d42575f3a6" providerId="ADAL" clId="{46AED7F8-18BE-4C7E-B9AC-F4C2CA2D1D79}" dt="2023-03-21T02:11:21.330" v="123" actId="478"/>
+          <ac:spMkLst>
+            <pc:docMk/>
+            <pc:sldMk cId="1028999168" sldId="260"/>
+            <ac:spMk id="3" creationId="{C78401F4-D234-4A7A-A0E3-62DD7C5EADD8}"/>
+          </ac:spMkLst>
+        </pc:spChg>
+        <pc:spChg chg="mod">
+          <ac:chgData name="LEUNG Nicole" userId="8ed04819-1a1c-42ab-ae09-44d42575f3a6" providerId="ADAL" clId="{46AED7F8-18BE-4C7E-B9AC-F4C2CA2D1D79}" dt="2023-03-21T02:12:12.812" v="213" actId="20577"/>
+          <ac:spMkLst>
+            <pc:docMk/>
+            <pc:sldMk cId="1028999168" sldId="260"/>
+            <ac:spMk id="15" creationId="{8F59E620-E10D-4CBA-9DE1-3BD87A128217}"/>
+          </ac:spMkLst>
+        </pc:spChg>
+        <pc:picChg chg="mod">
+          <ac:chgData name="LEUNG Nicole" userId="8ed04819-1a1c-42ab-ae09-44d42575f3a6" providerId="ADAL" clId="{46AED7F8-18BE-4C7E-B9AC-F4C2CA2D1D79}" dt="2023-03-21T02:11:23.451" v="124" actId="1076"/>
+          <ac:picMkLst>
+            <pc:docMk/>
+            <pc:sldMk cId="1028999168" sldId="260"/>
+            <ac:picMk id="9" creationId="{D0C3EEC8-9ED8-481B-B458-07ADB548E10D}"/>
+          </ac:picMkLst>
+        </pc:picChg>
+      </pc:sldChg>
+      <pc:sldChg chg="delSp modSp del mod">
+        <pc:chgData name="LEUNG Nicole" userId="8ed04819-1a1c-42ab-ae09-44d42575f3a6" providerId="ADAL" clId="{46AED7F8-18BE-4C7E-B9AC-F4C2CA2D1D79}" dt="2023-03-22T07:06:52.800" v="2207" actId="2696"/>
+        <pc:sldMkLst>
+          <pc:docMk/>
+          <pc:sldMk cId="95290033" sldId="261"/>
+        </pc:sldMkLst>
+        <pc:spChg chg="del mod">
+          <ac:chgData name="LEUNG Nicole" userId="8ed04819-1a1c-42ab-ae09-44d42575f3a6" providerId="ADAL" clId="{46AED7F8-18BE-4C7E-B9AC-F4C2CA2D1D79}" dt="2023-03-21T02:13:21.363" v="215" actId="478"/>
+          <ac:spMkLst>
+            <pc:docMk/>
+            <pc:sldMk cId="95290033" sldId="261"/>
+            <ac:spMk id="7" creationId="{EFEBA37C-E7C5-4525-B50F-4974565CCCEF}"/>
+          </ac:spMkLst>
+        </pc:spChg>
+      </pc:sldChg>
+      <pc:sldChg chg="addSp delSp modSp mod">
+        <pc:chgData name="LEUNG Nicole" userId="8ed04819-1a1c-42ab-ae09-44d42575f3a6" providerId="ADAL" clId="{46AED7F8-18BE-4C7E-B9AC-F4C2CA2D1D79}" dt="2023-03-23T09:18:35.262" v="2651" actId="1076"/>
+        <pc:sldMkLst>
+          <pc:docMk/>
+          <pc:sldMk cId="3330272683" sldId="262"/>
+        </pc:sldMkLst>
+        <pc:spChg chg="mod">
+          <ac:chgData name="LEUNG Nicole" userId="8ed04819-1a1c-42ab-ae09-44d42575f3a6" providerId="ADAL" clId="{46AED7F8-18BE-4C7E-B9AC-F4C2CA2D1D79}" dt="2023-03-21T02:15:39.938" v="320" actId="1076"/>
+          <ac:spMkLst>
+            <pc:docMk/>
+            <pc:sldMk cId="3330272683" sldId="262"/>
+            <ac:spMk id="3" creationId="{0722FC5A-B29F-4C58-940E-4D925D707B51}"/>
+          </ac:spMkLst>
+        </pc:spChg>
+        <pc:picChg chg="add mod">
+          <ac:chgData name="LEUNG Nicole" userId="8ed04819-1a1c-42ab-ae09-44d42575f3a6" providerId="ADAL" clId="{46AED7F8-18BE-4C7E-B9AC-F4C2CA2D1D79}" dt="2023-03-23T09:18:27.855" v="2648" actId="1076"/>
+          <ac:picMkLst>
+            <pc:docMk/>
+            <pc:sldMk cId="3330272683" sldId="262"/>
+            <ac:picMk id="5" creationId="{09C5E102-79A3-4F70-98F0-320FA675A3B5}"/>
+          </ac:picMkLst>
+        </pc:picChg>
+        <pc:picChg chg="add mod">
+          <ac:chgData name="LEUNG Nicole" userId="8ed04819-1a1c-42ab-ae09-44d42575f3a6" providerId="ADAL" clId="{46AED7F8-18BE-4C7E-B9AC-F4C2CA2D1D79}" dt="2023-03-23T09:18:35.262" v="2651" actId="1076"/>
+          <ac:picMkLst>
+            <pc:docMk/>
+            <pc:sldMk cId="3330272683" sldId="262"/>
+            <ac:picMk id="7" creationId="{EF134503-1FA0-4564-B306-B785C791FD4D}"/>
+          </ac:picMkLst>
+        </pc:picChg>
+        <pc:picChg chg="del">
+          <ac:chgData name="LEUNG Nicole" userId="8ed04819-1a1c-42ab-ae09-44d42575f3a6" providerId="ADAL" clId="{46AED7F8-18BE-4C7E-B9AC-F4C2CA2D1D79}" dt="2023-03-23T09:18:32.892" v="2649" actId="478"/>
+          <ac:picMkLst>
+            <pc:docMk/>
+            <pc:sldMk cId="3330272683" sldId="262"/>
+            <ac:picMk id="19" creationId="{A9925FD3-3EA1-48B5-B575-8B2931BC9836}"/>
+          </ac:picMkLst>
+        </pc:picChg>
+        <pc:picChg chg="del">
+          <ac:chgData name="LEUNG Nicole" userId="8ed04819-1a1c-42ab-ae09-44d42575f3a6" providerId="ADAL" clId="{46AED7F8-18BE-4C7E-B9AC-F4C2CA2D1D79}" dt="2023-03-23T09:18:26.052" v="2647" actId="478"/>
+          <ac:picMkLst>
+            <pc:docMk/>
+            <pc:sldMk cId="3330272683" sldId="262"/>
+            <ac:picMk id="21" creationId="{EDD630A4-2DB9-4BCC-BE2D-2C106EED9673}"/>
+          </ac:picMkLst>
+        </pc:picChg>
+      </pc:sldChg>
+      <pc:sldChg chg="delSp modSp del mod">
+        <pc:chgData name="LEUNG Nicole" userId="8ed04819-1a1c-42ab-ae09-44d42575f3a6" providerId="ADAL" clId="{46AED7F8-18BE-4C7E-B9AC-F4C2CA2D1D79}" dt="2023-03-22T07:06:54.859" v="2208" actId="2696"/>
+        <pc:sldMkLst>
+          <pc:docMk/>
+          <pc:sldMk cId="1100559221" sldId="264"/>
+        </pc:sldMkLst>
+        <pc:spChg chg="del">
+          <ac:chgData name="LEUNG Nicole" userId="8ed04819-1a1c-42ab-ae09-44d42575f3a6" providerId="ADAL" clId="{46AED7F8-18BE-4C7E-B9AC-F4C2CA2D1D79}" dt="2023-03-22T07:06:17.335" v="2204" actId="478"/>
+          <ac:spMkLst>
+            <pc:docMk/>
+            <pc:sldMk cId="1100559221" sldId="264"/>
+            <ac:spMk id="3" creationId="{7E01052D-ECB1-4400-817C-E1F06F4E8705}"/>
+          </ac:spMkLst>
+        </pc:spChg>
+        <pc:picChg chg="mod">
+          <ac:chgData name="LEUNG Nicole" userId="8ed04819-1a1c-42ab-ae09-44d42575f3a6" providerId="ADAL" clId="{46AED7F8-18BE-4C7E-B9AC-F4C2CA2D1D79}" dt="2023-03-22T07:06:21.022" v="2205" actId="14100"/>
+          <ac:picMkLst>
+            <pc:docMk/>
+            <pc:sldMk cId="1100559221" sldId="264"/>
+            <ac:picMk id="15" creationId="{9168F329-27DA-4FBE-911E-C8E6EB7FFD47}"/>
+          </ac:picMkLst>
+        </pc:picChg>
+      </pc:sldChg>
+      <pc:sldChg chg="addSp delSp modSp mod">
+        <pc:chgData name="LEUNG Nicole" userId="8ed04819-1a1c-42ab-ae09-44d42575f3a6" providerId="ADAL" clId="{46AED7F8-18BE-4C7E-B9AC-F4C2CA2D1D79}" dt="2023-03-23T10:21:26.384" v="2766" actId="20577"/>
+        <pc:sldMkLst>
+          <pc:docMk/>
+          <pc:sldMk cId="3442902861" sldId="266"/>
+        </pc:sldMkLst>
+        <pc:spChg chg="mod">
+          <ac:chgData name="LEUNG Nicole" userId="8ed04819-1a1c-42ab-ae09-44d42575f3a6" providerId="ADAL" clId="{46AED7F8-18BE-4C7E-B9AC-F4C2CA2D1D79}" dt="2023-03-20T09:39:33.549" v="72" actId="20577"/>
+          <ac:spMkLst>
+            <pc:docMk/>
+            <pc:sldMk cId="3442902861" sldId="266"/>
+            <ac:spMk id="2" creationId="{D6124752-D21F-4C37-8C89-5A6D49E7D613}"/>
+          </ac:spMkLst>
+        </pc:spChg>
+        <pc:spChg chg="mod">
+          <ac:chgData name="LEUNG Nicole" userId="8ed04819-1a1c-42ab-ae09-44d42575f3a6" providerId="ADAL" clId="{46AED7F8-18BE-4C7E-B9AC-F4C2CA2D1D79}" dt="2023-03-23T10:21:26.384" v="2766" actId="20577"/>
+          <ac:spMkLst>
+            <pc:docMk/>
+            <pc:sldMk cId="3442902861" sldId="266"/>
+            <ac:spMk id="3" creationId="{0722FC5A-B29F-4C58-940E-4D925D707B51}"/>
+          </ac:spMkLst>
+        </pc:spChg>
+        <pc:spChg chg="del">
+          <ac:chgData name="LEUNG Nicole" userId="8ed04819-1a1c-42ab-ae09-44d42575f3a6" providerId="ADAL" clId="{46AED7F8-18BE-4C7E-B9AC-F4C2CA2D1D79}" dt="2023-03-21T02:07:57.466" v="74" actId="478"/>
+          <ac:spMkLst>
+            <pc:docMk/>
+            <pc:sldMk cId="3442902861" sldId="266"/>
+            <ac:spMk id="4" creationId="{C9D96347-781B-4E78-9CB8-564B28E36891}"/>
+          </ac:spMkLst>
+        </pc:spChg>
+        <pc:spChg chg="del">
+          <ac:chgData name="LEUNG Nicole" userId="8ed04819-1a1c-42ab-ae09-44d42575f3a6" providerId="ADAL" clId="{46AED7F8-18BE-4C7E-B9AC-F4C2CA2D1D79}" dt="2023-03-21T02:07:59.645" v="75" actId="478"/>
+          <ac:spMkLst>
+            <pc:docMk/>
+            <pc:sldMk cId="3442902861" sldId="266"/>
+            <ac:spMk id="9" creationId="{03273A91-309B-4236-B0B9-6383024BC413}"/>
+          </ac:spMkLst>
+        </pc:spChg>
+        <pc:spChg chg="mod">
+          <ac:chgData name="LEUNG Nicole" userId="8ed04819-1a1c-42ab-ae09-44d42575f3a6" providerId="ADAL" clId="{46AED7F8-18BE-4C7E-B9AC-F4C2CA2D1D79}" dt="2023-03-20T09:34:45.370" v="9" actId="1076"/>
+          <ac:spMkLst>
+            <pc:docMk/>
+            <pc:sldMk cId="3442902861" sldId="266"/>
+            <ac:spMk id="11" creationId="{98EC32FC-078A-48E5-96F1-5E913CA7A096}"/>
+          </ac:spMkLst>
+        </pc:spChg>
+        <pc:picChg chg="add mod">
+          <ac:chgData name="LEUNG Nicole" userId="8ed04819-1a1c-42ab-ae09-44d42575f3a6" providerId="ADAL" clId="{46AED7F8-18BE-4C7E-B9AC-F4C2CA2D1D79}" dt="2023-03-23T09:15:53.377" v="2617" actId="1076"/>
+          <ac:picMkLst>
+            <pc:docMk/>
+            <pc:sldMk cId="3442902861" sldId="266"/>
+            <ac:picMk id="5" creationId="{02F239AC-498C-4F57-8529-63C10EC5F795}"/>
+          </ac:picMkLst>
+        </pc:picChg>
+        <pc:picChg chg="del">
+          <ac:chgData name="LEUNG Nicole" userId="8ed04819-1a1c-42ab-ae09-44d42575f3a6" providerId="ADAL" clId="{46AED7F8-18BE-4C7E-B9AC-F4C2CA2D1D79}" dt="2023-03-20T09:34:27.329" v="3" actId="478"/>
+          <ac:picMkLst>
+            <pc:docMk/>
+            <pc:sldMk cId="3442902861" sldId="266"/>
+            <ac:picMk id="5" creationId="{5A74EE3E-9A1E-4F94-BBA7-B2FF46777420}"/>
+          </ac:picMkLst>
+        </pc:picChg>
+        <pc:picChg chg="add del mod">
+          <ac:chgData name="LEUNG Nicole" userId="8ed04819-1a1c-42ab-ae09-44d42575f3a6" providerId="ADAL" clId="{46AED7F8-18BE-4C7E-B9AC-F4C2CA2D1D79}" dt="2023-03-23T09:15:50.450" v="2615" actId="478"/>
+          <ac:picMkLst>
+            <pc:docMk/>
+            <pc:sldMk cId="3442902861" sldId="266"/>
+            <ac:picMk id="7" creationId="{7523DAA6-B424-4F4C-8905-266DC44A7B71}"/>
+          </ac:picMkLst>
+        </pc:picChg>
+        <pc:picChg chg="del">
+          <ac:chgData name="LEUNG Nicole" userId="8ed04819-1a1c-42ab-ae09-44d42575f3a6" providerId="ADAL" clId="{46AED7F8-18BE-4C7E-B9AC-F4C2CA2D1D79}" dt="2023-03-20T09:34:38.999" v="6" actId="478"/>
+          <ac:picMkLst>
+            <pc:docMk/>
+            <pc:sldMk cId="3442902861" sldId="266"/>
+            <ac:picMk id="8" creationId="{CD290223-998F-4D8F-9134-73173E05E5B3}"/>
+          </ac:picMkLst>
+        </pc:picChg>
+        <pc:picChg chg="add mod">
+          <ac:chgData name="LEUNG Nicole" userId="8ed04819-1a1c-42ab-ae09-44d42575f3a6" providerId="ADAL" clId="{46AED7F8-18BE-4C7E-B9AC-F4C2CA2D1D79}" dt="2023-03-23T09:16:33.394" v="2623" actId="1076"/>
+          <ac:picMkLst>
+            <pc:docMk/>
+            <pc:sldMk cId="3442902861" sldId="266"/>
+            <ac:picMk id="8" creationId="{DB8A69E8-CEEC-4BF7-AD67-4CFCB595910E}"/>
+          </ac:picMkLst>
+        </pc:picChg>
+        <pc:picChg chg="add del mod">
+          <ac:chgData name="LEUNG Nicole" userId="8ed04819-1a1c-42ab-ae09-44d42575f3a6" providerId="ADAL" clId="{46AED7F8-18BE-4C7E-B9AC-F4C2CA2D1D79}" dt="2023-03-23T09:16:29.394" v="2621" actId="478"/>
+          <ac:picMkLst>
+            <pc:docMk/>
+            <pc:sldMk cId="3442902861" sldId="266"/>
+            <ac:picMk id="12" creationId="{513F47FB-2D9D-4325-BA7C-95120D71F953}"/>
+          </ac:picMkLst>
+        </pc:picChg>
+      </pc:sldChg>
+      <pc:sldChg chg="delSp modSp del mod">
+        <pc:chgData name="LEUNG Nicole" userId="8ed04819-1a1c-42ab-ae09-44d42575f3a6" providerId="ADAL" clId="{46AED7F8-18BE-4C7E-B9AC-F4C2CA2D1D79}" dt="2023-03-21T02:09:59.881" v="116" actId="47"/>
+        <pc:sldMkLst>
+          <pc:docMk/>
+          <pc:sldMk cId="2172804706" sldId="267"/>
+        </pc:sldMkLst>
+        <pc:spChg chg="mod">
+          <ac:chgData name="LEUNG Nicole" userId="8ed04819-1a1c-42ab-ae09-44d42575f3a6" providerId="ADAL" clId="{46AED7F8-18BE-4C7E-B9AC-F4C2CA2D1D79}" dt="2023-03-20T09:35:59.790" v="33" actId="1076"/>
+          <ac:spMkLst>
+            <pc:docMk/>
+            <pc:sldMk cId="2172804706" sldId="267"/>
+            <ac:spMk id="10" creationId="{FF0B31A4-D45C-4380-81C8-B123342A71E6}"/>
+          </ac:spMkLst>
+        </pc:spChg>
+        <pc:spChg chg="del">
+          <ac:chgData name="LEUNG Nicole" userId="8ed04819-1a1c-42ab-ae09-44d42575f3a6" providerId="ADAL" clId="{46AED7F8-18BE-4C7E-B9AC-F4C2CA2D1D79}" dt="2023-03-21T02:08:57.242" v="97" actId="478"/>
+          <ac:spMkLst>
+            <pc:docMk/>
+            <pc:sldMk cId="2172804706" sldId="267"/>
+            <ac:spMk id="14" creationId="{843880E1-89C4-441D-B393-B5D6DE0B89CD}"/>
+          </ac:spMkLst>
+        </pc:spChg>
+        <pc:spChg chg="del mod">
+          <ac:chgData name="LEUNG Nicole" userId="8ed04819-1a1c-42ab-ae09-44d42575f3a6" providerId="ADAL" clId="{46AED7F8-18BE-4C7E-B9AC-F4C2CA2D1D79}" dt="2023-03-21T02:08:54.347" v="96" actId="478"/>
+          <ac:spMkLst>
+            <pc:docMk/>
+            <pc:sldMk cId="2172804706" sldId="267"/>
+            <ac:spMk id="15" creationId="{DC29577F-9EF3-473A-AB68-7EF04F3E99D0}"/>
+          </ac:spMkLst>
+        </pc:spChg>
+      </pc:sldChg>
+      <pc:sldChg chg="addSp delSp modSp mod ord">
+        <pc:chgData name="LEUNG Nicole" userId="8ed04819-1a1c-42ab-ae09-44d42575f3a6" providerId="ADAL" clId="{46AED7F8-18BE-4C7E-B9AC-F4C2CA2D1D79}" dt="2023-03-23T09:16:58.081" v="2632" actId="1076"/>
+        <pc:sldMkLst>
+          <pc:docMk/>
+          <pc:sldMk cId="3223329462" sldId="269"/>
+        </pc:sldMkLst>
+        <pc:spChg chg="mod">
+          <ac:chgData name="LEUNG Nicole" userId="8ed04819-1a1c-42ab-ae09-44d42575f3a6" providerId="ADAL" clId="{46AED7F8-18BE-4C7E-B9AC-F4C2CA2D1D79}" dt="2023-03-21T02:08:46.567" v="94" actId="20577"/>
+          <ac:spMkLst>
+            <pc:docMk/>
+            <pc:sldMk cId="3223329462" sldId="269"/>
+            <ac:spMk id="3" creationId="{0722FC5A-B29F-4C58-940E-4D925D707B51}"/>
+          </ac:spMkLst>
+        </pc:spChg>
+        <pc:picChg chg="add mod">
+          <ac:chgData name="LEUNG Nicole" userId="8ed04819-1a1c-42ab-ae09-44d42575f3a6" providerId="ADAL" clId="{46AED7F8-18BE-4C7E-B9AC-F4C2CA2D1D79}" dt="2023-03-23T09:16:51.711" v="2629" actId="1076"/>
+          <ac:picMkLst>
+            <pc:docMk/>
+            <pc:sldMk cId="3223329462" sldId="269"/>
+            <ac:picMk id="4" creationId="{70FCB9BE-470B-4C5A-AFC1-D994A3D784C5}"/>
+          </ac:picMkLst>
+        </pc:picChg>
+        <pc:picChg chg="add del mod">
+          <ac:chgData name="LEUNG Nicole" userId="8ed04819-1a1c-42ab-ae09-44d42575f3a6" providerId="ADAL" clId="{46AED7F8-18BE-4C7E-B9AC-F4C2CA2D1D79}" dt="2023-03-23T09:16:48.572" v="2627" actId="478"/>
+          <ac:picMkLst>
+            <pc:docMk/>
+            <pc:sldMk cId="3223329462" sldId="269"/>
+            <ac:picMk id="7" creationId="{D66CB167-B112-4E89-BAB7-163DA0F37A7A}"/>
+          </ac:picMkLst>
+        </pc:picChg>
+        <pc:picChg chg="del">
+          <ac:chgData name="LEUNG Nicole" userId="8ed04819-1a1c-42ab-ae09-44d42575f3a6" providerId="ADAL" clId="{46AED7F8-18BE-4C7E-B9AC-F4C2CA2D1D79}" dt="2023-03-22T09:58:43.484" v="2607" actId="478"/>
+          <ac:picMkLst>
+            <pc:docMk/>
+            <pc:sldMk cId="3223329462" sldId="269"/>
+            <ac:picMk id="8" creationId="{4EAB1F09-034D-4FBE-B9A1-EEE1406402AA}"/>
+          </ac:picMkLst>
+        </pc:picChg>
+        <pc:picChg chg="add del mod">
+          <ac:chgData name="LEUNG Nicole" userId="8ed04819-1a1c-42ab-ae09-44d42575f3a6" providerId="ADAL" clId="{46AED7F8-18BE-4C7E-B9AC-F4C2CA2D1D79}" dt="2023-03-23T09:16:55.105" v="2630" actId="478"/>
+          <ac:picMkLst>
+            <pc:docMk/>
+            <pc:sldMk cId="3223329462" sldId="269"/>
+            <ac:picMk id="9" creationId="{13DB1E8F-388B-4BC3-B1B9-406DD9E46839}"/>
+          </ac:picMkLst>
+        </pc:picChg>
+        <pc:picChg chg="del">
+          <ac:chgData name="LEUNG Nicole" userId="8ed04819-1a1c-42ab-ae09-44d42575f3a6" providerId="ADAL" clId="{46AED7F8-18BE-4C7E-B9AC-F4C2CA2D1D79}" dt="2023-03-22T09:59:00.981" v="2613" actId="478"/>
+          <ac:picMkLst>
+            <pc:docMk/>
+            <pc:sldMk cId="3223329462" sldId="269"/>
+            <ac:picMk id="10" creationId="{8728F3A2-6B75-49D6-BC9B-800F3AE9B5FD}"/>
+          </ac:picMkLst>
+        </pc:picChg>
+        <pc:picChg chg="add mod">
+          <ac:chgData name="LEUNG Nicole" userId="8ed04819-1a1c-42ab-ae09-44d42575f3a6" providerId="ADAL" clId="{46AED7F8-18BE-4C7E-B9AC-F4C2CA2D1D79}" dt="2023-03-23T09:16:58.081" v="2632" actId="1076"/>
+          <ac:picMkLst>
+            <pc:docMk/>
+            <pc:sldMk cId="3223329462" sldId="269"/>
+            <ac:picMk id="11" creationId="{B0CBAF88-14CA-4CDA-B13C-777E7C833B62}"/>
+          </ac:picMkLst>
+        </pc:picChg>
+      </pc:sldChg>
+      <pc:sldChg chg="addSp modSp mod">
+        <pc:chgData name="LEUNG Nicole" userId="8ed04819-1a1c-42ab-ae09-44d42575f3a6" providerId="ADAL" clId="{46AED7F8-18BE-4C7E-B9AC-F4C2CA2D1D79}" dt="2023-03-28T17:51:28.272" v="3443" actId="1076"/>
+        <pc:sldMkLst>
+          <pc:docMk/>
+          <pc:sldMk cId="148509534" sldId="271"/>
+        </pc:sldMkLst>
+        <pc:spChg chg="add mod">
+          <ac:chgData name="LEUNG Nicole" userId="8ed04819-1a1c-42ab-ae09-44d42575f3a6" providerId="ADAL" clId="{46AED7F8-18BE-4C7E-B9AC-F4C2CA2D1D79}" dt="2023-03-23T10:21:06.494" v="2740" actId="20577"/>
+          <ac:spMkLst>
+            <pc:docMk/>
+            <pc:sldMk cId="148509534" sldId="271"/>
+            <ac:spMk id="3" creationId="{134FAAA6-14F0-4BE8-8AB8-3516A7979DCB}"/>
+          </ac:spMkLst>
+        </pc:spChg>
+        <pc:spChg chg="mod">
+          <ac:chgData name="LEUNG Nicole" userId="8ed04819-1a1c-42ab-ae09-44d42575f3a6" providerId="ADAL" clId="{46AED7F8-18BE-4C7E-B9AC-F4C2CA2D1D79}" dt="2023-03-28T17:51:28.272" v="3443" actId="1076"/>
+          <ac:spMkLst>
+            <pc:docMk/>
+            <pc:sldMk cId="148509534" sldId="271"/>
+            <ac:spMk id="4" creationId="{8E3D1676-23E6-4E72-B18A-7D13DBAD6907}"/>
+          </ac:spMkLst>
+        </pc:spChg>
+        <pc:spChg chg="mod">
+          <ac:chgData name="LEUNG Nicole" userId="8ed04819-1a1c-42ab-ae09-44d42575f3a6" providerId="ADAL" clId="{46AED7F8-18BE-4C7E-B9AC-F4C2CA2D1D79}" dt="2023-03-27T03:15:53.493" v="3262" actId="20577"/>
+          <ac:spMkLst>
+            <pc:docMk/>
+            <pc:sldMk cId="148509534" sldId="271"/>
+            <ac:spMk id="10" creationId="{6FDF8BAA-5517-44E5-A349-459CB9334C39}"/>
+          </ac:spMkLst>
+        </pc:spChg>
+        <pc:picChg chg="mod">
+          <ac:chgData name="LEUNG Nicole" userId="8ed04819-1a1c-42ab-ae09-44d42575f3a6" providerId="ADAL" clId="{46AED7F8-18BE-4C7E-B9AC-F4C2CA2D1D79}" dt="2023-03-22T07:18:18.975" v="2218" actId="1076"/>
+          <ac:picMkLst>
+            <pc:docMk/>
+            <pc:sldMk cId="148509534" sldId="271"/>
+            <ac:picMk id="9" creationId="{3DA9B211-5337-4408-8A2D-37760443C69D}"/>
+          </ac:picMkLst>
+        </pc:picChg>
+      </pc:sldChg>
+      <pc:sldChg chg="del">
+        <pc:chgData name="LEUNG Nicole" userId="8ed04819-1a1c-42ab-ae09-44d42575f3a6" providerId="ADAL" clId="{46AED7F8-18BE-4C7E-B9AC-F4C2CA2D1D79}" dt="2023-03-21T02:09:16.470" v="98" actId="47"/>
+        <pc:sldMkLst>
+          <pc:docMk/>
+          <pc:sldMk cId="689417263" sldId="272"/>
+        </pc:sldMkLst>
+      </pc:sldChg>
+      <pc:sldChg chg="modSp del mod">
+        <pc:chgData name="LEUNG Nicole" userId="8ed04819-1a1c-42ab-ae09-44d42575f3a6" providerId="ADAL" clId="{46AED7F8-18BE-4C7E-B9AC-F4C2CA2D1D79}" dt="2023-03-21T02:11:10.125" v="121" actId="47"/>
+        <pc:sldMkLst>
+          <pc:docMk/>
+          <pc:sldMk cId="689417263" sldId="273"/>
+        </pc:sldMkLst>
+        <pc:spChg chg="mod">
+          <ac:chgData name="LEUNG Nicole" userId="8ed04819-1a1c-42ab-ae09-44d42575f3a6" providerId="ADAL" clId="{46AED7F8-18BE-4C7E-B9AC-F4C2CA2D1D79}" dt="2023-03-21T02:10:15.165" v="118" actId="1076"/>
+          <ac:spMkLst>
+            <pc:docMk/>
+            <pc:sldMk cId="689417263" sldId="273"/>
+            <ac:spMk id="18" creationId="{777FEA76-3A62-4884-92A7-4E415DE0B425}"/>
+          </ac:spMkLst>
+        </pc:spChg>
+      </pc:sldChg>
+      <pc:sldChg chg="del">
+        <pc:chgData name="LEUNG Nicole" userId="8ed04819-1a1c-42ab-ae09-44d42575f3a6" providerId="ADAL" clId="{46AED7F8-18BE-4C7E-B9AC-F4C2CA2D1D79}" dt="2023-03-20T09:33:51.319" v="0" actId="47"/>
+        <pc:sldMkLst>
+          <pc:docMk/>
+          <pc:sldMk cId="4289746519" sldId="274"/>
+        </pc:sldMkLst>
+      </pc:sldChg>
+      <pc:sldChg chg="addSp delSp modSp mod">
+        <pc:chgData name="LEUNG Nicole" userId="8ed04819-1a1c-42ab-ae09-44d42575f3a6" providerId="ADAL" clId="{46AED7F8-18BE-4C7E-B9AC-F4C2CA2D1D79}" dt="2023-03-24T10:30:57.073" v="3219" actId="14100"/>
+        <pc:sldMkLst>
+          <pc:docMk/>
+          <pc:sldMk cId="3717067589" sldId="275"/>
+        </pc:sldMkLst>
+        <pc:spChg chg="mod">
+          <ac:chgData name="LEUNG Nicole" userId="8ed04819-1a1c-42ab-ae09-44d42575f3a6" providerId="ADAL" clId="{46AED7F8-18BE-4C7E-B9AC-F4C2CA2D1D79}" dt="2023-03-24T09:36:24.721" v="2840" actId="14100"/>
+          <ac:spMkLst>
+            <pc:docMk/>
+            <pc:sldMk cId="3717067589" sldId="275"/>
+            <ac:spMk id="2" creationId="{50913557-26C6-4DE5-8056-31DE97D97CC8}"/>
+          </ac:spMkLst>
+        </pc:spChg>
+        <pc:spChg chg="add mod">
+          <ac:chgData name="LEUNG Nicole" userId="8ed04819-1a1c-42ab-ae09-44d42575f3a6" providerId="ADAL" clId="{46AED7F8-18BE-4C7E-B9AC-F4C2CA2D1D79}" dt="2023-03-22T07:45:32.015" v="2268" actId="20577"/>
+          <ac:spMkLst>
+            <pc:docMk/>
+            <pc:sldMk cId="3717067589" sldId="275"/>
+            <ac:spMk id="3" creationId="{33D7F15E-045B-4D7A-B4FB-C49D27CAAB81}"/>
+          </ac:spMkLst>
+        </pc:spChg>
+        <pc:spChg chg="add del mod">
+          <ac:chgData name="LEUNG Nicole" userId="8ed04819-1a1c-42ab-ae09-44d42575f3a6" providerId="ADAL" clId="{46AED7F8-18BE-4C7E-B9AC-F4C2CA2D1D79}" dt="2023-03-23T09:33:50.813" v="2733"/>
+          <ac:spMkLst>
+            <pc:docMk/>
+            <pc:sldMk cId="3717067589" sldId="275"/>
+            <ac:spMk id="6" creationId="{D43D46B1-30BE-4A29-A995-A46914A0400B}"/>
+          </ac:spMkLst>
+        </pc:spChg>
+        <pc:spChg chg="add del mod">
+          <ac:chgData name="LEUNG Nicole" userId="8ed04819-1a1c-42ab-ae09-44d42575f3a6" providerId="ADAL" clId="{46AED7F8-18BE-4C7E-B9AC-F4C2CA2D1D79}" dt="2023-03-24T03:35:08.515" v="2771" actId="478"/>
+          <ac:spMkLst>
+            <pc:docMk/>
+            <pc:sldMk cId="3717067589" sldId="275"/>
+            <ac:spMk id="8" creationId="{C78EB763-545F-4277-9073-990366E1E4D9}"/>
+          </ac:spMkLst>
+        </pc:spChg>
+        <pc:spChg chg="mod">
+          <ac:chgData name="LEUNG Nicole" userId="8ed04819-1a1c-42ab-ae09-44d42575f3a6" providerId="ADAL" clId="{46AED7F8-18BE-4C7E-B9AC-F4C2CA2D1D79}" dt="2023-03-24T10:30:50.623" v="3218" actId="20577"/>
+          <ac:spMkLst>
+            <pc:docMk/>
+            <pc:sldMk cId="3717067589" sldId="275"/>
+            <ac:spMk id="9" creationId="{AD07311F-AE2E-43BA-A80E-67FB67398EEF}"/>
+          </ac:spMkLst>
+        </pc:spChg>
+        <pc:picChg chg="mod">
+          <ac:chgData name="LEUNG Nicole" userId="8ed04819-1a1c-42ab-ae09-44d42575f3a6" providerId="ADAL" clId="{46AED7F8-18BE-4C7E-B9AC-F4C2CA2D1D79}" dt="2023-03-22T09:35:48.967" v="2437" actId="14100"/>
+          <ac:picMkLst>
+            <pc:docMk/>
+            <pc:sldMk cId="3717067589" sldId="275"/>
+            <ac:picMk id="4" creationId="{B67DCFD8-EE9F-412D-95FA-C460B28FF81D}"/>
+          </ac:picMkLst>
+        </pc:picChg>
+        <pc:picChg chg="mod">
+          <ac:chgData name="LEUNG Nicole" userId="8ed04819-1a1c-42ab-ae09-44d42575f3a6" providerId="ADAL" clId="{46AED7F8-18BE-4C7E-B9AC-F4C2CA2D1D79}" dt="2023-03-23T09:30:10.752" v="2705" actId="1076"/>
+          <ac:picMkLst>
+            <pc:docMk/>
+            <pc:sldMk cId="3717067589" sldId="275"/>
+            <ac:picMk id="5" creationId="{5C625D91-5548-47C6-A3B0-00336E786440}"/>
+          </ac:picMkLst>
+        </pc:picChg>
+        <pc:picChg chg="del">
+          <ac:chgData name="LEUNG Nicole" userId="8ed04819-1a1c-42ab-ae09-44d42575f3a6" providerId="ADAL" clId="{46AED7F8-18BE-4C7E-B9AC-F4C2CA2D1D79}" dt="2023-03-24T03:34:59.924" v="2767" actId="478"/>
+          <ac:picMkLst>
+            <pc:docMk/>
+            <pc:sldMk cId="3717067589" sldId="275"/>
+            <ac:picMk id="7" creationId="{AE40A6C8-D29D-4AAC-93E8-1762C83FF2C6}"/>
+          </ac:picMkLst>
+        </pc:picChg>
+        <pc:picChg chg="add mod">
+          <ac:chgData name="LEUNG Nicole" userId="8ed04819-1a1c-42ab-ae09-44d42575f3a6" providerId="ADAL" clId="{46AED7F8-18BE-4C7E-B9AC-F4C2CA2D1D79}" dt="2023-03-24T10:30:57.073" v="3219" actId="14100"/>
+          <ac:picMkLst>
+            <pc:docMk/>
+            <pc:sldMk cId="3717067589" sldId="275"/>
+            <ac:picMk id="11" creationId="{FD9D06BD-044B-4F71-B6BC-14D3B2D8920C}"/>
+          </ac:picMkLst>
+        </pc:picChg>
+      </pc:sldChg>
+      <pc:sldChg chg="modSp mod">
+        <pc:chgData name="LEUNG Nicole" userId="8ed04819-1a1c-42ab-ae09-44d42575f3a6" providerId="ADAL" clId="{46AED7F8-18BE-4C7E-B9AC-F4C2CA2D1D79}" dt="2023-03-21T02:25:45.474" v="721" actId="20577"/>
+        <pc:sldMkLst>
+          <pc:docMk/>
+          <pc:sldMk cId="2242469584" sldId="276"/>
+        </pc:sldMkLst>
+        <pc:spChg chg="mod">
+          <ac:chgData name="LEUNG Nicole" userId="8ed04819-1a1c-42ab-ae09-44d42575f3a6" providerId="ADAL" clId="{46AED7F8-18BE-4C7E-B9AC-F4C2CA2D1D79}" dt="2023-03-21T02:25:45.474" v="721" actId="20577"/>
+          <ac:spMkLst>
+            <pc:docMk/>
+            <pc:sldMk cId="2242469584" sldId="276"/>
+            <ac:spMk id="2" creationId="{BB99FB79-BD8B-40B3-9C9A-C89EF3809370}"/>
+          </ac:spMkLst>
+        </pc:spChg>
+        <pc:picChg chg="mod">
+          <ac:chgData name="LEUNG Nicole" userId="8ed04819-1a1c-42ab-ae09-44d42575f3a6" providerId="ADAL" clId="{46AED7F8-18BE-4C7E-B9AC-F4C2CA2D1D79}" dt="2023-03-21T02:24:28.358" v="666" actId="1076"/>
+          <ac:picMkLst>
+            <pc:docMk/>
+            <pc:sldMk cId="2242469584" sldId="276"/>
+            <ac:picMk id="4" creationId="{52188A1D-31D7-4244-B882-F33431080577}"/>
+          </ac:picMkLst>
+        </pc:picChg>
+      </pc:sldChg>
+      <pc:sldChg chg="del">
+        <pc:chgData name="LEUNG Nicole" userId="8ed04819-1a1c-42ab-ae09-44d42575f3a6" providerId="ADAL" clId="{46AED7F8-18BE-4C7E-B9AC-F4C2CA2D1D79}" dt="2023-03-21T02:11:08.420" v="120" actId="47"/>
+        <pc:sldMkLst>
+          <pc:docMk/>
+          <pc:sldMk cId="1139370413" sldId="277"/>
+        </pc:sldMkLst>
+      </pc:sldChg>
+      <pc:sldChg chg="del">
+        <pc:chgData name="LEUNG Nicole" userId="8ed04819-1a1c-42ab-ae09-44d42575f3a6" providerId="ADAL" clId="{46AED7F8-18BE-4C7E-B9AC-F4C2CA2D1D79}" dt="2023-03-22T07:06:50.411" v="2206" actId="2696"/>
+        <pc:sldMkLst>
+          <pc:docMk/>
+          <pc:sldMk cId="1173804814" sldId="279"/>
+        </pc:sldMkLst>
+      </pc:sldChg>
+      <pc:sldChg chg="modSp del mod">
+        <pc:chgData name="LEUNG Nicole" userId="8ed04819-1a1c-42ab-ae09-44d42575f3a6" providerId="ADAL" clId="{46AED7F8-18BE-4C7E-B9AC-F4C2CA2D1D79}" dt="2023-03-22T07:06:59.729" v="2209" actId="2696"/>
+        <pc:sldMkLst>
+          <pc:docMk/>
+          <pc:sldMk cId="3426910520" sldId="280"/>
+        </pc:sldMkLst>
+        <pc:spChg chg="mod">
+          <ac:chgData name="LEUNG Nicole" userId="8ed04819-1a1c-42ab-ae09-44d42575f3a6" providerId="ADAL" clId="{46AED7F8-18BE-4C7E-B9AC-F4C2CA2D1D79}" dt="2023-03-21T02:14:23.252" v="241" actId="20577"/>
+          <ac:spMkLst>
+            <pc:docMk/>
+            <pc:sldMk cId="3426910520" sldId="280"/>
+            <ac:spMk id="2" creationId="{37702A86-600A-4100-A556-60DB9834732A}"/>
+          </ac:spMkLst>
+        </pc:spChg>
+        <pc:spChg chg="mod">
+          <ac:chgData name="LEUNG Nicole" userId="8ed04819-1a1c-42ab-ae09-44d42575f3a6" providerId="ADAL" clId="{46AED7F8-18BE-4C7E-B9AC-F4C2CA2D1D79}" dt="2023-03-21T02:15:14.678" v="319" actId="20577"/>
+          <ac:spMkLst>
+            <pc:docMk/>
+            <pc:sldMk cId="3426910520" sldId="280"/>
+            <ac:spMk id="3" creationId="{9A6BB529-0666-4400-9FE6-534F0544F88F}"/>
+          </ac:spMkLst>
+        </pc:spChg>
+      </pc:sldChg>
+      <pc:sldChg chg="modSp mod">
+        <pc:chgData name="LEUNG Nicole" userId="8ed04819-1a1c-42ab-ae09-44d42575f3a6" providerId="ADAL" clId="{46AED7F8-18BE-4C7E-B9AC-F4C2CA2D1D79}" dt="2023-03-24T10:31:20.194" v="3220" actId="14100"/>
+        <pc:sldMkLst>
+          <pc:docMk/>
+          <pc:sldMk cId="2849692965" sldId="281"/>
+        </pc:sldMkLst>
+        <pc:picChg chg="mod">
+          <ac:chgData name="LEUNG Nicole" userId="8ed04819-1a1c-42ab-ae09-44d42575f3a6" providerId="ADAL" clId="{46AED7F8-18BE-4C7E-B9AC-F4C2CA2D1D79}" dt="2023-03-24T10:31:20.194" v="3220" actId="14100"/>
+          <ac:picMkLst>
+            <pc:docMk/>
+            <pc:sldMk cId="2849692965" sldId="281"/>
+            <ac:picMk id="4" creationId="{7239D268-D566-4448-A0B5-C4223FAAE021}"/>
+          </ac:picMkLst>
+        </pc:picChg>
+        <pc:picChg chg="mod">
+          <ac:chgData name="LEUNG Nicole" userId="8ed04819-1a1c-42ab-ae09-44d42575f3a6" providerId="ADAL" clId="{46AED7F8-18BE-4C7E-B9AC-F4C2CA2D1D79}" dt="2023-03-21T02:23:52.119" v="660" actId="1076"/>
+          <ac:picMkLst>
+            <pc:docMk/>
+            <pc:sldMk cId="2849692965" sldId="281"/>
+            <ac:picMk id="5" creationId="{80A5A896-78E0-4FB9-8FCB-AEBA436DB3C4}"/>
+          </ac:picMkLst>
+        </pc:picChg>
+      </pc:sldChg>
+      <pc:sldChg chg="addSp delSp modSp mod setBg">
+        <pc:chgData name="LEUNG Nicole" userId="8ed04819-1a1c-42ab-ae09-44d42575f3a6" providerId="ADAL" clId="{46AED7F8-18BE-4C7E-B9AC-F4C2CA2D1D79}" dt="2023-03-27T08:52:07.705" v="3388" actId="1076"/>
+        <pc:sldMkLst>
+          <pc:docMk/>
+          <pc:sldMk cId="4159790325" sldId="283"/>
+        </pc:sldMkLst>
+        <pc:spChg chg="mod">
+          <ac:chgData name="LEUNG Nicole" userId="8ed04819-1a1c-42ab-ae09-44d42575f3a6" providerId="ADAL" clId="{46AED7F8-18BE-4C7E-B9AC-F4C2CA2D1D79}" dt="2023-03-22T09:54:36.137" v="2479" actId="26606"/>
+          <ac:spMkLst>
+            <pc:docMk/>
+            <pc:sldMk cId="4159790325" sldId="283"/>
+            <ac:spMk id="2" creationId="{AED9B812-38EB-43A9-861B-E84234C0DD61}"/>
+          </ac:spMkLst>
+        </pc:spChg>
+        <pc:spChg chg="mod">
+          <ac:chgData name="LEUNG Nicole" userId="8ed04819-1a1c-42ab-ae09-44d42575f3a6" providerId="ADAL" clId="{46AED7F8-18BE-4C7E-B9AC-F4C2CA2D1D79}" dt="2023-03-22T09:54:36.137" v="2479" actId="26606"/>
+          <ac:spMkLst>
+            <pc:docMk/>
+            <pc:sldMk cId="4159790325" sldId="283"/>
+            <ac:spMk id="3" creationId="{6094BA60-024E-4F66-AC74-E5CC6ADC6BE8}"/>
+          </ac:spMkLst>
+        </pc:spChg>
+        <pc:spChg chg="add del mod">
+          <ac:chgData name="LEUNG Nicole" userId="8ed04819-1a1c-42ab-ae09-44d42575f3a6" providerId="ADAL" clId="{46AED7F8-18BE-4C7E-B9AC-F4C2CA2D1D79}" dt="2023-03-24T03:41:57.202" v="2776" actId="478"/>
+          <ac:spMkLst>
+            <pc:docMk/>
+            <pc:sldMk cId="4159790325" sldId="283"/>
+            <ac:spMk id="6" creationId="{8173C2E9-2205-4B3E-9D6E-814EBAA2E878}"/>
+          </ac:spMkLst>
+        </pc:spChg>
+        <pc:spChg chg="add del mod">
+          <ac:chgData name="LEUNG Nicole" userId="8ed04819-1a1c-42ab-ae09-44d42575f3a6" providerId="ADAL" clId="{46AED7F8-18BE-4C7E-B9AC-F4C2CA2D1D79}" dt="2023-03-24T03:59:51.725" v="2838" actId="478"/>
+          <ac:spMkLst>
+            <pc:docMk/>
+            <pc:sldMk cId="4159790325" sldId="283"/>
+            <ac:spMk id="9" creationId="{F23D2C2A-A09E-414D-BCBA-CD9238DC0E93}"/>
+          </ac:spMkLst>
+        </pc:spChg>
+        <pc:spChg chg="add del">
+          <ac:chgData name="LEUNG Nicole" userId="8ed04819-1a1c-42ab-ae09-44d42575f3a6" providerId="ADAL" clId="{46AED7F8-18BE-4C7E-B9AC-F4C2CA2D1D79}" dt="2023-03-22T09:54:36.137" v="2479" actId="26606"/>
+          <ac:spMkLst>
+            <pc:docMk/>
+            <pc:sldMk cId="4159790325" sldId="283"/>
+            <ac:spMk id="13" creationId="{8761DDFE-071F-4200-B0AA-394476C2D2D6}"/>
+          </ac:spMkLst>
+        </pc:spChg>
+        <pc:picChg chg="add del mod">
+          <ac:chgData name="LEUNG Nicole" userId="8ed04819-1a1c-42ab-ae09-44d42575f3a6" providerId="ADAL" clId="{46AED7F8-18BE-4C7E-B9AC-F4C2CA2D1D79}" dt="2023-03-27T08:52:03.263" v="3386" actId="478"/>
+          <ac:picMkLst>
+            <pc:docMk/>
+            <pc:sldMk cId="4159790325" sldId="283"/>
+            <ac:picMk id="5" creationId="{3062CA2E-5E35-45C3-A270-4238BB09F41B}"/>
+          </ac:picMkLst>
+        </pc:picChg>
+        <pc:picChg chg="add mod">
+          <ac:chgData name="LEUNG Nicole" userId="8ed04819-1a1c-42ab-ae09-44d42575f3a6" providerId="ADAL" clId="{46AED7F8-18BE-4C7E-B9AC-F4C2CA2D1D79}" dt="2023-03-27T08:52:07.705" v="3388" actId="1076"/>
+          <ac:picMkLst>
+            <pc:docMk/>
+            <pc:sldMk cId="4159790325" sldId="283"/>
+            <ac:picMk id="6" creationId="{FA529496-14EB-4AE3-8F03-54BE3BBA74A6}"/>
+          </ac:picMkLst>
+        </pc:picChg>
+        <pc:picChg chg="add mod">
+          <ac:chgData name="LEUNG Nicole" userId="8ed04819-1a1c-42ab-ae09-44d42575f3a6" providerId="ADAL" clId="{46AED7F8-18BE-4C7E-B9AC-F4C2CA2D1D79}" dt="2023-03-24T03:42:38.274" v="2778" actId="14100"/>
+          <ac:picMkLst>
+            <pc:docMk/>
+            <pc:sldMk cId="4159790325" sldId="283"/>
+            <ac:picMk id="7" creationId="{30EB559E-CB5D-4B80-B48B-54A453329AA2}"/>
+          </ac:picMkLst>
+        </pc:picChg>
+        <pc:picChg chg="del mod ord">
+          <ac:chgData name="LEUNG Nicole" userId="8ed04819-1a1c-42ab-ae09-44d42575f3a6" providerId="ADAL" clId="{46AED7F8-18BE-4C7E-B9AC-F4C2CA2D1D79}" dt="2023-03-24T03:41:50.967" v="2772" actId="478"/>
+          <ac:picMkLst>
+            <pc:docMk/>
+            <pc:sldMk cId="4159790325" sldId="283"/>
+            <ac:picMk id="8" creationId="{0EB9A571-C79B-404A-B530-1AEBE84475F6}"/>
+          </ac:picMkLst>
+        </pc:picChg>
+        <pc:picChg chg="del mod">
+          <ac:chgData name="LEUNG Nicole" userId="8ed04819-1a1c-42ab-ae09-44d42575f3a6" providerId="ADAL" clId="{46AED7F8-18BE-4C7E-B9AC-F4C2CA2D1D79}" dt="2023-03-22T09:54:24.967" v="2470" actId="478"/>
+          <ac:picMkLst>
+            <pc:docMk/>
+            <pc:sldMk cId="4159790325" sldId="283"/>
+            <ac:picMk id="9" creationId="{F26DD8D8-9976-4726-9BE3-41B1321FE1C1}"/>
+          </ac:picMkLst>
+        </pc:picChg>
+      </pc:sldChg>
+      <pc:sldChg chg="del">
+        <pc:chgData name="LEUNG Nicole" userId="8ed04819-1a1c-42ab-ae09-44d42575f3a6" providerId="ADAL" clId="{46AED7F8-18BE-4C7E-B9AC-F4C2CA2D1D79}" dt="2023-03-21T02:11:05.469" v="119" actId="47"/>
+        <pc:sldMkLst>
+          <pc:docMk/>
+          <pc:sldMk cId="3394698022" sldId="284"/>
+        </pc:sldMkLst>
+      </pc:sldChg>
+      <pc:sldChg chg="addSp delSp modSp mod">
+        <pc:chgData name="LEUNG Nicole" userId="8ed04819-1a1c-42ab-ae09-44d42575f3a6" providerId="ADAL" clId="{46AED7F8-18BE-4C7E-B9AC-F4C2CA2D1D79}" dt="2023-03-24T10:31:52.681" v="3235" actId="20577"/>
+        <pc:sldMkLst>
+          <pc:docMk/>
+          <pc:sldMk cId="1739127976" sldId="285"/>
+        </pc:sldMkLst>
+        <pc:spChg chg="mod">
+          <ac:chgData name="LEUNG Nicole" userId="8ed04819-1a1c-42ab-ae09-44d42575f3a6" providerId="ADAL" clId="{46AED7F8-18BE-4C7E-B9AC-F4C2CA2D1D79}" dt="2023-03-22T03:17:20.433" v="1254" actId="20577"/>
+          <ac:spMkLst>
+            <pc:docMk/>
+            <pc:sldMk cId="1739127976" sldId="285"/>
+            <ac:spMk id="2" creationId="{B1748EFC-037C-4D62-BA8D-09FD14A862CD}"/>
+          </ac:spMkLst>
+        </pc:spChg>
+        <pc:spChg chg="mod">
+          <ac:chgData name="LEUNG Nicole" userId="8ed04819-1a1c-42ab-ae09-44d42575f3a6" providerId="ADAL" clId="{46AED7F8-18BE-4C7E-B9AC-F4C2CA2D1D79}" dt="2023-03-24T10:31:52.681" v="3235" actId="20577"/>
+          <ac:spMkLst>
+            <pc:docMk/>
+            <pc:sldMk cId="1739127976" sldId="285"/>
+            <ac:spMk id="3" creationId="{E1D53481-D0F7-4989-AE93-2EC86E926AEF}"/>
+          </ac:spMkLst>
+        </pc:spChg>
+        <pc:picChg chg="add mod">
+          <ac:chgData name="LEUNG Nicole" userId="8ed04819-1a1c-42ab-ae09-44d42575f3a6" providerId="ADAL" clId="{46AED7F8-18BE-4C7E-B9AC-F4C2CA2D1D79}" dt="2023-03-23T09:19:47.505" v="2654" actId="1076"/>
+          <ac:picMkLst>
+            <pc:docMk/>
+            <pc:sldMk cId="1739127976" sldId="285"/>
+            <ac:picMk id="5" creationId="{84B89F66-48E2-4291-B991-55E17AF995D8}"/>
+          </ac:picMkLst>
+        </pc:picChg>
+        <pc:picChg chg="del">
+          <ac:chgData name="LEUNG Nicole" userId="8ed04819-1a1c-42ab-ae09-44d42575f3a6" providerId="ADAL" clId="{46AED7F8-18BE-4C7E-B9AC-F4C2CA2D1D79}" dt="2023-03-22T03:32:08.828" v="1255" actId="478"/>
+          <ac:picMkLst>
+            <pc:docMk/>
+            <pc:sldMk cId="1739127976" sldId="285"/>
+            <ac:picMk id="5" creationId="{BA50BCDC-823C-4383-96A6-D171EE293D0F}"/>
+          </ac:picMkLst>
+        </pc:picChg>
+        <pc:picChg chg="add del mod">
+          <ac:chgData name="LEUNG Nicole" userId="8ed04819-1a1c-42ab-ae09-44d42575f3a6" providerId="ADAL" clId="{46AED7F8-18BE-4C7E-B9AC-F4C2CA2D1D79}" dt="2023-03-23T09:19:44.580" v="2652" actId="478"/>
+          <ac:picMkLst>
+            <pc:docMk/>
+            <pc:sldMk cId="1739127976" sldId="285"/>
+            <ac:picMk id="6" creationId="{F99A1DBB-DB58-458F-976F-F8E8D9474BB6}"/>
+          </ac:picMkLst>
+        </pc:picChg>
+        <pc:picChg chg="del">
+          <ac:chgData name="LEUNG Nicole" userId="8ed04819-1a1c-42ab-ae09-44d42575f3a6" providerId="ADAL" clId="{46AED7F8-18BE-4C7E-B9AC-F4C2CA2D1D79}" dt="2023-03-22T03:33:31.448" v="1258" actId="478"/>
+          <ac:picMkLst>
+            <pc:docMk/>
+            <pc:sldMk cId="1739127976" sldId="285"/>
+            <ac:picMk id="7" creationId="{720C46F9-6FA2-490F-902F-209B26BFE1BB}"/>
+          </ac:picMkLst>
+        </pc:picChg>
+        <pc:picChg chg="add mod">
+          <ac:chgData name="LEUNG Nicole" userId="8ed04819-1a1c-42ab-ae09-44d42575f3a6" providerId="ADAL" clId="{46AED7F8-18BE-4C7E-B9AC-F4C2CA2D1D79}" dt="2023-03-23T09:20:04.053" v="2657" actId="1076"/>
+          <ac:picMkLst>
+            <pc:docMk/>
+            <pc:sldMk cId="1739127976" sldId="285"/>
+            <ac:picMk id="8" creationId="{8346D190-0508-44DF-B71A-4892DE43BF64}"/>
+          </ac:picMkLst>
+        </pc:picChg>
+        <pc:picChg chg="add del mod">
+          <ac:chgData name="LEUNG Nicole" userId="8ed04819-1a1c-42ab-ae09-44d42575f3a6" providerId="ADAL" clId="{46AED7F8-18BE-4C7E-B9AC-F4C2CA2D1D79}" dt="2023-03-23T09:20:00.918" v="2655" actId="478"/>
+          <ac:picMkLst>
+            <pc:docMk/>
+            <pc:sldMk cId="1739127976" sldId="285"/>
+            <ac:picMk id="9" creationId="{08390D6F-CDAB-4CB4-A655-65C9976FCC8A}"/>
+          </ac:picMkLst>
+        </pc:picChg>
+      </pc:sldChg>
+      <pc:sldChg chg="delSp modSp mod">
+        <pc:chgData name="LEUNG Nicole" userId="8ed04819-1a1c-42ab-ae09-44d42575f3a6" providerId="ADAL" clId="{46AED7F8-18BE-4C7E-B9AC-F4C2CA2D1D79}" dt="2023-03-22T07:20:47.934" v="2220" actId="14734"/>
+        <pc:sldMkLst>
+          <pc:docMk/>
+          <pc:sldMk cId="2244824" sldId="289"/>
+        </pc:sldMkLst>
+        <pc:spChg chg="del">
+          <ac:chgData name="LEUNG Nicole" userId="8ed04819-1a1c-42ab-ae09-44d42575f3a6" providerId="ADAL" clId="{46AED7F8-18BE-4C7E-B9AC-F4C2CA2D1D79}" dt="2023-03-21T02:29:18.918" v="931" actId="478"/>
+          <ac:spMkLst>
+            <pc:docMk/>
+            <pc:sldMk cId="2244824" sldId="289"/>
+            <ac:spMk id="6" creationId="{2033B45C-581A-4A1D-A145-DD2275726760}"/>
+          </ac:spMkLst>
+        </pc:spChg>
+        <pc:graphicFrameChg chg="modGraphic">
+          <ac:chgData name="LEUNG Nicole" userId="8ed04819-1a1c-42ab-ae09-44d42575f3a6" providerId="ADAL" clId="{46AED7F8-18BE-4C7E-B9AC-F4C2CA2D1D79}" dt="2023-03-22T07:20:47.934" v="2220" actId="14734"/>
+          <ac:graphicFrameMkLst>
+            <pc:docMk/>
+            <pc:sldMk cId="2244824" sldId="289"/>
+            <ac:graphicFrameMk id="5" creationId="{896A0D97-381C-44E5-A277-977F62E1C1DE}"/>
+          </ac:graphicFrameMkLst>
+        </pc:graphicFrameChg>
+      </pc:sldChg>
+      <pc:sldChg chg="modSp mod">
+        <pc:chgData name="LEUNG Nicole" userId="8ed04819-1a1c-42ab-ae09-44d42575f3a6" providerId="ADAL" clId="{46AED7F8-18BE-4C7E-B9AC-F4C2CA2D1D79}" dt="2023-03-24T10:00:38.636" v="2953" actId="1076"/>
+        <pc:sldMkLst>
+          <pc:docMk/>
+          <pc:sldMk cId="2506668147" sldId="290"/>
+        </pc:sldMkLst>
+        <pc:spChg chg="mod">
+          <ac:chgData name="LEUNG Nicole" userId="8ed04819-1a1c-42ab-ae09-44d42575f3a6" providerId="ADAL" clId="{46AED7F8-18BE-4C7E-B9AC-F4C2CA2D1D79}" dt="2023-03-22T02:42:03.989" v="1226" actId="14100"/>
+          <ac:spMkLst>
+            <pc:docMk/>
+            <pc:sldMk cId="2506668147" sldId="290"/>
+            <ac:spMk id="2" creationId="{EC523B02-5F95-4633-8AAA-EFDF6751F9AC}"/>
+          </ac:spMkLst>
+        </pc:spChg>
+        <pc:picChg chg="mod">
+          <ac:chgData name="LEUNG Nicole" userId="8ed04819-1a1c-42ab-ae09-44d42575f3a6" providerId="ADAL" clId="{46AED7F8-18BE-4C7E-B9AC-F4C2CA2D1D79}" dt="2023-03-24T10:00:38.636" v="2953" actId="1076"/>
+          <ac:picMkLst>
+            <pc:docMk/>
+            <pc:sldMk cId="2506668147" sldId="290"/>
+            <ac:picMk id="5" creationId="{31A9851F-C57C-4CA1-98C5-EB6157295172}"/>
+          </ac:picMkLst>
+        </pc:picChg>
+        <pc:picChg chg="mod">
+          <ac:chgData name="LEUNG Nicole" userId="8ed04819-1a1c-42ab-ae09-44d42575f3a6" providerId="ADAL" clId="{46AED7F8-18BE-4C7E-B9AC-F4C2CA2D1D79}" dt="2023-03-24T10:00:36.428" v="2952" actId="1076"/>
+          <ac:picMkLst>
+            <pc:docMk/>
+            <pc:sldMk cId="2506668147" sldId="290"/>
+            <ac:picMk id="8" creationId="{EC20F656-3AE7-4635-AF55-0272180D0E2A}"/>
+          </ac:picMkLst>
+        </pc:picChg>
+      </pc:sldChg>
+      <pc:sldChg chg="modSp add del mod ord">
+        <pc:chgData name="LEUNG Nicole" userId="8ed04819-1a1c-42ab-ae09-44d42575f3a6" providerId="ADAL" clId="{46AED7F8-18BE-4C7E-B9AC-F4C2CA2D1D79}" dt="2023-03-20T09:38:30.509" v="40" actId="47"/>
+        <pc:sldMkLst>
+          <pc:docMk/>
+          <pc:sldMk cId="2077699479" sldId="291"/>
+        </pc:sldMkLst>
+        <pc:spChg chg="mod">
+          <ac:chgData name="LEUNG Nicole" userId="8ed04819-1a1c-42ab-ae09-44d42575f3a6" providerId="ADAL" clId="{46AED7F8-18BE-4C7E-B9AC-F4C2CA2D1D79}" dt="2023-03-20T09:38:06.304" v="37"/>
+          <ac:spMkLst>
+            <pc:docMk/>
+            <pc:sldMk cId="2077699479" sldId="291"/>
+            <ac:spMk id="10" creationId="{441E9043-238B-4820-A9B0-7E72A148164F}"/>
+          </ac:spMkLst>
+        </pc:spChg>
+      </pc:sldChg>
+      <pc:sldChg chg="addSp delSp modSp mod ord modShow">
+        <pc:chgData name="LEUNG Nicole" userId="8ed04819-1a1c-42ab-ae09-44d42575f3a6" providerId="ADAL" clId="{46AED7F8-18BE-4C7E-B9AC-F4C2CA2D1D79}" dt="2023-03-23T09:16:41.746" v="2626" actId="1076"/>
+        <pc:sldMkLst>
+          <pc:docMk/>
+          <pc:sldMk cId="1601178964" sldId="292"/>
+        </pc:sldMkLst>
+        <pc:spChg chg="del">
+          <ac:chgData name="LEUNG Nicole" userId="8ed04819-1a1c-42ab-ae09-44d42575f3a6" providerId="ADAL" clId="{46AED7F8-18BE-4C7E-B9AC-F4C2CA2D1D79}" dt="2023-03-21T02:08:03.425" v="76" actId="478"/>
+          <ac:spMkLst>
+            <pc:docMk/>
+            <pc:sldMk cId="1601178964" sldId="292"/>
+            <ac:spMk id="5" creationId="{BA0CD18F-204C-4D36-8D38-C5663BAE40B6}"/>
+          </ac:spMkLst>
+        </pc:spChg>
+        <pc:spChg chg="mod">
+          <ac:chgData name="LEUNG Nicole" userId="8ed04819-1a1c-42ab-ae09-44d42575f3a6" providerId="ADAL" clId="{46AED7F8-18BE-4C7E-B9AC-F4C2CA2D1D79}" dt="2023-03-21T02:09:55.384" v="115" actId="20577"/>
+          <ac:spMkLst>
+            <pc:docMk/>
+            <pc:sldMk cId="1601178964" sldId="292"/>
+            <ac:spMk id="9" creationId="{32E72F45-88B7-48EF-8899-109509120516}"/>
+          </ac:spMkLst>
+        </pc:spChg>
+        <pc:spChg chg="mod">
+          <ac:chgData name="LEUNG Nicole" userId="8ed04819-1a1c-42ab-ae09-44d42575f3a6" providerId="ADAL" clId="{46AED7F8-18BE-4C7E-B9AC-F4C2CA2D1D79}" dt="2023-03-22T09:33:04.518" v="2433" actId="14100"/>
+          <ac:spMkLst>
+            <pc:docMk/>
+            <pc:sldMk cId="1601178964" sldId="292"/>
+            <ac:spMk id="15" creationId="{80001105-1374-432C-8FDD-D954D89771F9}"/>
+          </ac:spMkLst>
+        </pc:spChg>
+        <pc:picChg chg="add del mod">
+          <ac:chgData name="LEUNG Nicole" userId="8ed04819-1a1c-42ab-ae09-44d42575f3a6" providerId="ADAL" clId="{46AED7F8-18BE-4C7E-B9AC-F4C2CA2D1D79}" dt="2023-03-23T09:16:01.576" v="2618" actId="478"/>
+          <ac:picMkLst>
+            <pc:docMk/>
+            <pc:sldMk cId="1601178964" sldId="292"/>
+            <ac:picMk id="3" creationId="{FBFCF111-359A-440D-9574-83FB522B89CD}"/>
+          </ac:picMkLst>
+        </pc:picChg>
+        <pc:picChg chg="add del mod">
+          <ac:chgData name="LEUNG Nicole" userId="8ed04819-1a1c-42ab-ae09-44d42575f3a6" providerId="ADAL" clId="{46AED7F8-18BE-4C7E-B9AC-F4C2CA2D1D79}" dt="2023-03-23T09:16:38.435" v="2624" actId="478"/>
+          <ac:picMkLst>
+            <pc:docMk/>
+            <pc:sldMk cId="1601178964" sldId="292"/>
+            <ac:picMk id="5" creationId="{5796704A-51B9-4A2E-BFC6-861AE28D0DEC}"/>
+          </ac:picMkLst>
+        </pc:picChg>
+        <pc:picChg chg="del">
+          <ac:chgData name="LEUNG Nicole" userId="8ed04819-1a1c-42ab-ae09-44d42575f3a6" providerId="ADAL" clId="{46AED7F8-18BE-4C7E-B9AC-F4C2CA2D1D79}" dt="2023-03-22T09:57:37.133" v="2601" actId="478"/>
+          <ac:picMkLst>
+            <pc:docMk/>
+            <pc:sldMk cId="1601178964" sldId="292"/>
+            <ac:picMk id="7" creationId="{AD71860E-DDC4-4E21-AFE7-604F1F5C2148}"/>
+          </ac:picMkLst>
+        </pc:picChg>
+        <pc:picChg chg="add mod">
+          <ac:chgData name="LEUNG Nicole" userId="8ed04819-1a1c-42ab-ae09-44d42575f3a6" providerId="ADAL" clId="{46AED7F8-18BE-4C7E-B9AC-F4C2CA2D1D79}" dt="2023-03-23T09:16:04.731" v="2620" actId="1076"/>
+          <ac:picMkLst>
+            <pc:docMk/>
+            <pc:sldMk cId="1601178964" sldId="292"/>
+            <ac:picMk id="8" creationId="{77AD99B5-8F17-4373-90C1-4AFEE51401EC}"/>
+          </ac:picMkLst>
+        </pc:picChg>
+        <pc:picChg chg="del">
+          <ac:chgData name="LEUNG Nicole" userId="8ed04819-1a1c-42ab-ae09-44d42575f3a6" providerId="ADAL" clId="{46AED7F8-18BE-4C7E-B9AC-F4C2CA2D1D79}" dt="2023-03-22T09:57:54.954" v="2604" actId="478"/>
+          <ac:picMkLst>
+            <pc:docMk/>
+            <pc:sldMk cId="1601178964" sldId="292"/>
+            <ac:picMk id="10" creationId="{8728F3A2-6B75-49D6-BC9B-800F3AE9B5FD}"/>
+          </ac:picMkLst>
+        </pc:picChg>
+        <pc:picChg chg="add mod">
+          <ac:chgData name="LEUNG Nicole" userId="8ed04819-1a1c-42ab-ae09-44d42575f3a6" providerId="ADAL" clId="{46AED7F8-18BE-4C7E-B9AC-F4C2CA2D1D79}" dt="2023-03-23T09:16:41.746" v="2626" actId="1076"/>
+          <ac:picMkLst>
+            <pc:docMk/>
+            <pc:sldMk cId="1601178964" sldId="292"/>
+            <ac:picMk id="12" creationId="{A697BC1F-C270-4B22-A6C9-3DCDD4988815}"/>
+          </ac:picMkLst>
+        </pc:picChg>
+      </pc:sldChg>
+      <pc:sldChg chg="modSp mod">
+        <pc:chgData name="LEUNG Nicole" userId="8ed04819-1a1c-42ab-ae09-44d42575f3a6" providerId="ADAL" clId="{46AED7F8-18BE-4C7E-B9AC-F4C2CA2D1D79}" dt="2023-03-21T02:37:27.404" v="1008" actId="14100"/>
+        <pc:sldMkLst>
+          <pc:docMk/>
+          <pc:sldMk cId="2645904127" sldId="293"/>
+        </pc:sldMkLst>
+        <pc:spChg chg="mod">
+          <ac:chgData name="LEUNG Nicole" userId="8ed04819-1a1c-42ab-ae09-44d42575f3a6" providerId="ADAL" clId="{46AED7F8-18BE-4C7E-B9AC-F4C2CA2D1D79}" dt="2023-03-21T02:30:48.433" v="1006" actId="20577"/>
+          <ac:spMkLst>
+            <pc:docMk/>
+            <pc:sldMk cId="2645904127" sldId="293"/>
+            <ac:spMk id="2" creationId="{EC523B02-5F95-4633-8AAA-EFDF6751F9AC}"/>
+          </ac:spMkLst>
+        </pc:spChg>
+        <pc:spChg chg="mod">
+          <ac:chgData name="LEUNG Nicole" userId="8ed04819-1a1c-42ab-ae09-44d42575f3a6" providerId="ADAL" clId="{46AED7F8-18BE-4C7E-B9AC-F4C2CA2D1D79}" dt="2023-03-21T02:37:27.404" v="1008" actId="14100"/>
+          <ac:spMkLst>
+            <pc:docMk/>
+            <pc:sldMk cId="2645904127" sldId="293"/>
+            <ac:spMk id="3" creationId="{C4E4A81A-FF7F-43AE-905F-910C1DE44062}"/>
+          </ac:spMkLst>
+        </pc:spChg>
+      </pc:sldChg>
+      <pc:sldChg chg="modSp mod">
+        <pc:chgData name="LEUNG Nicole" userId="8ed04819-1a1c-42ab-ae09-44d42575f3a6" providerId="ADAL" clId="{46AED7F8-18BE-4C7E-B9AC-F4C2CA2D1D79}" dt="2023-03-21T02:39:56.558" v="1206" actId="33524"/>
+        <pc:sldMkLst>
+          <pc:docMk/>
+          <pc:sldMk cId="3602892782" sldId="294"/>
+        </pc:sldMkLst>
+        <pc:spChg chg="mod">
+          <ac:chgData name="LEUNG Nicole" userId="8ed04819-1a1c-42ab-ae09-44d42575f3a6" providerId="ADAL" clId="{46AED7F8-18BE-4C7E-B9AC-F4C2CA2D1D79}" dt="2023-03-21T02:39:56.558" v="1206" actId="33524"/>
+          <ac:spMkLst>
+            <pc:docMk/>
+            <pc:sldMk cId="3602892782" sldId="294"/>
+            <ac:spMk id="3" creationId="{C4E4A81A-FF7F-43AE-905F-910C1DE44062}"/>
+          </ac:spMkLst>
+        </pc:spChg>
+      </pc:sldChg>
+      <pc:sldChg chg="addSp delSp modSp mod">
+        <pc:chgData name="LEUNG Nicole" userId="8ed04819-1a1c-42ab-ae09-44d42575f3a6" providerId="ADAL" clId="{46AED7F8-18BE-4C7E-B9AC-F4C2CA2D1D79}" dt="2023-03-23T09:21:07.708" v="2663" actId="1076"/>
+        <pc:sldMkLst>
+          <pc:docMk/>
+          <pc:sldMk cId="1455654293" sldId="295"/>
+        </pc:sldMkLst>
+        <pc:picChg chg="del">
+          <ac:chgData name="LEUNG Nicole" userId="8ed04819-1a1c-42ab-ae09-44d42575f3a6" providerId="ADAL" clId="{46AED7F8-18BE-4C7E-B9AC-F4C2CA2D1D79}" dt="2023-03-23T09:20:55.903" v="2658" actId="478"/>
+          <ac:picMkLst>
+            <pc:docMk/>
+            <pc:sldMk cId="1455654293" sldId="295"/>
+            <ac:picMk id="5" creationId="{15C938E3-EC16-41DB-8A20-E6C1BB21F1D2}"/>
+          </ac:picMkLst>
+        </pc:picChg>
+        <pc:picChg chg="add mod">
+          <ac:chgData name="LEUNG Nicole" userId="8ed04819-1a1c-42ab-ae09-44d42575f3a6" providerId="ADAL" clId="{46AED7F8-18BE-4C7E-B9AC-F4C2CA2D1D79}" dt="2023-03-23T09:21:00.074" v="2660" actId="1076"/>
+          <ac:picMkLst>
+            <pc:docMk/>
+            <pc:sldMk cId="1455654293" sldId="295"/>
+            <ac:picMk id="6" creationId="{1EC6700F-C9D7-493D-9D22-AA06E3B385BD}"/>
+          </ac:picMkLst>
+        </pc:picChg>
+        <pc:picChg chg="del">
+          <ac:chgData name="LEUNG Nicole" userId="8ed04819-1a1c-42ab-ae09-44d42575f3a6" providerId="ADAL" clId="{46AED7F8-18BE-4C7E-B9AC-F4C2CA2D1D79}" dt="2023-03-23T09:21:04.221" v="2661" actId="478"/>
+          <ac:picMkLst>
+            <pc:docMk/>
+            <pc:sldMk cId="1455654293" sldId="295"/>
+            <ac:picMk id="8" creationId="{B6EDF51D-501E-455D-BA67-1A3BD08EB015}"/>
+          </ac:picMkLst>
+        </pc:picChg>
+        <pc:picChg chg="add mod">
+          <ac:chgData name="LEUNG Nicole" userId="8ed04819-1a1c-42ab-ae09-44d42575f3a6" providerId="ADAL" clId="{46AED7F8-18BE-4C7E-B9AC-F4C2CA2D1D79}" dt="2023-03-23T09:21:07.708" v="2663" actId="1076"/>
+          <ac:picMkLst>
+            <pc:docMk/>
+            <pc:sldMk cId="1455654293" sldId="295"/>
+            <ac:picMk id="9" creationId="{59561249-32BC-4A5A-A93E-D9831124BC4C}"/>
+          </ac:picMkLst>
+        </pc:picChg>
+      </pc:sldChg>
+      <pc:sldChg chg="addSp delSp modSp mod">
+        <pc:chgData name="LEUNG Nicole" userId="8ed04819-1a1c-42ab-ae09-44d42575f3a6" providerId="ADAL" clId="{46AED7F8-18BE-4C7E-B9AC-F4C2CA2D1D79}" dt="2023-03-23T09:21:32.314" v="2669" actId="1076"/>
+        <pc:sldMkLst>
+          <pc:docMk/>
+          <pc:sldMk cId="3145441901" sldId="296"/>
+        </pc:sldMkLst>
+        <pc:picChg chg="del">
+          <ac:chgData name="LEUNG Nicole" userId="8ed04819-1a1c-42ab-ae09-44d42575f3a6" providerId="ADAL" clId="{46AED7F8-18BE-4C7E-B9AC-F4C2CA2D1D79}" dt="2023-03-23T09:21:21.182" v="2664" actId="478"/>
+          <ac:picMkLst>
+            <pc:docMk/>
+            <pc:sldMk cId="3145441901" sldId="296"/>
+            <ac:picMk id="5" creationId="{A1C26CA2-0287-45F1-99A4-5AA5EEC4DC5A}"/>
+          </ac:picMkLst>
+        </pc:picChg>
+        <pc:picChg chg="add mod">
+          <ac:chgData name="LEUNG Nicole" userId="8ed04819-1a1c-42ab-ae09-44d42575f3a6" providerId="ADAL" clId="{46AED7F8-18BE-4C7E-B9AC-F4C2CA2D1D79}" dt="2023-03-23T09:21:24.566" v="2666" actId="1076"/>
+          <ac:picMkLst>
+            <pc:docMk/>
+            <pc:sldMk cId="3145441901" sldId="296"/>
+            <ac:picMk id="6" creationId="{8DD6FAF5-24B3-48E9-B58E-5B6723FED0B6}"/>
+          </ac:picMkLst>
+        </pc:picChg>
+        <pc:picChg chg="del">
+          <ac:chgData name="LEUNG Nicole" userId="8ed04819-1a1c-42ab-ae09-44d42575f3a6" providerId="ADAL" clId="{46AED7F8-18BE-4C7E-B9AC-F4C2CA2D1D79}" dt="2023-03-23T09:21:28.954" v="2667" actId="478"/>
+          <ac:picMkLst>
+            <pc:docMk/>
+            <pc:sldMk cId="3145441901" sldId="296"/>
+            <ac:picMk id="7" creationId="{3E4D60EE-3F1E-45A7-9F75-077CF313EA91}"/>
+          </ac:picMkLst>
+        </pc:picChg>
+        <pc:picChg chg="add mod">
+          <ac:chgData name="LEUNG Nicole" userId="8ed04819-1a1c-42ab-ae09-44d42575f3a6" providerId="ADAL" clId="{46AED7F8-18BE-4C7E-B9AC-F4C2CA2D1D79}" dt="2023-03-23T09:21:32.314" v="2669" actId="1076"/>
+          <ac:picMkLst>
+            <pc:docMk/>
+            <pc:sldMk cId="3145441901" sldId="296"/>
+            <ac:picMk id="9" creationId="{5C3542E3-F7B7-4984-A6F2-790813568661}"/>
+          </ac:picMkLst>
+        </pc:picChg>
+      </pc:sldChg>
+      <pc:sldChg chg="addSp delSp modSp mod">
+        <pc:chgData name="LEUNG Nicole" userId="8ed04819-1a1c-42ab-ae09-44d42575f3a6" providerId="ADAL" clId="{46AED7F8-18BE-4C7E-B9AC-F4C2CA2D1D79}" dt="2023-03-23T09:21:57.090" v="2676" actId="1076"/>
+        <pc:sldMkLst>
+          <pc:docMk/>
+          <pc:sldMk cId="851749145" sldId="297"/>
+        </pc:sldMkLst>
+        <pc:picChg chg="del">
+          <ac:chgData name="LEUNG Nicole" userId="8ed04819-1a1c-42ab-ae09-44d42575f3a6" providerId="ADAL" clId="{46AED7F8-18BE-4C7E-B9AC-F4C2CA2D1D79}" dt="2023-03-23T09:21:46.166" v="2670" actId="478"/>
+          <ac:picMkLst>
+            <pc:docMk/>
+            <pc:sldMk cId="851749145" sldId="297"/>
+            <ac:picMk id="5" creationId="{6D311F15-EAB3-450C-B9CD-D91F16765136}"/>
+          </ac:picMkLst>
+        </pc:picChg>
+        <pc:picChg chg="del mod">
+          <ac:chgData name="LEUNG Nicole" userId="8ed04819-1a1c-42ab-ae09-44d42575f3a6" providerId="ADAL" clId="{46AED7F8-18BE-4C7E-B9AC-F4C2CA2D1D79}" dt="2023-03-23T09:21:53.051" v="2673" actId="478"/>
+          <ac:picMkLst>
+            <pc:docMk/>
+            <pc:sldMk cId="851749145" sldId="297"/>
+            <ac:picMk id="6" creationId="{B95EBAE5-4566-400E-8D78-C5A7247771AC}"/>
+          </ac:picMkLst>
+        </pc:picChg>
+        <pc:picChg chg="add mod">
+          <ac:chgData name="LEUNG Nicole" userId="8ed04819-1a1c-42ab-ae09-44d42575f3a6" providerId="ADAL" clId="{46AED7F8-18BE-4C7E-B9AC-F4C2CA2D1D79}" dt="2023-03-23T09:21:49.185" v="2672" actId="1076"/>
+          <ac:picMkLst>
+            <pc:docMk/>
+            <pc:sldMk cId="851749145" sldId="297"/>
+            <ac:picMk id="7" creationId="{3E3F3997-FDD7-4E02-ADC7-CECA46E73028}"/>
+          </ac:picMkLst>
+        </pc:picChg>
+        <pc:picChg chg="add mod">
+          <ac:chgData name="LEUNG Nicole" userId="8ed04819-1a1c-42ab-ae09-44d42575f3a6" providerId="ADAL" clId="{46AED7F8-18BE-4C7E-B9AC-F4C2CA2D1D79}" dt="2023-03-23T09:21:57.090" v="2676" actId="1076"/>
+          <ac:picMkLst>
+            <pc:docMk/>
+            <pc:sldMk cId="851749145" sldId="297"/>
+            <ac:picMk id="9" creationId="{BAE76938-5887-4499-8A0A-4E9D29CFCE24}"/>
+          </ac:picMkLst>
+        </pc:picChg>
+      </pc:sldChg>
+      <pc:sldChg chg="delSp add setBg delDesignElem">
+        <pc:chgData name="LEUNG Nicole" userId="8ed04819-1a1c-42ab-ae09-44d42575f3a6" providerId="ADAL" clId="{46AED7F8-18BE-4C7E-B9AC-F4C2CA2D1D79}" dt="2023-03-22T07:07:44.961" v="2213"/>
+        <pc:sldMkLst>
+          <pc:docMk/>
+          <pc:sldMk cId="1524054791" sldId="299"/>
+        </pc:sldMkLst>
+        <pc:spChg chg="del">
+          <ac:chgData name="LEUNG Nicole" userId="8ed04819-1a1c-42ab-ae09-44d42575f3a6" providerId="ADAL" clId="{46AED7F8-18BE-4C7E-B9AC-F4C2CA2D1D79}" dt="2023-03-22T07:07:44.961" v="2213"/>
+          <ac:spMkLst>
+            <pc:docMk/>
+            <pc:sldMk cId="1524054791" sldId="299"/>
+            <ac:spMk id="58" creationId="{42D91A80-424C-43FF-B36B-58B851DC5EB1}"/>
+          </ac:spMkLst>
+        </pc:spChg>
+        <pc:spChg chg="del">
+          <ac:chgData name="LEUNG Nicole" userId="8ed04819-1a1c-42ab-ae09-44d42575f3a6" providerId="ADAL" clId="{46AED7F8-18BE-4C7E-B9AC-F4C2CA2D1D79}" dt="2023-03-22T07:07:44.961" v="2213"/>
+          <ac:spMkLst>
+            <pc:docMk/>
+            <pc:sldMk cId="1524054791" sldId="299"/>
+            <ac:spMk id="59" creationId="{99413ED5-9ED4-4772-BCE4-2BCAE6B12E35}"/>
+          </ac:spMkLst>
+        </pc:spChg>
+        <pc:spChg chg="del">
+          <ac:chgData name="LEUNG Nicole" userId="8ed04819-1a1c-42ab-ae09-44d42575f3a6" providerId="ADAL" clId="{46AED7F8-18BE-4C7E-B9AC-F4C2CA2D1D79}" dt="2023-03-22T07:07:44.961" v="2213"/>
+          <ac:spMkLst>
+            <pc:docMk/>
+            <pc:sldMk cId="1524054791" sldId="299"/>
+            <ac:spMk id="60" creationId="{04357C93-F0CB-4A1C-8F77-4E9063789819}"/>
+          </ac:spMkLst>
+        </pc:spChg>
+        <pc:spChg chg="del">
+          <ac:chgData name="LEUNG Nicole" userId="8ed04819-1a1c-42ab-ae09-44d42575f3a6" providerId="ADAL" clId="{46AED7F8-18BE-4C7E-B9AC-F4C2CA2D1D79}" dt="2023-03-22T07:07:44.961" v="2213"/>
+          <ac:spMkLst>
+            <pc:docMk/>
+            <pc:sldMk cId="1524054791" sldId="299"/>
+            <ac:spMk id="61" creationId="{90F533E9-6690-41A8-A372-4C6C622D028D}"/>
+          </ac:spMkLst>
+        </pc:spChg>
+      </pc:sldChg>
+      <pc:sldChg chg="addSp delSp modSp del mod setBg">
+        <pc:chgData name="LEUNG Nicole" userId="8ed04819-1a1c-42ab-ae09-44d42575f3a6" providerId="ADAL" clId="{46AED7F8-18BE-4C7E-B9AC-F4C2CA2D1D79}" dt="2023-03-22T07:07:39.550" v="2210" actId="2696"/>
+        <pc:sldMkLst>
+          <pc:docMk/>
+          <pc:sldMk cId="2796572706" sldId="299"/>
+        </pc:sldMkLst>
+        <pc:spChg chg="mod">
+          <ac:chgData name="LEUNG Nicole" userId="8ed04819-1a1c-42ab-ae09-44d42575f3a6" providerId="ADAL" clId="{46AED7F8-18BE-4C7E-B9AC-F4C2CA2D1D79}" dt="2023-03-22T05:28:36.537" v="1611" actId="26606"/>
+          <ac:spMkLst>
+            <pc:docMk/>
+            <pc:sldMk cId="2796572706" sldId="299"/>
+            <ac:spMk id="2" creationId="{EC523B02-5F95-4633-8AAA-EFDF6751F9AC}"/>
+          </ac:spMkLst>
+        </pc:spChg>
+        <pc:spChg chg="mod ord">
+          <ac:chgData name="LEUNG Nicole" userId="8ed04819-1a1c-42ab-ae09-44d42575f3a6" providerId="ADAL" clId="{46AED7F8-18BE-4C7E-B9AC-F4C2CA2D1D79}" dt="2023-03-22T05:29:07.235" v="1621" actId="1076"/>
+          <ac:spMkLst>
+            <pc:docMk/>
+            <pc:sldMk cId="2796572706" sldId="299"/>
+            <ac:spMk id="3" creationId="{C4E4A81A-FF7F-43AE-905F-910C1DE44062}"/>
+          </ac:spMkLst>
+        </pc:spChg>
+        <pc:spChg chg="add del">
+          <ac:chgData name="LEUNG Nicole" userId="8ed04819-1a1c-42ab-ae09-44d42575f3a6" providerId="ADAL" clId="{46AED7F8-18BE-4C7E-B9AC-F4C2CA2D1D79}" dt="2023-03-22T05:28:27.329" v="1596" actId="26606"/>
+          <ac:spMkLst>
+            <pc:docMk/>
+            <pc:sldMk cId="2796572706" sldId="299"/>
+            <ac:spMk id="15" creationId="{42D91A80-424C-43FF-B36B-58B851DC5EB1}"/>
+          </ac:spMkLst>
+        </pc:spChg>
+        <pc:spChg chg="add del">
+          <ac:chgData name="LEUNG Nicole" userId="8ed04819-1a1c-42ab-ae09-44d42575f3a6" providerId="ADAL" clId="{46AED7F8-18BE-4C7E-B9AC-F4C2CA2D1D79}" dt="2023-03-22T05:28:27.329" v="1596" actId="26606"/>
+          <ac:spMkLst>
+            <pc:docMk/>
+            <pc:sldMk cId="2796572706" sldId="299"/>
+            <ac:spMk id="17" creationId="{99413ED5-9ED4-4772-BCE4-2BCAE6B12E35}"/>
+          </ac:spMkLst>
+        </pc:spChg>
+        <pc:spChg chg="add del">
+          <ac:chgData name="LEUNG Nicole" userId="8ed04819-1a1c-42ab-ae09-44d42575f3a6" providerId="ADAL" clId="{46AED7F8-18BE-4C7E-B9AC-F4C2CA2D1D79}" dt="2023-03-22T05:28:27.329" v="1596" actId="26606"/>
+          <ac:spMkLst>
+            <pc:docMk/>
+            <pc:sldMk cId="2796572706" sldId="299"/>
+            <ac:spMk id="19" creationId="{04357C93-F0CB-4A1C-8F77-4E9063789819}"/>
+          </ac:spMkLst>
+        </pc:spChg>
+        <pc:spChg chg="add del">
+          <ac:chgData name="LEUNG Nicole" userId="8ed04819-1a1c-42ab-ae09-44d42575f3a6" providerId="ADAL" clId="{46AED7F8-18BE-4C7E-B9AC-F4C2CA2D1D79}" dt="2023-03-22T05:28:27.329" v="1596" actId="26606"/>
+          <ac:spMkLst>
+            <pc:docMk/>
+            <pc:sldMk cId="2796572706" sldId="299"/>
+            <ac:spMk id="21" creationId="{90F533E9-6690-41A8-A372-4C6C622D028D}"/>
+          </ac:spMkLst>
+        </pc:spChg>
+        <pc:spChg chg="add del">
+          <ac:chgData name="LEUNG Nicole" userId="8ed04819-1a1c-42ab-ae09-44d42575f3a6" providerId="ADAL" clId="{46AED7F8-18BE-4C7E-B9AC-F4C2CA2D1D79}" dt="2023-03-22T05:28:28.196" v="1598" actId="26606"/>
+          <ac:spMkLst>
+            <pc:docMk/>
+            <pc:sldMk cId="2796572706" sldId="299"/>
+            <ac:spMk id="23" creationId="{0855A890-B60B-4670-9DC2-69DC05015AB3}"/>
+          </ac:spMkLst>
+        </pc:spChg>
+        <pc:spChg chg="add del">
+          <ac:chgData name="LEUNG Nicole" userId="8ed04819-1a1c-42ab-ae09-44d42575f3a6" providerId="ADAL" clId="{46AED7F8-18BE-4C7E-B9AC-F4C2CA2D1D79}" dt="2023-03-22T05:28:28.196" v="1598" actId="26606"/>
+          <ac:spMkLst>
+            <pc:docMk/>
+            <pc:sldMk cId="2796572706" sldId="299"/>
+            <ac:spMk id="24" creationId="{90F533E9-6690-41A8-A372-4C6C622D028D}"/>
+          </ac:spMkLst>
+        </pc:spChg>
+        <pc:spChg chg="add del">
+          <ac:chgData name="LEUNG Nicole" userId="8ed04819-1a1c-42ab-ae09-44d42575f3a6" providerId="ADAL" clId="{46AED7F8-18BE-4C7E-B9AC-F4C2CA2D1D79}" dt="2023-03-22T05:28:28.196" v="1598" actId="26606"/>
+          <ac:spMkLst>
+            <pc:docMk/>
+            <pc:sldMk cId="2796572706" sldId="299"/>
+            <ac:spMk id="25" creationId="{99413ED5-9ED4-4772-BCE4-2BCAE6B12E35}"/>
+          </ac:spMkLst>
+        </pc:spChg>
+        <pc:spChg chg="add del">
+          <ac:chgData name="LEUNG Nicole" userId="8ed04819-1a1c-42ab-ae09-44d42575f3a6" providerId="ADAL" clId="{46AED7F8-18BE-4C7E-B9AC-F4C2CA2D1D79}" dt="2023-03-22T05:28:28.196" v="1598" actId="26606"/>
+          <ac:spMkLst>
+            <pc:docMk/>
+            <pc:sldMk cId="2796572706" sldId="299"/>
+            <ac:spMk id="26" creationId="{04357C93-F0CB-4A1C-8F77-4E9063789819}"/>
+          </ac:spMkLst>
+        </pc:spChg>
+        <pc:spChg chg="add del">
+          <ac:chgData name="LEUNG Nicole" userId="8ed04819-1a1c-42ab-ae09-44d42575f3a6" providerId="ADAL" clId="{46AED7F8-18BE-4C7E-B9AC-F4C2CA2D1D79}" dt="2023-03-22T05:28:30.427" v="1600" actId="26606"/>
+          <ac:spMkLst>
+            <pc:docMk/>
+            <pc:sldMk cId="2796572706" sldId="299"/>
+            <ac:spMk id="28" creationId="{A3C210E6-A35A-4F68-8D60-801A019C75B8}"/>
+          </ac:spMkLst>
+        </pc:spChg>
+        <pc:spChg chg="add del">
+          <ac:chgData name="LEUNG Nicole" userId="8ed04819-1a1c-42ab-ae09-44d42575f3a6" providerId="ADAL" clId="{46AED7F8-18BE-4C7E-B9AC-F4C2CA2D1D79}" dt="2023-03-22T05:28:30.427" v="1600" actId="26606"/>
+          <ac:spMkLst>
+            <pc:docMk/>
+            <pc:sldMk cId="2796572706" sldId="299"/>
+            <ac:spMk id="29" creationId="{AC0D06B0-F19C-459E-B221-A34B506FB5E3}"/>
+          </ac:spMkLst>
+        </pc:spChg>
+        <pc:spChg chg="add del">
+          <ac:chgData name="LEUNG Nicole" userId="8ed04819-1a1c-42ab-ae09-44d42575f3a6" providerId="ADAL" clId="{46AED7F8-18BE-4C7E-B9AC-F4C2CA2D1D79}" dt="2023-03-22T05:28:30.427" v="1600" actId="26606"/>
+          <ac:spMkLst>
+            <pc:docMk/>
+            <pc:sldMk cId="2796572706" sldId="299"/>
+            <ac:spMk id="30" creationId="{345B26DA-1C6B-4C66-81C9-9C1877FC2DB1}"/>
+          </ac:spMkLst>
+        </pc:spChg>
+        <pc:spChg chg="add del">
+          <ac:chgData name="LEUNG Nicole" userId="8ed04819-1a1c-42ab-ae09-44d42575f3a6" providerId="ADAL" clId="{46AED7F8-18BE-4C7E-B9AC-F4C2CA2D1D79}" dt="2023-03-22T05:28:30.427" v="1600" actId="26606"/>
+          <ac:spMkLst>
+            <pc:docMk/>
+            <pc:sldMk cId="2796572706" sldId="299"/>
+            <ac:spMk id="31" creationId="{98DE6C44-43F8-4DE4-AB81-66853FFEA09A}"/>
+          </ac:spMkLst>
+        </pc:spChg>
+        <pc:spChg chg="add del">
+          <ac:chgData name="LEUNG Nicole" userId="8ed04819-1a1c-42ab-ae09-44d42575f3a6" providerId="ADAL" clId="{46AED7F8-18BE-4C7E-B9AC-F4C2CA2D1D79}" dt="2023-03-22T05:28:30.427" v="1600" actId="26606"/>
+          <ac:spMkLst>
+            <pc:docMk/>
+            <pc:sldMk cId="2796572706" sldId="299"/>
+            <ac:spMk id="32" creationId="{2409529B-9B56-4F10-BE4D-F934DB89E57E}"/>
+          </ac:spMkLst>
+        </pc:spChg>
+        <pc:spChg chg="add del">
+          <ac:chgData name="LEUNG Nicole" userId="8ed04819-1a1c-42ab-ae09-44d42575f3a6" providerId="ADAL" clId="{46AED7F8-18BE-4C7E-B9AC-F4C2CA2D1D79}" dt="2023-03-22T05:28:31.439" v="1602" actId="26606"/>
+          <ac:spMkLst>
+            <pc:docMk/>
+            <pc:sldMk cId="2796572706" sldId="299"/>
+            <ac:spMk id="34" creationId="{0855A890-B60B-4670-9DC2-69DC05015AB3}"/>
+          </ac:spMkLst>
+        </pc:spChg>
+        <pc:spChg chg="add del">
+          <ac:chgData name="LEUNG Nicole" userId="8ed04819-1a1c-42ab-ae09-44d42575f3a6" providerId="ADAL" clId="{46AED7F8-18BE-4C7E-B9AC-F4C2CA2D1D79}" dt="2023-03-22T05:28:31.439" v="1602" actId="26606"/>
+          <ac:spMkLst>
+            <pc:docMk/>
+            <pc:sldMk cId="2796572706" sldId="299"/>
+            <ac:spMk id="35" creationId="{90F533E9-6690-41A8-A372-4C6C622D028D}"/>
+          </ac:spMkLst>
+        </pc:spChg>
+        <pc:spChg chg="add del">
+          <ac:chgData name="LEUNG Nicole" userId="8ed04819-1a1c-42ab-ae09-44d42575f3a6" providerId="ADAL" clId="{46AED7F8-18BE-4C7E-B9AC-F4C2CA2D1D79}" dt="2023-03-22T05:28:31.439" v="1602" actId="26606"/>
+          <ac:spMkLst>
+            <pc:docMk/>
+            <pc:sldMk cId="2796572706" sldId="299"/>
+            <ac:spMk id="36" creationId="{99413ED5-9ED4-4772-BCE4-2BCAE6B12E35}"/>
+          </ac:spMkLst>
+        </pc:spChg>
+        <pc:spChg chg="add del">
+          <ac:chgData name="LEUNG Nicole" userId="8ed04819-1a1c-42ab-ae09-44d42575f3a6" providerId="ADAL" clId="{46AED7F8-18BE-4C7E-B9AC-F4C2CA2D1D79}" dt="2023-03-22T05:28:31.439" v="1602" actId="26606"/>
+          <ac:spMkLst>
+            <pc:docMk/>
+            <pc:sldMk cId="2796572706" sldId="299"/>
+            <ac:spMk id="37" creationId="{04357C93-F0CB-4A1C-8F77-4E9063789819}"/>
+          </ac:spMkLst>
+        </pc:spChg>
+        <pc:spChg chg="add del">
+          <ac:chgData name="LEUNG Nicole" userId="8ed04819-1a1c-42ab-ae09-44d42575f3a6" providerId="ADAL" clId="{46AED7F8-18BE-4C7E-B9AC-F4C2CA2D1D79}" dt="2023-03-22T05:28:33.168" v="1604" actId="26606"/>
+          <ac:spMkLst>
+            <pc:docMk/>
+            <pc:sldMk cId="2796572706" sldId="299"/>
+            <ac:spMk id="39" creationId="{6EAFBB7C-BA65-4034-8F52-32E6C514E7FA}"/>
+          </ac:spMkLst>
+        </pc:spChg>
+        <pc:spChg chg="add del">
+          <ac:chgData name="LEUNG Nicole" userId="8ed04819-1a1c-42ab-ae09-44d42575f3a6" providerId="ADAL" clId="{46AED7F8-18BE-4C7E-B9AC-F4C2CA2D1D79}" dt="2023-03-22T05:28:33.168" v="1604" actId="26606"/>
+          <ac:spMkLst>
+            <pc:docMk/>
+            <pc:sldMk cId="2796572706" sldId="299"/>
+            <ac:spMk id="40" creationId="{B9D56ACA-1E9F-4685-8853-D3A4777AC060}"/>
+          </ac:spMkLst>
+        </pc:spChg>
+        <pc:spChg chg="add del">
+          <ac:chgData name="LEUNG Nicole" userId="8ed04819-1a1c-42ab-ae09-44d42575f3a6" providerId="ADAL" clId="{46AED7F8-18BE-4C7E-B9AC-F4C2CA2D1D79}" dt="2023-03-22T05:28:34.130" v="1606" actId="26606"/>
+          <ac:spMkLst>
+            <pc:docMk/>
+            <pc:sldMk cId="2796572706" sldId="299"/>
+            <ac:spMk id="42" creationId="{D898B8EB-E53C-4E72-9817-B4BFCAD73600}"/>
+          </ac:spMkLst>
+        </pc:spChg>
+        <pc:spChg chg="add del">
+          <ac:chgData name="LEUNG Nicole" userId="8ed04819-1a1c-42ab-ae09-44d42575f3a6" providerId="ADAL" clId="{46AED7F8-18BE-4C7E-B9AC-F4C2CA2D1D79}" dt="2023-03-22T05:28:34.130" v="1606" actId="26606"/>
+          <ac:spMkLst>
+            <pc:docMk/>
+            <pc:sldMk cId="2796572706" sldId="299"/>
+            <ac:spMk id="43" creationId="{4E130362-2F35-4AB7-9EA5-DBC0F771A58D}"/>
+          </ac:spMkLst>
+        </pc:spChg>
+        <pc:spChg chg="add del">
+          <ac:chgData name="LEUNG Nicole" userId="8ed04819-1a1c-42ab-ae09-44d42575f3a6" providerId="ADAL" clId="{46AED7F8-18BE-4C7E-B9AC-F4C2CA2D1D79}" dt="2023-03-22T05:28:34.130" v="1606" actId="26606"/>
+          <ac:spMkLst>
+            <pc:docMk/>
+            <pc:sldMk cId="2796572706" sldId="299"/>
+            <ac:spMk id="44" creationId="{56BE988C-7A5B-41EC-A46C-AEA93D8D32FD}"/>
+          </ac:spMkLst>
+        </pc:spChg>
+        <pc:spChg chg="add del">
+          <ac:chgData name="LEUNG Nicole" userId="8ed04819-1a1c-42ab-ae09-44d42575f3a6" providerId="ADAL" clId="{46AED7F8-18BE-4C7E-B9AC-F4C2CA2D1D79}" dt="2023-03-22T05:28:34.130" v="1606" actId="26606"/>
+          <ac:spMkLst>
+            <pc:docMk/>
+            <pc:sldMk cId="2796572706" sldId="299"/>
+            <ac:spMk id="45" creationId="{E3CB1EC0-40A9-4D5E-B7E2-6E3423CE28B2}"/>
+          </ac:spMkLst>
+        </pc:spChg>
+        <pc:spChg chg="add del">
+          <ac:chgData name="LEUNG Nicole" userId="8ed04819-1a1c-42ab-ae09-44d42575f3a6" providerId="ADAL" clId="{46AED7F8-18BE-4C7E-B9AC-F4C2CA2D1D79}" dt="2023-03-22T05:28:34.130" v="1606" actId="26606"/>
+          <ac:spMkLst>
+            <pc:docMk/>
+            <pc:sldMk cId="2796572706" sldId="299"/>
+            <ac:spMk id="46" creationId="{DCBE52EF-2889-423F-947C-0E44A760D696}"/>
+          </ac:spMkLst>
+        </pc:spChg>
+        <pc:spChg chg="add del">
+          <ac:chgData name="LEUNG Nicole" userId="8ed04819-1a1c-42ab-ae09-44d42575f3a6" providerId="ADAL" clId="{46AED7F8-18BE-4C7E-B9AC-F4C2CA2D1D79}" dt="2023-03-22T05:28:35.741" v="1608" actId="26606"/>
+          <ac:spMkLst>
+            <pc:docMk/>
+            <pc:sldMk cId="2796572706" sldId="299"/>
+            <ac:spMk id="48" creationId="{B4059D9B-2E55-47FE-A188-0F9BD734E0A0}"/>
+          </ac:spMkLst>
+        </pc:spChg>
+        <pc:spChg chg="add del">
+          <ac:chgData name="LEUNG Nicole" userId="8ed04819-1a1c-42ab-ae09-44d42575f3a6" providerId="ADAL" clId="{46AED7F8-18BE-4C7E-B9AC-F4C2CA2D1D79}" dt="2023-03-22T05:28:36.528" v="1610" actId="26606"/>
+          <ac:spMkLst>
+            <pc:docMk/>
+            <pc:sldMk cId="2796572706" sldId="299"/>
+            <ac:spMk id="52" creationId="{3611733F-E5BD-49F1-953E-8029C6596AF2}"/>
+          </ac:spMkLst>
+        </pc:spChg>
+        <pc:spChg chg="add del">
+          <ac:chgData name="LEUNG Nicole" userId="8ed04819-1a1c-42ab-ae09-44d42575f3a6" providerId="ADAL" clId="{46AED7F8-18BE-4C7E-B9AC-F4C2CA2D1D79}" dt="2023-03-22T05:28:36.528" v="1610" actId="26606"/>
+          <ac:spMkLst>
+            <pc:docMk/>
+            <pc:sldMk cId="2796572706" sldId="299"/>
+            <ac:spMk id="53" creationId="{6EA0003C-06B7-4E3A-9E9A-2DA8CA829F71}"/>
+          </ac:spMkLst>
+        </pc:spChg>
+        <pc:spChg chg="add">
+          <ac:chgData name="LEUNG Nicole" userId="8ed04819-1a1c-42ab-ae09-44d42575f3a6" providerId="ADAL" clId="{46AED7F8-18BE-4C7E-B9AC-F4C2CA2D1D79}" dt="2023-03-22T05:28:36.537" v="1611" actId="26606"/>
+          <ac:spMkLst>
+            <pc:docMk/>
+            <pc:sldMk cId="2796572706" sldId="299"/>
+            <ac:spMk id="58" creationId="{42D91A80-424C-43FF-B36B-58B851DC5EB1}"/>
+          </ac:spMkLst>
+        </pc:spChg>
+        <pc:spChg chg="add">
+          <ac:chgData name="LEUNG Nicole" userId="8ed04819-1a1c-42ab-ae09-44d42575f3a6" providerId="ADAL" clId="{46AED7F8-18BE-4C7E-B9AC-F4C2CA2D1D79}" dt="2023-03-22T05:28:36.537" v="1611" actId="26606"/>
+          <ac:spMkLst>
+            <pc:docMk/>
+            <pc:sldMk cId="2796572706" sldId="299"/>
+            <ac:spMk id="59" creationId="{99413ED5-9ED4-4772-BCE4-2BCAE6B12E35}"/>
+          </ac:spMkLst>
+        </pc:spChg>
+        <pc:spChg chg="add">
+          <ac:chgData name="LEUNG Nicole" userId="8ed04819-1a1c-42ab-ae09-44d42575f3a6" providerId="ADAL" clId="{46AED7F8-18BE-4C7E-B9AC-F4C2CA2D1D79}" dt="2023-03-22T05:28:36.537" v="1611" actId="26606"/>
+          <ac:spMkLst>
+            <pc:docMk/>
+            <pc:sldMk cId="2796572706" sldId="299"/>
+            <ac:spMk id="60" creationId="{04357C93-F0CB-4A1C-8F77-4E9063789819}"/>
+          </ac:spMkLst>
+        </pc:spChg>
+        <pc:spChg chg="add">
+          <ac:chgData name="LEUNG Nicole" userId="8ed04819-1a1c-42ab-ae09-44d42575f3a6" providerId="ADAL" clId="{46AED7F8-18BE-4C7E-B9AC-F4C2CA2D1D79}" dt="2023-03-22T05:28:36.537" v="1611" actId="26606"/>
+          <ac:spMkLst>
+            <pc:docMk/>
+            <pc:sldMk cId="2796572706" sldId="299"/>
+            <ac:spMk id="61" creationId="{90F533E9-6690-41A8-A372-4C6C622D028D}"/>
+          </ac:spMkLst>
+        </pc:spChg>
+        <pc:grpChg chg="add del">
+          <ac:chgData name="LEUNG Nicole" userId="8ed04819-1a1c-42ab-ae09-44d42575f3a6" providerId="ADAL" clId="{46AED7F8-18BE-4C7E-B9AC-F4C2CA2D1D79}" dt="2023-03-22T05:28:35.741" v="1608" actId="26606"/>
+          <ac:grpSpMkLst>
+            <pc:docMk/>
+            <pc:sldMk cId="2796572706" sldId="299"/>
+            <ac:grpSpMk id="49" creationId="{F938B951-7EFC-40A2-B198-E73D39DFB3FC}"/>
+          </ac:grpSpMkLst>
+        </pc:grpChg>
+        <pc:grpChg chg="add del">
+          <ac:chgData name="LEUNG Nicole" userId="8ed04819-1a1c-42ab-ae09-44d42575f3a6" providerId="ADAL" clId="{46AED7F8-18BE-4C7E-B9AC-F4C2CA2D1D79}" dt="2023-03-22T05:28:36.528" v="1610" actId="26606"/>
+          <ac:grpSpMkLst>
+            <pc:docMk/>
+            <pc:sldMk cId="2796572706" sldId="299"/>
+            <ac:grpSpMk id="54" creationId="{8A01F592-3A3D-4FF0-BA89-6141201456E8}"/>
+          </ac:grpSpMkLst>
+        </pc:grpChg>
+        <pc:picChg chg="mod ord">
+          <ac:chgData name="LEUNG Nicole" userId="8ed04819-1a1c-42ab-ae09-44d42575f3a6" providerId="ADAL" clId="{46AED7F8-18BE-4C7E-B9AC-F4C2CA2D1D79}" dt="2023-03-22T05:28:36.537" v="1611" actId="26606"/>
+          <ac:picMkLst>
+            <pc:docMk/>
+            <pc:sldMk cId="2796572706" sldId="299"/>
+            <ac:picMk id="5" creationId="{79A4E094-2C35-46E0-805B-1975E62169F8}"/>
+          </ac:picMkLst>
+        </pc:picChg>
+        <pc:picChg chg="add mod ord">
+          <ac:chgData name="LEUNG Nicole" userId="8ed04819-1a1c-42ab-ae09-44d42575f3a6" providerId="ADAL" clId="{46AED7F8-18BE-4C7E-B9AC-F4C2CA2D1D79}" dt="2023-03-22T05:28:36.537" v="1611" actId="26606"/>
+          <ac:picMkLst>
+            <pc:docMk/>
+            <pc:sldMk cId="2796572706" sldId="299"/>
+            <ac:picMk id="6" creationId="{3065AC14-10BD-401A-A1D5-4D20279A4AD0}"/>
+          </ac:picMkLst>
+        </pc:picChg>
+        <pc:picChg chg="add mod ord">
+          <ac:chgData name="LEUNG Nicole" userId="8ed04819-1a1c-42ab-ae09-44d42575f3a6" providerId="ADAL" clId="{46AED7F8-18BE-4C7E-B9AC-F4C2CA2D1D79}" dt="2023-03-22T05:28:57.785" v="1614" actId="14100"/>
+          <ac:picMkLst>
+            <pc:docMk/>
+            <pc:sldMk cId="2796572706" sldId="299"/>
+            <ac:picMk id="8" creationId="{BA95CE92-D262-4898-87DA-51FC2D84BC6F}"/>
+          </ac:picMkLst>
+        </pc:picChg>
+        <pc:picChg chg="add mod ord">
+          <ac:chgData name="LEUNG Nicole" userId="8ed04819-1a1c-42ab-ae09-44d42575f3a6" providerId="ADAL" clId="{46AED7F8-18BE-4C7E-B9AC-F4C2CA2D1D79}" dt="2023-03-22T05:28:36.537" v="1611" actId="26606"/>
+          <ac:picMkLst>
+            <pc:docMk/>
+            <pc:sldMk cId="2796572706" sldId="299"/>
+            <ac:picMk id="10" creationId="{0E044CB9-4522-40F5-8767-3697A9C38D62}"/>
+          </ac:picMkLst>
+        </pc:picChg>
+      </pc:sldChg>
+      <pc:sldChg chg="modSp mod">
+        <pc:chgData name="LEUNG Nicole" userId="8ed04819-1a1c-42ab-ae09-44d42575f3a6" providerId="ADAL" clId="{46AED7F8-18BE-4C7E-B9AC-F4C2CA2D1D79}" dt="2023-03-28T17:33:04.179" v="3439" actId="20577"/>
+        <pc:sldMkLst>
+          <pc:docMk/>
+          <pc:sldMk cId="1343742741" sldId="300"/>
+        </pc:sldMkLst>
+        <pc:spChg chg="mod">
+          <ac:chgData name="LEUNG Nicole" userId="8ed04819-1a1c-42ab-ae09-44d42575f3a6" providerId="ADAL" clId="{46AED7F8-18BE-4C7E-B9AC-F4C2CA2D1D79}" dt="2023-03-24T10:01:07.075" v="2959" actId="1076"/>
+          <ac:spMkLst>
+            <pc:docMk/>
+            <pc:sldMk cId="1343742741" sldId="300"/>
+            <ac:spMk id="2" creationId="{EC523B02-5F95-4633-8AAA-EFDF6751F9AC}"/>
+          </ac:spMkLst>
+        </pc:spChg>
+        <pc:spChg chg="mod">
+          <ac:chgData name="LEUNG Nicole" userId="8ed04819-1a1c-42ab-ae09-44d42575f3a6" providerId="ADAL" clId="{46AED7F8-18BE-4C7E-B9AC-F4C2CA2D1D79}" dt="2023-03-28T17:33:04.179" v="3439" actId="20577"/>
+          <ac:spMkLst>
+            <pc:docMk/>
+            <pc:sldMk cId="1343742741" sldId="300"/>
+            <ac:spMk id="12" creationId="{BA0395D4-DD9F-4206-88E4-0B5C7127FE91}"/>
+          </ac:spMkLst>
+        </pc:spChg>
+        <pc:picChg chg="mod">
+          <ac:chgData name="LEUNG Nicole" userId="8ed04819-1a1c-42ab-ae09-44d42575f3a6" providerId="ADAL" clId="{46AED7F8-18BE-4C7E-B9AC-F4C2CA2D1D79}" dt="2023-03-24T10:01:13.801" v="2961" actId="1076"/>
+          <ac:picMkLst>
+            <pc:docMk/>
+            <pc:sldMk cId="1343742741" sldId="300"/>
+            <ac:picMk id="17" creationId="{D29E8FA9-9AF0-4CBD-8158-733113781A20}"/>
+          </ac:picMkLst>
+        </pc:picChg>
+        <pc:picChg chg="mod">
+          <ac:chgData name="LEUNG Nicole" userId="8ed04819-1a1c-42ab-ae09-44d42575f3a6" providerId="ADAL" clId="{46AED7F8-18BE-4C7E-B9AC-F4C2CA2D1D79}" dt="2023-03-24T10:01:17.057" v="2962" actId="1076"/>
+          <ac:picMkLst>
+            <pc:docMk/>
+            <pc:sldMk cId="1343742741" sldId="300"/>
+            <ac:picMk id="20" creationId="{CF080999-89D2-4835-BC6C-4BBE3BF7EA4C}"/>
+          </ac:picMkLst>
+        </pc:picChg>
+      </pc:sldChg>
+      <pc:sldChg chg="addSp delSp modSp mod">
+        <pc:chgData name="LEUNG Nicole" userId="8ed04819-1a1c-42ab-ae09-44d42575f3a6" providerId="ADAL" clId="{46AED7F8-18BE-4C7E-B9AC-F4C2CA2D1D79}" dt="2023-03-28T17:34:21.293" v="3442" actId="1076"/>
+        <pc:sldMkLst>
+          <pc:docMk/>
+          <pc:sldMk cId="2029018428" sldId="302"/>
+        </pc:sldMkLst>
+        <pc:picChg chg="add del mod">
+          <ac:chgData name="LEUNG Nicole" userId="8ed04819-1a1c-42ab-ae09-44d42575f3a6" providerId="ADAL" clId="{46AED7F8-18BE-4C7E-B9AC-F4C2CA2D1D79}" dt="2023-03-23T09:25:59.692" v="2686" actId="478"/>
+          <ac:picMkLst>
+            <pc:docMk/>
+            <pc:sldMk cId="2029018428" sldId="302"/>
+            <ac:picMk id="5" creationId="{4161EA41-5495-4744-AD6A-D2A4B7DFE7CB}"/>
+          </ac:picMkLst>
+        </pc:picChg>
+        <pc:picChg chg="del">
+          <ac:chgData name="LEUNG Nicole" userId="8ed04819-1a1c-42ab-ae09-44d42575f3a6" providerId="ADAL" clId="{46AED7F8-18BE-4C7E-B9AC-F4C2CA2D1D79}" dt="2023-03-23T09:25:35.043" v="2680" actId="478"/>
+          <ac:picMkLst>
+            <pc:docMk/>
+            <pc:sldMk cId="2029018428" sldId="302"/>
+            <ac:picMk id="7" creationId="{A8772CB6-83AC-464C-825D-DC0E6EFAF8B0}"/>
+          </ac:picMkLst>
+        </pc:picChg>
+        <pc:picChg chg="del mod">
+          <ac:chgData name="LEUNG Nicole" userId="8ed04819-1a1c-42ab-ae09-44d42575f3a6" providerId="ADAL" clId="{46AED7F8-18BE-4C7E-B9AC-F4C2CA2D1D79}" dt="2023-03-23T09:25:28.556" v="2677" actId="478"/>
+          <ac:picMkLst>
+            <pc:docMk/>
+            <pc:sldMk cId="2029018428" sldId="302"/>
+            <ac:picMk id="8" creationId="{ABCAB96B-7833-4E92-A0B2-55C84B0EDF04}"/>
+          </ac:picMkLst>
+        </pc:picChg>
+        <pc:picChg chg="add del mod">
+          <ac:chgData name="LEUNG Nicole" userId="8ed04819-1a1c-42ab-ae09-44d42575f3a6" providerId="ADAL" clId="{46AED7F8-18BE-4C7E-B9AC-F4C2CA2D1D79}" dt="2023-03-23T09:25:53.036" v="2683" actId="478"/>
+          <ac:picMkLst>
+            <pc:docMk/>
+            <pc:sldMk cId="2029018428" sldId="302"/>
+            <ac:picMk id="9" creationId="{31E63E3A-DEBF-4C13-813B-F9EB96A9DF7C}"/>
+          </ac:picMkLst>
+        </pc:picChg>
+        <pc:picChg chg="add del mod">
+          <ac:chgData name="LEUNG Nicole" userId="8ed04819-1a1c-42ab-ae09-44d42575f3a6" providerId="ADAL" clId="{46AED7F8-18BE-4C7E-B9AC-F4C2CA2D1D79}" dt="2023-03-23T09:26:48.316" v="2695" actId="478"/>
+          <ac:picMkLst>
+            <pc:docMk/>
+            <pc:sldMk cId="2029018428" sldId="302"/>
+            <ac:picMk id="12" creationId="{510DFA2A-92E1-4576-A4DE-CAA57C94F00A}"/>
+          </ac:picMkLst>
+        </pc:picChg>
+        <pc:picChg chg="add del mod">
+          <ac:chgData name="LEUNG Nicole" userId="8ed04819-1a1c-42ab-ae09-44d42575f3a6" providerId="ADAL" clId="{46AED7F8-18BE-4C7E-B9AC-F4C2CA2D1D79}" dt="2023-03-23T09:26:53.315" v="2698" actId="478"/>
+          <ac:picMkLst>
+            <pc:docMk/>
+            <pc:sldMk cId="2029018428" sldId="302"/>
+            <ac:picMk id="14" creationId="{2F01AB5F-3BB4-453E-874B-667CA8E50CBE}"/>
+          </ac:picMkLst>
+        </pc:picChg>
+        <pc:picChg chg="add mod">
+          <ac:chgData name="LEUNG Nicole" userId="8ed04819-1a1c-42ab-ae09-44d42575f3a6" providerId="ADAL" clId="{46AED7F8-18BE-4C7E-B9AC-F4C2CA2D1D79}" dt="2023-03-28T17:34:21.293" v="3442" actId="1076"/>
+          <ac:picMkLst>
+            <pc:docMk/>
+            <pc:sldMk cId="2029018428" sldId="302"/>
+            <ac:picMk id="16" creationId="{114B15C8-2019-497A-B666-31C071882E97}"/>
+          </ac:picMkLst>
+        </pc:picChg>
+        <pc:picChg chg="add mod">
+          <ac:chgData name="LEUNG Nicole" userId="8ed04819-1a1c-42ab-ae09-44d42575f3a6" providerId="ADAL" clId="{46AED7F8-18BE-4C7E-B9AC-F4C2CA2D1D79}" dt="2023-03-28T17:34:05.180" v="3440" actId="1076"/>
+          <ac:picMkLst>
+            <pc:docMk/>
+            <pc:sldMk cId="2029018428" sldId="302"/>
+            <ac:picMk id="18" creationId="{735C8ED6-74B5-4806-8A40-81F8E51F2A12}"/>
+          </ac:picMkLst>
+        </pc:picChg>
+      </pc:sldChg>
+      <pc:sldChg chg="modSp mod">
+        <pc:chgData name="LEUNG Nicole" userId="8ed04819-1a1c-42ab-ae09-44d42575f3a6" providerId="ADAL" clId="{46AED7F8-18BE-4C7E-B9AC-F4C2CA2D1D79}" dt="2023-03-24T03:43:18.161" v="2779" actId="255"/>
+        <pc:sldMkLst>
+          <pc:docMk/>
+          <pc:sldMk cId="1724655501" sldId="303"/>
+        </pc:sldMkLst>
+        <pc:graphicFrameChg chg="modGraphic">
+          <ac:chgData name="LEUNG Nicole" userId="8ed04819-1a1c-42ab-ae09-44d42575f3a6" providerId="ADAL" clId="{46AED7F8-18BE-4C7E-B9AC-F4C2CA2D1D79}" dt="2023-03-24T03:43:18.161" v="2779" actId="255"/>
+          <ac:graphicFrameMkLst>
+            <pc:docMk/>
+            <pc:sldMk cId="1724655501" sldId="303"/>
+            <ac:graphicFrameMk id="4" creationId="{329D30CB-4423-42B7-9BF7-1D854680E175}"/>
+          </ac:graphicFrameMkLst>
+        </pc:graphicFrameChg>
+      </pc:sldChg>
+      <pc:sldChg chg="del">
+        <pc:chgData name="LEUNG Nicole" userId="8ed04819-1a1c-42ab-ae09-44d42575f3a6" providerId="ADAL" clId="{46AED7F8-18BE-4C7E-B9AC-F4C2CA2D1D79}" dt="2023-03-20T09:33:52.118" v="1" actId="47"/>
+        <pc:sldMkLst>
+          <pc:docMk/>
+          <pc:sldMk cId="834880465" sldId="305"/>
+        </pc:sldMkLst>
+      </pc:sldChg>
+      <pc:sldChg chg="del">
+        <pc:chgData name="LEUNG Nicole" userId="8ed04819-1a1c-42ab-ae09-44d42575f3a6" providerId="ADAL" clId="{46AED7F8-18BE-4C7E-B9AC-F4C2CA2D1D79}" dt="2023-03-21T02:17:40.951" v="457" actId="47"/>
+        <pc:sldMkLst>
+          <pc:docMk/>
+          <pc:sldMk cId="1660519983" sldId="306"/>
+        </pc:sldMkLst>
+      </pc:sldChg>
+      <pc:sldChg chg="modSp mod">
+        <pc:chgData name="LEUNG Nicole" userId="8ed04819-1a1c-42ab-ae09-44d42575f3a6" providerId="ADAL" clId="{46AED7F8-18BE-4C7E-B9AC-F4C2CA2D1D79}" dt="2023-03-22T07:27:11.285" v="2224" actId="1076"/>
+        <pc:sldMkLst>
+          <pc:docMk/>
+          <pc:sldMk cId="2696944007" sldId="308"/>
+        </pc:sldMkLst>
+        <pc:spChg chg="mod">
+          <ac:chgData name="LEUNG Nicole" userId="8ed04819-1a1c-42ab-ae09-44d42575f3a6" providerId="ADAL" clId="{46AED7F8-18BE-4C7E-B9AC-F4C2CA2D1D79}" dt="2023-03-22T07:10:49.832" v="2214" actId="14100"/>
+          <ac:spMkLst>
+            <pc:docMk/>
+            <pc:sldMk cId="2696944007" sldId="308"/>
+            <ac:spMk id="3" creationId="{BBFE9126-C565-4E94-82E9-A88FDB40D813}"/>
+          </ac:spMkLst>
+        </pc:spChg>
+        <pc:spChg chg="mod">
+          <ac:chgData name="LEUNG Nicole" userId="8ed04819-1a1c-42ab-ae09-44d42575f3a6" providerId="ADAL" clId="{46AED7F8-18BE-4C7E-B9AC-F4C2CA2D1D79}" dt="2023-03-22T07:27:11.285" v="2224" actId="1076"/>
+          <ac:spMkLst>
+            <pc:docMk/>
+            <pc:sldMk cId="2696944007" sldId="308"/>
+            <ac:spMk id="4" creationId="{579FCE5E-8E3A-4AC7-824D-AF7C0D0C7F6C}"/>
+          </ac:spMkLst>
+        </pc:spChg>
+      </pc:sldChg>
+      <pc:sldChg chg="modSp mod">
+        <pc:chgData name="LEUNG Nicole" userId="8ed04819-1a1c-42ab-ae09-44d42575f3a6" providerId="ADAL" clId="{46AED7F8-18BE-4C7E-B9AC-F4C2CA2D1D79}" dt="2023-03-21T03:23:35.276" v="1207" actId="14100"/>
+        <pc:sldMkLst>
+          <pc:docMk/>
+          <pc:sldMk cId="1583066299" sldId="309"/>
+        </pc:sldMkLst>
+        <pc:spChg chg="mod">
+          <ac:chgData name="LEUNG Nicole" userId="8ed04819-1a1c-42ab-ae09-44d42575f3a6" providerId="ADAL" clId="{46AED7F8-18BE-4C7E-B9AC-F4C2CA2D1D79}" dt="2023-03-21T03:23:35.276" v="1207" actId="14100"/>
+          <ac:spMkLst>
+            <pc:docMk/>
+            <pc:sldMk cId="1583066299" sldId="309"/>
+            <ac:spMk id="2" creationId="{B4E32D6D-1A3A-481F-BADE-19C45032D059}"/>
+          </ac:spMkLst>
+        </pc:spChg>
+      </pc:sldChg>
+      <pc:sldChg chg="del">
+        <pc:chgData name="LEUNG Nicole" userId="8ed04819-1a1c-42ab-ae09-44d42575f3a6" providerId="ADAL" clId="{46AED7F8-18BE-4C7E-B9AC-F4C2CA2D1D79}" dt="2023-03-22T03:46:19.641" v="1376" actId="2696"/>
+        <pc:sldMkLst>
+          <pc:docMk/>
+          <pc:sldMk cId="4036466995" sldId="310"/>
+        </pc:sldMkLst>
+      </pc:sldChg>
+      <pc:sldChg chg="modSp mod">
+        <pc:chgData name="LEUNG Nicole" userId="8ed04819-1a1c-42ab-ae09-44d42575f3a6" providerId="ADAL" clId="{46AED7F8-18BE-4C7E-B9AC-F4C2CA2D1D79}" dt="2023-03-22T02:40:46.314" v="1212" actId="20577"/>
+        <pc:sldMkLst>
+          <pc:docMk/>
+          <pc:sldMk cId="3937487968" sldId="311"/>
+        </pc:sldMkLst>
+        <pc:spChg chg="mod">
+          <ac:chgData name="LEUNG Nicole" userId="8ed04819-1a1c-42ab-ae09-44d42575f3a6" providerId="ADAL" clId="{46AED7F8-18BE-4C7E-B9AC-F4C2CA2D1D79}" dt="2023-03-22T02:40:46.314" v="1212" actId="20577"/>
+          <ac:spMkLst>
+            <pc:docMk/>
+            <pc:sldMk cId="3937487968" sldId="311"/>
+            <ac:spMk id="3" creationId="{1DC33D17-7259-4D64-AF40-41E27B5308F1}"/>
+          </ac:spMkLst>
+        </pc:spChg>
+      </pc:sldChg>
+      <pc:sldChg chg="addSp delSp modSp mod">
+        <pc:chgData name="LEUNG Nicole" userId="8ed04819-1a1c-42ab-ae09-44d42575f3a6" providerId="ADAL" clId="{46AED7F8-18BE-4C7E-B9AC-F4C2CA2D1D79}" dt="2023-03-23T09:26:36.488" v="2694" actId="1076"/>
+        <pc:sldMkLst>
+          <pc:docMk/>
+          <pc:sldMk cId="1724579227" sldId="312"/>
+        </pc:sldMkLst>
+        <pc:picChg chg="del">
+          <ac:chgData name="LEUNG Nicole" userId="8ed04819-1a1c-42ab-ae09-44d42575f3a6" providerId="ADAL" clId="{46AED7F8-18BE-4C7E-B9AC-F4C2CA2D1D79}" dt="2023-03-23T09:26:34.379" v="2692" actId="478"/>
+          <ac:picMkLst>
+            <pc:docMk/>
+            <pc:sldMk cId="1724579227" sldId="312"/>
+            <ac:picMk id="5" creationId="{52509BCC-F558-4469-A901-56EB010F716C}"/>
+          </ac:picMkLst>
+        </pc:picChg>
+        <pc:picChg chg="add mod">
+          <ac:chgData name="LEUNG Nicole" userId="8ed04819-1a1c-42ab-ae09-44d42575f3a6" providerId="ADAL" clId="{46AED7F8-18BE-4C7E-B9AC-F4C2CA2D1D79}" dt="2023-03-23T09:26:29.670" v="2691" actId="1076"/>
+          <ac:picMkLst>
+            <pc:docMk/>
+            <pc:sldMk cId="1724579227" sldId="312"/>
+            <ac:picMk id="6" creationId="{308BCAB9-FAED-4CA3-83A1-DFEB7564ECBF}"/>
+          </ac:picMkLst>
+        </pc:picChg>
+        <pc:picChg chg="del">
+          <ac:chgData name="LEUNG Nicole" userId="8ed04819-1a1c-42ab-ae09-44d42575f3a6" providerId="ADAL" clId="{46AED7F8-18BE-4C7E-B9AC-F4C2CA2D1D79}" dt="2023-03-23T09:26:26.350" v="2689" actId="478"/>
+          <ac:picMkLst>
+            <pc:docMk/>
+            <pc:sldMk cId="1724579227" sldId="312"/>
+            <ac:picMk id="7" creationId="{1C18B887-2293-41A7-8E7F-E7D25F1DE81E}"/>
+          </ac:picMkLst>
+        </pc:picChg>
+        <pc:picChg chg="add mod">
+          <ac:chgData name="LEUNG Nicole" userId="8ed04819-1a1c-42ab-ae09-44d42575f3a6" providerId="ADAL" clId="{46AED7F8-18BE-4C7E-B9AC-F4C2CA2D1D79}" dt="2023-03-23T09:26:36.488" v="2694" actId="1076"/>
+          <ac:picMkLst>
+            <pc:docMk/>
+            <pc:sldMk cId="1724579227" sldId="312"/>
+            <ac:picMk id="9" creationId="{EE0CFF38-5A03-49EE-B40E-8B364C3F0431}"/>
+          </ac:picMkLst>
+        </pc:picChg>
+      </pc:sldChg>
+      <pc:sldChg chg="del">
+        <pc:chgData name="LEUNG Nicole" userId="8ed04819-1a1c-42ab-ae09-44d42575f3a6" providerId="ADAL" clId="{46AED7F8-18BE-4C7E-B9AC-F4C2CA2D1D79}" dt="2023-03-23T09:27:31.188" v="2701" actId="2696"/>
+        <pc:sldMkLst>
+          <pc:docMk/>
+          <pc:sldMk cId="379772369" sldId="313"/>
+        </pc:sldMkLst>
+      </pc:sldChg>
+      <pc:sldChg chg="modSp add mod">
+        <pc:chgData name="LEUNG Nicole" userId="8ed04819-1a1c-42ab-ae09-44d42575f3a6" providerId="ADAL" clId="{46AED7F8-18BE-4C7E-B9AC-F4C2CA2D1D79}" dt="2023-03-22T09:21:27.648" v="2304" actId="20577"/>
+        <pc:sldMkLst>
+          <pc:docMk/>
+          <pc:sldMk cId="3390811765" sldId="315"/>
+        </pc:sldMkLst>
+        <pc:spChg chg="mod">
+          <ac:chgData name="LEUNG Nicole" userId="8ed04819-1a1c-42ab-ae09-44d42575f3a6" providerId="ADAL" clId="{46AED7F8-18BE-4C7E-B9AC-F4C2CA2D1D79}" dt="2023-03-22T09:21:27.648" v="2304" actId="20577"/>
+          <ac:spMkLst>
+            <pc:docMk/>
+            <pc:sldMk cId="3390811765" sldId="315"/>
+            <ac:spMk id="3" creationId="{38279423-2A7B-42E7-9AAD-819A01DEF59F}"/>
+          </ac:spMkLst>
+        </pc:spChg>
+      </pc:sldChg>
+      <pc:sldChg chg="modSp add mod">
+        <pc:chgData name="LEUNG Nicole" userId="8ed04819-1a1c-42ab-ae09-44d42575f3a6" providerId="ADAL" clId="{46AED7F8-18BE-4C7E-B9AC-F4C2CA2D1D79}" dt="2023-03-22T09:22:44.171" v="2311" actId="13926"/>
+        <pc:sldMkLst>
+          <pc:docMk/>
+          <pc:sldMk cId="3217505827" sldId="316"/>
+        </pc:sldMkLst>
+        <pc:spChg chg="mod">
+          <ac:chgData name="LEUNG Nicole" userId="8ed04819-1a1c-42ab-ae09-44d42575f3a6" providerId="ADAL" clId="{46AED7F8-18BE-4C7E-B9AC-F4C2CA2D1D79}" dt="2023-03-22T09:22:44.171" v="2311" actId="13926"/>
+          <ac:spMkLst>
+            <pc:docMk/>
+            <pc:sldMk cId="3217505827" sldId="316"/>
+            <ac:spMk id="3" creationId="{16DF9936-5C66-4D34-A98D-6A0722AE50E0}"/>
+          </ac:spMkLst>
+        </pc:spChg>
+      </pc:sldChg>
+      <pc:sldChg chg="modSp new mod">
+        <pc:chgData name="LEUNG Nicole" userId="8ed04819-1a1c-42ab-ae09-44d42575f3a6" providerId="ADAL" clId="{46AED7F8-18BE-4C7E-B9AC-F4C2CA2D1D79}" dt="2023-03-22T06:34:04.240" v="2196" actId="313"/>
+        <pc:sldMkLst>
+          <pc:docMk/>
+          <pc:sldMk cId="2343557002" sldId="317"/>
+        </pc:sldMkLst>
+        <pc:spChg chg="mod">
+          <ac:chgData name="LEUNG Nicole" userId="8ed04819-1a1c-42ab-ae09-44d42575f3a6" providerId="ADAL" clId="{46AED7F8-18BE-4C7E-B9AC-F4C2CA2D1D79}" dt="2023-03-22T05:24:34.036" v="1580" actId="20577"/>
+          <ac:spMkLst>
+            <pc:docMk/>
+            <pc:sldMk cId="2343557002" sldId="317"/>
+            <ac:spMk id="2" creationId="{67EBEA2C-9D3F-451F-B2CF-5E072A61EA51}"/>
+          </ac:spMkLst>
+        </pc:spChg>
+        <pc:spChg chg="mod">
+          <ac:chgData name="LEUNG Nicole" userId="8ed04819-1a1c-42ab-ae09-44d42575f3a6" providerId="ADAL" clId="{46AED7F8-18BE-4C7E-B9AC-F4C2CA2D1D79}" dt="2023-03-22T06:34:04.240" v="2196" actId="313"/>
+          <ac:spMkLst>
+            <pc:docMk/>
+            <pc:sldMk cId="2343557002" sldId="317"/>
+            <ac:spMk id="3" creationId="{9342268B-A687-4F1D-8190-3F35F31E4B51}"/>
+          </ac:spMkLst>
+        </pc:spChg>
+      </pc:sldChg>
+      <pc:sldChg chg="add">
+        <pc:chgData name="LEUNG Nicole" userId="8ed04819-1a1c-42ab-ae09-44d42575f3a6" providerId="ADAL" clId="{46AED7F8-18BE-4C7E-B9AC-F4C2CA2D1D79}" dt="2023-03-22T07:07:44.961" v="2213"/>
+        <pc:sldMkLst>
+          <pc:docMk/>
+          <pc:sldMk cId="1565561515" sldId="318"/>
+        </pc:sldMkLst>
+      </pc:sldChg>
+      <pc:sldChg chg="addSp delSp modSp new del mod">
+        <pc:chgData name="LEUNG Nicole" userId="8ed04819-1a1c-42ab-ae09-44d42575f3a6" providerId="ADAL" clId="{46AED7F8-18BE-4C7E-B9AC-F4C2CA2D1D79}" dt="2023-03-22T07:07:39.550" v="2210" actId="2696"/>
+        <pc:sldMkLst>
+          <pc:docMk/>
+          <pc:sldMk cId="2975975160" sldId="318"/>
+        </pc:sldMkLst>
+        <pc:spChg chg="mod">
+          <ac:chgData name="LEUNG Nicole" userId="8ed04819-1a1c-42ab-ae09-44d42575f3a6" providerId="ADAL" clId="{46AED7F8-18BE-4C7E-B9AC-F4C2CA2D1D79}" dt="2023-03-22T05:44:34.270" v="1632" actId="20577"/>
+          <ac:spMkLst>
+            <pc:docMk/>
+            <pc:sldMk cId="2975975160" sldId="318"/>
+            <ac:spMk id="2" creationId="{164F2797-9A88-4DC8-A740-847E5C61C5E0}"/>
+          </ac:spMkLst>
+        </pc:spChg>
+        <pc:spChg chg="del">
+          <ac:chgData name="LEUNG Nicole" userId="8ed04819-1a1c-42ab-ae09-44d42575f3a6" providerId="ADAL" clId="{46AED7F8-18BE-4C7E-B9AC-F4C2CA2D1D79}" dt="2023-03-22T05:44:52.947" v="1635" actId="478"/>
+          <ac:spMkLst>
+            <pc:docMk/>
+            <pc:sldMk cId="2975975160" sldId="318"/>
+            <ac:spMk id="3" creationId="{413F9A91-551F-47DB-8AA8-8EFC6B10B354}"/>
+          </ac:spMkLst>
+        </pc:spChg>
+        <pc:picChg chg="add mod">
+          <ac:chgData name="LEUNG Nicole" userId="8ed04819-1a1c-42ab-ae09-44d42575f3a6" providerId="ADAL" clId="{46AED7F8-18BE-4C7E-B9AC-F4C2CA2D1D79}" dt="2023-03-22T06:03:32.848" v="1699" actId="1076"/>
+          <ac:picMkLst>
+            <pc:docMk/>
+            <pc:sldMk cId="2975975160" sldId="318"/>
+            <ac:picMk id="5" creationId="{C43E2393-659D-447A-8DB8-76508D89D65D}"/>
+          </ac:picMkLst>
+        </pc:picChg>
+        <pc:picChg chg="add del mod">
+          <ac:chgData name="LEUNG Nicole" userId="8ed04819-1a1c-42ab-ae09-44d42575f3a6" providerId="ADAL" clId="{46AED7F8-18BE-4C7E-B9AC-F4C2CA2D1D79}" dt="2023-03-22T05:45:07.077" v="1638" actId="478"/>
+          <ac:picMkLst>
+            <pc:docMk/>
+            <pc:sldMk cId="2975975160" sldId="318"/>
+            <ac:picMk id="7" creationId="{59DC28C3-5167-4851-AF18-2DA1D2007536}"/>
+          </ac:picMkLst>
+        </pc:picChg>
+        <pc:picChg chg="add del mod">
+          <ac:chgData name="LEUNG Nicole" userId="8ed04819-1a1c-42ab-ae09-44d42575f3a6" providerId="ADAL" clId="{46AED7F8-18BE-4C7E-B9AC-F4C2CA2D1D79}" dt="2023-03-22T05:48:34.148" v="1643" actId="478"/>
+          <ac:picMkLst>
+            <pc:docMk/>
+            <pc:sldMk cId="2975975160" sldId="318"/>
+            <ac:picMk id="9" creationId="{C5893FAE-FA89-4AC1-83A9-733AF6819E3F}"/>
+          </ac:picMkLst>
+        </pc:picChg>
+        <pc:picChg chg="add del mod">
+          <ac:chgData name="LEUNG Nicole" userId="8ed04819-1a1c-42ab-ae09-44d42575f3a6" providerId="ADAL" clId="{46AED7F8-18BE-4C7E-B9AC-F4C2CA2D1D79}" dt="2023-03-22T05:48:40.004" v="1646" actId="478"/>
+          <ac:picMkLst>
+            <pc:docMk/>
+            <pc:sldMk cId="2975975160" sldId="318"/>
+            <ac:picMk id="11" creationId="{72B94089-D1AF-4680-B724-BB9E725F0686}"/>
+          </ac:picMkLst>
+        </pc:picChg>
+        <pc:picChg chg="add del mod">
+          <ac:chgData name="LEUNG Nicole" userId="8ed04819-1a1c-42ab-ae09-44d42575f3a6" providerId="ADAL" clId="{46AED7F8-18BE-4C7E-B9AC-F4C2CA2D1D79}" dt="2023-03-22T05:57:53.309" v="1664" actId="21"/>
+          <ac:picMkLst>
+            <pc:docMk/>
+            <pc:sldMk cId="2975975160" sldId="318"/>
+            <ac:picMk id="13" creationId="{FC9B3889-4141-4C8E-90F4-F22305C668D8}"/>
+          </ac:picMkLst>
+        </pc:picChg>
+      </pc:sldChg>
+      <pc:sldChg chg="delSp add setBg delDesignElem">
+        <pc:chgData name="LEUNG Nicole" userId="8ed04819-1a1c-42ab-ae09-44d42575f3a6" providerId="ADAL" clId="{46AED7F8-18BE-4C7E-B9AC-F4C2CA2D1D79}" dt="2023-03-22T07:07:44.961" v="2213"/>
+        <pc:sldMkLst>
+          <pc:docMk/>
+          <pc:sldMk cId="1059160177" sldId="319"/>
+        </pc:sldMkLst>
+        <pc:spChg chg="del">
+          <ac:chgData name="LEUNG Nicole" userId="8ed04819-1a1c-42ab-ae09-44d42575f3a6" providerId="ADAL" clId="{46AED7F8-18BE-4C7E-B9AC-F4C2CA2D1D79}" dt="2023-03-22T07:07:44.961" v="2213"/>
+          <ac:spMkLst>
+            <pc:docMk/>
+            <pc:sldMk cId="1059160177" sldId="319"/>
+            <ac:spMk id="10" creationId="{1A95671B-3CC6-4792-9114-B74FAEA224E6}"/>
+          </ac:spMkLst>
+        </pc:spChg>
+      </pc:sldChg>
+      <pc:sldChg chg="addSp delSp modSp new del mod setBg">
+        <pc:chgData name="LEUNG Nicole" userId="8ed04819-1a1c-42ab-ae09-44d42575f3a6" providerId="ADAL" clId="{46AED7F8-18BE-4C7E-B9AC-F4C2CA2D1D79}" dt="2023-03-22T07:07:39.550" v="2210" actId="2696"/>
+        <pc:sldMkLst>
+          <pc:docMk/>
+          <pc:sldMk cId="3076973922" sldId="319"/>
+        </pc:sldMkLst>
+        <pc:spChg chg="del mod">
+          <ac:chgData name="LEUNG Nicole" userId="8ed04819-1a1c-42ab-ae09-44d42575f3a6" providerId="ADAL" clId="{46AED7F8-18BE-4C7E-B9AC-F4C2CA2D1D79}" dt="2023-03-22T06:04:01.011" v="1701" actId="478"/>
+          <ac:spMkLst>
+            <pc:docMk/>
+            <pc:sldMk cId="3076973922" sldId="319"/>
+            <ac:spMk id="2" creationId="{C7784F2D-B30F-49BF-9434-1FBE1A3160F7}"/>
+          </ac:spMkLst>
+        </pc:spChg>
+        <pc:spChg chg="del mod">
+          <ac:chgData name="LEUNG Nicole" userId="8ed04819-1a1c-42ab-ae09-44d42575f3a6" providerId="ADAL" clId="{46AED7F8-18BE-4C7E-B9AC-F4C2CA2D1D79}" dt="2023-03-22T05:57:36.032" v="1662" actId="478"/>
+          <ac:spMkLst>
+            <pc:docMk/>
+            <pc:sldMk cId="3076973922" sldId="319"/>
+            <ac:spMk id="3" creationId="{06082541-86C6-4034-9B5E-0A0F3A8597C8}"/>
+          </ac:spMkLst>
+        </pc:spChg>
+        <pc:spChg chg="add del">
+          <ac:chgData name="LEUNG Nicole" userId="8ed04819-1a1c-42ab-ae09-44d42575f3a6" providerId="ADAL" clId="{46AED7F8-18BE-4C7E-B9AC-F4C2CA2D1D79}" dt="2023-03-22T05:58:57.563" v="1679" actId="26606"/>
+          <ac:spMkLst>
+            <pc:docMk/>
+            <pc:sldMk cId="3076973922" sldId="319"/>
+            <ac:spMk id="10" creationId="{1A95671B-3CC6-4792-9114-B74FAEA224E6}"/>
+          </ac:spMkLst>
+        </pc:spChg>
+        <pc:spChg chg="add del">
+          <ac:chgData name="LEUNG Nicole" userId="8ed04819-1a1c-42ab-ae09-44d42575f3a6" providerId="ADAL" clId="{46AED7F8-18BE-4C7E-B9AC-F4C2CA2D1D79}" dt="2023-03-22T05:58:57.563" v="1679" actId="26606"/>
+          <ac:spMkLst>
+            <pc:docMk/>
+            <pc:sldMk cId="3076973922" sldId="319"/>
+            <ac:spMk id="16" creationId="{7C98A213-5994-475E-B327-DC6EC27FBA8B}"/>
+          </ac:spMkLst>
+        </pc:spChg>
+        <pc:spChg chg="add del">
+          <ac:chgData name="LEUNG Nicole" userId="8ed04819-1a1c-42ab-ae09-44d42575f3a6" providerId="ADAL" clId="{46AED7F8-18BE-4C7E-B9AC-F4C2CA2D1D79}" dt="2023-03-22T05:58:57.563" v="1679" actId="26606"/>
+          <ac:spMkLst>
+            <pc:docMk/>
+            <pc:sldMk cId="3076973922" sldId="319"/>
+            <ac:spMk id="18" creationId="{4B030A0D-0DAD-4A99-89BB-419527D6A64B}"/>
+          </ac:spMkLst>
+        </pc:spChg>
+        <pc:picChg chg="add del mod">
+          <ac:chgData name="LEUNG Nicole" userId="8ed04819-1a1c-42ab-ae09-44d42575f3a6" providerId="ADAL" clId="{46AED7F8-18BE-4C7E-B9AC-F4C2CA2D1D79}" dt="2023-03-22T05:57:28.947" v="1659" actId="478"/>
+          <ac:picMkLst>
+            <pc:docMk/>
+            <pc:sldMk cId="3076973922" sldId="319"/>
+            <ac:picMk id="5" creationId="{370FE495-7A12-47A7-A820-E11E3C22C9F3}"/>
+          </ac:picMkLst>
+        </pc:picChg>
+        <pc:picChg chg="add mod">
+          <ac:chgData name="LEUNG Nicole" userId="8ed04819-1a1c-42ab-ae09-44d42575f3a6" providerId="ADAL" clId="{46AED7F8-18BE-4C7E-B9AC-F4C2CA2D1D79}" dt="2023-03-22T06:31:28.421" v="2186" actId="14100"/>
+          <ac:picMkLst>
+            <pc:docMk/>
+            <pc:sldMk cId="3076973922" sldId="319"/>
+            <ac:picMk id="7" creationId="{4F2D8885-2879-4021-AD25-3AE9A8096843}"/>
+          </ac:picMkLst>
+        </pc:picChg>
+        <pc:picChg chg="add mod ord">
+          <ac:chgData name="LEUNG Nicole" userId="8ed04819-1a1c-42ab-ae09-44d42575f3a6" providerId="ADAL" clId="{46AED7F8-18BE-4C7E-B9AC-F4C2CA2D1D79}" dt="2023-03-22T06:04:10.933" v="1704" actId="1076"/>
+          <ac:picMkLst>
+            <pc:docMk/>
+            <pc:sldMk cId="3076973922" sldId="319"/>
+            <ac:picMk id="9" creationId="{176CF9F8-6084-48D4-BA3C-4D1C0346C9D5}"/>
+          </ac:picMkLst>
+        </pc:picChg>
+        <pc:picChg chg="add mod">
+          <ac:chgData name="LEUNG Nicole" userId="8ed04819-1a1c-42ab-ae09-44d42575f3a6" providerId="ADAL" clId="{46AED7F8-18BE-4C7E-B9AC-F4C2CA2D1D79}" dt="2023-03-22T06:04:19.637" v="1706" actId="1076"/>
+          <ac:picMkLst>
+            <pc:docMk/>
+            <pc:sldMk cId="3076973922" sldId="319"/>
+            <ac:picMk id="11" creationId="{F7FF54D0-84C9-4483-AE8F-198B5CF48592}"/>
+          </ac:picMkLst>
+        </pc:picChg>
+        <pc:picChg chg="add mod">
+          <ac:chgData name="LEUNG Nicole" userId="8ed04819-1a1c-42ab-ae09-44d42575f3a6" providerId="ADAL" clId="{46AED7F8-18BE-4C7E-B9AC-F4C2CA2D1D79}" dt="2023-03-22T06:04:06.242" v="1703" actId="1076"/>
+          <ac:picMkLst>
+            <pc:docMk/>
+            <pc:sldMk cId="3076973922" sldId="319"/>
+            <ac:picMk id="13" creationId="{97A1868A-B8CD-4FC7-9EB6-7A0CD4210F49}"/>
+          </ac:picMkLst>
+        </pc:picChg>
+      </pc:sldChg>
+      <pc:sldChg chg="new del">
+        <pc:chgData name="LEUNG Nicole" userId="8ed04819-1a1c-42ab-ae09-44d42575f3a6" providerId="ADAL" clId="{46AED7F8-18BE-4C7E-B9AC-F4C2CA2D1D79}" dt="2023-03-22T06:03:27.404" v="1697" actId="2696"/>
+        <pc:sldMkLst>
+          <pc:docMk/>
+          <pc:sldMk cId="3225223899" sldId="320"/>
+        </pc:sldMkLst>
+      </pc:sldChg>
+      <pc:sldChg chg="add">
+        <pc:chgData name="LEUNG Nicole" userId="8ed04819-1a1c-42ab-ae09-44d42575f3a6" providerId="ADAL" clId="{46AED7F8-18BE-4C7E-B9AC-F4C2CA2D1D79}" dt="2023-03-22T07:07:44.961" v="2213"/>
+        <pc:sldMkLst>
+          <pc:docMk/>
+          <pc:sldMk cId="755391499" sldId="321"/>
+        </pc:sldMkLst>
+      </pc:sldChg>
+      <pc:sldChg chg="addSp delSp modSp new del mod">
+        <pc:chgData name="LEUNG Nicole" userId="8ed04819-1a1c-42ab-ae09-44d42575f3a6" providerId="ADAL" clId="{46AED7F8-18BE-4C7E-B9AC-F4C2CA2D1D79}" dt="2023-03-22T07:07:39.550" v="2210" actId="2696"/>
+        <pc:sldMkLst>
+          <pc:docMk/>
+          <pc:sldMk cId="3016156902" sldId="321"/>
+        </pc:sldMkLst>
+        <pc:spChg chg="del">
+          <ac:chgData name="LEUNG Nicole" userId="8ed04819-1a1c-42ab-ae09-44d42575f3a6" providerId="ADAL" clId="{46AED7F8-18BE-4C7E-B9AC-F4C2CA2D1D79}" dt="2023-03-22T06:11:32.511" v="2167" actId="478"/>
+          <ac:spMkLst>
+            <pc:docMk/>
+            <pc:sldMk cId="3016156902" sldId="321"/>
+            <ac:spMk id="2" creationId="{4D15E652-1958-42A2-8C54-C1280982E655}"/>
+          </ac:spMkLst>
+        </pc:spChg>
+        <pc:spChg chg="mod ord">
+          <ac:chgData name="LEUNG Nicole" userId="8ed04819-1a1c-42ab-ae09-44d42575f3a6" providerId="ADAL" clId="{46AED7F8-18BE-4C7E-B9AC-F4C2CA2D1D79}" dt="2023-03-22T06:12:16.896" v="2182" actId="20577"/>
+          <ac:spMkLst>
+            <pc:docMk/>
+            <pc:sldMk cId="3016156902" sldId="321"/>
+            <ac:spMk id="3" creationId="{EB57EC2E-D10C-4115-A6AF-5B5EE6482C00}"/>
+          </ac:spMkLst>
+        </pc:spChg>
+        <pc:picChg chg="add mod">
+          <ac:chgData name="LEUNG Nicole" userId="8ed04819-1a1c-42ab-ae09-44d42575f3a6" providerId="ADAL" clId="{46AED7F8-18BE-4C7E-B9AC-F4C2CA2D1D79}" dt="2023-03-22T06:11:31.094" v="2166" actId="14100"/>
+          <ac:picMkLst>
+            <pc:docMk/>
+            <pc:sldMk cId="3016156902" sldId="321"/>
+            <ac:picMk id="5" creationId="{93A6E2F8-D542-45A6-830D-1BFD1DA2FCAE}"/>
+          </ac:picMkLst>
+        </pc:picChg>
+        <pc:picChg chg="add mod">
+          <ac:chgData name="LEUNG Nicole" userId="8ed04819-1a1c-42ab-ae09-44d42575f3a6" providerId="ADAL" clId="{46AED7F8-18BE-4C7E-B9AC-F4C2CA2D1D79}" dt="2023-03-22T06:11:40.326" v="2169" actId="14100"/>
+          <ac:picMkLst>
+            <pc:docMk/>
+            <pc:sldMk cId="3016156902" sldId="321"/>
+            <ac:picMk id="7" creationId="{35F07CFD-DA67-44B3-9388-695B3D565255}"/>
+          </ac:picMkLst>
+        </pc:picChg>
+        <pc:picChg chg="add mod">
+          <ac:chgData name="LEUNG Nicole" userId="8ed04819-1a1c-42ab-ae09-44d42575f3a6" providerId="ADAL" clId="{46AED7F8-18BE-4C7E-B9AC-F4C2CA2D1D79}" dt="2023-03-22T06:11:47.739" v="2172" actId="1076"/>
+          <ac:picMkLst>
+            <pc:docMk/>
+            <pc:sldMk cId="3016156902" sldId="321"/>
+            <ac:picMk id="9" creationId="{08B27B97-2012-40EF-AFF2-8BE74590E570}"/>
+          </ac:picMkLst>
+        </pc:picChg>
+        <pc:picChg chg="add mod">
+          <ac:chgData name="LEUNG Nicole" userId="8ed04819-1a1c-42ab-ae09-44d42575f3a6" providerId="ADAL" clId="{46AED7F8-18BE-4C7E-B9AC-F4C2CA2D1D79}" dt="2023-03-22T06:11:56.891" v="2176" actId="14100"/>
+          <ac:picMkLst>
+            <pc:docMk/>
+            <pc:sldMk cId="3016156902" sldId="321"/>
+            <ac:picMk id="11" creationId="{B59BF4F0-F592-438C-8D21-A1904B8908FB}"/>
+          </ac:picMkLst>
+        </pc:picChg>
+      </pc:sldChg>
+      <pc:sldChg chg="new del">
+        <pc:chgData name="LEUNG Nicole" userId="8ed04819-1a1c-42ab-ae09-44d42575f3a6" providerId="ADAL" clId="{46AED7F8-18BE-4C7E-B9AC-F4C2CA2D1D79}" dt="2023-03-23T09:18:14.480" v="2645" actId="2696"/>
+        <pc:sldMkLst>
+          <pc:docMk/>
+          <pc:sldMk cId="3752621791" sldId="322"/>
+        </pc:sldMkLst>
+      </pc:sldChg>
+      <pc:sldChg chg="addSp delSp modSp new mod ord">
+        <pc:chgData name="LEUNG Nicole" userId="8ed04819-1a1c-42ab-ae09-44d42575f3a6" providerId="ADAL" clId="{46AED7F8-18BE-4C7E-B9AC-F4C2CA2D1D79}" dt="2023-03-23T09:17:44.090" v="2644"/>
+        <pc:sldMkLst>
+          <pc:docMk/>
+          <pc:sldMk cId="3138354313" sldId="323"/>
+        </pc:sldMkLst>
+        <pc:spChg chg="del">
+          <ac:chgData name="LEUNG Nicole" userId="8ed04819-1a1c-42ab-ae09-44d42575f3a6" providerId="ADAL" clId="{46AED7F8-18BE-4C7E-B9AC-F4C2CA2D1D79}" dt="2023-03-23T09:17:36.373" v="2642" actId="478"/>
+          <ac:spMkLst>
+            <pc:docMk/>
+            <pc:sldMk cId="3138354313" sldId="323"/>
+            <ac:spMk id="2" creationId="{BC32BAFC-9449-4227-B728-501DAF51AF88}"/>
+          </ac:spMkLst>
+        </pc:spChg>
+        <pc:spChg chg="del">
+          <ac:chgData name="LEUNG Nicole" userId="8ed04819-1a1c-42ab-ae09-44d42575f3a6" providerId="ADAL" clId="{46AED7F8-18BE-4C7E-B9AC-F4C2CA2D1D79}" dt="2023-03-23T09:17:35.138" v="2641" actId="478"/>
+          <ac:spMkLst>
+            <pc:docMk/>
+            <pc:sldMk cId="3138354313" sldId="323"/>
+            <ac:spMk id="3" creationId="{E2695FCF-E8CF-4B83-9EF8-8F5311F6AC71}"/>
+          </ac:spMkLst>
+        </pc:spChg>
+        <pc:picChg chg="add mod">
+          <ac:chgData name="LEUNG Nicole" userId="8ed04819-1a1c-42ab-ae09-44d42575f3a6" providerId="ADAL" clId="{46AED7F8-18BE-4C7E-B9AC-F4C2CA2D1D79}" dt="2023-03-23T09:17:29.461" v="2639" actId="14100"/>
+          <ac:picMkLst>
+            <pc:docMk/>
+            <pc:sldMk cId="3138354313" sldId="323"/>
+            <ac:picMk id="5" creationId="{ED433F08-4168-407A-9984-7AD5B6044148}"/>
+          </ac:picMkLst>
+        </pc:picChg>
+        <pc:picChg chg="add mod">
+          <ac:chgData name="LEUNG Nicole" userId="8ed04819-1a1c-42ab-ae09-44d42575f3a6" providerId="ADAL" clId="{46AED7F8-18BE-4C7E-B9AC-F4C2CA2D1D79}" dt="2023-03-23T09:17:32.309" v="2640" actId="14100"/>
+          <ac:picMkLst>
+            <pc:docMk/>
+            <pc:sldMk cId="3138354313" sldId="323"/>
+            <ac:picMk id="7" creationId="{D8385936-414D-4CD3-87C3-322F7081F59E}"/>
+          </ac:picMkLst>
+        </pc:picChg>
+      </pc:sldChg>
+      <pc:sldChg chg="addSp delSp modSp mod">
+        <pc:chgData name="LEUNG Nicole" userId="8ed04819-1a1c-42ab-ae09-44d42575f3a6" providerId="ADAL" clId="{46AED7F8-18BE-4C7E-B9AC-F4C2CA2D1D79}" dt="2023-03-27T03:30:21.004" v="3264" actId="20577"/>
+        <pc:sldMkLst>
+          <pc:docMk/>
+          <pc:sldMk cId="685052390" sldId="324"/>
+        </pc:sldMkLst>
+        <pc:spChg chg="add mod">
+          <ac:chgData name="LEUNG Nicole" userId="8ed04819-1a1c-42ab-ae09-44d42575f3a6" providerId="ADAL" clId="{46AED7F8-18BE-4C7E-B9AC-F4C2CA2D1D79}" dt="2023-03-24T10:12:32.655" v="3014" actId="1076"/>
+          <ac:spMkLst>
+            <pc:docMk/>
+            <pc:sldMk cId="685052390" sldId="324"/>
+            <ac:spMk id="7" creationId="{1C923572-75D1-4013-BD55-03F47BADD876}"/>
+          </ac:spMkLst>
+        </pc:spChg>
+        <pc:spChg chg="mod">
+          <ac:chgData name="LEUNG Nicole" userId="8ed04819-1a1c-42ab-ae09-44d42575f3a6" providerId="ADAL" clId="{46AED7F8-18BE-4C7E-B9AC-F4C2CA2D1D79}" dt="2023-03-27T03:29:57.510" v="3263" actId="1076"/>
+          <ac:spMkLst>
+            <pc:docMk/>
+            <pc:sldMk cId="685052390" sldId="324"/>
+            <ac:spMk id="8" creationId="{ACACAFAB-4930-4CFE-AD1A-44985FAC3B14}"/>
+          </ac:spMkLst>
+        </pc:spChg>
+        <pc:spChg chg="add mod">
+          <ac:chgData name="LEUNG Nicole" userId="8ed04819-1a1c-42ab-ae09-44d42575f3a6" providerId="ADAL" clId="{46AED7F8-18BE-4C7E-B9AC-F4C2CA2D1D79}" dt="2023-03-27T02:52:44.254" v="3240" actId="1076"/>
+          <ac:spMkLst>
+            <pc:docMk/>
+            <pc:sldMk cId="685052390" sldId="324"/>
+            <ac:spMk id="9" creationId="{9B610A0A-A807-4235-8BB1-F0CB168CB21A}"/>
+          </ac:spMkLst>
+        </pc:spChg>
+        <pc:spChg chg="add mod">
+          <ac:chgData name="LEUNG Nicole" userId="8ed04819-1a1c-42ab-ae09-44d42575f3a6" providerId="ADAL" clId="{46AED7F8-18BE-4C7E-B9AC-F4C2CA2D1D79}" dt="2023-03-24T10:19:31.679" v="3094" actId="688"/>
+          <ac:spMkLst>
+            <pc:docMk/>
+            <pc:sldMk cId="685052390" sldId="324"/>
+            <ac:spMk id="10" creationId="{998ACEB0-0BC7-4E30-A153-38F9EA57121C}"/>
+          </ac:spMkLst>
+        </pc:spChg>
+        <pc:spChg chg="add mod">
+          <ac:chgData name="LEUNG Nicole" userId="8ed04819-1a1c-42ab-ae09-44d42575f3a6" providerId="ADAL" clId="{46AED7F8-18BE-4C7E-B9AC-F4C2CA2D1D79}" dt="2023-03-24T10:19:17.470" v="3089" actId="1076"/>
+          <ac:spMkLst>
+            <pc:docMk/>
+            <pc:sldMk cId="685052390" sldId="324"/>
+            <ac:spMk id="14" creationId="{2B06C150-EBE6-483B-B164-9DADAA66B82A}"/>
+          </ac:spMkLst>
+        </pc:spChg>
+        <pc:spChg chg="mod">
+          <ac:chgData name="LEUNG Nicole" userId="8ed04819-1a1c-42ab-ae09-44d42575f3a6" providerId="ADAL" clId="{46AED7F8-18BE-4C7E-B9AC-F4C2CA2D1D79}" dt="2023-03-24T10:26:47.919" v="3203" actId="1076"/>
+          <ac:spMkLst>
+            <pc:docMk/>
+            <pc:sldMk cId="685052390" sldId="324"/>
+            <ac:spMk id="15" creationId="{FE01B4FE-6411-477A-998F-2C14F0F7DD43}"/>
+          </ac:spMkLst>
+        </pc:spChg>
+        <pc:spChg chg="add del">
+          <ac:chgData name="LEUNG Nicole" userId="8ed04819-1a1c-42ab-ae09-44d42575f3a6" providerId="ADAL" clId="{46AED7F8-18BE-4C7E-B9AC-F4C2CA2D1D79}" dt="2023-03-24T10:13:18.032" v="3016" actId="478"/>
+          <ac:spMkLst>
+            <pc:docMk/>
+            <pc:sldMk cId="685052390" sldId="324"/>
+            <ac:spMk id="20" creationId="{3FF0E947-3263-4834-8B48-CBA67C4E3350}"/>
+          </ac:spMkLst>
+        </pc:spChg>
+        <pc:spChg chg="add mod">
+          <ac:chgData name="LEUNG Nicole" userId="8ed04819-1a1c-42ab-ae09-44d42575f3a6" providerId="ADAL" clId="{46AED7F8-18BE-4C7E-B9AC-F4C2CA2D1D79}" dt="2023-03-24T10:15:09.833" v="3028" actId="14100"/>
+          <ac:spMkLst>
+            <pc:docMk/>
+            <pc:sldMk cId="685052390" sldId="324"/>
+            <ac:spMk id="24" creationId="{5AB93E4E-E4F3-45EF-B769-F80A40A3D317}"/>
+          </ac:spMkLst>
+        </pc:spChg>
+        <pc:spChg chg="add mod">
+          <ac:chgData name="LEUNG Nicole" userId="8ed04819-1a1c-42ab-ae09-44d42575f3a6" providerId="ADAL" clId="{46AED7F8-18BE-4C7E-B9AC-F4C2CA2D1D79}" dt="2023-03-27T03:30:21.004" v="3264" actId="20577"/>
+          <ac:spMkLst>
+            <pc:docMk/>
+            <pc:sldMk cId="685052390" sldId="324"/>
+            <ac:spMk id="26" creationId="{818922C5-BB94-4905-B298-6AE31E0E1A7F}"/>
+          </ac:spMkLst>
+        </pc:spChg>
+        <pc:spChg chg="add del mod">
+          <ac:chgData name="LEUNG Nicole" userId="8ed04819-1a1c-42ab-ae09-44d42575f3a6" providerId="ADAL" clId="{46AED7F8-18BE-4C7E-B9AC-F4C2CA2D1D79}" dt="2023-03-24T10:25:59.070" v="3162" actId="478"/>
+          <ac:spMkLst>
+            <pc:docMk/>
+            <pc:sldMk cId="685052390" sldId="324"/>
+            <ac:spMk id="27" creationId="{1A9ED5E1-48FD-4185-BF99-8F8E0B7BBA88}"/>
+          </ac:spMkLst>
+        </pc:spChg>
+        <pc:spChg chg="add del mod">
+          <ac:chgData name="LEUNG Nicole" userId="8ed04819-1a1c-42ab-ae09-44d42575f3a6" providerId="ADAL" clId="{46AED7F8-18BE-4C7E-B9AC-F4C2CA2D1D79}" dt="2023-03-24T10:25:57.401" v="3161" actId="478"/>
+          <ac:spMkLst>
+            <pc:docMk/>
+            <pc:sldMk cId="685052390" sldId="324"/>
+            <ac:spMk id="28" creationId="{4F0027DD-ABC7-4AF4-BFC4-F9FB5711F997}"/>
+          </ac:spMkLst>
+        </pc:spChg>
+        <pc:spChg chg="add mod">
+          <ac:chgData name="LEUNG Nicole" userId="8ed04819-1a1c-42ab-ae09-44d42575f3a6" providerId="ADAL" clId="{46AED7F8-18BE-4C7E-B9AC-F4C2CA2D1D79}" dt="2023-03-24T10:21:33.213" v="3131" actId="1076"/>
+          <ac:spMkLst>
+            <pc:docMk/>
+            <pc:sldMk cId="685052390" sldId="324"/>
+            <ac:spMk id="29" creationId="{B1D27924-AF5D-4649-B780-A5D4918CA5C0}"/>
+          </ac:spMkLst>
+        </pc:spChg>
+        <pc:spChg chg="add mod">
+          <ac:chgData name="LEUNG Nicole" userId="8ed04819-1a1c-42ab-ae09-44d42575f3a6" providerId="ADAL" clId="{46AED7F8-18BE-4C7E-B9AC-F4C2CA2D1D79}" dt="2023-03-24T10:19:28.220" v="3093" actId="1076"/>
+          <ac:spMkLst>
+            <pc:docMk/>
+            <pc:sldMk cId="685052390" sldId="324"/>
+            <ac:spMk id="30" creationId="{A99FE39C-236C-4D51-8C3D-5233222958F0}"/>
+          </ac:spMkLst>
+        </pc:spChg>
+        <pc:spChg chg="add">
+          <ac:chgData name="LEUNG Nicole" userId="8ed04819-1a1c-42ab-ae09-44d42575f3a6" providerId="ADAL" clId="{46AED7F8-18BE-4C7E-B9AC-F4C2CA2D1D79}" dt="2023-03-24T10:24:57.909" v="3149" actId="11529"/>
+          <ac:spMkLst>
+            <pc:docMk/>
+            <pc:sldMk cId="685052390" sldId="324"/>
+            <ac:spMk id="32" creationId="{A8B24CE1-1381-4D59-A4C4-3AD4D3968F47}"/>
+          </ac:spMkLst>
+        </pc:spChg>
+        <pc:spChg chg="add mod">
+          <ac:chgData name="LEUNG Nicole" userId="8ed04819-1a1c-42ab-ae09-44d42575f3a6" providerId="ADAL" clId="{46AED7F8-18BE-4C7E-B9AC-F4C2CA2D1D79}" dt="2023-03-24T10:26:51.672" v="3204" actId="14100"/>
+          <ac:spMkLst>
+            <pc:docMk/>
+            <pc:sldMk cId="685052390" sldId="324"/>
+            <ac:spMk id="33" creationId="{5CF35FAB-F10C-47EA-8B85-33301370A547}"/>
+          </ac:spMkLst>
+        </pc:spChg>
+        <pc:picChg chg="del mod">
+          <ac:chgData name="LEUNG Nicole" userId="8ed04819-1a1c-42ab-ae09-44d42575f3a6" providerId="ADAL" clId="{46AED7F8-18BE-4C7E-B9AC-F4C2CA2D1D79}" dt="2023-03-24T09:55:13.108" v="2909" actId="21"/>
+          <ac:picMkLst>
+            <pc:docMk/>
+            <pc:sldMk cId="685052390" sldId="324"/>
+            <ac:picMk id="3" creationId="{9F83FB1F-6BD8-4C48-8818-02A6418D222B}"/>
+          </ac:picMkLst>
+        </pc:picChg>
+        <pc:picChg chg="del mod">
+          <ac:chgData name="LEUNG Nicole" userId="8ed04819-1a1c-42ab-ae09-44d42575f3a6" providerId="ADAL" clId="{46AED7F8-18BE-4C7E-B9AC-F4C2CA2D1D79}" dt="2023-03-24T10:26:00.252" v="3163" actId="478"/>
+          <ac:picMkLst>
+            <pc:docMk/>
+            <pc:sldMk cId="685052390" sldId="324"/>
+            <ac:picMk id="4" creationId="{3593EE09-63A8-47A5-812D-AFFE796AB757}"/>
+          </ac:picMkLst>
+        </pc:picChg>
+        <pc:picChg chg="mod">
+          <ac:chgData name="LEUNG Nicole" userId="8ed04819-1a1c-42ab-ae09-44d42575f3a6" providerId="ADAL" clId="{46AED7F8-18BE-4C7E-B9AC-F4C2CA2D1D79}" dt="2023-03-24T10:12:06.940" v="3008" actId="1076"/>
+          <ac:picMkLst>
+            <pc:docMk/>
+            <pc:sldMk cId="685052390" sldId="324"/>
+            <ac:picMk id="5" creationId="{714BE021-93C7-4C60-BD25-550C2F0AB1AD}"/>
+          </ac:picMkLst>
+        </pc:picChg>
+        <pc:picChg chg="mod">
+          <ac:chgData name="LEUNG Nicole" userId="8ed04819-1a1c-42ab-ae09-44d42575f3a6" providerId="ADAL" clId="{46AED7F8-18BE-4C7E-B9AC-F4C2CA2D1D79}" dt="2023-03-24T10:21:50.428" v="3136" actId="14100"/>
+          <ac:picMkLst>
+            <pc:docMk/>
+            <pc:sldMk cId="685052390" sldId="324"/>
+            <ac:picMk id="6" creationId="{E02C09AD-179E-463D-ABB4-5F3E636BE935}"/>
+          </ac:picMkLst>
+        </pc:picChg>
+        <pc:picChg chg="add mod">
+          <ac:chgData name="LEUNG Nicole" userId="8ed04819-1a1c-42ab-ae09-44d42575f3a6" providerId="ADAL" clId="{46AED7F8-18BE-4C7E-B9AC-F4C2CA2D1D79}" dt="2023-03-24T09:55:24.529" v="2913" actId="1076"/>
+          <ac:picMkLst>
+            <pc:docMk/>
+            <pc:sldMk cId="685052390" sldId="324"/>
+            <ac:picMk id="11" creationId="{FD5C0C17-4E61-490B-8288-D4424E1F336B}"/>
+          </ac:picMkLst>
+        </pc:picChg>
+        <pc:picChg chg="add del mod">
+          <ac:chgData name="LEUNG Nicole" userId="8ed04819-1a1c-42ab-ae09-44d42575f3a6" providerId="ADAL" clId="{46AED7F8-18BE-4C7E-B9AC-F4C2CA2D1D79}" dt="2023-03-24T09:55:21.407" v="2912" actId="478"/>
+          <ac:picMkLst>
+            <pc:docMk/>
+            <pc:sldMk cId="685052390" sldId="324"/>
+            <ac:picMk id="12" creationId="{DFB73717-4F8B-4595-A3D3-DC315645610F}"/>
+          </ac:picMkLst>
+        </pc:picChg>
+        <pc:picChg chg="add mod">
+          <ac:chgData name="LEUNG Nicole" userId="8ed04819-1a1c-42ab-ae09-44d42575f3a6" providerId="ADAL" clId="{46AED7F8-18BE-4C7E-B9AC-F4C2CA2D1D79}" dt="2023-03-24T10:16:54.587" v="3050" actId="1076"/>
+          <ac:picMkLst>
+            <pc:docMk/>
+            <pc:sldMk cId="685052390" sldId="324"/>
+            <ac:picMk id="13" creationId="{BC052B5A-861C-4229-8BCE-1EA21AC9A22F}"/>
+          </ac:picMkLst>
+        </pc:picChg>
+        <pc:picChg chg="add del mod">
+          <ac:chgData name="LEUNG Nicole" userId="8ed04819-1a1c-42ab-ae09-44d42575f3a6" providerId="ADAL" clId="{46AED7F8-18BE-4C7E-B9AC-F4C2CA2D1D79}" dt="2023-03-24T10:09:55.733" v="2988" actId="478"/>
+          <ac:picMkLst>
+            <pc:docMk/>
+            <pc:sldMk cId="685052390" sldId="324"/>
+            <ac:picMk id="17" creationId="{0D33EF9B-5D92-45B8-BFD3-53B7FBB9C279}"/>
+          </ac:picMkLst>
+        </pc:picChg>
+        <pc:picChg chg="add del mod">
+          <ac:chgData name="LEUNG Nicole" userId="8ed04819-1a1c-42ab-ae09-44d42575f3a6" providerId="ADAL" clId="{46AED7F8-18BE-4C7E-B9AC-F4C2CA2D1D79}" dt="2023-03-24T10:08:38.175" v="2971" actId="478"/>
+          <ac:picMkLst>
+            <pc:docMk/>
+            <pc:sldMk cId="685052390" sldId="324"/>
+            <ac:picMk id="19" creationId="{9A6A468E-4F27-4BF6-BEAC-E9C3D1CE94D3}"/>
+          </ac:picMkLst>
+        </pc:picChg>
+        <pc:picChg chg="add mod">
+          <ac:chgData name="LEUNG Nicole" userId="8ed04819-1a1c-42ab-ae09-44d42575f3a6" providerId="ADAL" clId="{46AED7F8-18BE-4C7E-B9AC-F4C2CA2D1D79}" dt="2023-03-24T10:19:22.776" v="3091" actId="1076"/>
+          <ac:picMkLst>
+            <pc:docMk/>
+            <pc:sldMk cId="685052390" sldId="324"/>
+            <ac:picMk id="25" creationId="{7FB1C738-5C43-48C6-AF12-E64712FDCE39}"/>
+          </ac:picMkLst>
+        </pc:picChg>
+        <pc:picChg chg="add mod">
+          <ac:chgData name="LEUNG Nicole" userId="8ed04819-1a1c-42ab-ae09-44d42575f3a6" providerId="ADAL" clId="{46AED7F8-18BE-4C7E-B9AC-F4C2CA2D1D79}" dt="2023-03-24T10:20:21.363" v="3109" actId="1076"/>
+          <ac:picMkLst>
+            <pc:docMk/>
+            <pc:sldMk cId="685052390" sldId="324"/>
+            <ac:picMk id="31" creationId="{4E4690F8-7D4F-4CA7-A1A4-91EE49E599BD}"/>
+          </ac:picMkLst>
+        </pc:picChg>
+        <pc:picChg chg="add mod">
+          <ac:chgData name="LEUNG Nicole" userId="8ed04819-1a1c-42ab-ae09-44d42575f3a6" providerId="ADAL" clId="{46AED7F8-18BE-4C7E-B9AC-F4C2CA2D1D79}" dt="2023-03-24T10:26:44.644" v="3202" actId="1076"/>
+          <ac:picMkLst>
+            <pc:docMk/>
+            <pc:sldMk cId="685052390" sldId="324"/>
+            <ac:picMk id="34" creationId="{01164368-3CD4-4688-B754-E7302AEB6463}"/>
+          </ac:picMkLst>
+        </pc:picChg>
+        <pc:cxnChg chg="add del mod">
+          <ac:chgData name="LEUNG Nicole" userId="8ed04819-1a1c-42ab-ae09-44d42575f3a6" providerId="ADAL" clId="{46AED7F8-18BE-4C7E-B9AC-F4C2CA2D1D79}" dt="2023-03-24T10:13:56.462" v="3019" actId="478"/>
+          <ac:cxnSpMkLst>
+            <pc:docMk/>
+            <pc:sldMk cId="685052390" sldId="324"/>
+            <ac:cxnSpMk id="22" creationId="{88FDC431-C57F-4E02-A077-41D44BA209C5}"/>
+          </ac:cxnSpMkLst>
+        </pc:cxnChg>
+      </pc:sldChg>
+      <pc:sldChg chg="addSp delSp modSp new mod">
+        <pc:chgData name="LEUNG Nicole" userId="8ed04819-1a1c-42ab-ae09-44d42575f3a6" providerId="ADAL" clId="{46AED7F8-18BE-4C7E-B9AC-F4C2CA2D1D79}" dt="2023-03-27T07:11:14.333" v="3279" actId="478"/>
+        <pc:sldMkLst>
+          <pc:docMk/>
+          <pc:sldMk cId="4051684265" sldId="328"/>
+        </pc:sldMkLst>
+        <pc:spChg chg="del mod">
+          <ac:chgData name="LEUNG Nicole" userId="8ed04819-1a1c-42ab-ae09-44d42575f3a6" providerId="ADAL" clId="{46AED7F8-18BE-4C7E-B9AC-F4C2CA2D1D79}" dt="2023-03-27T07:11:06.750" v="3278" actId="478"/>
+          <ac:spMkLst>
+            <pc:docMk/>
+            <pc:sldMk cId="4051684265" sldId="328"/>
+            <ac:spMk id="2" creationId="{401AFF46-3395-4ACF-9AB7-F4F8DFD6FC95}"/>
+          </ac:spMkLst>
+        </pc:spChg>
+        <pc:spChg chg="del">
+          <ac:chgData name="LEUNG Nicole" userId="8ed04819-1a1c-42ab-ae09-44d42575f3a6" providerId="ADAL" clId="{46AED7F8-18BE-4C7E-B9AC-F4C2CA2D1D79}" dt="2023-03-27T07:10:55.226" v="3276" actId="478"/>
+          <ac:spMkLst>
+            <pc:docMk/>
+            <pc:sldMk cId="4051684265" sldId="328"/>
+            <ac:spMk id="3" creationId="{6D45CDE9-646F-4A92-8758-51203A92682E}"/>
+          </ac:spMkLst>
+        </pc:spChg>
+        <pc:spChg chg="add del mod">
+          <ac:chgData name="LEUNG Nicole" userId="8ed04819-1a1c-42ab-ae09-44d42575f3a6" providerId="ADAL" clId="{46AED7F8-18BE-4C7E-B9AC-F4C2CA2D1D79}" dt="2023-03-27T07:11:14.333" v="3279" actId="478"/>
+          <ac:spMkLst>
+            <pc:docMk/>
+            <pc:sldMk cId="4051684265" sldId="328"/>
+            <ac:spMk id="7" creationId="{8DD55ACF-CFAD-4575-9B5C-7EA50594794E}"/>
+          </ac:spMkLst>
+        </pc:spChg>
+        <pc:picChg chg="add mod">
+          <ac:chgData name="LEUNG Nicole" userId="8ed04819-1a1c-42ab-ae09-44d42575f3a6" providerId="ADAL" clId="{46AED7F8-18BE-4C7E-B9AC-F4C2CA2D1D79}" dt="2023-03-27T07:02:36.108" v="3271" actId="1076"/>
+          <ac:picMkLst>
+            <pc:docMk/>
+            <pc:sldMk cId="4051684265" sldId="328"/>
+            <ac:picMk id="5" creationId="{599AA1E7-AFCC-45AE-9BEF-3FBB15E2E165}"/>
+          </ac:picMkLst>
+        </pc:picChg>
+      </pc:sldChg>
+      <pc:sldChg chg="addSp delSp modSp new mod ord">
+        <pc:chgData name="LEUNG Nicole" userId="8ed04819-1a1c-42ab-ae09-44d42575f3a6" providerId="ADAL" clId="{46AED7F8-18BE-4C7E-B9AC-F4C2CA2D1D79}" dt="2023-03-27T08:08:59.674" v="3356"/>
+        <pc:sldMkLst>
+          <pc:docMk/>
+          <pc:sldMk cId="1680002346" sldId="329"/>
+        </pc:sldMkLst>
+        <pc:spChg chg="del">
+          <ac:chgData name="LEUNG Nicole" userId="8ed04819-1a1c-42ab-ae09-44d42575f3a6" providerId="ADAL" clId="{46AED7F8-18BE-4C7E-B9AC-F4C2CA2D1D79}" dt="2023-03-27T07:13:26.820" v="3285" actId="478"/>
+          <ac:spMkLst>
+            <pc:docMk/>
+            <pc:sldMk cId="1680002346" sldId="329"/>
+            <ac:spMk id="2" creationId="{D556A4C1-B1D5-41A8-AFFD-F4465CE841C5}"/>
+          </ac:spMkLst>
+        </pc:spChg>
+        <pc:spChg chg="del">
+          <ac:chgData name="LEUNG Nicole" userId="8ed04819-1a1c-42ab-ae09-44d42575f3a6" providerId="ADAL" clId="{46AED7F8-18BE-4C7E-B9AC-F4C2CA2D1D79}" dt="2023-03-27T07:13:28.931" v="3286" actId="478"/>
+          <ac:spMkLst>
+            <pc:docMk/>
+            <pc:sldMk cId="1680002346" sldId="329"/>
+            <ac:spMk id="3" creationId="{23EBE132-2B39-4C18-AF01-D6345F481804}"/>
+          </ac:spMkLst>
+        </pc:spChg>
+        <pc:spChg chg="add mod">
+          <ac:chgData name="LEUNG Nicole" userId="8ed04819-1a1c-42ab-ae09-44d42575f3a6" providerId="ADAL" clId="{46AED7F8-18BE-4C7E-B9AC-F4C2CA2D1D79}" dt="2023-03-27T07:13:24.785" v="3284" actId="1076"/>
+          <ac:spMkLst>
+            <pc:docMk/>
+            <pc:sldMk cId="1680002346" sldId="329"/>
+            <ac:spMk id="6" creationId="{B48B13D0-6CBE-4360-BDD5-D11037B19CF9}"/>
+          </ac:spMkLst>
+        </pc:spChg>
+        <pc:picChg chg="add mod">
+          <ac:chgData name="LEUNG Nicole" userId="8ed04819-1a1c-42ab-ae09-44d42575f3a6" providerId="ADAL" clId="{46AED7F8-18BE-4C7E-B9AC-F4C2CA2D1D79}" dt="2023-03-27T08:06:58.212" v="3348" actId="1076"/>
+          <ac:picMkLst>
+            <pc:docMk/>
+            <pc:sldMk cId="1680002346" sldId="329"/>
+            <ac:picMk id="5" creationId="{04F15152-2C0C-4230-8C26-EE79745FAFA3}"/>
+          </ac:picMkLst>
+        </pc:picChg>
+        <pc:picChg chg="add mod">
+          <ac:chgData name="LEUNG Nicole" userId="8ed04819-1a1c-42ab-ae09-44d42575f3a6" providerId="ADAL" clId="{46AED7F8-18BE-4C7E-B9AC-F4C2CA2D1D79}" dt="2023-03-27T08:06:55.969" v="3347" actId="14100"/>
+          <ac:picMkLst>
+            <pc:docMk/>
+            <pc:sldMk cId="1680002346" sldId="329"/>
+            <ac:picMk id="7" creationId="{4ECEBB5A-382C-48A1-A362-96EE731A4B2C}"/>
+          </ac:picMkLst>
+        </pc:picChg>
+      </pc:sldChg>
+      <pc:sldChg chg="addSp delSp modSp new mod">
+        <pc:chgData name="LEUNG Nicole" userId="8ed04819-1a1c-42ab-ae09-44d42575f3a6" providerId="ADAL" clId="{46AED7F8-18BE-4C7E-B9AC-F4C2CA2D1D79}" dt="2023-03-27T07:42:24.476" v="3313" actId="1076"/>
+        <pc:sldMkLst>
+          <pc:docMk/>
+          <pc:sldMk cId="2074922080" sldId="330"/>
+        </pc:sldMkLst>
+        <pc:spChg chg="del">
+          <ac:chgData name="LEUNG Nicole" userId="8ed04819-1a1c-42ab-ae09-44d42575f3a6" providerId="ADAL" clId="{46AED7F8-18BE-4C7E-B9AC-F4C2CA2D1D79}" dt="2023-03-27T07:38:11.184" v="3302" actId="478"/>
+          <ac:spMkLst>
+            <pc:docMk/>
+            <pc:sldMk cId="2074922080" sldId="330"/>
+            <ac:spMk id="2" creationId="{527BF387-9D19-465A-AD31-702E485927BF}"/>
+          </ac:spMkLst>
+        </pc:spChg>
+        <pc:spChg chg="del">
+          <ac:chgData name="LEUNG Nicole" userId="8ed04819-1a1c-42ab-ae09-44d42575f3a6" providerId="ADAL" clId="{46AED7F8-18BE-4C7E-B9AC-F4C2CA2D1D79}" dt="2023-03-27T07:38:07.636" v="3301" actId="478"/>
+          <ac:spMkLst>
+            <pc:docMk/>
+            <pc:sldMk cId="2074922080" sldId="330"/>
+            <ac:spMk id="3" creationId="{29344073-8376-4C02-AF18-C2FD08BF6D76}"/>
+          </ac:spMkLst>
+        </pc:spChg>
+        <pc:spChg chg="add mod">
+          <ac:chgData name="LEUNG Nicole" userId="8ed04819-1a1c-42ab-ae09-44d42575f3a6" providerId="ADAL" clId="{46AED7F8-18BE-4C7E-B9AC-F4C2CA2D1D79}" dt="2023-03-27T07:42:11.979" v="3308" actId="1076"/>
+          <ac:spMkLst>
+            <pc:docMk/>
+            <pc:sldMk cId="2074922080" sldId="330"/>
+            <ac:spMk id="6" creationId="{D88ED61B-BFD5-408F-9584-EA14267C9EF8}"/>
+          </ac:spMkLst>
+        </pc:spChg>
+        <pc:picChg chg="add mod">
+          <ac:chgData name="LEUNG Nicole" userId="8ed04819-1a1c-42ab-ae09-44d42575f3a6" providerId="ADAL" clId="{46AED7F8-18BE-4C7E-B9AC-F4C2CA2D1D79}" dt="2023-03-27T07:42:24.476" v="3313" actId="1076"/>
+          <ac:picMkLst>
+            <pc:docMk/>
+            <pc:sldMk cId="2074922080" sldId="330"/>
+            <ac:picMk id="5" creationId="{92D01027-C164-42F7-8BEA-7D6084349477}"/>
+          </ac:picMkLst>
+        </pc:picChg>
+        <pc:picChg chg="add mod">
+          <ac:chgData name="LEUNG Nicole" userId="8ed04819-1a1c-42ab-ae09-44d42575f3a6" providerId="ADAL" clId="{46AED7F8-18BE-4C7E-B9AC-F4C2CA2D1D79}" dt="2023-03-27T07:42:19.729" v="3311" actId="1076"/>
+          <ac:picMkLst>
+            <pc:docMk/>
+            <pc:sldMk cId="2074922080" sldId="330"/>
+            <ac:picMk id="8" creationId="{19473CB5-78D4-44CA-9A05-EB6467B59BC8}"/>
+          </ac:picMkLst>
+        </pc:picChg>
+      </pc:sldChg>
+      <pc:sldChg chg="addSp delSp modSp new mod">
+        <pc:chgData name="LEUNG Nicole" userId="8ed04819-1a1c-42ab-ae09-44d42575f3a6" providerId="ADAL" clId="{46AED7F8-18BE-4C7E-B9AC-F4C2CA2D1D79}" dt="2023-03-27T07:38:25.554" v="3303"/>
+        <pc:sldMkLst>
+          <pc:docMk/>
+          <pc:sldMk cId="3008568549" sldId="331"/>
+        </pc:sldMkLst>
+        <pc:spChg chg="del">
+          <ac:chgData name="LEUNG Nicole" userId="8ed04819-1a1c-42ab-ae09-44d42575f3a6" providerId="ADAL" clId="{46AED7F8-18BE-4C7E-B9AC-F4C2CA2D1D79}" dt="2023-03-27T07:37:20.036" v="3295" actId="478"/>
+          <ac:spMkLst>
+            <pc:docMk/>
+            <pc:sldMk cId="3008568549" sldId="331"/>
+            <ac:spMk id="2" creationId="{327AA829-6AE4-479F-8585-89645312E8FD}"/>
+          </ac:spMkLst>
+        </pc:spChg>
+        <pc:spChg chg="del">
+          <ac:chgData name="LEUNG Nicole" userId="8ed04819-1a1c-42ab-ae09-44d42575f3a6" providerId="ADAL" clId="{46AED7F8-18BE-4C7E-B9AC-F4C2CA2D1D79}" dt="2023-03-27T07:37:21.520" v="3296" actId="478"/>
+          <ac:spMkLst>
+            <pc:docMk/>
+            <pc:sldMk cId="3008568549" sldId="331"/>
+            <ac:spMk id="3" creationId="{9A5EFF58-6CBC-4554-8CB1-A07B5997AE88}"/>
+          </ac:spMkLst>
+        </pc:spChg>
+        <pc:spChg chg="add mod">
+          <ac:chgData name="LEUNG Nicole" userId="8ed04819-1a1c-42ab-ae09-44d42575f3a6" providerId="ADAL" clId="{46AED7F8-18BE-4C7E-B9AC-F4C2CA2D1D79}" dt="2023-03-27T07:38:25.554" v="3303"/>
+          <ac:spMkLst>
+            <pc:docMk/>
+            <pc:sldMk cId="3008568549" sldId="331"/>
+            <ac:spMk id="8" creationId="{32942D70-8DC4-4123-8886-A9A19585D2B0}"/>
+          </ac:spMkLst>
+        </pc:spChg>
+        <pc:picChg chg="add mod">
+          <ac:chgData name="LEUNG Nicole" userId="8ed04819-1a1c-42ab-ae09-44d42575f3a6" providerId="ADAL" clId="{46AED7F8-18BE-4C7E-B9AC-F4C2CA2D1D79}" dt="2023-03-27T07:37:23.217" v="3297" actId="1076"/>
+          <ac:picMkLst>
+            <pc:docMk/>
+            <pc:sldMk cId="3008568549" sldId="331"/>
+            <ac:picMk id="5" creationId="{04B91270-73AC-4DE4-BD3E-A4D06FFAACC9}"/>
+          </ac:picMkLst>
+        </pc:picChg>
+        <pc:picChg chg="add mod">
+          <ac:chgData name="LEUNG Nicole" userId="8ed04819-1a1c-42ab-ae09-44d42575f3a6" providerId="ADAL" clId="{46AED7F8-18BE-4C7E-B9AC-F4C2CA2D1D79}" dt="2023-03-27T07:37:36.762" v="3300" actId="1076"/>
+          <ac:picMkLst>
+            <pc:docMk/>
+            <pc:sldMk cId="3008568549" sldId="331"/>
+            <ac:picMk id="7" creationId="{3081D0B5-DCE0-4339-89B0-693435AAA750}"/>
+          </ac:picMkLst>
+        </pc:picChg>
+      </pc:sldChg>
+      <pc:sldChg chg="addSp delSp modSp new mod">
+        <pc:chgData name="LEUNG Nicole" userId="8ed04819-1a1c-42ab-ae09-44d42575f3a6" providerId="ADAL" clId="{46AED7F8-18BE-4C7E-B9AC-F4C2CA2D1D79}" dt="2023-03-27T08:07:29.271" v="3351" actId="21"/>
+        <pc:sldMkLst>
+          <pc:docMk/>
+          <pc:sldMk cId="493213936" sldId="332"/>
+        </pc:sldMkLst>
+        <pc:spChg chg="del">
+          <ac:chgData name="LEUNG Nicole" userId="8ed04819-1a1c-42ab-ae09-44d42575f3a6" providerId="ADAL" clId="{46AED7F8-18BE-4C7E-B9AC-F4C2CA2D1D79}" dt="2023-03-27T07:44:33.928" v="3317" actId="478"/>
+          <ac:spMkLst>
+            <pc:docMk/>
+            <pc:sldMk cId="493213936" sldId="332"/>
+            <ac:spMk id="2" creationId="{D579119B-2DC0-4F3C-BF01-5479A781FDEB}"/>
+          </ac:spMkLst>
+        </pc:spChg>
+        <pc:spChg chg="del mod">
+          <ac:chgData name="LEUNG Nicole" userId="8ed04819-1a1c-42ab-ae09-44d42575f3a6" providerId="ADAL" clId="{46AED7F8-18BE-4C7E-B9AC-F4C2CA2D1D79}" dt="2023-03-27T07:44:30.044" v="3316" actId="478"/>
+          <ac:spMkLst>
+            <pc:docMk/>
+            <pc:sldMk cId="493213936" sldId="332"/>
+            <ac:spMk id="3" creationId="{4BBFCD58-8D9F-44C6-A02A-68E4299EF6D5}"/>
+          </ac:spMkLst>
+        </pc:spChg>
+        <pc:spChg chg="add mod">
+          <ac:chgData name="LEUNG Nicole" userId="8ed04819-1a1c-42ab-ae09-44d42575f3a6" providerId="ADAL" clId="{46AED7F8-18BE-4C7E-B9AC-F4C2CA2D1D79}" dt="2023-03-27T07:44:48.372" v="3323" actId="1076"/>
+          <ac:spMkLst>
+            <pc:docMk/>
+            <pc:sldMk cId="493213936" sldId="332"/>
+            <ac:spMk id="6" creationId="{CD382307-32E6-460A-8790-29FB25CD29C7}"/>
+          </ac:spMkLst>
+        </pc:spChg>
+        <pc:picChg chg="add del mod">
+          <ac:chgData name="LEUNG Nicole" userId="8ed04819-1a1c-42ab-ae09-44d42575f3a6" providerId="ADAL" clId="{46AED7F8-18BE-4C7E-B9AC-F4C2CA2D1D79}" dt="2023-03-27T08:06:51.284" v="3345" actId="21"/>
+          <ac:picMkLst>
+            <pc:docMk/>
+            <pc:sldMk cId="493213936" sldId="332"/>
+            <ac:picMk id="5" creationId="{678CDE12-202F-40DC-B359-9FF6F44E04CF}"/>
+          </ac:picMkLst>
+        </pc:picChg>
+        <pc:picChg chg="add del mod">
+          <ac:chgData name="LEUNG Nicole" userId="8ed04819-1a1c-42ab-ae09-44d42575f3a6" providerId="ADAL" clId="{46AED7F8-18BE-4C7E-B9AC-F4C2CA2D1D79}" dt="2023-03-27T08:07:29.271" v="3351" actId="21"/>
+          <ac:picMkLst>
+            <pc:docMk/>
+            <pc:sldMk cId="493213936" sldId="332"/>
+            <ac:picMk id="8" creationId="{C7B11C78-96A4-4D12-A53E-3F8D3A3368E6}"/>
+          </ac:picMkLst>
+        </pc:picChg>
+        <pc:picChg chg="add mod">
+          <ac:chgData name="LEUNG Nicole" userId="8ed04819-1a1c-42ab-ae09-44d42575f3a6" providerId="ADAL" clId="{46AED7F8-18BE-4C7E-B9AC-F4C2CA2D1D79}" dt="2023-03-27T08:07:06.408" v="3350" actId="1076"/>
+          <ac:picMkLst>
+            <pc:docMk/>
+            <pc:sldMk cId="493213936" sldId="332"/>
+            <ac:picMk id="10" creationId="{DE47D5DB-580C-4A04-83CA-DF713714EB0D}"/>
+          </ac:picMkLst>
+        </pc:picChg>
+      </pc:sldChg>
+      <pc:sldChg chg="addSp delSp modSp new mod">
+        <pc:chgData name="LEUNG Nicole" userId="8ed04819-1a1c-42ab-ae09-44d42575f3a6" providerId="ADAL" clId="{46AED7F8-18BE-4C7E-B9AC-F4C2CA2D1D79}" dt="2023-03-27T08:19:20.131" v="3370" actId="1076"/>
+        <pc:sldMkLst>
+          <pc:docMk/>
+          <pc:sldMk cId="3822795629" sldId="333"/>
+        </pc:sldMkLst>
+        <pc:spChg chg="del">
+          <ac:chgData name="LEUNG Nicole" userId="8ed04819-1a1c-42ab-ae09-44d42575f3a6" providerId="ADAL" clId="{46AED7F8-18BE-4C7E-B9AC-F4C2CA2D1D79}" dt="2023-03-27T07:51:13.436" v="3327" actId="478"/>
+          <ac:spMkLst>
+            <pc:docMk/>
+            <pc:sldMk cId="3822795629" sldId="333"/>
+            <ac:spMk id="2" creationId="{B495BCCC-C12C-4662-A22D-9C617EFAC5C0}"/>
+          </ac:spMkLst>
+        </pc:spChg>
+        <pc:spChg chg="del">
+          <ac:chgData name="LEUNG Nicole" userId="8ed04819-1a1c-42ab-ae09-44d42575f3a6" providerId="ADAL" clId="{46AED7F8-18BE-4C7E-B9AC-F4C2CA2D1D79}" dt="2023-03-27T07:51:12.714" v="3326" actId="478"/>
+          <ac:spMkLst>
+            <pc:docMk/>
+            <pc:sldMk cId="3822795629" sldId="333"/>
+            <ac:spMk id="3" creationId="{AD0B78CB-5864-4426-AB05-BE461634774B}"/>
+          </ac:spMkLst>
+        </pc:spChg>
+        <pc:spChg chg="add mod">
+          <ac:chgData name="LEUNG Nicole" userId="8ed04819-1a1c-42ab-ae09-44d42575f3a6" providerId="ADAL" clId="{46AED7F8-18BE-4C7E-B9AC-F4C2CA2D1D79}" dt="2023-03-27T08:13:24.221" v="3359" actId="1076"/>
+          <ac:spMkLst>
+            <pc:docMk/>
+            <pc:sldMk cId="3822795629" sldId="333"/>
+            <ac:spMk id="4" creationId="{F6AA7075-6E85-4823-BBF1-E2792B252A0B}"/>
+          </ac:spMkLst>
+        </pc:spChg>
+        <pc:picChg chg="add mod">
+          <ac:chgData name="LEUNG Nicole" userId="8ed04819-1a1c-42ab-ae09-44d42575f3a6" providerId="ADAL" clId="{46AED7F8-18BE-4C7E-B9AC-F4C2CA2D1D79}" dt="2023-03-27T08:13:26.168" v="3360" actId="1076"/>
+          <ac:picMkLst>
+            <pc:docMk/>
+            <pc:sldMk cId="3822795629" sldId="333"/>
+            <ac:picMk id="6" creationId="{01BB05F4-9B0D-42A4-AAF2-B9148F87FB2D}"/>
+          </ac:picMkLst>
+        </pc:picChg>
+        <pc:picChg chg="add mod">
+          <ac:chgData name="LEUNG Nicole" userId="8ed04819-1a1c-42ab-ae09-44d42575f3a6" providerId="ADAL" clId="{46AED7F8-18BE-4C7E-B9AC-F4C2CA2D1D79}" dt="2023-03-27T08:19:20.131" v="3370" actId="1076"/>
+          <ac:picMkLst>
+            <pc:docMk/>
+            <pc:sldMk cId="3822795629" sldId="333"/>
+            <ac:picMk id="8" creationId="{0D495F12-9668-4BB1-94BE-085E806F2107}"/>
+          </ac:picMkLst>
+        </pc:picChg>
+      </pc:sldChg>
+      <pc:sldChg chg="addSp delSp modSp new del mod ord">
+        <pc:chgData name="LEUNG Nicole" userId="8ed04819-1a1c-42ab-ae09-44d42575f3a6" providerId="ADAL" clId="{46AED7F8-18BE-4C7E-B9AC-F4C2CA2D1D79}" dt="2023-03-27T08:00:35.966" v="3339" actId="47"/>
+        <pc:sldMkLst>
+          <pc:docMk/>
+          <pc:sldMk cId="1833922371" sldId="334"/>
+        </pc:sldMkLst>
+        <pc:spChg chg="del">
+          <ac:chgData name="LEUNG Nicole" userId="8ed04819-1a1c-42ab-ae09-44d42575f3a6" providerId="ADAL" clId="{46AED7F8-18BE-4C7E-B9AC-F4C2CA2D1D79}" dt="2023-03-27T07:59:33.080" v="3329" actId="478"/>
+          <ac:spMkLst>
+            <pc:docMk/>
+            <pc:sldMk cId="1833922371" sldId="334"/>
+            <ac:spMk id="2" creationId="{906EAAAC-ABCC-4739-A8B3-A94CC01796C7}"/>
+          </ac:spMkLst>
+        </pc:spChg>
+        <pc:spChg chg="del">
+          <ac:chgData name="LEUNG Nicole" userId="8ed04819-1a1c-42ab-ae09-44d42575f3a6" providerId="ADAL" clId="{46AED7F8-18BE-4C7E-B9AC-F4C2CA2D1D79}" dt="2023-03-27T07:59:35.775" v="3330" actId="478"/>
+          <ac:spMkLst>
+            <pc:docMk/>
+            <pc:sldMk cId="1833922371" sldId="334"/>
+            <ac:spMk id="3" creationId="{F1E7CD4E-8E24-41CE-8511-C1A890142391}"/>
+          </ac:spMkLst>
+        </pc:spChg>
+        <pc:spChg chg="add mod">
+          <ac:chgData name="LEUNG Nicole" userId="8ed04819-1a1c-42ab-ae09-44d42575f3a6" providerId="ADAL" clId="{46AED7F8-18BE-4C7E-B9AC-F4C2CA2D1D79}" dt="2023-03-27T07:59:58.642" v="3336"/>
+          <ac:spMkLst>
+            <pc:docMk/>
+            <pc:sldMk cId="1833922371" sldId="334"/>
+            <ac:spMk id="8" creationId="{60E782C1-0976-44A2-B0FF-597E10105C76}"/>
+          </ac:spMkLst>
+        </pc:spChg>
+        <pc:picChg chg="add mod">
+          <ac:chgData name="LEUNG Nicole" userId="8ed04819-1a1c-42ab-ae09-44d42575f3a6" providerId="ADAL" clId="{46AED7F8-18BE-4C7E-B9AC-F4C2CA2D1D79}" dt="2023-03-27T07:59:39.182" v="3333" actId="1076"/>
+          <ac:picMkLst>
+            <pc:docMk/>
+            <pc:sldMk cId="1833922371" sldId="334"/>
+            <ac:picMk id="5" creationId="{D275D455-9BC0-4D6E-9485-845AE21BFBDC}"/>
+          </ac:picMkLst>
+        </pc:picChg>
+        <pc:picChg chg="add mod">
+          <ac:chgData name="LEUNG Nicole" userId="8ed04819-1a1c-42ab-ae09-44d42575f3a6" providerId="ADAL" clId="{46AED7F8-18BE-4C7E-B9AC-F4C2CA2D1D79}" dt="2023-03-27T07:59:44.120" v="3335" actId="1076"/>
+          <ac:picMkLst>
+            <pc:docMk/>
+            <pc:sldMk cId="1833922371" sldId="334"/>
+            <ac:picMk id="7" creationId="{6B703526-66D7-4639-B4C2-F5FA2B97789A}"/>
+          </ac:picMkLst>
+        </pc:picChg>
+      </pc:sldChg>
+      <pc:sldChg chg="addSp delSp modSp new mod">
+        <pc:chgData name="LEUNG Nicole" userId="8ed04819-1a1c-42ab-ae09-44d42575f3a6" providerId="ADAL" clId="{46AED7F8-18BE-4C7E-B9AC-F4C2CA2D1D79}" dt="2023-03-27T08:07:36.290" v="3354" actId="1076"/>
+        <pc:sldMkLst>
+          <pc:docMk/>
+          <pc:sldMk cId="4177304750" sldId="334"/>
+        </pc:sldMkLst>
+        <pc:spChg chg="del">
+          <ac:chgData name="LEUNG Nicole" userId="8ed04819-1a1c-42ab-ae09-44d42575f3a6" providerId="ADAL" clId="{46AED7F8-18BE-4C7E-B9AC-F4C2CA2D1D79}" dt="2023-03-27T08:01:57.602" v="3342" actId="478"/>
+          <ac:spMkLst>
+            <pc:docMk/>
+            <pc:sldMk cId="4177304750" sldId="334"/>
+            <ac:spMk id="2" creationId="{8C32AA81-C39A-45D4-932D-F63C367BB29C}"/>
+          </ac:spMkLst>
+        </pc:spChg>
+        <pc:spChg chg="del">
+          <ac:chgData name="LEUNG Nicole" userId="8ed04819-1a1c-42ab-ae09-44d42575f3a6" providerId="ADAL" clId="{46AED7F8-18BE-4C7E-B9AC-F4C2CA2D1D79}" dt="2023-03-27T08:01:52.497" v="3341" actId="478"/>
+          <ac:spMkLst>
+            <pc:docMk/>
+            <pc:sldMk cId="4177304750" sldId="334"/>
+            <ac:spMk id="3" creationId="{D51D6E97-ACC9-4F48-9D37-020DD8BD5C5B}"/>
+          </ac:spMkLst>
+        </pc:spChg>
+        <pc:spChg chg="add mod">
+          <ac:chgData name="LEUNG Nicole" userId="8ed04819-1a1c-42ab-ae09-44d42575f3a6" providerId="ADAL" clId="{46AED7F8-18BE-4C7E-B9AC-F4C2CA2D1D79}" dt="2023-03-27T08:07:34.735" v="3353"/>
+          <ac:spMkLst>
+            <pc:docMk/>
+            <pc:sldMk cId="4177304750" sldId="334"/>
+            <ac:spMk id="5" creationId="{CDC5E63F-ED25-4732-B364-5A0DB1B47116}"/>
+          </ac:spMkLst>
+        </pc:spChg>
+        <pc:picChg chg="add mod">
+          <ac:chgData name="LEUNG Nicole" userId="8ed04819-1a1c-42ab-ae09-44d42575f3a6" providerId="ADAL" clId="{46AED7F8-18BE-4C7E-B9AC-F4C2CA2D1D79}" dt="2023-03-27T08:07:36.290" v="3354" actId="1076"/>
+          <ac:picMkLst>
+            <pc:docMk/>
+            <pc:sldMk cId="4177304750" sldId="334"/>
+            <ac:picMk id="4" creationId="{FD37A0B0-4E50-42AF-8108-912C5D3A0922}"/>
+          </ac:picMkLst>
+        </pc:picChg>
+      </pc:sldChg>
+      <pc:sldChg chg="addSp delSp modSp new mod">
+        <pc:chgData name="LEUNG Nicole" userId="8ed04819-1a1c-42ab-ae09-44d42575f3a6" providerId="ADAL" clId="{46AED7F8-18BE-4C7E-B9AC-F4C2CA2D1D79}" dt="2023-03-27T08:19:28.517" v="3372" actId="1076"/>
+        <pc:sldMkLst>
+          <pc:docMk/>
+          <pc:sldMk cId="1239691435" sldId="335"/>
+        </pc:sldMkLst>
+        <pc:spChg chg="del mod">
+          <ac:chgData name="LEUNG Nicole" userId="8ed04819-1a1c-42ab-ae09-44d42575f3a6" providerId="ADAL" clId="{46AED7F8-18BE-4C7E-B9AC-F4C2CA2D1D79}" dt="2023-03-27T08:19:08.089" v="3366" actId="478"/>
+          <ac:spMkLst>
+            <pc:docMk/>
+            <pc:sldMk cId="1239691435" sldId="335"/>
+            <ac:spMk id="2" creationId="{40735847-EAE3-4EC5-9AC1-B0D133B52E60}"/>
+          </ac:spMkLst>
+        </pc:spChg>
+        <pc:spChg chg="del">
+          <ac:chgData name="LEUNG Nicole" userId="8ed04819-1a1c-42ab-ae09-44d42575f3a6" providerId="ADAL" clId="{46AED7F8-18BE-4C7E-B9AC-F4C2CA2D1D79}" dt="2023-03-27T08:19:06.064" v="3363"/>
+          <ac:spMkLst>
+            <pc:docMk/>
+            <pc:sldMk cId="1239691435" sldId="335"/>
+            <ac:spMk id="3" creationId="{F07D33DD-F4B7-44C8-8B19-6E587CDA6B0B}"/>
+          </ac:spMkLst>
+        </pc:spChg>
+        <pc:spChg chg="add mod">
+          <ac:chgData name="LEUNG Nicole" userId="8ed04819-1a1c-42ab-ae09-44d42575f3a6" providerId="ADAL" clId="{46AED7F8-18BE-4C7E-B9AC-F4C2CA2D1D79}" dt="2023-03-27T08:19:28.517" v="3372" actId="1076"/>
+          <ac:spMkLst>
+            <pc:docMk/>
+            <pc:sldMk cId="1239691435" sldId="335"/>
+            <ac:spMk id="6" creationId="{993A98B5-EEDD-4C89-92DF-9FB01693CAB0}"/>
+          </ac:spMkLst>
+        </pc:spChg>
+        <pc:picChg chg="add mod">
+          <ac:chgData name="LEUNG Nicole" userId="8ed04819-1a1c-42ab-ae09-44d42575f3a6" providerId="ADAL" clId="{46AED7F8-18BE-4C7E-B9AC-F4C2CA2D1D79}" dt="2023-03-27T08:19:14.327" v="3369" actId="1076"/>
+          <ac:picMkLst>
+            <pc:docMk/>
+            <pc:sldMk cId="1239691435" sldId="335"/>
+            <ac:picMk id="5" creationId="{20881464-6419-4FB8-97D2-F5843AB2C2D8}"/>
+          </ac:picMkLst>
+        </pc:picChg>
+      </pc:sldChg>
+      <pc:sldChg chg="addSp delSp modSp new mod">
+        <pc:chgData name="LEUNG Nicole" userId="8ed04819-1a1c-42ab-ae09-44d42575f3a6" providerId="ADAL" clId="{46AED7F8-18BE-4C7E-B9AC-F4C2CA2D1D79}" dt="2023-03-27T09:51:31.358" v="3437" actId="1076"/>
+        <pc:sldMkLst>
+          <pc:docMk/>
+          <pc:sldMk cId="2823189888" sldId="336"/>
+        </pc:sldMkLst>
+        <pc:spChg chg="del">
+          <ac:chgData name="LEUNG Nicole" userId="8ed04819-1a1c-42ab-ae09-44d42575f3a6" providerId="ADAL" clId="{46AED7F8-18BE-4C7E-B9AC-F4C2CA2D1D79}" dt="2023-03-27T08:33:39.195" v="3375" actId="478"/>
+          <ac:spMkLst>
+            <pc:docMk/>
+            <pc:sldMk cId="2823189888" sldId="336"/>
+            <ac:spMk id="2" creationId="{838B94DE-9D8B-4D0E-94F9-8AC3EF47A60E}"/>
+          </ac:spMkLst>
+        </pc:spChg>
+        <pc:spChg chg="del">
+          <ac:chgData name="LEUNG Nicole" userId="8ed04819-1a1c-42ab-ae09-44d42575f3a6" providerId="ADAL" clId="{46AED7F8-18BE-4C7E-B9AC-F4C2CA2D1D79}" dt="2023-03-27T08:33:34.386" v="3374" actId="478"/>
+          <ac:spMkLst>
+            <pc:docMk/>
+            <pc:sldMk cId="2823189888" sldId="336"/>
+            <ac:spMk id="3" creationId="{FC4CEB9D-23A3-4AED-9FAF-7596CE8CD960}"/>
+          </ac:spMkLst>
+        </pc:spChg>
+        <pc:spChg chg="add mod">
+          <ac:chgData name="LEUNG Nicole" userId="8ed04819-1a1c-42ab-ae09-44d42575f3a6" providerId="ADAL" clId="{46AED7F8-18BE-4C7E-B9AC-F4C2CA2D1D79}" dt="2023-03-27T08:33:44.843" v="3377"/>
+          <ac:spMkLst>
+            <pc:docMk/>
+            <pc:sldMk cId="2823189888" sldId="336"/>
+            <ac:spMk id="6" creationId="{F8583A3D-E8AD-42AF-8EC4-39E5911B1170}"/>
+          </ac:spMkLst>
+        </pc:spChg>
+        <pc:picChg chg="add mod">
+          <ac:chgData name="LEUNG Nicole" userId="8ed04819-1a1c-42ab-ae09-44d42575f3a6" providerId="ADAL" clId="{46AED7F8-18BE-4C7E-B9AC-F4C2CA2D1D79}" dt="2023-03-27T09:51:31.358" v="3437" actId="1076"/>
+          <ac:picMkLst>
+            <pc:docMk/>
+            <pc:sldMk cId="2823189888" sldId="336"/>
+            <ac:picMk id="5" creationId="{9C9B5533-E273-4894-BD98-15C20F57FAF5}"/>
+          </ac:picMkLst>
+        </pc:picChg>
+      </pc:sldChg>
+      <pc:sldChg chg="addSp delSp modSp new mod">
+        <pc:chgData name="LEUNG Nicole" userId="8ed04819-1a1c-42ab-ae09-44d42575f3a6" providerId="ADAL" clId="{46AED7F8-18BE-4C7E-B9AC-F4C2CA2D1D79}" dt="2023-03-27T09:08:55.405" v="3427" actId="1076"/>
+        <pc:sldMkLst>
+          <pc:docMk/>
+          <pc:sldMk cId="274734294" sldId="337"/>
+        </pc:sldMkLst>
+        <pc:spChg chg="del">
+          <ac:chgData name="LEUNG Nicole" userId="8ed04819-1a1c-42ab-ae09-44d42575f3a6" providerId="ADAL" clId="{46AED7F8-18BE-4C7E-B9AC-F4C2CA2D1D79}" dt="2023-03-27T08:44:46.406" v="3381" actId="478"/>
+          <ac:spMkLst>
+            <pc:docMk/>
+            <pc:sldMk cId="274734294" sldId="337"/>
+            <ac:spMk id="2" creationId="{AB1719C8-5EB3-4778-A56C-0DD31EBFE7F3}"/>
+          </ac:spMkLst>
+        </pc:spChg>
+        <pc:spChg chg="del">
+          <ac:chgData name="LEUNG Nicole" userId="8ed04819-1a1c-42ab-ae09-44d42575f3a6" providerId="ADAL" clId="{46AED7F8-18BE-4C7E-B9AC-F4C2CA2D1D79}" dt="2023-03-27T08:44:43.102" v="3380" actId="478"/>
+          <ac:spMkLst>
+            <pc:docMk/>
+            <pc:sldMk cId="274734294" sldId="337"/>
+            <ac:spMk id="3" creationId="{B51466F0-D047-47BD-AA35-4A5F6C5ADA05}"/>
+          </ac:spMkLst>
+        </pc:spChg>
+        <pc:spChg chg="add mod">
+          <ac:chgData name="LEUNG Nicole" userId="8ed04819-1a1c-42ab-ae09-44d42575f3a6" providerId="ADAL" clId="{46AED7F8-18BE-4C7E-B9AC-F4C2CA2D1D79}" dt="2023-03-27T09:08:55.405" v="3427" actId="1076"/>
+          <ac:spMkLst>
+            <pc:docMk/>
+            <pc:sldMk cId="274734294" sldId="337"/>
+            <ac:spMk id="8" creationId="{E0DE995A-7B98-4302-9C3F-CD796EB54B27}"/>
+          </ac:spMkLst>
+        </pc:spChg>
+        <pc:picChg chg="add mod">
+          <ac:chgData name="LEUNG Nicole" userId="8ed04819-1a1c-42ab-ae09-44d42575f3a6" providerId="ADAL" clId="{46AED7F8-18BE-4C7E-B9AC-F4C2CA2D1D79}" dt="2023-03-27T08:50:01.517" v="3383" actId="1076"/>
+          <ac:picMkLst>
+            <pc:docMk/>
+            <pc:sldMk cId="274734294" sldId="337"/>
+            <ac:picMk id="5" creationId="{60CFA0D4-00AD-49AB-B6DD-C6E6C42EEC32}"/>
+          </ac:picMkLst>
+        </pc:picChg>
+        <pc:picChg chg="add mod">
+          <ac:chgData name="LEUNG Nicole" userId="8ed04819-1a1c-42ab-ae09-44d42575f3a6" providerId="ADAL" clId="{46AED7F8-18BE-4C7E-B9AC-F4C2CA2D1D79}" dt="2023-03-27T08:50:05.691" v="3385" actId="1076"/>
+          <ac:picMkLst>
+            <pc:docMk/>
+            <pc:sldMk cId="274734294" sldId="337"/>
+            <ac:picMk id="7" creationId="{7E93C875-3909-4BD1-8AF0-DD324F7BC111}"/>
+          </ac:picMkLst>
+        </pc:picChg>
+      </pc:sldChg>
+      <pc:sldChg chg="addSp delSp modSp new mod">
+        <pc:chgData name="LEUNG Nicole" userId="8ed04819-1a1c-42ab-ae09-44d42575f3a6" providerId="ADAL" clId="{46AED7F8-18BE-4C7E-B9AC-F4C2CA2D1D79}" dt="2023-03-27T08:55:07.538" v="3400" actId="1076"/>
+        <pc:sldMkLst>
+          <pc:docMk/>
+          <pc:sldMk cId="1780598910" sldId="338"/>
+        </pc:sldMkLst>
+        <pc:spChg chg="del">
+          <ac:chgData name="LEUNG Nicole" userId="8ed04819-1a1c-42ab-ae09-44d42575f3a6" providerId="ADAL" clId="{46AED7F8-18BE-4C7E-B9AC-F4C2CA2D1D79}" dt="2023-03-27T08:53:00.125" v="3391" actId="478"/>
+          <ac:spMkLst>
+            <pc:docMk/>
+            <pc:sldMk cId="1780598910" sldId="338"/>
+            <ac:spMk id="2" creationId="{7C4369D1-5C17-4E23-9CEB-549B1823EFDC}"/>
+          </ac:spMkLst>
+        </pc:spChg>
+        <pc:spChg chg="del">
+          <ac:chgData name="LEUNG Nicole" userId="8ed04819-1a1c-42ab-ae09-44d42575f3a6" providerId="ADAL" clId="{46AED7F8-18BE-4C7E-B9AC-F4C2CA2D1D79}" dt="2023-03-27T08:53:01.143" v="3392" actId="478"/>
+          <ac:spMkLst>
+            <pc:docMk/>
+            <pc:sldMk cId="1780598910" sldId="338"/>
+            <ac:spMk id="3" creationId="{C68AA953-374A-4041-B55D-0D6C8B27B0E1}"/>
+          </ac:spMkLst>
+        </pc:spChg>
+        <pc:spChg chg="add mod">
+          <ac:chgData name="LEUNG Nicole" userId="8ed04819-1a1c-42ab-ae09-44d42575f3a6" providerId="ADAL" clId="{46AED7F8-18BE-4C7E-B9AC-F4C2CA2D1D79}" dt="2023-03-27T08:54:36.534" v="3398"/>
+          <ac:spMkLst>
+            <pc:docMk/>
+            <pc:sldMk cId="1780598910" sldId="338"/>
+            <ac:spMk id="8" creationId="{2E1F91EA-6721-4003-A5C7-EBCB0ACD83AE}"/>
+          </ac:spMkLst>
+        </pc:spChg>
+        <pc:picChg chg="add mod">
+          <ac:chgData name="LEUNG Nicole" userId="8ed04819-1a1c-42ab-ae09-44d42575f3a6" providerId="ADAL" clId="{46AED7F8-18BE-4C7E-B9AC-F4C2CA2D1D79}" dt="2023-03-27T08:54:28.590" v="3397" actId="1076"/>
+          <ac:picMkLst>
+            <pc:docMk/>
+            <pc:sldMk cId="1780598910" sldId="338"/>
+            <ac:picMk id="5" creationId="{0EFB74E2-841D-4205-A280-1D444B3E98BC}"/>
+          </ac:picMkLst>
+        </pc:picChg>
+        <pc:picChg chg="add mod">
+          <ac:chgData name="LEUNG Nicole" userId="8ed04819-1a1c-42ab-ae09-44d42575f3a6" providerId="ADAL" clId="{46AED7F8-18BE-4C7E-B9AC-F4C2CA2D1D79}" dt="2023-03-27T08:54:25.994" v="3396" actId="1076"/>
+          <ac:picMkLst>
+            <pc:docMk/>
+            <pc:sldMk cId="1780598910" sldId="338"/>
+            <ac:picMk id="7" creationId="{5B77B50F-D9BA-4EEC-B301-573B75527749}"/>
+          </ac:picMkLst>
+        </pc:picChg>
+        <pc:picChg chg="add mod">
+          <ac:chgData name="LEUNG Nicole" userId="8ed04819-1a1c-42ab-ae09-44d42575f3a6" providerId="ADAL" clId="{46AED7F8-18BE-4C7E-B9AC-F4C2CA2D1D79}" dt="2023-03-27T08:55:07.538" v="3400" actId="1076"/>
+          <ac:picMkLst>
+            <pc:docMk/>
+            <pc:sldMk cId="1780598910" sldId="338"/>
+            <ac:picMk id="9" creationId="{82594EB5-2401-4098-8317-151F18F94C90}"/>
+          </ac:picMkLst>
+        </pc:picChg>
+      </pc:sldChg>
+      <pc:sldChg chg="addSp delSp modSp new mod">
+        <pc:chgData name="LEUNG Nicole" userId="8ed04819-1a1c-42ab-ae09-44d42575f3a6" providerId="ADAL" clId="{46AED7F8-18BE-4C7E-B9AC-F4C2CA2D1D79}" dt="2023-03-27T09:08:33.078" v="3425" actId="1076"/>
+        <pc:sldMkLst>
+          <pc:docMk/>
+          <pc:sldMk cId="1093346677" sldId="339"/>
+        </pc:sldMkLst>
+        <pc:spChg chg="del">
+          <ac:chgData name="LEUNG Nicole" userId="8ed04819-1a1c-42ab-ae09-44d42575f3a6" providerId="ADAL" clId="{46AED7F8-18BE-4C7E-B9AC-F4C2CA2D1D79}" dt="2023-03-27T09:04:15.477" v="3404" actId="478"/>
+          <ac:spMkLst>
+            <pc:docMk/>
+            <pc:sldMk cId="1093346677" sldId="339"/>
+            <ac:spMk id="2" creationId="{5434FDCF-2D4D-454D-B33E-70CA1F8F0770}"/>
+          </ac:spMkLst>
+        </pc:spChg>
+        <pc:spChg chg="del mod">
+          <ac:chgData name="LEUNG Nicole" userId="8ed04819-1a1c-42ab-ae09-44d42575f3a6" providerId="ADAL" clId="{46AED7F8-18BE-4C7E-B9AC-F4C2CA2D1D79}" dt="2023-03-27T09:04:14.722" v="3403" actId="478"/>
+          <ac:spMkLst>
+            <pc:docMk/>
+            <pc:sldMk cId="1093346677" sldId="339"/>
+            <ac:spMk id="3" creationId="{74F104B7-C65E-4FE6-A810-CB598A857BE2}"/>
+          </ac:spMkLst>
+        </pc:spChg>
+        <pc:spChg chg="add mod">
+          <ac:chgData name="LEUNG Nicole" userId="8ed04819-1a1c-42ab-ae09-44d42575f3a6" providerId="ADAL" clId="{46AED7F8-18BE-4C7E-B9AC-F4C2CA2D1D79}" dt="2023-03-27T09:05:17.688" v="3408" actId="1076"/>
+          <ac:spMkLst>
+            <pc:docMk/>
+            <pc:sldMk cId="1093346677" sldId="339"/>
+            <ac:spMk id="6" creationId="{C1302919-9F2E-4926-8B9D-EB6B36C2C84D}"/>
+          </ac:spMkLst>
+        </pc:spChg>
+        <pc:picChg chg="add mod">
+          <ac:chgData name="LEUNG Nicole" userId="8ed04819-1a1c-42ab-ae09-44d42575f3a6" providerId="ADAL" clId="{46AED7F8-18BE-4C7E-B9AC-F4C2CA2D1D79}" dt="2023-03-27T09:04:19.016" v="3406" actId="1076"/>
+          <ac:picMkLst>
+            <pc:docMk/>
+            <pc:sldMk cId="1093346677" sldId="339"/>
+            <ac:picMk id="5" creationId="{67FDCC08-279E-4D33-8196-420D44D231B6}"/>
+          </ac:picMkLst>
+        </pc:picChg>
+        <pc:picChg chg="add mod">
+          <ac:chgData name="LEUNG Nicole" userId="8ed04819-1a1c-42ab-ae09-44d42575f3a6" providerId="ADAL" clId="{46AED7F8-18BE-4C7E-B9AC-F4C2CA2D1D79}" dt="2023-03-27T09:07:59.296" v="3411" actId="14100"/>
+          <ac:picMkLst>
+            <pc:docMk/>
+            <pc:sldMk cId="1093346677" sldId="339"/>
+            <ac:picMk id="8" creationId="{1E25BEE8-4A13-4383-9420-20836482A0C6}"/>
+          </ac:picMkLst>
+        </pc:picChg>
+        <pc:picChg chg="add mod">
+          <ac:chgData name="LEUNG Nicole" userId="8ed04819-1a1c-42ab-ae09-44d42575f3a6" providerId="ADAL" clId="{46AED7F8-18BE-4C7E-B9AC-F4C2CA2D1D79}" dt="2023-03-27T09:08:09.013" v="3415" actId="1076"/>
+          <ac:picMkLst>
+            <pc:docMk/>
+            <pc:sldMk cId="1093346677" sldId="339"/>
+            <ac:picMk id="10" creationId="{52FCE676-1089-4634-A467-37E0673165E0}"/>
+          </ac:picMkLst>
+        </pc:picChg>
+        <pc:picChg chg="add mod">
+          <ac:chgData name="LEUNG Nicole" userId="8ed04819-1a1c-42ab-ae09-44d42575f3a6" providerId="ADAL" clId="{46AED7F8-18BE-4C7E-B9AC-F4C2CA2D1D79}" dt="2023-03-27T09:08:15.420" v="3418" actId="1076"/>
+          <ac:picMkLst>
+            <pc:docMk/>
+            <pc:sldMk cId="1093346677" sldId="339"/>
+            <ac:picMk id="12" creationId="{454BE514-4D0B-4E3D-AE78-A00E945E46B0}"/>
+          </ac:picMkLst>
+        </pc:picChg>
+        <pc:picChg chg="add mod">
+          <ac:chgData name="LEUNG Nicole" userId="8ed04819-1a1c-42ab-ae09-44d42575f3a6" providerId="ADAL" clId="{46AED7F8-18BE-4C7E-B9AC-F4C2CA2D1D79}" dt="2023-03-27T09:08:24.529" v="3421" actId="1076"/>
+          <ac:picMkLst>
+            <pc:docMk/>
+            <pc:sldMk cId="1093346677" sldId="339"/>
+            <ac:picMk id="14" creationId="{03A92E60-D9CF-44EE-89CA-C1EFC6C458F7}"/>
+          </ac:picMkLst>
+        </pc:picChg>
+        <pc:picChg chg="add mod">
+          <ac:chgData name="LEUNG Nicole" userId="8ed04819-1a1c-42ab-ae09-44d42575f3a6" providerId="ADAL" clId="{46AED7F8-18BE-4C7E-B9AC-F4C2CA2D1D79}" dt="2023-03-27T09:08:33.078" v="3425" actId="1076"/>
+          <ac:picMkLst>
+            <pc:docMk/>
+            <pc:sldMk cId="1093346677" sldId="339"/>
+            <ac:picMk id="16" creationId="{E1A556CC-6544-4A87-9AE6-438805FB3962}"/>
+          </ac:picMkLst>
+        </pc:picChg>
+      </pc:sldChg>
+      <pc:sldChg chg="addSp delSp modSp new mod">
+        <pc:chgData name="LEUNG Nicole" userId="8ed04819-1a1c-42ab-ae09-44d42575f3a6" providerId="ADAL" clId="{46AED7F8-18BE-4C7E-B9AC-F4C2CA2D1D79}" dt="2023-03-27T09:11:35.231" v="3436" actId="1076"/>
+        <pc:sldMkLst>
+          <pc:docMk/>
+          <pc:sldMk cId="3817614916" sldId="340"/>
+        </pc:sldMkLst>
+        <pc:spChg chg="del">
+          <ac:chgData name="LEUNG Nicole" userId="8ed04819-1a1c-42ab-ae09-44d42575f3a6" providerId="ADAL" clId="{46AED7F8-18BE-4C7E-B9AC-F4C2CA2D1D79}" dt="2023-03-27T09:10:46.696" v="3430" actId="478"/>
+          <ac:spMkLst>
+            <pc:docMk/>
+            <pc:sldMk cId="3817614916" sldId="340"/>
+            <ac:spMk id="2" creationId="{884E7016-F359-4D8C-8591-B35937571AB7}"/>
+          </ac:spMkLst>
+        </pc:spChg>
+        <pc:spChg chg="del">
+          <ac:chgData name="LEUNG Nicole" userId="8ed04819-1a1c-42ab-ae09-44d42575f3a6" providerId="ADAL" clId="{46AED7F8-18BE-4C7E-B9AC-F4C2CA2D1D79}" dt="2023-03-27T09:10:45.484" v="3429" actId="478"/>
+          <ac:spMkLst>
+            <pc:docMk/>
+            <pc:sldMk cId="3817614916" sldId="340"/>
+            <ac:spMk id="3" creationId="{6543C81E-C997-40A2-8635-D72C4728F77E}"/>
+          </ac:spMkLst>
+        </pc:spChg>
+        <pc:spChg chg="add mod">
+          <ac:chgData name="LEUNG Nicole" userId="8ed04819-1a1c-42ab-ae09-44d42575f3a6" providerId="ADAL" clId="{46AED7F8-18BE-4C7E-B9AC-F4C2CA2D1D79}" dt="2023-03-27T09:11:35.231" v="3436" actId="1076"/>
+          <ac:spMkLst>
+            <pc:docMk/>
+            <pc:sldMk cId="3817614916" sldId="340"/>
+            <ac:spMk id="8" creationId="{797D2667-6440-4655-93A1-9BDB80A4E6E5}"/>
+          </ac:spMkLst>
+        </pc:spChg>
+        <pc:picChg chg="add mod">
+          <ac:chgData name="LEUNG Nicole" userId="8ed04819-1a1c-42ab-ae09-44d42575f3a6" providerId="ADAL" clId="{46AED7F8-18BE-4C7E-B9AC-F4C2CA2D1D79}" dt="2023-03-27T09:10:50.050" v="3432" actId="1076"/>
+          <ac:picMkLst>
+            <pc:docMk/>
+            <pc:sldMk cId="3817614916" sldId="340"/>
+            <ac:picMk id="5" creationId="{A1A8C9C0-8AFD-4B99-9547-FA940C986EDC}"/>
+          </ac:picMkLst>
+        </pc:picChg>
+        <pc:picChg chg="add mod">
+          <ac:chgData name="LEUNG Nicole" userId="8ed04819-1a1c-42ab-ae09-44d42575f3a6" providerId="ADAL" clId="{46AED7F8-18BE-4C7E-B9AC-F4C2CA2D1D79}" dt="2023-03-27T09:10:54.992" v="3434" actId="1076"/>
+          <ac:picMkLst>
+            <pc:docMk/>
+            <pc:sldMk cId="3817614916" sldId="340"/>
+            <ac:picMk id="7" creationId="{583448FA-47BE-4992-B381-E2290FC660D5}"/>
+          </ac:picMkLst>
+        </pc:picChg>
+      </pc:sldChg>
+    </pc:docChg>
+  </pc:docChgLst>
+  <pc:docChgLst>
+    <pc:chgData name="AU Kelvin" userId="416e5d84-3133-4774-aa1a-290e1bef47d6" providerId="ADAL" clId="{9A4767C1-AA41-4A8F-91E9-F856893F4EE6}"/>
+    <pc:docChg chg="undo redo custSel addSld delSld modSld">
+      <pc:chgData name="AU Kelvin" userId="416e5d84-3133-4774-aa1a-290e1bef47d6" providerId="ADAL" clId="{9A4767C1-AA41-4A8F-91E9-F856893F4EE6}" dt="2023-03-10T10:09:57.225" v="2099" actId="20577"/>
+      <pc:docMkLst>
+        <pc:docMk/>
+      </pc:docMkLst>
+      <pc:sldChg chg="addSp modSp mod">
+        <pc:chgData name="AU Kelvin" userId="416e5d84-3133-4774-aa1a-290e1bef47d6" providerId="ADAL" clId="{9A4767C1-AA41-4A8F-91E9-F856893F4EE6}" dt="2023-03-10T10:07:58.867" v="2095" actId="13926"/>
+        <pc:sldMkLst>
+          <pc:docMk/>
+          <pc:sldMk cId="1028999168" sldId="260"/>
+        </pc:sldMkLst>
+        <pc:spChg chg="add mod">
+          <ac:chgData name="AU Kelvin" userId="416e5d84-3133-4774-aa1a-290e1bef47d6" providerId="ADAL" clId="{9A4767C1-AA41-4A8F-91E9-F856893F4EE6}" dt="2023-03-10T10:07:58.867" v="2095" actId="13926"/>
+          <ac:spMkLst>
+            <pc:docMk/>
+            <pc:sldMk cId="1028999168" sldId="260"/>
+            <ac:spMk id="3" creationId="{C78401F4-D234-4A7A-A0E3-62DD7C5EADD8}"/>
+          </ac:spMkLst>
+        </pc:spChg>
+      </pc:sldChg>
+      <pc:sldChg chg="addSp modSp mod">
+        <pc:chgData name="AU Kelvin" userId="416e5d84-3133-4774-aa1a-290e1bef47d6" providerId="ADAL" clId="{9A4767C1-AA41-4A8F-91E9-F856893F4EE6}" dt="2023-03-10T10:09:57.225" v="2099" actId="20577"/>
+        <pc:sldMkLst>
+          <pc:docMk/>
+          <pc:sldMk cId="95290033" sldId="261"/>
+        </pc:sldMkLst>
+        <pc:spChg chg="add mod">
+          <ac:chgData name="AU Kelvin" userId="416e5d84-3133-4774-aa1a-290e1bef47d6" providerId="ADAL" clId="{9A4767C1-AA41-4A8F-91E9-F856893F4EE6}" dt="2023-03-10T10:09:57.225" v="2099" actId="20577"/>
+          <ac:spMkLst>
+            <pc:docMk/>
+            <pc:sldMk cId="95290033" sldId="261"/>
+            <ac:spMk id="7" creationId="{EFEBA37C-E7C5-4525-B50F-4974565CCCEF}"/>
+          </ac:spMkLst>
+        </pc:spChg>
+      </pc:sldChg>
+      <pc:sldChg chg="addSp delSp modSp mod">
+        <pc:chgData name="AU Kelvin" userId="416e5d84-3133-4774-aa1a-290e1bef47d6" providerId="ADAL" clId="{9A4767C1-AA41-4A8F-91E9-F856893F4EE6}" dt="2023-03-10T07:41:28.694" v="1893" actId="1076"/>
+        <pc:sldMkLst>
+          <pc:docMk/>
+          <pc:sldMk cId="3442902861" sldId="266"/>
+        </pc:sldMkLst>
+        <pc:spChg chg="mod">
+          <ac:chgData name="AU Kelvin" userId="416e5d84-3133-4774-aa1a-290e1bef47d6" providerId="ADAL" clId="{9A4767C1-AA41-4A8F-91E9-F856893F4EE6}" dt="2023-03-10T02:25:16.168" v="1415" actId="20577"/>
+          <ac:spMkLst>
+            <pc:docMk/>
+            <pc:sldMk cId="3442902861" sldId="266"/>
+            <ac:spMk id="2" creationId="{D6124752-D21F-4C37-8C89-5A6D49E7D613}"/>
+          </ac:spMkLst>
+        </pc:spChg>
+        <pc:spChg chg="mod">
+          <ac:chgData name="AU Kelvin" userId="416e5d84-3133-4774-aa1a-290e1bef47d6" providerId="ADAL" clId="{9A4767C1-AA41-4A8F-91E9-F856893F4EE6}" dt="2023-03-10T07:27:05.538" v="1729" actId="20577"/>
+          <ac:spMkLst>
+            <pc:docMk/>
+            <pc:sldMk cId="3442902861" sldId="266"/>
+            <ac:spMk id="3" creationId="{0722FC5A-B29F-4C58-940E-4D925D707B51}"/>
+          </ac:spMkLst>
+        </pc:spChg>
+        <pc:spChg chg="add mod">
+          <ac:chgData name="AU Kelvin" userId="416e5d84-3133-4774-aa1a-290e1bef47d6" providerId="ADAL" clId="{9A4767C1-AA41-4A8F-91E9-F856893F4EE6}" dt="2023-03-10T07:28:42.138" v="1796" actId="1076"/>
+          <ac:spMkLst>
+            <pc:docMk/>
+            <pc:sldMk cId="3442902861" sldId="266"/>
+            <ac:spMk id="4" creationId="{C9D96347-781B-4E78-9CB8-564B28E36891}"/>
+          </ac:spMkLst>
+        </pc:spChg>
+        <pc:spChg chg="add mod">
+          <ac:chgData name="AU Kelvin" userId="416e5d84-3133-4774-aa1a-290e1bef47d6" providerId="ADAL" clId="{9A4767C1-AA41-4A8F-91E9-F856893F4EE6}" dt="2023-03-10T07:27:19.857" v="1734" actId="20577"/>
+          <ac:spMkLst>
+            <pc:docMk/>
+            <pc:sldMk cId="3442902861" sldId="266"/>
+            <ac:spMk id="9" creationId="{03273A91-309B-4236-B0B9-6383024BC413}"/>
+          </ac:spMkLst>
+        </pc:spChg>
+        <pc:spChg chg="add del mod">
+          <ac:chgData name="AU Kelvin" userId="416e5d84-3133-4774-aa1a-290e1bef47d6" providerId="ADAL" clId="{9A4767C1-AA41-4A8F-91E9-F856893F4EE6}" dt="2023-03-10T07:40:00.668" v="1876" actId="478"/>
+          <ac:spMkLst>
+            <pc:docMk/>
+            <pc:sldMk cId="3442902861" sldId="266"/>
+            <ac:spMk id="10" creationId="{7294E152-3A14-4081-B5F8-6F3C503CAA07}"/>
+          </ac:spMkLst>
+        </pc:spChg>
+        <pc:spChg chg="add mod">
+          <ac:chgData name="AU Kelvin" userId="416e5d84-3133-4774-aa1a-290e1bef47d6" providerId="ADAL" clId="{9A4767C1-AA41-4A8F-91E9-F856893F4EE6}" dt="2023-03-10T07:41:28.694" v="1893" actId="1076"/>
+          <ac:spMkLst>
+            <pc:docMk/>
+            <pc:sldMk cId="3442902861" sldId="266"/>
+            <ac:spMk id="11" creationId="{98EC32FC-078A-48E5-96F1-5E913CA7A096}"/>
+          </ac:spMkLst>
+        </pc:spChg>
+        <pc:picChg chg="mod">
+          <ac:chgData name="AU Kelvin" userId="416e5d84-3133-4774-aa1a-290e1bef47d6" providerId="ADAL" clId="{9A4767C1-AA41-4A8F-91E9-F856893F4EE6}" dt="2023-03-10T02:24:16.352" v="1351" actId="1076"/>
+          <ac:picMkLst>
+            <pc:docMk/>
+            <pc:sldMk cId="3442902861" sldId="266"/>
+            <ac:picMk id="5" creationId="{5A74EE3E-9A1E-4F94-BBA7-B2FF46777420}"/>
+          </ac:picMkLst>
+        </pc:picChg>
+        <pc:picChg chg="add del mod">
+          <ac:chgData name="AU Kelvin" userId="416e5d84-3133-4774-aa1a-290e1bef47d6" providerId="ADAL" clId="{9A4767C1-AA41-4A8F-91E9-F856893F4EE6}" dt="2023-03-10T02:23:49.564" v="1345"/>
+          <ac:picMkLst>
+            <pc:docMk/>
+            <pc:sldMk cId="3442902861" sldId="266"/>
+            <ac:picMk id="6" creationId="{ED35E859-5BD4-49BD-90EB-978DDA40D5EC}"/>
+          </ac:picMkLst>
+        </pc:picChg>
+        <pc:picChg chg="del">
+          <ac:chgData name="AU Kelvin" userId="416e5d84-3133-4774-aa1a-290e1bef47d6" providerId="ADAL" clId="{9A4767C1-AA41-4A8F-91E9-F856893F4EE6}" dt="2023-03-10T02:23:40.099" v="1340" actId="21"/>
+          <ac:picMkLst>
+            <pc:docMk/>
+            <pc:sldMk cId="3442902861" sldId="266"/>
+            <ac:picMk id="7" creationId="{7D11AFA2-FAE3-45D7-811D-958F565C4297}"/>
+          </ac:picMkLst>
+        </pc:picChg>
+        <pc:picChg chg="add mod">
+          <ac:chgData name="AU Kelvin" userId="416e5d84-3133-4774-aa1a-290e1bef47d6" providerId="ADAL" clId="{9A4767C1-AA41-4A8F-91E9-F856893F4EE6}" dt="2023-03-10T02:24:09.490" v="1350" actId="14100"/>
+          <ac:picMkLst>
+            <pc:docMk/>
+            <pc:sldMk cId="3442902861" sldId="266"/>
+            <ac:picMk id="8" creationId="{CD290223-998F-4D8F-9134-73173E05E5B3}"/>
+          </ac:picMkLst>
+        </pc:picChg>
+      </pc:sldChg>
+      <pc:sldChg chg="modSp new mod">
+        <pc:chgData name="AU Kelvin" userId="416e5d84-3133-4774-aa1a-290e1bef47d6" providerId="ADAL" clId="{9A4767C1-AA41-4A8F-91E9-F856893F4EE6}" dt="2023-03-09T06:30:41.661" v="37" actId="20577"/>
+        <pc:sldMkLst>
+          <pc:docMk/>
+          <pc:sldMk cId="689417263" sldId="267"/>
+        </pc:sldMkLst>
+        <pc:spChg chg="mod">
+          <ac:chgData name="AU Kelvin" userId="416e5d84-3133-4774-aa1a-290e1bef47d6" providerId="ADAL" clId="{9A4767C1-AA41-4A8F-91E9-F856893F4EE6}" dt="2023-03-09T06:30:41.661" v="37" actId="20577"/>
+          <ac:spMkLst>
+            <pc:docMk/>
+            <pc:sldMk cId="689417263" sldId="267"/>
+            <ac:spMk id="2" creationId="{A928EF97-08A3-4706-9D19-A326A68B2964}"/>
+          </ac:spMkLst>
+        </pc:spChg>
+      </pc:sldChg>
+      <pc:sldChg chg="addSp delSp modSp mod modShow">
+        <pc:chgData name="AU Kelvin" userId="416e5d84-3133-4774-aa1a-290e1bef47d6" providerId="ADAL" clId="{9A4767C1-AA41-4A8F-91E9-F856893F4EE6}" dt="2023-03-10T07:42:24.930" v="1896"/>
+        <pc:sldMkLst>
+          <pc:docMk/>
+          <pc:sldMk cId="2172804706" sldId="267"/>
+        </pc:sldMkLst>
+        <pc:spChg chg="add del mod">
+          <ac:chgData name="AU Kelvin" userId="416e5d84-3133-4774-aa1a-290e1bef47d6" providerId="ADAL" clId="{9A4767C1-AA41-4A8F-91E9-F856893F4EE6}" dt="2023-03-10T07:22:11.507" v="1663" actId="478"/>
+          <ac:spMkLst>
+            <pc:docMk/>
+            <pc:sldMk cId="2172804706" sldId="267"/>
+            <ac:spMk id="6" creationId="{F2E7320E-07AA-44CD-B53A-C4967E9D45FC}"/>
+          </ac:spMkLst>
+        </pc:spChg>
+        <pc:spChg chg="del">
+          <ac:chgData name="AU Kelvin" userId="416e5d84-3133-4774-aa1a-290e1bef47d6" providerId="ADAL" clId="{9A4767C1-AA41-4A8F-91E9-F856893F4EE6}" dt="2023-03-10T07:21:55.725" v="1643" actId="478"/>
+          <ac:spMkLst>
+            <pc:docMk/>
+            <pc:sldMk cId="2172804706" sldId="267"/>
+            <ac:spMk id="8" creationId="{4AC6116F-469F-4A0D-BD15-3D93A5ABDC3B}"/>
+          </ac:spMkLst>
+        </pc:spChg>
+        <pc:spChg chg="add mod">
+          <ac:chgData name="AU Kelvin" userId="416e5d84-3133-4774-aa1a-290e1bef47d6" providerId="ADAL" clId="{9A4767C1-AA41-4A8F-91E9-F856893F4EE6}" dt="2023-03-10T07:22:02.837" v="1662" actId="27636"/>
+          <ac:spMkLst>
+            <pc:docMk/>
+            <pc:sldMk cId="2172804706" sldId="267"/>
+            <ac:spMk id="10" creationId="{FF0B31A4-D45C-4380-81C8-B123342A71E6}"/>
+          </ac:spMkLst>
+        </pc:spChg>
+        <pc:spChg chg="add del mod">
+          <ac:chgData name="AU Kelvin" userId="416e5d84-3133-4774-aa1a-290e1bef47d6" providerId="ADAL" clId="{9A4767C1-AA41-4A8F-91E9-F856893F4EE6}" dt="2023-03-10T07:22:15.401" v="1664" actId="478"/>
+          <ac:spMkLst>
+            <pc:docMk/>
+            <pc:sldMk cId="2172804706" sldId="267"/>
+            <ac:spMk id="12" creationId="{F5D2A41A-8A30-41BB-AA31-F696FFFE3C91}"/>
+          </ac:spMkLst>
+        </pc:spChg>
+        <pc:spChg chg="add mod">
+          <ac:chgData name="AU Kelvin" userId="416e5d84-3133-4774-aa1a-290e1bef47d6" providerId="ADAL" clId="{9A4767C1-AA41-4A8F-91E9-F856893F4EE6}" dt="2023-03-10T07:41:03.804" v="1888" actId="20577"/>
+          <ac:spMkLst>
+            <pc:docMk/>
+            <pc:sldMk cId="2172804706" sldId="267"/>
+            <ac:spMk id="13" creationId="{CCDAA278-5CBF-4877-807C-C998CF5D670F}"/>
+          </ac:spMkLst>
+        </pc:spChg>
+        <pc:spChg chg="add mod">
+          <ac:chgData name="AU Kelvin" userId="416e5d84-3133-4774-aa1a-290e1bef47d6" providerId="ADAL" clId="{9A4767C1-AA41-4A8F-91E9-F856893F4EE6}" dt="2023-03-10T07:42:21.025" v="1895"/>
+          <ac:spMkLst>
+            <pc:docMk/>
+            <pc:sldMk cId="2172804706" sldId="267"/>
+            <ac:spMk id="14" creationId="{843880E1-89C4-441D-B393-B5D6DE0B89CD}"/>
+          </ac:spMkLst>
+        </pc:spChg>
+        <pc:spChg chg="add mod">
+          <ac:chgData name="AU Kelvin" userId="416e5d84-3133-4774-aa1a-290e1bef47d6" providerId="ADAL" clId="{9A4767C1-AA41-4A8F-91E9-F856893F4EE6}" dt="2023-03-10T07:42:24.930" v="1896"/>
+          <ac:spMkLst>
+            <pc:docMk/>
+            <pc:sldMk cId="2172804706" sldId="267"/>
+            <ac:spMk id="15" creationId="{DC29577F-9EF3-473A-AB68-7EF04F3E99D0}"/>
+          </ac:spMkLst>
+        </pc:spChg>
+        <pc:picChg chg="del">
+          <ac:chgData name="AU Kelvin" userId="416e5d84-3133-4774-aa1a-290e1bef47d6" providerId="ADAL" clId="{9A4767C1-AA41-4A8F-91E9-F856893F4EE6}" dt="2023-03-10T02:23:52.902" v="1347" actId="21"/>
+          <ac:picMkLst>
+            <pc:docMk/>
+            <pc:sldMk cId="2172804706" sldId="267"/>
+            <ac:picMk id="5" creationId="{C04A081E-9852-46B6-A49B-0E508ECE54F3}"/>
+          </ac:picMkLst>
+        </pc:picChg>
+        <pc:picChg chg="add del">
+          <ac:chgData name="AU Kelvin" userId="416e5d84-3133-4774-aa1a-290e1bef47d6" providerId="ADAL" clId="{9A4767C1-AA41-4A8F-91E9-F856893F4EE6}" dt="2023-03-10T02:23:51.901" v="1346" actId="21"/>
+          <ac:picMkLst>
+            <pc:docMk/>
+            <pc:sldMk cId="2172804706" sldId="267"/>
+            <ac:picMk id="7" creationId="{E1444774-6B0E-4908-860A-2618E04FA654}"/>
+          </ac:picMkLst>
+        </pc:picChg>
+        <pc:picChg chg="add mod">
+          <ac:chgData name="AU Kelvin" userId="416e5d84-3133-4774-aa1a-290e1bef47d6" providerId="ADAL" clId="{9A4767C1-AA41-4A8F-91E9-F856893F4EE6}" dt="2023-03-10T02:30:10.106" v="1417" actId="1076"/>
+          <ac:picMkLst>
+            <pc:docMk/>
+            <pc:sldMk cId="2172804706" sldId="267"/>
+            <ac:picMk id="9" creationId="{DDB5C4C2-E9D6-4638-909D-E3C64216015A}"/>
+          </ac:picMkLst>
+        </pc:picChg>
+      </pc:sldChg>
+      <pc:sldChg chg="mod modShow">
+        <pc:chgData name="AU Kelvin" userId="416e5d84-3133-4774-aa1a-290e1bef47d6" providerId="ADAL" clId="{9A4767C1-AA41-4A8F-91E9-F856893F4EE6}" dt="2023-03-10T07:25:25.841" v="1687" actId="729"/>
+        <pc:sldMkLst>
+          <pc:docMk/>
+          <pc:sldMk cId="3832514624" sldId="268"/>
+        </pc:sldMkLst>
+      </pc:sldChg>
+      <pc:sldChg chg="modSp mod modShow">
+        <pc:chgData name="AU Kelvin" userId="416e5d84-3133-4774-aa1a-290e1bef47d6" providerId="ADAL" clId="{9A4767C1-AA41-4A8F-91E9-F856893F4EE6}" dt="2023-03-10T07:25:31.476" v="1688" actId="729"/>
+        <pc:sldMkLst>
+          <pc:docMk/>
+          <pc:sldMk cId="3223329462" sldId="269"/>
+        </pc:sldMkLst>
+        <pc:spChg chg="mod">
+          <ac:chgData name="AU Kelvin" userId="416e5d84-3133-4774-aa1a-290e1bef47d6" providerId="ADAL" clId="{9A4767C1-AA41-4A8F-91E9-F856893F4EE6}" dt="2023-03-10T07:19:41.128" v="1636" actId="20577"/>
+          <ac:spMkLst>
+            <pc:docMk/>
+            <pc:sldMk cId="3223329462" sldId="269"/>
+            <ac:spMk id="3" creationId="{0722FC5A-B29F-4C58-940E-4D925D707B51}"/>
+          </ac:spMkLst>
+        </pc:spChg>
+      </pc:sldChg>
+      <pc:sldChg chg="add del">
+        <pc:chgData name="AU Kelvin" userId="416e5d84-3133-4774-aa1a-290e1bef47d6" providerId="ADAL" clId="{9A4767C1-AA41-4A8F-91E9-F856893F4EE6}" dt="2023-03-10T10:03:58.180" v="1963" actId="47"/>
+        <pc:sldMkLst>
+          <pc:docMk/>
+          <pc:sldMk cId="689417263" sldId="272"/>
+        </pc:sldMkLst>
+      </pc:sldChg>
+      <pc:sldChg chg="addSp delSp modSp mod">
+        <pc:chgData name="AU Kelvin" userId="416e5d84-3133-4774-aa1a-290e1bef47d6" providerId="ADAL" clId="{9A4767C1-AA41-4A8F-91E9-F856893F4EE6}" dt="2023-03-10T10:00:39.262" v="1959" actId="1076"/>
+        <pc:sldMkLst>
+          <pc:docMk/>
+          <pc:sldMk cId="689417263" sldId="273"/>
+        </pc:sldMkLst>
+        <pc:spChg chg="mod">
+          <ac:chgData name="AU Kelvin" userId="416e5d84-3133-4774-aa1a-290e1bef47d6" providerId="ADAL" clId="{9A4767C1-AA41-4A8F-91E9-F856893F4EE6}" dt="2023-03-09T06:42:05.707" v="111" actId="1076"/>
+          <ac:spMkLst>
+            <pc:docMk/>
+            <pc:sldMk cId="689417263" sldId="273"/>
+            <ac:spMk id="2" creationId="{A928EF97-08A3-4706-9D19-A326A68B2964}"/>
+          </ac:spMkLst>
+        </pc:spChg>
+        <pc:spChg chg="del">
+          <ac:chgData name="AU Kelvin" userId="416e5d84-3133-4774-aa1a-290e1bef47d6" providerId="ADAL" clId="{9A4767C1-AA41-4A8F-91E9-F856893F4EE6}" dt="2023-03-09T06:42:52.628" v="125"/>
+          <ac:spMkLst>
+            <pc:docMk/>
+            <pc:sldMk cId="689417263" sldId="273"/>
+            <ac:spMk id="3" creationId="{BDAF05D6-3AE1-4C81-8219-2233A6D15176}"/>
+          </ac:spMkLst>
+        </pc:spChg>
+        <pc:spChg chg="add del mod">
+          <ac:chgData name="AU Kelvin" userId="416e5d84-3133-4774-aa1a-290e1bef47d6" providerId="ADAL" clId="{9A4767C1-AA41-4A8F-91E9-F856893F4EE6}" dt="2023-03-09T10:24:40.510" v="134"/>
+          <ac:spMkLst>
+            <pc:docMk/>
+            <pc:sldMk cId="689417263" sldId="273"/>
+            <ac:spMk id="12" creationId="{999663E5-95E9-4025-A2F8-2D17A62A5F48}"/>
+          </ac:spMkLst>
+        </pc:spChg>
+        <pc:spChg chg="add mod">
+          <ac:chgData name="AU Kelvin" userId="416e5d84-3133-4774-aa1a-290e1bef47d6" providerId="ADAL" clId="{9A4767C1-AA41-4A8F-91E9-F856893F4EE6}" dt="2023-03-10T10:00:39.262" v="1959" actId="1076"/>
+          <ac:spMkLst>
+            <pc:docMk/>
+            <pc:sldMk cId="689417263" sldId="273"/>
+            <ac:spMk id="17" creationId="{AEF8B360-861D-4550-A7B7-8609D5C57817}"/>
+          </ac:spMkLst>
+        </pc:spChg>
+        <pc:spChg chg="add mod">
+          <ac:chgData name="AU Kelvin" userId="416e5d84-3133-4774-aa1a-290e1bef47d6" providerId="ADAL" clId="{9A4767C1-AA41-4A8F-91E9-F856893F4EE6}" dt="2023-03-09T11:07:35.117" v="1032" actId="404"/>
+          <ac:spMkLst>
+            <pc:docMk/>
+            <pc:sldMk cId="689417263" sldId="273"/>
+            <ac:spMk id="18" creationId="{777FEA76-3A62-4884-92A7-4E415DE0B425}"/>
+          </ac:spMkLst>
+        </pc:spChg>
+        <pc:picChg chg="add del mod">
+          <ac:chgData name="AU Kelvin" userId="416e5d84-3133-4774-aa1a-290e1bef47d6" providerId="ADAL" clId="{9A4767C1-AA41-4A8F-91E9-F856893F4EE6}" dt="2023-03-09T06:38:26.195" v="66" actId="478"/>
+          <ac:picMkLst>
+            <pc:docMk/>
+            <pc:sldMk cId="689417263" sldId="273"/>
+            <ac:picMk id="5" creationId="{F8FE3F41-FEDA-4EE0-B3DF-63EF93C9B42A}"/>
+          </ac:picMkLst>
+        </pc:picChg>
+        <pc:picChg chg="add del mod">
+          <ac:chgData name="AU Kelvin" userId="416e5d84-3133-4774-aa1a-290e1bef47d6" providerId="ADAL" clId="{9A4767C1-AA41-4A8F-91E9-F856893F4EE6}" dt="2023-03-09T06:42:51.527" v="124" actId="21"/>
+          <ac:picMkLst>
+            <pc:docMk/>
+            <pc:sldMk cId="689417263" sldId="273"/>
+            <ac:picMk id="7" creationId="{DD16E120-3B7C-43F5-B0E7-5CE28E99F67F}"/>
+          </ac:picMkLst>
+        </pc:picChg>
+        <pc:picChg chg="add del mod">
+          <ac:chgData name="AU Kelvin" userId="416e5d84-3133-4774-aa1a-290e1bef47d6" providerId="ADAL" clId="{9A4767C1-AA41-4A8F-91E9-F856893F4EE6}" dt="2023-03-09T06:42:03.658" v="107" actId="22"/>
+          <ac:picMkLst>
+            <pc:docMk/>
+            <pc:sldMk cId="689417263" sldId="273"/>
+            <ac:picMk id="9" creationId="{FBB65DB5-8EF8-40F8-AAF9-0E750BA34B27}"/>
+          </ac:picMkLst>
+        </pc:picChg>
+        <pc:picChg chg="add del mod">
+          <ac:chgData name="AU Kelvin" userId="416e5d84-3133-4774-aa1a-290e1bef47d6" providerId="ADAL" clId="{9A4767C1-AA41-4A8F-91E9-F856893F4EE6}" dt="2023-03-09T10:23:00.303" v="126" actId="478"/>
+          <ac:picMkLst>
+            <pc:docMk/>
+            <pc:sldMk cId="689417263" sldId="273"/>
+            <ac:picMk id="10" creationId="{42EA8F07-2F50-4052-9483-76603DD897E4}"/>
+          </ac:picMkLst>
+        </pc:picChg>
+        <pc:picChg chg="add mod">
+          <ac:chgData name="AU Kelvin" userId="416e5d84-3133-4774-aa1a-290e1bef47d6" providerId="ADAL" clId="{9A4767C1-AA41-4A8F-91E9-F856893F4EE6}" dt="2023-03-09T10:25:54.287" v="146" actId="14100"/>
+          <ac:picMkLst>
+            <pc:docMk/>
+            <pc:sldMk cId="689417263" sldId="273"/>
+            <ac:picMk id="14" creationId="{878E4CC8-620A-497E-B700-881EAFB778BC}"/>
+          </ac:picMkLst>
+        </pc:picChg>
+        <pc:picChg chg="add mod">
+          <ac:chgData name="AU Kelvin" userId="416e5d84-3133-4774-aa1a-290e1bef47d6" providerId="ADAL" clId="{9A4767C1-AA41-4A8F-91E9-F856893F4EE6}" dt="2023-03-09T10:35:45.475" v="257" actId="1076"/>
+          <ac:picMkLst>
+            <pc:docMk/>
+            <pc:sldMk cId="689417263" sldId="273"/>
+            <ac:picMk id="16" creationId="{37BE95A8-5A2E-4C43-8B97-4ED1ECAC824E}"/>
+          </ac:picMkLst>
+        </pc:picChg>
+      </pc:sldChg>
+      <pc:sldChg chg="addSp modSp mod">
+        <pc:chgData name="AU Kelvin" userId="416e5d84-3133-4774-aa1a-290e1bef47d6" providerId="ADAL" clId="{9A4767C1-AA41-4A8F-91E9-F856893F4EE6}" dt="2023-03-10T02:59:40.097" v="1554" actId="20577"/>
+        <pc:sldMkLst>
+          <pc:docMk/>
+          <pc:sldMk cId="4289746519" sldId="274"/>
+        </pc:sldMkLst>
+        <pc:spChg chg="add mod">
+          <ac:chgData name="AU Kelvin" userId="416e5d84-3133-4774-aa1a-290e1bef47d6" providerId="ADAL" clId="{9A4767C1-AA41-4A8F-91E9-F856893F4EE6}" dt="2023-03-10T02:59:15.985" v="1550" actId="1076"/>
+          <ac:spMkLst>
+            <pc:docMk/>
+            <pc:sldMk cId="4289746519" sldId="274"/>
+            <ac:spMk id="5" creationId="{F101B121-EACA-42C5-9A60-4D5C1E6BA197}"/>
+          </ac:spMkLst>
+        </pc:spChg>
+        <pc:spChg chg="add mod">
+          <ac:chgData name="AU Kelvin" userId="416e5d84-3133-4774-aa1a-290e1bef47d6" providerId="ADAL" clId="{9A4767C1-AA41-4A8F-91E9-F856893F4EE6}" dt="2023-03-10T02:59:40.097" v="1554" actId="20577"/>
+          <ac:spMkLst>
+            <pc:docMk/>
+            <pc:sldMk cId="4289746519" sldId="274"/>
+            <ac:spMk id="6" creationId="{5E3D5021-9FBF-4F93-8FF2-B272560A4AD1}"/>
+          </ac:spMkLst>
+        </pc:spChg>
+        <pc:picChg chg="mod">
+          <ac:chgData name="AU Kelvin" userId="416e5d84-3133-4774-aa1a-290e1bef47d6" providerId="ADAL" clId="{9A4767C1-AA41-4A8F-91E9-F856893F4EE6}" dt="2023-03-10T02:59:18.438" v="1551" actId="1076"/>
+          <ac:picMkLst>
+            <pc:docMk/>
+            <pc:sldMk cId="4289746519" sldId="274"/>
+            <ac:picMk id="4" creationId="{38ECB1B0-01D9-4425-9D79-48F72EC65172}"/>
+          </ac:picMkLst>
+        </pc:picChg>
+      </pc:sldChg>
+      <pc:sldChg chg="addSp delSp modSp add mod">
+        <pc:chgData name="AU Kelvin" userId="416e5d84-3133-4774-aa1a-290e1bef47d6" providerId="ADAL" clId="{9A4767C1-AA41-4A8F-91E9-F856893F4EE6}" dt="2023-03-09T11:08:16.796" v="1113" actId="20577"/>
+        <pc:sldMkLst>
+          <pc:docMk/>
+          <pc:sldMk cId="1139370413" sldId="277"/>
+        </pc:sldMkLst>
+        <pc:spChg chg="mod">
+          <ac:chgData name="AU Kelvin" userId="416e5d84-3133-4774-aa1a-290e1bef47d6" providerId="ADAL" clId="{9A4767C1-AA41-4A8F-91E9-F856893F4EE6}" dt="2023-03-09T06:42:19.095" v="121" actId="20577"/>
+          <ac:spMkLst>
+            <pc:docMk/>
+            <pc:sldMk cId="1139370413" sldId="277"/>
+            <ac:spMk id="2" creationId="{A928EF97-08A3-4706-9D19-A326A68B2964}"/>
+          </ac:spMkLst>
+        </pc:spChg>
+        <pc:spChg chg="del">
+          <ac:chgData name="AU Kelvin" userId="416e5d84-3133-4774-aa1a-290e1bef47d6" providerId="ADAL" clId="{9A4767C1-AA41-4A8F-91E9-F856893F4EE6}" dt="2023-03-09T06:42:45.085" v="123" actId="22"/>
+          <ac:spMkLst>
+            <pc:docMk/>
+            <pc:sldMk cId="1139370413" sldId="277"/>
+            <ac:spMk id="3" creationId="{BDAF05D6-3AE1-4C81-8219-2233A6D15176}"/>
+          </ac:spMkLst>
+        </pc:spChg>
+        <pc:spChg chg="add del mod">
+          <ac:chgData name="AU Kelvin" userId="416e5d84-3133-4774-aa1a-290e1bef47d6" providerId="ADAL" clId="{9A4767C1-AA41-4A8F-91E9-F856893F4EE6}" dt="2023-03-09T10:26:34.228" v="159" actId="478"/>
+          <ac:spMkLst>
+            <pc:docMk/>
+            <pc:sldMk cId="1139370413" sldId="277"/>
+            <ac:spMk id="8" creationId="{FDB032E2-5BB2-47B8-BD5D-3BB49C838EFD}"/>
+          </ac:spMkLst>
+        </pc:spChg>
+        <pc:spChg chg="add mod">
+          <ac:chgData name="AU Kelvin" userId="416e5d84-3133-4774-aa1a-290e1bef47d6" providerId="ADAL" clId="{9A4767C1-AA41-4A8F-91E9-F856893F4EE6}" dt="2023-03-09T10:45:16.084" v="718" actId="20577"/>
+          <ac:spMkLst>
+            <pc:docMk/>
+            <pc:sldMk cId="1139370413" sldId="277"/>
+            <ac:spMk id="22" creationId="{E92859DA-8069-43BD-AC6B-F3348E6A3643}"/>
+          </ac:spMkLst>
+        </pc:spChg>
+        <pc:spChg chg="add mod">
+          <ac:chgData name="AU Kelvin" userId="416e5d84-3133-4774-aa1a-290e1bef47d6" providerId="ADAL" clId="{9A4767C1-AA41-4A8F-91E9-F856893F4EE6}" dt="2023-03-09T10:49:29.376" v="791"/>
+          <ac:spMkLst>
+            <pc:docMk/>
+            <pc:sldMk cId="1139370413" sldId="277"/>
+            <ac:spMk id="23" creationId="{6BF817E3-3621-48DF-9CA4-318AC4FDB599}"/>
+          </ac:spMkLst>
+        </pc:spChg>
+        <pc:spChg chg="add mod">
+          <ac:chgData name="AU Kelvin" userId="416e5d84-3133-4774-aa1a-290e1bef47d6" providerId="ADAL" clId="{9A4767C1-AA41-4A8F-91E9-F856893F4EE6}" dt="2023-03-09T10:49:27.777" v="790"/>
+          <ac:spMkLst>
+            <pc:docMk/>
+            <pc:sldMk cId="1139370413" sldId="277"/>
+            <ac:spMk id="24" creationId="{FBB6F9B8-FFF0-4CB2-9892-18C2B4FBAC9F}"/>
+          </ac:spMkLst>
+        </pc:spChg>
+        <pc:spChg chg="add mod">
+          <ac:chgData name="AU Kelvin" userId="416e5d84-3133-4774-aa1a-290e1bef47d6" providerId="ADAL" clId="{9A4767C1-AA41-4A8F-91E9-F856893F4EE6}" dt="2023-03-09T10:49:19.333" v="788" actId="20577"/>
+          <ac:spMkLst>
+            <pc:docMk/>
+            <pc:sldMk cId="1139370413" sldId="277"/>
+            <ac:spMk id="25" creationId="{F5D23B51-F2B1-4C36-B518-AA2BFA4103EC}"/>
+          </ac:spMkLst>
+        </pc:spChg>
+        <pc:spChg chg="add mod">
+          <ac:chgData name="AU Kelvin" userId="416e5d84-3133-4774-aa1a-290e1bef47d6" providerId="ADAL" clId="{9A4767C1-AA41-4A8F-91E9-F856893F4EE6}" dt="2023-03-09T10:49:24.967" v="789"/>
+          <ac:spMkLst>
+            <pc:docMk/>
+            <pc:sldMk cId="1139370413" sldId="277"/>
+            <ac:spMk id="26" creationId="{80957EC0-D309-4965-A76F-B91F35621152}"/>
+          </ac:spMkLst>
+        </pc:spChg>
+        <pc:spChg chg="add del mod">
+          <ac:chgData name="AU Kelvin" userId="416e5d84-3133-4774-aa1a-290e1bef47d6" providerId="ADAL" clId="{9A4767C1-AA41-4A8F-91E9-F856893F4EE6}" dt="2023-03-09T11:00:57.523" v="823"/>
+          <ac:spMkLst>
+            <pc:docMk/>
+            <pc:sldMk cId="1139370413" sldId="277"/>
+            <ac:spMk id="27" creationId="{C589C402-B6A1-4B04-81D1-F9EC938C1D0E}"/>
+          </ac:spMkLst>
+        </pc:spChg>
+        <pc:spChg chg="add mod">
+          <ac:chgData name="AU Kelvin" userId="416e5d84-3133-4774-aa1a-290e1bef47d6" providerId="ADAL" clId="{9A4767C1-AA41-4A8F-91E9-F856893F4EE6}" dt="2023-03-09T10:53:54.156" v="820" actId="20577"/>
+          <ac:spMkLst>
+            <pc:docMk/>
+            <pc:sldMk cId="1139370413" sldId="277"/>
+            <ac:spMk id="28" creationId="{F0E57BF5-8015-48FB-AA5D-302052F4799B}"/>
+          </ac:spMkLst>
+        </pc:spChg>
+        <pc:spChg chg="add mod">
+          <ac:chgData name="AU Kelvin" userId="416e5d84-3133-4774-aa1a-290e1bef47d6" providerId="ADAL" clId="{9A4767C1-AA41-4A8F-91E9-F856893F4EE6}" dt="2023-03-09T10:53:57.438" v="821" actId="6549"/>
+          <ac:spMkLst>
+            <pc:docMk/>
+            <pc:sldMk cId="1139370413" sldId="277"/>
+            <ac:spMk id="29" creationId="{53BD28DB-A18C-4702-97E1-257E621A172C}"/>
+          </ac:spMkLst>
+        </pc:spChg>
+        <pc:spChg chg="add mod">
+          <ac:chgData name="AU Kelvin" userId="416e5d84-3133-4774-aa1a-290e1bef47d6" providerId="ADAL" clId="{9A4767C1-AA41-4A8F-91E9-F856893F4EE6}" dt="2023-03-09T11:08:16.796" v="1113" actId="20577"/>
+          <ac:spMkLst>
+            <pc:docMk/>
+            <pc:sldMk cId="1139370413" sldId="277"/>
+            <ac:spMk id="30" creationId="{D38B9A14-F122-40CB-B282-891C763A0B48}"/>
+          </ac:spMkLst>
+        </pc:spChg>
+        <pc:picChg chg="add del mod ord">
+          <ac:chgData name="AU Kelvin" userId="416e5d84-3133-4774-aa1a-290e1bef47d6" providerId="ADAL" clId="{9A4767C1-AA41-4A8F-91E9-F856893F4EE6}" dt="2023-03-09T10:23:01.489" v="127" actId="478"/>
+          <ac:picMkLst>
+            <pc:docMk/>
+            <pc:sldMk cId="1139370413" sldId="277"/>
+            <ac:picMk id="5" creationId="{2DE28BB4-8F54-4486-8A96-0678C30C1AC1}"/>
+          </ac:picMkLst>
+        </pc:picChg>
+        <pc:picChg chg="del">
+          <ac:chgData name="AU Kelvin" userId="416e5d84-3133-4774-aa1a-290e1bef47d6" providerId="ADAL" clId="{9A4767C1-AA41-4A8F-91E9-F856893F4EE6}" dt="2023-03-09T06:42:21.323" v="122" actId="478"/>
+          <ac:picMkLst>
+            <pc:docMk/>
+            <pc:sldMk cId="1139370413" sldId="277"/>
+            <ac:picMk id="7" creationId="{DD16E120-3B7C-43F5-B0E7-5CE28E99F67F}"/>
+          </ac:picMkLst>
+        </pc:picChg>
+        <pc:picChg chg="add del mod">
+          <ac:chgData name="AU Kelvin" userId="416e5d84-3133-4774-aa1a-290e1bef47d6" providerId="ADAL" clId="{9A4767C1-AA41-4A8F-91E9-F856893F4EE6}" dt="2023-03-09T10:26:30.042" v="153"/>
+          <ac:picMkLst>
+            <pc:docMk/>
+            <pc:sldMk cId="1139370413" sldId="277"/>
+            <ac:picMk id="10" creationId="{E546297E-4973-4F13-99C5-40411468512E}"/>
+          </ac:picMkLst>
+        </pc:picChg>
+        <pc:picChg chg="add del mod">
+          <ac:chgData name="AU Kelvin" userId="416e5d84-3133-4774-aa1a-290e1bef47d6" providerId="ADAL" clId="{9A4767C1-AA41-4A8F-91E9-F856893F4EE6}" dt="2023-03-09T10:26:31.506" v="158"/>
+          <ac:picMkLst>
+            <pc:docMk/>
+            <pc:sldMk cId="1139370413" sldId="277"/>
+            <ac:picMk id="12" creationId="{9244E89A-6389-4FE7-8338-8F2616A37B85}"/>
+          </ac:picMkLst>
+        </pc:picChg>
+        <pc:picChg chg="add mod">
+          <ac:chgData name="AU Kelvin" userId="416e5d84-3133-4774-aa1a-290e1bef47d6" providerId="ADAL" clId="{9A4767C1-AA41-4A8F-91E9-F856893F4EE6}" dt="2023-03-09T10:27:19.134" v="171" actId="1076"/>
+          <ac:picMkLst>
+            <pc:docMk/>
+            <pc:sldMk cId="1139370413" sldId="277"/>
+            <ac:picMk id="14" creationId="{0020203A-1F95-47D3-9237-D5AC4A11F220}"/>
+          </ac:picMkLst>
+        </pc:picChg>
+        <pc:picChg chg="add mod">
+          <ac:chgData name="AU Kelvin" userId="416e5d84-3133-4774-aa1a-290e1bef47d6" providerId="ADAL" clId="{9A4767C1-AA41-4A8F-91E9-F856893F4EE6}" dt="2023-03-09T10:27:29.470" v="172" actId="14100"/>
+          <ac:picMkLst>
+            <pc:docMk/>
+            <pc:sldMk cId="1139370413" sldId="277"/>
+            <ac:picMk id="16" creationId="{43A3199E-2E75-40B6-B853-66BDCD883227}"/>
+          </ac:picMkLst>
+        </pc:picChg>
+        <pc:picChg chg="add del mod">
+          <ac:chgData name="AU Kelvin" userId="416e5d84-3133-4774-aa1a-290e1bef47d6" providerId="ADAL" clId="{9A4767C1-AA41-4A8F-91E9-F856893F4EE6}" dt="2023-03-09T10:31:57.440" v="191" actId="478"/>
+          <ac:picMkLst>
+            <pc:docMk/>
+            <pc:sldMk cId="1139370413" sldId="277"/>
+            <ac:picMk id="18" creationId="{1805688C-C01E-4768-9527-744E453F2D8F}"/>
+          </ac:picMkLst>
+        </pc:picChg>
+        <pc:picChg chg="add mod">
+          <ac:chgData name="AU Kelvin" userId="416e5d84-3133-4774-aa1a-290e1bef47d6" providerId="ADAL" clId="{9A4767C1-AA41-4A8F-91E9-F856893F4EE6}" dt="2023-03-09T10:32:31.097" v="195" actId="1076"/>
+          <ac:picMkLst>
+            <pc:docMk/>
+            <pc:sldMk cId="1139370413" sldId="277"/>
+            <ac:picMk id="20" creationId="{486CFF3A-F9A1-4D44-A299-695666D488B5}"/>
+          </ac:picMkLst>
+        </pc:picChg>
+        <pc:picChg chg="add mod">
+          <ac:chgData name="AU Kelvin" userId="416e5d84-3133-4774-aa1a-290e1bef47d6" providerId="ADAL" clId="{9A4767C1-AA41-4A8F-91E9-F856893F4EE6}" dt="2023-03-09T10:32:42.243" v="197" actId="1076"/>
+          <ac:picMkLst>
+            <pc:docMk/>
+            <pc:sldMk cId="1139370413" sldId="277"/>
+            <ac:picMk id="21" creationId="{F0A9AD82-E8CE-4F73-B6F9-7B3C38F1CF0E}"/>
+          </ac:picMkLst>
+        </pc:picChg>
+      </pc:sldChg>
+      <pc:sldChg chg="addSp delSp modSp add mod">
+        <pc:chgData name="AU Kelvin" userId="416e5d84-3133-4774-aa1a-290e1bef47d6" providerId="ADAL" clId="{9A4767C1-AA41-4A8F-91E9-F856893F4EE6}" dt="2023-03-10T10:00:46.443" v="1961" actId="20577"/>
+        <pc:sldMkLst>
+          <pc:docMk/>
+          <pc:sldMk cId="3394698022" sldId="284"/>
+        </pc:sldMkLst>
+        <pc:spChg chg="mod">
+          <ac:chgData name="AU Kelvin" userId="416e5d84-3133-4774-aa1a-290e1bef47d6" providerId="ADAL" clId="{9A4767C1-AA41-4A8F-91E9-F856893F4EE6}" dt="2023-03-09T10:23:06.529" v="133" actId="20577"/>
+          <ac:spMkLst>
+            <pc:docMk/>
+            <pc:sldMk cId="3394698022" sldId="284"/>
+            <ac:spMk id="2" creationId="{A928EF97-08A3-4706-9D19-A326A68B2964}"/>
+          </ac:spMkLst>
+        </pc:spChg>
+        <pc:spChg chg="del">
+          <ac:chgData name="AU Kelvin" userId="416e5d84-3133-4774-aa1a-290e1bef47d6" providerId="ADAL" clId="{9A4767C1-AA41-4A8F-91E9-F856893F4EE6}" dt="2023-03-09T10:27:58.715" v="173" actId="478"/>
+          <ac:spMkLst>
+            <pc:docMk/>
+            <pc:sldMk cId="3394698022" sldId="284"/>
+            <ac:spMk id="8" creationId="{FDB032E2-5BB2-47B8-BD5D-3BB49C838EFD}"/>
+          </ac:spMkLst>
+        </pc:spChg>
+        <pc:spChg chg="add mod">
+          <ac:chgData name="AU Kelvin" userId="416e5d84-3133-4774-aa1a-290e1bef47d6" providerId="ADAL" clId="{9A4767C1-AA41-4A8F-91E9-F856893F4EE6}" dt="2023-03-09T11:08:37.568" v="1114"/>
+          <ac:spMkLst>
+            <pc:docMk/>
+            <pc:sldMk cId="3394698022" sldId="284"/>
+            <ac:spMk id="9" creationId="{7834B851-1529-423F-B2FA-E1B7171ED214}"/>
+          </ac:spMkLst>
+        </pc:spChg>
+        <pc:spChg chg="add mod">
+          <ac:chgData name="AU Kelvin" userId="416e5d84-3133-4774-aa1a-290e1bef47d6" providerId="ADAL" clId="{9A4767C1-AA41-4A8F-91E9-F856893F4EE6}" dt="2023-03-10T10:00:46.443" v="1961" actId="20577"/>
+          <ac:spMkLst>
+            <pc:docMk/>
+            <pc:sldMk cId="3394698022" sldId="284"/>
+            <ac:spMk id="10" creationId="{70262CB6-64E6-4698-A2A5-16CF79B1F737}"/>
+          </ac:spMkLst>
+        </pc:spChg>
+        <pc:picChg chg="add mod">
+          <ac:chgData name="AU Kelvin" userId="416e5d84-3133-4774-aa1a-290e1bef47d6" providerId="ADAL" clId="{9A4767C1-AA41-4A8F-91E9-F856893F4EE6}" dt="2023-03-09T10:28:35.063" v="185" actId="14100"/>
+          <ac:picMkLst>
+            <pc:docMk/>
+            <pc:sldMk cId="3394698022" sldId="284"/>
+            <ac:picMk id="4" creationId="{C2046B1F-78CE-4371-AA9C-12EC488A7ECF}"/>
+          </ac:picMkLst>
+        </pc:picChg>
+        <pc:picChg chg="add mod">
+          <ac:chgData name="AU Kelvin" userId="416e5d84-3133-4774-aa1a-290e1bef47d6" providerId="ADAL" clId="{9A4767C1-AA41-4A8F-91E9-F856893F4EE6}" dt="2023-03-09T10:28:28.831" v="184" actId="1076"/>
+          <ac:picMkLst>
+            <pc:docMk/>
+            <pc:sldMk cId="3394698022" sldId="284"/>
+            <ac:picMk id="6" creationId="{8FCF6D7B-D99E-4BAB-9D70-E9A16164D4EB}"/>
+          </ac:picMkLst>
+        </pc:picChg>
+      </pc:sldChg>
+      <pc:sldChg chg="addSp delSp modSp add mod modShow">
+        <pc:chgData name="AU Kelvin" userId="416e5d84-3133-4774-aa1a-290e1bef47d6" providerId="ADAL" clId="{9A4767C1-AA41-4A8F-91E9-F856893F4EE6}" dt="2023-03-10T07:42:50.849" v="1897"/>
+        <pc:sldMkLst>
+          <pc:docMk/>
+          <pc:sldMk cId="2077699479" sldId="291"/>
+        </pc:sldMkLst>
+        <pc:spChg chg="del">
+          <ac:chgData name="AU Kelvin" userId="416e5d84-3133-4774-aa1a-290e1bef47d6" providerId="ADAL" clId="{9A4767C1-AA41-4A8F-91E9-F856893F4EE6}" dt="2023-03-10T07:22:42.651" v="1665" actId="478"/>
+          <ac:spMkLst>
+            <pc:docMk/>
+            <pc:sldMk cId="2077699479" sldId="291"/>
+            <ac:spMk id="2" creationId="{D6124752-D21F-4C37-8C89-5A6D49E7D613}"/>
+          </ac:spMkLst>
+        </pc:spChg>
+        <pc:spChg chg="del">
+          <ac:chgData name="AU Kelvin" userId="416e5d84-3133-4774-aa1a-290e1bef47d6" providerId="ADAL" clId="{9A4767C1-AA41-4A8F-91E9-F856893F4EE6}" dt="2023-03-10T07:24:55.961" v="1685" actId="478"/>
+          <ac:spMkLst>
+            <pc:docMk/>
+            <pc:sldMk cId="2077699479" sldId="291"/>
+            <ac:spMk id="3" creationId="{0722FC5A-B29F-4C58-940E-4D925D707B51}"/>
+          </ac:spMkLst>
+        </pc:spChg>
+        <pc:spChg chg="add del mod">
+          <ac:chgData name="AU Kelvin" userId="416e5d84-3133-4774-aa1a-290e1bef47d6" providerId="ADAL" clId="{9A4767C1-AA41-4A8F-91E9-F856893F4EE6}" dt="2023-03-10T07:22:45.389" v="1667" actId="478"/>
+          <ac:spMkLst>
+            <pc:docMk/>
+            <pc:sldMk cId="2077699479" sldId="291"/>
+            <ac:spMk id="6" creationId="{8C92BA6A-2234-4F78-B545-FE36D4540067}"/>
+          </ac:spMkLst>
+        </pc:spChg>
+        <pc:spChg chg="add mod">
+          <ac:chgData name="AU Kelvin" userId="416e5d84-3133-4774-aa1a-290e1bef47d6" providerId="ADAL" clId="{9A4767C1-AA41-4A8F-91E9-F856893F4EE6}" dt="2023-03-10T07:22:55.679" v="1672"/>
+          <ac:spMkLst>
+            <pc:docMk/>
+            <pc:sldMk cId="2077699479" sldId="291"/>
+            <ac:spMk id="8" creationId="{982A48B3-7479-4CFD-8C66-62B2CE53B796}"/>
+          </ac:spMkLst>
+        </pc:spChg>
+        <pc:spChg chg="add mod">
+          <ac:chgData name="AU Kelvin" userId="416e5d84-3133-4774-aa1a-290e1bef47d6" providerId="ADAL" clId="{9A4767C1-AA41-4A8F-91E9-F856893F4EE6}" dt="2023-03-10T07:24:56.300" v="1686"/>
+          <ac:spMkLst>
+            <pc:docMk/>
+            <pc:sldMk cId="2077699479" sldId="291"/>
+            <ac:spMk id="10" creationId="{441E9043-238B-4820-A9B0-7E72A148164F}"/>
+          </ac:spMkLst>
+        </pc:spChg>
+        <pc:spChg chg="add mod">
+          <ac:chgData name="AU Kelvin" userId="416e5d84-3133-4774-aa1a-290e1bef47d6" providerId="ADAL" clId="{9A4767C1-AA41-4A8F-91E9-F856893F4EE6}" dt="2023-03-10T07:29:03.093" v="1797"/>
+          <ac:spMkLst>
+            <pc:docMk/>
+            <pc:sldMk cId="2077699479" sldId="291"/>
+            <ac:spMk id="11" creationId="{8513EA13-0220-44FD-9967-217A5509F3B7}"/>
+          </ac:spMkLst>
+        </pc:spChg>
+        <pc:spChg chg="add mod">
+          <ac:chgData name="AU Kelvin" userId="416e5d84-3133-4774-aa1a-290e1bef47d6" providerId="ADAL" clId="{9A4767C1-AA41-4A8F-91E9-F856893F4EE6}" dt="2023-03-10T07:42:50.849" v="1897"/>
+          <ac:spMkLst>
+            <pc:docMk/>
+            <pc:sldMk cId="2077699479" sldId="291"/>
+            <ac:spMk id="12" creationId="{B956803E-61F3-4C0A-9E7B-C518C9CFD560}"/>
+          </ac:spMkLst>
+        </pc:spChg>
+        <pc:picChg chg="del">
+          <ac:chgData name="AU Kelvin" userId="416e5d84-3133-4774-aa1a-290e1bef47d6" providerId="ADAL" clId="{9A4767C1-AA41-4A8F-91E9-F856893F4EE6}" dt="2023-03-10T07:23:02.341" v="1673" actId="21"/>
+          <ac:picMkLst>
+            <pc:docMk/>
+            <pc:sldMk cId="2077699479" sldId="291"/>
+            <ac:picMk id="7" creationId="{2E085EE4-FEA6-4368-8E94-85BDDBB7F64E}"/>
+          </ac:picMkLst>
+        </pc:picChg>
+        <pc:picChg chg="add mod">
+          <ac:chgData name="AU Kelvin" userId="416e5d84-3133-4774-aa1a-290e1bef47d6" providerId="ADAL" clId="{9A4767C1-AA41-4A8F-91E9-F856893F4EE6}" dt="2023-03-10T07:23:40.390" v="1680" actId="1076"/>
+          <ac:picMkLst>
+            <pc:docMk/>
+            <pc:sldMk cId="2077699479" sldId="291"/>
+            <ac:picMk id="9" creationId="{65887865-F5E7-4F32-B7B3-7828574BD415}"/>
+          </ac:picMkLst>
+        </pc:picChg>
+      </pc:sldChg>
+      <pc:sldChg chg="addSp delSp modSp add mod modShow">
+        <pc:chgData name="AU Kelvin" userId="416e5d84-3133-4774-aa1a-290e1bef47d6" providerId="ADAL" clId="{9A4767C1-AA41-4A8F-91E9-F856893F4EE6}" dt="2023-03-10T07:43:10.612" v="1899"/>
+        <pc:sldMkLst>
+          <pc:docMk/>
+          <pc:sldMk cId="1601178964" sldId="292"/>
+        </pc:sldMkLst>
+        <pc:spChg chg="del">
+          <ac:chgData name="AU Kelvin" userId="416e5d84-3133-4774-aa1a-290e1bef47d6" providerId="ADAL" clId="{9A4767C1-AA41-4A8F-91E9-F856893F4EE6}" dt="2023-03-10T07:29:33.168" v="1798" actId="478"/>
+          <ac:spMkLst>
+            <pc:docMk/>
+            <pc:sldMk cId="1601178964" sldId="292"/>
+            <ac:spMk id="3" creationId="{0722FC5A-B29F-4C58-940E-4D925D707B51}"/>
+          </ac:spMkLst>
+        </pc:spChg>
+        <pc:spChg chg="add del mod">
+          <ac:chgData name="AU Kelvin" userId="416e5d84-3133-4774-aa1a-290e1bef47d6" providerId="ADAL" clId="{9A4767C1-AA41-4A8F-91E9-F856893F4EE6}" dt="2023-03-10T07:24:29.779" v="1684" actId="478"/>
+          <ac:spMkLst>
+            <pc:docMk/>
+            <pc:sldMk cId="1601178964" sldId="292"/>
+            <ac:spMk id="4" creationId="{9E31117A-43C4-47F6-A01F-FA340647FB40}"/>
+          </ac:spMkLst>
+        </pc:spChg>
+        <pc:spChg chg="add mod">
+          <ac:chgData name="AU Kelvin" userId="416e5d84-3133-4774-aa1a-290e1bef47d6" providerId="ADAL" clId="{9A4767C1-AA41-4A8F-91E9-F856893F4EE6}" dt="2023-03-10T07:26:23.284" v="1710" actId="13926"/>
+          <ac:spMkLst>
+            <pc:docMk/>
+            <pc:sldMk cId="1601178964" sldId="292"/>
+            <ac:spMk id="5" creationId="{BA0CD18F-204C-4D36-8D38-C5663BAE40B6}"/>
+          </ac:spMkLst>
+        </pc:spChg>
+        <pc:spChg chg="del">
+          <ac:chgData name="AU Kelvin" userId="416e5d84-3133-4774-aa1a-290e1bef47d6" providerId="ADAL" clId="{9A4767C1-AA41-4A8F-91E9-F856893F4EE6}" dt="2023-03-10T07:24:25.780" v="1682" actId="478"/>
+          <ac:spMkLst>
+            <pc:docMk/>
+            <pc:sldMk cId="1601178964" sldId="292"/>
+            <ac:spMk id="6" creationId="{83861B73-95BF-4669-8FF5-2BBE57D09DFE}"/>
+          </ac:spMkLst>
+        </pc:spChg>
+        <pc:spChg chg="add mod">
+          <ac:chgData name="AU Kelvin" userId="416e5d84-3133-4774-aa1a-290e1bef47d6" providerId="ADAL" clId="{9A4767C1-AA41-4A8F-91E9-F856893F4EE6}" dt="2023-03-10T07:24:27.336" v="1683"/>
+          <ac:spMkLst>
+            <pc:docMk/>
+            <pc:sldMk cId="1601178964" sldId="292"/>
+            <ac:spMk id="9" creationId="{32E72F45-88B7-48EF-8899-109509120516}"/>
+          </ac:spMkLst>
+        </pc:spChg>
+        <pc:spChg chg="add del mod">
+          <ac:chgData name="AU Kelvin" userId="416e5d84-3133-4774-aa1a-290e1bef47d6" providerId="ADAL" clId="{9A4767C1-AA41-4A8F-91E9-F856893F4EE6}" dt="2023-03-10T07:29:35.613" v="1799" actId="478"/>
+          <ac:spMkLst>
+            <pc:docMk/>
+            <pc:sldMk cId="1601178964" sldId="292"/>
+            <ac:spMk id="12" creationId="{7A380A16-EC5A-4C83-9132-6DDA9AA533F6}"/>
+          </ac:spMkLst>
+        </pc:spChg>
+        <pc:spChg chg="add mod">
+          <ac:chgData name="AU Kelvin" userId="416e5d84-3133-4774-aa1a-290e1bef47d6" providerId="ADAL" clId="{9A4767C1-AA41-4A8F-91E9-F856893F4EE6}" dt="2023-03-10T07:30:11.075" v="1827"/>
+          <ac:spMkLst>
+            <pc:docMk/>
+            <pc:sldMk cId="1601178964" sldId="292"/>
+            <ac:spMk id="13" creationId="{E0B225A2-6DD1-4C47-BD87-0059102335A0}"/>
+          </ac:spMkLst>
+        </pc:spChg>
+        <pc:spChg chg="add del mod">
+          <ac:chgData name="AU Kelvin" userId="416e5d84-3133-4774-aa1a-290e1bef47d6" providerId="ADAL" clId="{9A4767C1-AA41-4A8F-91E9-F856893F4EE6}" dt="2023-03-10T07:43:10.444" v="1898" actId="478"/>
+          <ac:spMkLst>
+            <pc:docMk/>
+            <pc:sldMk cId="1601178964" sldId="292"/>
+            <ac:spMk id="14" creationId="{795D4ACA-B7BE-4C24-B3A0-6505BE7CDFB8}"/>
+          </ac:spMkLst>
+        </pc:spChg>
+        <pc:spChg chg="add mod">
+          <ac:chgData name="AU Kelvin" userId="416e5d84-3133-4774-aa1a-290e1bef47d6" providerId="ADAL" clId="{9A4767C1-AA41-4A8F-91E9-F856893F4EE6}" dt="2023-03-10T07:43:10.612" v="1899"/>
+          <ac:spMkLst>
+            <pc:docMk/>
+            <pc:sldMk cId="1601178964" sldId="292"/>
+            <ac:spMk id="15" creationId="{80001105-1374-432C-8FDD-D954D89771F9}"/>
+          </ac:spMkLst>
+        </pc:spChg>
+        <pc:picChg chg="add mod">
+          <ac:chgData name="AU Kelvin" userId="416e5d84-3133-4774-aa1a-290e1bef47d6" providerId="ADAL" clId="{9A4767C1-AA41-4A8F-91E9-F856893F4EE6}" dt="2023-03-10T07:24:15.241" v="1681" actId="1076"/>
+          <ac:picMkLst>
+            <pc:docMk/>
+            <pc:sldMk cId="1601178964" sldId="292"/>
+            <ac:picMk id="7" creationId="{AD71860E-DDC4-4E21-AFE7-604F1F5C2148}"/>
+          </ac:picMkLst>
+        </pc:picChg>
+        <pc:picChg chg="del">
+          <ac:chgData name="AU Kelvin" userId="416e5d84-3133-4774-aa1a-290e1bef47d6" providerId="ADAL" clId="{9A4767C1-AA41-4A8F-91E9-F856893F4EE6}" dt="2023-03-10T07:23:28.380" v="1676" actId="21"/>
+          <ac:picMkLst>
+            <pc:docMk/>
+            <pc:sldMk cId="1601178964" sldId="292"/>
+            <ac:picMk id="8" creationId="{4EAB1F09-034D-4FBE-B9A1-EEE1406402AA}"/>
+          </ac:picMkLst>
+        </pc:picChg>
+      </pc:sldChg>
+    </pc:docChg>
+  </pc:docChgLst>
+  <pc:docChgLst>
+    <pc:chgData name="TSE Kin" userId="0225f25b-d90a-49aa-8f8a-7a0034099826" providerId="ADAL" clId="{B7374FB9-91D6-471D-9E28-7A0A55B93918}"/>
+    <pc:docChg chg="custSel addSld delSld modSld sldOrd">
+      <pc:chgData name="TSE Kin" userId="0225f25b-d90a-49aa-8f8a-7a0034099826" providerId="ADAL" clId="{B7374FB9-91D6-471D-9E28-7A0A55B93918}" dt="2023-03-28T06:31:28.026" v="426" actId="13822"/>
+      <pc:docMkLst>
+        <pc:docMk/>
+      </pc:docMkLst>
+      <pc:sldChg chg="modSp mod addCm modCm">
+        <pc:chgData name="TSE Kin" userId="0225f25b-d90a-49aa-8f8a-7a0034099826" providerId="ADAL" clId="{B7374FB9-91D6-471D-9E28-7A0A55B93918}" dt="2023-03-24T10:16:44.693" v="332"/>
+        <pc:sldMkLst>
+          <pc:docMk/>
+          <pc:sldMk cId="3330272683" sldId="262"/>
+        </pc:sldMkLst>
+        <pc:spChg chg="mod">
+          <ac:chgData name="TSE Kin" userId="0225f25b-d90a-49aa-8f8a-7a0034099826" providerId="ADAL" clId="{B7374FB9-91D6-471D-9E28-7A0A55B93918}" dt="2023-03-24T10:15:52.817" v="329" actId="20577"/>
+          <ac:spMkLst>
+            <pc:docMk/>
+            <pc:sldMk cId="3330272683" sldId="262"/>
+            <ac:spMk id="2" creationId="{D6124752-D21F-4C37-8C89-5A6D49E7D613}"/>
+          </ac:spMkLst>
+        </pc:spChg>
+      </pc:sldChg>
+      <pc:sldChg chg="addCm modCm">
+        <pc:chgData name="TSE Kin" userId="0225f25b-d90a-49aa-8f8a-7a0034099826" providerId="ADAL" clId="{B7374FB9-91D6-471D-9E28-7A0A55B93918}" dt="2023-03-24T10:05:20.763" v="270" actId="5900"/>
+        <pc:sldMkLst>
+          <pc:docMk/>
+          <pc:sldMk cId="3442902861" sldId="266"/>
+        </pc:sldMkLst>
+      </pc:sldChg>
+      <pc:sldChg chg="addCm modCm">
+        <pc:chgData name="TSE Kin" userId="0225f25b-d90a-49aa-8f8a-7a0034099826" providerId="ADAL" clId="{B7374FB9-91D6-471D-9E28-7A0A55B93918}" dt="2023-03-24T10:13:25.950" v="282"/>
+        <pc:sldMkLst>
+          <pc:docMk/>
+          <pc:sldMk cId="3223329462" sldId="269"/>
+        </pc:sldMkLst>
+      </pc:sldChg>
+      <pc:sldChg chg="addSp modSp mod">
+        <pc:chgData name="TSE Kin" userId="0225f25b-d90a-49aa-8f8a-7a0034099826" providerId="ADAL" clId="{B7374FB9-91D6-471D-9E28-7A0A55B93918}" dt="2023-03-28T06:31:28.026" v="426" actId="13822"/>
+        <pc:sldMkLst>
+          <pc:docMk/>
+          <pc:sldMk cId="148509534" sldId="271"/>
+        </pc:sldMkLst>
+        <pc:spChg chg="add mod">
+          <ac:chgData name="TSE Kin" userId="0225f25b-d90a-49aa-8f8a-7a0034099826" providerId="ADAL" clId="{B7374FB9-91D6-471D-9E28-7A0A55B93918}" dt="2023-03-28T06:31:28.026" v="426" actId="13822"/>
+          <ac:spMkLst>
+            <pc:docMk/>
+            <pc:sldMk cId="148509534" sldId="271"/>
+            <ac:spMk id="4" creationId="{8E3D1676-23E6-4E72-B18A-7D13DBAD6907}"/>
+          </ac:spMkLst>
+        </pc:spChg>
+      </pc:sldChg>
+      <pc:sldChg chg="modSp mod addCm modCm">
+        <pc:chgData name="TSE Kin" userId="0225f25b-d90a-49aa-8f8a-7a0034099826" providerId="ADAL" clId="{B7374FB9-91D6-471D-9E28-7A0A55B93918}" dt="2023-03-24T10:25:08.332" v="335" actId="13926"/>
+        <pc:sldMkLst>
+          <pc:docMk/>
+          <pc:sldMk cId="3717067589" sldId="275"/>
+        </pc:sldMkLst>
+        <pc:spChg chg="mod">
+          <ac:chgData name="TSE Kin" userId="0225f25b-d90a-49aa-8f8a-7a0034099826" providerId="ADAL" clId="{B7374FB9-91D6-471D-9E28-7A0A55B93918}" dt="2023-03-24T10:25:08.332" v="335" actId="13926"/>
+          <ac:spMkLst>
+            <pc:docMk/>
+            <pc:sldMk cId="3717067589" sldId="275"/>
+            <ac:spMk id="3" creationId="{33D7F15E-045B-4D7A-B4FB-C49D27CAAB81}"/>
+          </ac:spMkLst>
+        </pc:spChg>
+      </pc:sldChg>
+      <pc:sldChg chg="modSp mod addCm modCm">
+        <pc:chgData name="TSE Kin" userId="0225f25b-d90a-49aa-8f8a-7a0034099826" providerId="ADAL" clId="{B7374FB9-91D6-471D-9E28-7A0A55B93918}" dt="2023-03-24T10:49:43.099" v="368"/>
+        <pc:sldMkLst>
+          <pc:docMk/>
+          <pc:sldMk cId="2849692965" sldId="281"/>
+        </pc:sldMkLst>
+        <pc:picChg chg="mod">
+          <ac:chgData name="TSE Kin" userId="0225f25b-d90a-49aa-8f8a-7a0034099826" providerId="ADAL" clId="{B7374FB9-91D6-471D-9E28-7A0A55B93918}" dt="2023-03-24T09:59:27.009" v="246" actId="14100"/>
+          <ac:picMkLst>
+            <pc:docMk/>
+            <pc:sldMk cId="2849692965" sldId="281"/>
+            <ac:picMk id="4" creationId="{7239D268-D566-4448-A0B5-C4223FAAE021}"/>
+          </ac:picMkLst>
+        </pc:picChg>
+        <pc:picChg chg="mod">
+          <ac:chgData name="TSE Kin" userId="0225f25b-d90a-49aa-8f8a-7a0034099826" providerId="ADAL" clId="{B7374FB9-91D6-471D-9E28-7A0A55B93918}" dt="2023-03-24T10:28:26.603" v="342" actId="1076"/>
+          <ac:picMkLst>
+            <pc:docMk/>
+            <pc:sldMk cId="2849692965" sldId="281"/>
+            <ac:picMk id="5" creationId="{80A5A896-78E0-4FB9-8FCB-AEBA436DB3C4}"/>
+          </ac:picMkLst>
+        </pc:picChg>
+        <pc:picChg chg="mod">
+          <ac:chgData name="TSE Kin" userId="0225f25b-d90a-49aa-8f8a-7a0034099826" providerId="ADAL" clId="{B7374FB9-91D6-471D-9E28-7A0A55B93918}" dt="2023-03-24T09:57:06.204" v="243" actId="14100"/>
+          <ac:picMkLst>
+            <pc:docMk/>
+            <pc:sldMk cId="2849692965" sldId="281"/>
+            <ac:picMk id="7" creationId="{EE8CA801-F2FC-47F0-93F8-866B80116BE4}"/>
+          </ac:picMkLst>
+        </pc:picChg>
+      </pc:sldChg>
+      <pc:sldChg chg="addCm modCm">
+        <pc:chgData name="TSE Kin" userId="0225f25b-d90a-49aa-8f8a-7a0034099826" providerId="ADAL" clId="{B7374FB9-91D6-471D-9E28-7A0A55B93918}" dt="2023-03-24T10:28:03.676" v="341"/>
+        <pc:sldMkLst>
+          <pc:docMk/>
+          <pc:sldMk cId="4159790325" sldId="283"/>
+        </pc:sldMkLst>
+      </pc:sldChg>
+      <pc:sldChg chg="addCm modCm">
+        <pc:chgData name="TSE Kin" userId="0225f25b-d90a-49aa-8f8a-7a0034099826" providerId="ADAL" clId="{B7374FB9-91D6-471D-9E28-7A0A55B93918}" dt="2023-03-24T10:38:09.227" v="366"/>
+        <pc:sldMkLst>
+          <pc:docMk/>
+          <pc:sldMk cId="1601178964" sldId="292"/>
+        </pc:sldMkLst>
+      </pc:sldChg>
+      <pc:sldChg chg="modSp mod">
+        <pc:chgData name="TSE Kin" userId="0225f25b-d90a-49aa-8f8a-7a0034099826" providerId="ADAL" clId="{B7374FB9-91D6-471D-9E28-7A0A55B93918}" dt="2023-03-24T09:58:52.400" v="245" actId="404"/>
+        <pc:sldMkLst>
+          <pc:docMk/>
+          <pc:sldMk cId="1343742741" sldId="300"/>
+        </pc:sldMkLst>
+        <pc:spChg chg="mod">
+          <ac:chgData name="TSE Kin" userId="0225f25b-d90a-49aa-8f8a-7a0034099826" providerId="ADAL" clId="{B7374FB9-91D6-471D-9E28-7A0A55B93918}" dt="2023-03-24T09:58:52.400" v="245" actId="404"/>
+          <ac:spMkLst>
+            <pc:docMk/>
+            <pc:sldMk cId="1343742741" sldId="300"/>
+            <ac:spMk id="2" creationId="{EC523B02-5F95-4633-8AAA-EFDF6751F9AC}"/>
+          </ac:spMkLst>
+        </pc:spChg>
+      </pc:sldChg>
+      <pc:sldChg chg="addCm delCm modCm">
+        <pc:chgData name="TSE Kin" userId="0225f25b-d90a-49aa-8f8a-7a0034099826" providerId="ADAL" clId="{B7374FB9-91D6-471D-9E28-7A0A55B93918}" dt="2023-03-24T10:09:47.060" v="277" actId="1592"/>
+        <pc:sldMkLst>
+          <pc:docMk/>
+          <pc:sldMk cId="3138354313" sldId="323"/>
+        </pc:sldMkLst>
+      </pc:sldChg>
+      <pc:sldChg chg="addSp modSp new mod">
+        <pc:chgData name="TSE Kin" userId="0225f25b-d90a-49aa-8f8a-7a0034099826" providerId="ADAL" clId="{B7374FB9-91D6-471D-9E28-7A0A55B93918}" dt="2023-03-24T10:03:00.596" v="265" actId="20577"/>
+        <pc:sldMkLst>
+          <pc:docMk/>
+          <pc:sldMk cId="685052390" sldId="324"/>
+        </pc:sldMkLst>
+        <pc:spChg chg="mod">
+          <ac:chgData name="TSE Kin" userId="0225f25b-d90a-49aa-8f8a-7a0034099826" providerId="ADAL" clId="{B7374FB9-91D6-471D-9E28-7A0A55B93918}" dt="2023-03-24T09:52:53.654" v="31" actId="20577"/>
+          <ac:spMkLst>
+            <pc:docMk/>
+            <pc:sldMk cId="685052390" sldId="324"/>
+            <ac:spMk id="2" creationId="{B0F0EE94-D3BE-42E4-AA41-6FD391F358B0}"/>
+          </ac:spMkLst>
+        </pc:spChg>
+        <pc:spChg chg="add mod">
+          <ac:chgData name="TSE Kin" userId="0225f25b-d90a-49aa-8f8a-7a0034099826" providerId="ADAL" clId="{B7374FB9-91D6-471D-9E28-7A0A55B93918}" dt="2023-03-24T09:55:40.051" v="242" actId="1076"/>
+          <ac:spMkLst>
+            <pc:docMk/>
+            <pc:sldMk cId="685052390" sldId="324"/>
+            <ac:spMk id="8" creationId="{ACACAFAB-4930-4CFE-AD1A-44985FAC3B14}"/>
+          </ac:spMkLst>
+        </pc:spChg>
+        <pc:spChg chg="add mod">
+          <ac:chgData name="TSE Kin" userId="0225f25b-d90a-49aa-8f8a-7a0034099826" providerId="ADAL" clId="{B7374FB9-91D6-471D-9E28-7A0A55B93918}" dt="2023-03-24T10:03:00.596" v="265" actId="20577"/>
+          <ac:spMkLst>
+            <pc:docMk/>
+            <pc:sldMk cId="685052390" sldId="324"/>
+            <ac:spMk id="15" creationId="{FE01B4FE-6411-477A-998F-2C14F0F7DD43}"/>
+          </ac:spMkLst>
+        </pc:spChg>
+        <pc:picChg chg="add mod">
+          <ac:chgData name="TSE Kin" userId="0225f25b-d90a-49aa-8f8a-7a0034099826" providerId="ADAL" clId="{B7374FB9-91D6-471D-9E28-7A0A55B93918}" dt="2023-03-24T09:51:14.281" v="3" actId="1076"/>
+          <ac:picMkLst>
+            <pc:docMk/>
+            <pc:sldMk cId="685052390" sldId="324"/>
+            <ac:picMk id="3" creationId="{9F83FB1F-6BD8-4C48-8818-02A6418D222B}"/>
+          </ac:picMkLst>
+        </pc:picChg>
+        <pc:picChg chg="add mod">
+          <ac:chgData name="TSE Kin" userId="0225f25b-d90a-49aa-8f8a-7a0034099826" providerId="ADAL" clId="{B7374FB9-91D6-471D-9E28-7A0A55B93918}" dt="2023-03-24T09:51:15.567" v="4" actId="571"/>
+          <ac:picMkLst>
+            <pc:docMk/>
+            <pc:sldMk cId="685052390" sldId="324"/>
+            <ac:picMk id="4" creationId="{3593EE09-63A8-47A5-812D-AFFE796AB757}"/>
+          </ac:picMkLst>
+        </pc:picChg>
+        <pc:picChg chg="add mod">
+          <ac:chgData name="TSE Kin" userId="0225f25b-d90a-49aa-8f8a-7a0034099826" providerId="ADAL" clId="{B7374FB9-91D6-471D-9E28-7A0A55B93918}" dt="2023-03-24T09:51:17.184" v="5" actId="571"/>
+          <ac:picMkLst>
+            <pc:docMk/>
+            <pc:sldMk cId="685052390" sldId="324"/>
+            <ac:picMk id="5" creationId="{714BE021-93C7-4C60-BD25-550C2F0AB1AD}"/>
+          </ac:picMkLst>
+        </pc:picChg>
+        <pc:picChg chg="add mod">
+          <ac:chgData name="TSE Kin" userId="0225f25b-d90a-49aa-8f8a-7a0034099826" providerId="ADAL" clId="{B7374FB9-91D6-471D-9E28-7A0A55B93918}" dt="2023-03-24T09:51:19.867" v="6" actId="571"/>
+          <ac:picMkLst>
+            <pc:docMk/>
+            <pc:sldMk cId="685052390" sldId="324"/>
+            <ac:picMk id="6" creationId="{E02C09AD-179E-463D-ABB4-5F3E636BE935}"/>
+          </ac:picMkLst>
+        </pc:picChg>
+      </pc:sldChg>
+      <pc:sldChg chg="modSp new mod ord">
+        <pc:chgData name="TSE Kin" userId="0225f25b-d90a-49aa-8f8a-7a0034099826" providerId="ADAL" clId="{B7374FB9-91D6-471D-9E28-7A0A55B93918}" dt="2023-03-24T10:14:53.617" v="303" actId="113"/>
+        <pc:sldMkLst>
+          <pc:docMk/>
+          <pc:sldMk cId="3210920882" sldId="325"/>
+        </pc:sldMkLst>
+        <pc:spChg chg="mod">
+          <ac:chgData name="TSE Kin" userId="0225f25b-d90a-49aa-8f8a-7a0034099826" providerId="ADAL" clId="{B7374FB9-91D6-471D-9E28-7A0A55B93918}" dt="2023-03-24T10:14:53.617" v="303" actId="113"/>
+          <ac:spMkLst>
+            <pc:docMk/>
+            <pc:sldMk cId="3210920882" sldId="325"/>
+            <ac:spMk id="2" creationId="{AACC8460-FFAB-477E-AFF6-30A8B073C425}"/>
+          </ac:spMkLst>
+        </pc:spChg>
+      </pc:sldChg>
+      <pc:sldChg chg="modSp add mod ord">
+        <pc:chgData name="TSE Kin" userId="0225f25b-d90a-49aa-8f8a-7a0034099826" providerId="ADAL" clId="{B7374FB9-91D6-471D-9E28-7A0A55B93918}" dt="2023-03-24T10:35:57.782" v="357" actId="20577"/>
+        <pc:sldMkLst>
+          <pc:docMk/>
+          <pc:sldMk cId="2599792077" sldId="326"/>
+        </pc:sldMkLst>
+        <pc:spChg chg="mod">
+          <ac:chgData name="TSE Kin" userId="0225f25b-d90a-49aa-8f8a-7a0034099826" providerId="ADAL" clId="{B7374FB9-91D6-471D-9E28-7A0A55B93918}" dt="2023-03-24T10:35:57.782" v="357" actId="20577"/>
+          <ac:spMkLst>
+            <pc:docMk/>
+            <pc:sldMk cId="2599792077" sldId="326"/>
+            <ac:spMk id="2" creationId="{AACC8460-FFAB-477E-AFF6-30A8B073C425}"/>
+          </ac:spMkLst>
+        </pc:spChg>
+      </pc:sldChg>
+      <pc:sldChg chg="modSp add mod ord">
+        <pc:chgData name="TSE Kin" userId="0225f25b-d90a-49aa-8f8a-7a0034099826" providerId="ADAL" clId="{B7374FB9-91D6-471D-9E28-7A0A55B93918}" dt="2023-03-24T10:36:17.552" v="365"/>
+        <pc:sldMkLst>
+          <pc:docMk/>
+          <pc:sldMk cId="4085462577" sldId="327"/>
+        </pc:sldMkLst>
+        <pc:spChg chg="mod">
+          <ac:chgData name="TSE Kin" userId="0225f25b-d90a-49aa-8f8a-7a0034099826" providerId="ADAL" clId="{B7374FB9-91D6-471D-9E28-7A0A55B93918}" dt="2023-03-24T10:36:09.853" v="363" actId="20577"/>
+          <ac:spMkLst>
+            <pc:docMk/>
+            <pc:sldMk cId="4085462577" sldId="327"/>
+            <ac:spMk id="2" creationId="{AACC8460-FFAB-477E-AFF6-30A8B073C425}"/>
+          </ac:spMkLst>
+        </pc:spChg>
+      </pc:sldChg>
+      <pc:sldChg chg="new del">
+        <pc:chgData name="TSE Kin" userId="0225f25b-d90a-49aa-8f8a-7a0034099826" providerId="ADAL" clId="{B7374FB9-91D6-471D-9E28-7A0A55B93918}" dt="2023-03-27T02:30:58.928" v="370" actId="47"/>
+        <pc:sldMkLst>
+          <pc:docMk/>
+          <pc:sldMk cId="1936159422" sldId="328"/>
+        </pc:sldMkLst>
+      </pc:sldChg>
+      <pc:sldChg chg="addSp modSp add del mod setBg">
+        <pc:chgData name="TSE Kin" userId="0225f25b-d90a-49aa-8f8a-7a0034099826" providerId="ADAL" clId="{B7374FB9-91D6-471D-9E28-7A0A55B93918}" dt="2023-03-27T03:02:54.551" v="384" actId="47"/>
+        <pc:sldMkLst>
+          <pc:docMk/>
+          <pc:sldMk cId="1971543399" sldId="328"/>
+        </pc:sldMkLst>
+        <pc:spChg chg="add mod">
+          <ac:chgData name="TSE Kin" userId="0225f25b-d90a-49aa-8f8a-7a0034099826" providerId="ADAL" clId="{B7374FB9-91D6-471D-9E28-7A0A55B93918}" dt="2023-03-27T03:02:50.846" v="383" actId="20577"/>
+          <ac:spMkLst>
+            <pc:docMk/>
+            <pc:sldMk cId="1971543399" sldId="328"/>
+            <ac:spMk id="4" creationId="{2B4F2120-F72B-4B10-A30B-EFC6BF017500}"/>
+          </ac:spMkLst>
+        </pc:spChg>
+      </pc:sldChg>
+      <pc:sldChg chg="addSp modSp mod">
+        <pc:chgData name="TSE Kin" userId="0225f25b-d90a-49aa-8f8a-7a0034099826" providerId="ADAL" clId="{B7374FB9-91D6-471D-9E28-7A0A55B93918}" dt="2023-03-27T07:11:22.444" v="422" actId="20577"/>
+        <pc:sldMkLst>
+          <pc:docMk/>
+          <pc:sldMk cId="4051684265" sldId="328"/>
+        </pc:sldMkLst>
+        <pc:spChg chg="add mod">
+          <ac:chgData name="TSE Kin" userId="0225f25b-d90a-49aa-8f8a-7a0034099826" providerId="ADAL" clId="{B7374FB9-91D6-471D-9E28-7A0A55B93918}" dt="2023-03-27T07:11:22.444" v="422" actId="20577"/>
+          <ac:spMkLst>
+            <pc:docMk/>
+            <pc:sldMk cId="4051684265" sldId="328"/>
+            <ac:spMk id="4" creationId="{C67326FF-12BC-4A15-ACB9-4AB3A01EAF3D}"/>
+          </ac:spMkLst>
+        </pc:spChg>
+      </pc:sldChg>
+      <pc:sldChg chg="addCm modCm">
+        <pc:chgData name="TSE Kin" userId="0225f25b-d90a-49aa-8f8a-7a0034099826" providerId="ADAL" clId="{B7374FB9-91D6-471D-9E28-7A0A55B93918}" dt="2023-03-28T03:54:58.414" v="424"/>
+        <pc:sldMkLst>
+          <pc:docMk/>
+          <pc:sldMk cId="3817614916" sldId="340"/>
+        </pc:sldMkLst>
+      </pc:sldChg>
+    </pc:docChg>
+  </pc:docChgLst>
+  <pc:docChgLst>
     <pc:chgData name="LEUNG Nicole" userId="8ed04819-1a1c-42ab-ae09-44d42575f3a6" providerId="ADAL" clId="{3E657728-002F-4D06-8545-52875357E7CC}"/>
     <pc:docChg chg="undo redo custSel addSld delSld modSld sldOrd addMainMaster delMainMaster">
       <pc:chgData name="LEUNG Nicole" userId="8ed04819-1a1c-42ab-ae09-44d42575f3a6" providerId="ADAL" clId="{3E657728-002F-4D06-8545-52875357E7CC}" dt="2023-03-20T09:29:54.991" v="5894" actId="1076"/>
@@ -8002,293 +8289,6 @@
           </pc:sldLayoutMkLst>
         </pc:sldLayoutChg>
       </pc:sldMasterChg>
-    </pc:docChg>
-  </pc:docChgLst>
-  <pc:docChgLst>
-    <pc:chgData name="TSE Kin" userId="0225f25b-d90a-49aa-8f8a-7a0034099826" providerId="ADAL" clId="{B7374FB9-91D6-471D-9E28-7A0A55B93918}"/>
-    <pc:docChg chg="custSel addSld delSld modSld sldOrd">
-      <pc:chgData name="TSE Kin" userId="0225f25b-d90a-49aa-8f8a-7a0034099826" providerId="ADAL" clId="{B7374FB9-91D6-471D-9E28-7A0A55B93918}" dt="2023-03-28T06:31:28.026" v="426" actId="13822"/>
-      <pc:docMkLst>
-        <pc:docMk/>
-      </pc:docMkLst>
-      <pc:sldChg chg="modSp mod addCm modCm">
-        <pc:chgData name="TSE Kin" userId="0225f25b-d90a-49aa-8f8a-7a0034099826" providerId="ADAL" clId="{B7374FB9-91D6-471D-9E28-7A0A55B93918}" dt="2023-03-24T10:16:44.693" v="332"/>
-        <pc:sldMkLst>
-          <pc:docMk/>
-          <pc:sldMk cId="3330272683" sldId="262"/>
-        </pc:sldMkLst>
-        <pc:spChg chg="mod">
-          <ac:chgData name="TSE Kin" userId="0225f25b-d90a-49aa-8f8a-7a0034099826" providerId="ADAL" clId="{B7374FB9-91D6-471D-9E28-7A0A55B93918}" dt="2023-03-24T10:15:52.817" v="329" actId="20577"/>
-          <ac:spMkLst>
-            <pc:docMk/>
-            <pc:sldMk cId="3330272683" sldId="262"/>
-            <ac:spMk id="2" creationId="{D6124752-D21F-4C37-8C89-5A6D49E7D613}"/>
-          </ac:spMkLst>
-        </pc:spChg>
-      </pc:sldChg>
-      <pc:sldChg chg="addCm modCm">
-        <pc:chgData name="TSE Kin" userId="0225f25b-d90a-49aa-8f8a-7a0034099826" providerId="ADAL" clId="{B7374FB9-91D6-471D-9E28-7A0A55B93918}" dt="2023-03-24T10:05:20.763" v="270" actId="5900"/>
-        <pc:sldMkLst>
-          <pc:docMk/>
-          <pc:sldMk cId="3442902861" sldId="266"/>
-        </pc:sldMkLst>
-      </pc:sldChg>
-      <pc:sldChg chg="addCm modCm">
-        <pc:chgData name="TSE Kin" userId="0225f25b-d90a-49aa-8f8a-7a0034099826" providerId="ADAL" clId="{B7374FB9-91D6-471D-9E28-7A0A55B93918}" dt="2023-03-24T10:13:25.950" v="282"/>
-        <pc:sldMkLst>
-          <pc:docMk/>
-          <pc:sldMk cId="3223329462" sldId="269"/>
-        </pc:sldMkLst>
-      </pc:sldChg>
-      <pc:sldChg chg="addSp modSp mod">
-        <pc:chgData name="TSE Kin" userId="0225f25b-d90a-49aa-8f8a-7a0034099826" providerId="ADAL" clId="{B7374FB9-91D6-471D-9E28-7A0A55B93918}" dt="2023-03-28T06:31:28.026" v="426" actId="13822"/>
-        <pc:sldMkLst>
-          <pc:docMk/>
-          <pc:sldMk cId="148509534" sldId="271"/>
-        </pc:sldMkLst>
-        <pc:spChg chg="add mod">
-          <ac:chgData name="TSE Kin" userId="0225f25b-d90a-49aa-8f8a-7a0034099826" providerId="ADAL" clId="{B7374FB9-91D6-471D-9E28-7A0A55B93918}" dt="2023-03-28T06:31:28.026" v="426" actId="13822"/>
-          <ac:spMkLst>
-            <pc:docMk/>
-            <pc:sldMk cId="148509534" sldId="271"/>
-            <ac:spMk id="4" creationId="{8E3D1676-23E6-4E72-B18A-7D13DBAD6907}"/>
-          </ac:spMkLst>
-        </pc:spChg>
-      </pc:sldChg>
-      <pc:sldChg chg="modSp mod addCm modCm">
-        <pc:chgData name="TSE Kin" userId="0225f25b-d90a-49aa-8f8a-7a0034099826" providerId="ADAL" clId="{B7374FB9-91D6-471D-9E28-7A0A55B93918}" dt="2023-03-24T10:25:08.332" v="335" actId="13926"/>
-        <pc:sldMkLst>
-          <pc:docMk/>
-          <pc:sldMk cId="3717067589" sldId="275"/>
-        </pc:sldMkLst>
-        <pc:spChg chg="mod">
-          <ac:chgData name="TSE Kin" userId="0225f25b-d90a-49aa-8f8a-7a0034099826" providerId="ADAL" clId="{B7374FB9-91D6-471D-9E28-7A0A55B93918}" dt="2023-03-24T10:25:08.332" v="335" actId="13926"/>
-          <ac:spMkLst>
-            <pc:docMk/>
-            <pc:sldMk cId="3717067589" sldId="275"/>
-            <ac:spMk id="3" creationId="{33D7F15E-045B-4D7A-B4FB-C49D27CAAB81}"/>
-          </ac:spMkLst>
-        </pc:spChg>
-      </pc:sldChg>
-      <pc:sldChg chg="modSp mod addCm modCm">
-        <pc:chgData name="TSE Kin" userId="0225f25b-d90a-49aa-8f8a-7a0034099826" providerId="ADAL" clId="{B7374FB9-91D6-471D-9E28-7A0A55B93918}" dt="2023-03-24T10:49:43.099" v="368"/>
-        <pc:sldMkLst>
-          <pc:docMk/>
-          <pc:sldMk cId="2849692965" sldId="281"/>
-        </pc:sldMkLst>
-        <pc:picChg chg="mod">
-          <ac:chgData name="TSE Kin" userId="0225f25b-d90a-49aa-8f8a-7a0034099826" providerId="ADAL" clId="{B7374FB9-91D6-471D-9E28-7A0A55B93918}" dt="2023-03-24T09:59:27.009" v="246" actId="14100"/>
-          <ac:picMkLst>
-            <pc:docMk/>
-            <pc:sldMk cId="2849692965" sldId="281"/>
-            <ac:picMk id="4" creationId="{7239D268-D566-4448-A0B5-C4223FAAE021}"/>
-          </ac:picMkLst>
-        </pc:picChg>
-        <pc:picChg chg="mod">
-          <ac:chgData name="TSE Kin" userId="0225f25b-d90a-49aa-8f8a-7a0034099826" providerId="ADAL" clId="{B7374FB9-91D6-471D-9E28-7A0A55B93918}" dt="2023-03-24T10:28:26.603" v="342" actId="1076"/>
-          <ac:picMkLst>
-            <pc:docMk/>
-            <pc:sldMk cId="2849692965" sldId="281"/>
-            <ac:picMk id="5" creationId="{80A5A896-78E0-4FB9-8FCB-AEBA436DB3C4}"/>
-          </ac:picMkLst>
-        </pc:picChg>
-        <pc:picChg chg="mod">
-          <ac:chgData name="TSE Kin" userId="0225f25b-d90a-49aa-8f8a-7a0034099826" providerId="ADAL" clId="{B7374FB9-91D6-471D-9E28-7A0A55B93918}" dt="2023-03-24T09:57:06.204" v="243" actId="14100"/>
-          <ac:picMkLst>
-            <pc:docMk/>
-            <pc:sldMk cId="2849692965" sldId="281"/>
-            <ac:picMk id="7" creationId="{EE8CA801-F2FC-47F0-93F8-866B80116BE4}"/>
-          </ac:picMkLst>
-        </pc:picChg>
-      </pc:sldChg>
-      <pc:sldChg chg="addCm modCm">
-        <pc:chgData name="TSE Kin" userId="0225f25b-d90a-49aa-8f8a-7a0034099826" providerId="ADAL" clId="{B7374FB9-91D6-471D-9E28-7A0A55B93918}" dt="2023-03-24T10:28:03.676" v="341"/>
-        <pc:sldMkLst>
-          <pc:docMk/>
-          <pc:sldMk cId="4159790325" sldId="283"/>
-        </pc:sldMkLst>
-      </pc:sldChg>
-      <pc:sldChg chg="addCm modCm">
-        <pc:chgData name="TSE Kin" userId="0225f25b-d90a-49aa-8f8a-7a0034099826" providerId="ADAL" clId="{B7374FB9-91D6-471D-9E28-7A0A55B93918}" dt="2023-03-24T10:38:09.227" v="366"/>
-        <pc:sldMkLst>
-          <pc:docMk/>
-          <pc:sldMk cId="1601178964" sldId="292"/>
-        </pc:sldMkLst>
-      </pc:sldChg>
-      <pc:sldChg chg="modSp mod">
-        <pc:chgData name="TSE Kin" userId="0225f25b-d90a-49aa-8f8a-7a0034099826" providerId="ADAL" clId="{B7374FB9-91D6-471D-9E28-7A0A55B93918}" dt="2023-03-24T09:58:52.400" v="245" actId="404"/>
-        <pc:sldMkLst>
-          <pc:docMk/>
-          <pc:sldMk cId="1343742741" sldId="300"/>
-        </pc:sldMkLst>
-        <pc:spChg chg="mod">
-          <ac:chgData name="TSE Kin" userId="0225f25b-d90a-49aa-8f8a-7a0034099826" providerId="ADAL" clId="{B7374FB9-91D6-471D-9E28-7A0A55B93918}" dt="2023-03-24T09:58:52.400" v="245" actId="404"/>
-          <ac:spMkLst>
-            <pc:docMk/>
-            <pc:sldMk cId="1343742741" sldId="300"/>
-            <ac:spMk id="2" creationId="{EC523B02-5F95-4633-8AAA-EFDF6751F9AC}"/>
-          </ac:spMkLst>
-        </pc:spChg>
-      </pc:sldChg>
-      <pc:sldChg chg="addCm delCm modCm">
-        <pc:chgData name="TSE Kin" userId="0225f25b-d90a-49aa-8f8a-7a0034099826" providerId="ADAL" clId="{B7374FB9-91D6-471D-9E28-7A0A55B93918}" dt="2023-03-24T10:09:47.060" v="277" actId="1592"/>
-        <pc:sldMkLst>
-          <pc:docMk/>
-          <pc:sldMk cId="3138354313" sldId="323"/>
-        </pc:sldMkLst>
-      </pc:sldChg>
-      <pc:sldChg chg="addSp modSp new mod">
-        <pc:chgData name="TSE Kin" userId="0225f25b-d90a-49aa-8f8a-7a0034099826" providerId="ADAL" clId="{B7374FB9-91D6-471D-9E28-7A0A55B93918}" dt="2023-03-24T10:03:00.596" v="265" actId="20577"/>
-        <pc:sldMkLst>
-          <pc:docMk/>
-          <pc:sldMk cId="685052390" sldId="324"/>
-        </pc:sldMkLst>
-        <pc:spChg chg="mod">
-          <ac:chgData name="TSE Kin" userId="0225f25b-d90a-49aa-8f8a-7a0034099826" providerId="ADAL" clId="{B7374FB9-91D6-471D-9E28-7A0A55B93918}" dt="2023-03-24T09:52:53.654" v="31" actId="20577"/>
-          <ac:spMkLst>
-            <pc:docMk/>
-            <pc:sldMk cId="685052390" sldId="324"/>
-            <ac:spMk id="2" creationId="{B0F0EE94-D3BE-42E4-AA41-6FD391F358B0}"/>
-          </ac:spMkLst>
-        </pc:spChg>
-        <pc:spChg chg="add mod">
-          <ac:chgData name="TSE Kin" userId="0225f25b-d90a-49aa-8f8a-7a0034099826" providerId="ADAL" clId="{B7374FB9-91D6-471D-9E28-7A0A55B93918}" dt="2023-03-24T09:55:40.051" v="242" actId="1076"/>
-          <ac:spMkLst>
-            <pc:docMk/>
-            <pc:sldMk cId="685052390" sldId="324"/>
-            <ac:spMk id="8" creationId="{ACACAFAB-4930-4CFE-AD1A-44985FAC3B14}"/>
-          </ac:spMkLst>
-        </pc:spChg>
-        <pc:spChg chg="add mod">
-          <ac:chgData name="TSE Kin" userId="0225f25b-d90a-49aa-8f8a-7a0034099826" providerId="ADAL" clId="{B7374FB9-91D6-471D-9E28-7A0A55B93918}" dt="2023-03-24T10:03:00.596" v="265" actId="20577"/>
-          <ac:spMkLst>
-            <pc:docMk/>
-            <pc:sldMk cId="685052390" sldId="324"/>
-            <ac:spMk id="15" creationId="{FE01B4FE-6411-477A-998F-2C14F0F7DD43}"/>
-          </ac:spMkLst>
-        </pc:spChg>
-        <pc:picChg chg="add mod">
-          <ac:chgData name="TSE Kin" userId="0225f25b-d90a-49aa-8f8a-7a0034099826" providerId="ADAL" clId="{B7374FB9-91D6-471D-9E28-7A0A55B93918}" dt="2023-03-24T09:51:14.281" v="3" actId="1076"/>
-          <ac:picMkLst>
-            <pc:docMk/>
-            <pc:sldMk cId="685052390" sldId="324"/>
-            <ac:picMk id="3" creationId="{9F83FB1F-6BD8-4C48-8818-02A6418D222B}"/>
-          </ac:picMkLst>
-        </pc:picChg>
-        <pc:picChg chg="add mod">
-          <ac:chgData name="TSE Kin" userId="0225f25b-d90a-49aa-8f8a-7a0034099826" providerId="ADAL" clId="{B7374FB9-91D6-471D-9E28-7A0A55B93918}" dt="2023-03-24T09:51:15.567" v="4" actId="571"/>
-          <ac:picMkLst>
-            <pc:docMk/>
-            <pc:sldMk cId="685052390" sldId="324"/>
-            <ac:picMk id="4" creationId="{3593EE09-63A8-47A5-812D-AFFE796AB757}"/>
-          </ac:picMkLst>
-        </pc:picChg>
-        <pc:picChg chg="add mod">
-          <ac:chgData name="TSE Kin" userId="0225f25b-d90a-49aa-8f8a-7a0034099826" providerId="ADAL" clId="{B7374FB9-91D6-471D-9E28-7A0A55B93918}" dt="2023-03-24T09:51:17.184" v="5" actId="571"/>
-          <ac:picMkLst>
-            <pc:docMk/>
-            <pc:sldMk cId="685052390" sldId="324"/>
-            <ac:picMk id="5" creationId="{714BE021-93C7-4C60-BD25-550C2F0AB1AD}"/>
-          </ac:picMkLst>
-        </pc:picChg>
-        <pc:picChg chg="add mod">
-          <ac:chgData name="TSE Kin" userId="0225f25b-d90a-49aa-8f8a-7a0034099826" providerId="ADAL" clId="{B7374FB9-91D6-471D-9E28-7A0A55B93918}" dt="2023-03-24T09:51:19.867" v="6" actId="571"/>
-          <ac:picMkLst>
-            <pc:docMk/>
-            <pc:sldMk cId="685052390" sldId="324"/>
-            <ac:picMk id="6" creationId="{E02C09AD-179E-463D-ABB4-5F3E636BE935}"/>
-          </ac:picMkLst>
-        </pc:picChg>
-      </pc:sldChg>
-      <pc:sldChg chg="modSp new mod ord">
-        <pc:chgData name="TSE Kin" userId="0225f25b-d90a-49aa-8f8a-7a0034099826" providerId="ADAL" clId="{B7374FB9-91D6-471D-9E28-7A0A55B93918}" dt="2023-03-24T10:14:53.617" v="303" actId="113"/>
-        <pc:sldMkLst>
-          <pc:docMk/>
-          <pc:sldMk cId="3210920882" sldId="325"/>
-        </pc:sldMkLst>
-        <pc:spChg chg="mod">
-          <ac:chgData name="TSE Kin" userId="0225f25b-d90a-49aa-8f8a-7a0034099826" providerId="ADAL" clId="{B7374FB9-91D6-471D-9E28-7A0A55B93918}" dt="2023-03-24T10:14:53.617" v="303" actId="113"/>
-          <ac:spMkLst>
-            <pc:docMk/>
-            <pc:sldMk cId="3210920882" sldId="325"/>
-            <ac:spMk id="2" creationId="{AACC8460-FFAB-477E-AFF6-30A8B073C425}"/>
-          </ac:spMkLst>
-        </pc:spChg>
-      </pc:sldChg>
-      <pc:sldChg chg="modSp add mod ord">
-        <pc:chgData name="TSE Kin" userId="0225f25b-d90a-49aa-8f8a-7a0034099826" providerId="ADAL" clId="{B7374FB9-91D6-471D-9E28-7A0A55B93918}" dt="2023-03-24T10:35:57.782" v="357" actId="20577"/>
-        <pc:sldMkLst>
-          <pc:docMk/>
-          <pc:sldMk cId="2599792077" sldId="326"/>
-        </pc:sldMkLst>
-        <pc:spChg chg="mod">
-          <ac:chgData name="TSE Kin" userId="0225f25b-d90a-49aa-8f8a-7a0034099826" providerId="ADAL" clId="{B7374FB9-91D6-471D-9E28-7A0A55B93918}" dt="2023-03-24T10:35:57.782" v="357" actId="20577"/>
-          <ac:spMkLst>
-            <pc:docMk/>
-            <pc:sldMk cId="2599792077" sldId="326"/>
-            <ac:spMk id="2" creationId="{AACC8460-FFAB-477E-AFF6-30A8B073C425}"/>
-          </ac:spMkLst>
-        </pc:spChg>
-      </pc:sldChg>
-      <pc:sldChg chg="modSp add mod ord">
-        <pc:chgData name="TSE Kin" userId="0225f25b-d90a-49aa-8f8a-7a0034099826" providerId="ADAL" clId="{B7374FB9-91D6-471D-9E28-7A0A55B93918}" dt="2023-03-24T10:36:17.552" v="365"/>
-        <pc:sldMkLst>
-          <pc:docMk/>
-          <pc:sldMk cId="4085462577" sldId="327"/>
-        </pc:sldMkLst>
-        <pc:spChg chg="mod">
-          <ac:chgData name="TSE Kin" userId="0225f25b-d90a-49aa-8f8a-7a0034099826" providerId="ADAL" clId="{B7374FB9-91D6-471D-9E28-7A0A55B93918}" dt="2023-03-24T10:36:09.853" v="363" actId="20577"/>
-          <ac:spMkLst>
-            <pc:docMk/>
-            <pc:sldMk cId="4085462577" sldId="327"/>
-            <ac:spMk id="2" creationId="{AACC8460-FFAB-477E-AFF6-30A8B073C425}"/>
-          </ac:spMkLst>
-        </pc:spChg>
-      </pc:sldChg>
-      <pc:sldChg chg="new del">
-        <pc:chgData name="TSE Kin" userId="0225f25b-d90a-49aa-8f8a-7a0034099826" providerId="ADAL" clId="{B7374FB9-91D6-471D-9E28-7A0A55B93918}" dt="2023-03-27T02:30:58.928" v="370" actId="47"/>
-        <pc:sldMkLst>
-          <pc:docMk/>
-          <pc:sldMk cId="1936159422" sldId="328"/>
-        </pc:sldMkLst>
-      </pc:sldChg>
-      <pc:sldChg chg="addSp modSp add del mod setBg">
-        <pc:chgData name="TSE Kin" userId="0225f25b-d90a-49aa-8f8a-7a0034099826" providerId="ADAL" clId="{B7374FB9-91D6-471D-9E28-7A0A55B93918}" dt="2023-03-27T03:02:54.551" v="384" actId="47"/>
-        <pc:sldMkLst>
-          <pc:docMk/>
-          <pc:sldMk cId="1971543399" sldId="328"/>
-        </pc:sldMkLst>
-        <pc:spChg chg="add mod">
-          <ac:chgData name="TSE Kin" userId="0225f25b-d90a-49aa-8f8a-7a0034099826" providerId="ADAL" clId="{B7374FB9-91D6-471D-9E28-7A0A55B93918}" dt="2023-03-27T03:02:50.846" v="383" actId="20577"/>
-          <ac:spMkLst>
-            <pc:docMk/>
-            <pc:sldMk cId="1971543399" sldId="328"/>
-            <ac:spMk id="4" creationId="{2B4F2120-F72B-4B10-A30B-EFC6BF017500}"/>
-          </ac:spMkLst>
-        </pc:spChg>
-      </pc:sldChg>
-      <pc:sldChg chg="addSp modSp mod">
-        <pc:chgData name="TSE Kin" userId="0225f25b-d90a-49aa-8f8a-7a0034099826" providerId="ADAL" clId="{B7374FB9-91D6-471D-9E28-7A0A55B93918}" dt="2023-03-27T07:11:22.444" v="422" actId="20577"/>
-        <pc:sldMkLst>
-          <pc:docMk/>
-          <pc:sldMk cId="4051684265" sldId="328"/>
-        </pc:sldMkLst>
-        <pc:spChg chg="add mod">
-          <ac:chgData name="TSE Kin" userId="0225f25b-d90a-49aa-8f8a-7a0034099826" providerId="ADAL" clId="{B7374FB9-91D6-471D-9E28-7A0A55B93918}" dt="2023-03-27T07:11:22.444" v="422" actId="20577"/>
-          <ac:spMkLst>
-            <pc:docMk/>
-            <pc:sldMk cId="4051684265" sldId="328"/>
-            <ac:spMk id="4" creationId="{C67326FF-12BC-4A15-ACB9-4AB3A01EAF3D}"/>
-          </ac:spMkLst>
-        </pc:spChg>
-      </pc:sldChg>
-      <pc:sldChg chg="addCm modCm">
-        <pc:chgData name="TSE Kin" userId="0225f25b-d90a-49aa-8f8a-7a0034099826" providerId="ADAL" clId="{B7374FB9-91D6-471D-9E28-7A0A55B93918}" dt="2023-03-28T03:54:58.414" v="424"/>
-        <pc:sldMkLst>
-          <pc:docMk/>
-          <pc:sldMk cId="3817614916" sldId="340"/>
-        </pc:sldMkLst>
-      </pc:sldChg>
     </pc:docChg>
   </pc:docChgLst>
 </pc:chgInfo>
@@ -8598,7 +8598,7 @@
           <a:p>
             <a:fld id="{A78166DA-00B6-4747-95F8-88D75EE642E0}" type="datetimeFigureOut">
               <a:rPr lang="en-US" smtClean="0"/>
-              <a:t>31/03/2023</a:t>
+              <a:t>3/28/2023</a:t>
             </a:fld>
             <a:endParaRPr lang="en-US"/>
           </a:p>
@@ -8930,90 +8930,6 @@
           <a:p>
             <a:fld id="{698B4DAF-D1B8-4388-AE59-FC5D6E6C8709}" type="slidenum">
               <a:rPr lang="en-US" smtClean="0"/>
-              <a:t>1</a:t>
-            </a:fld>
-            <a:endParaRPr lang="en-US"/>
-          </a:p>
-        </p:txBody>
-      </p:sp>
-    </p:spTree>
-    <p:extLst>
-      <p:ext uri="{BB962C8B-B14F-4D97-AF65-F5344CB8AC3E}">
-        <p14:creationId xmlns:p14="http://schemas.microsoft.com/office/powerpoint/2010/main" val="1252309509"/>
-      </p:ext>
-    </p:extLst>
-  </p:cSld>
-  <p:clrMapOvr>
-    <a:masterClrMapping/>
-  </p:clrMapOvr>
-</p:notes>
-</file>
-
-<file path=ppt/notesSlides/notesSlide2.xml><?xml version="1.0" encoding="utf-8"?>
-<p:notes xmlns:a="http://schemas.openxmlformats.org/drawingml/2006/main" xmlns:r="http://schemas.openxmlformats.org/officeDocument/2006/relationships" xmlns:p="http://schemas.openxmlformats.org/presentationml/2006/main">
-  <p:cSld>
-    <p:spTree>
-      <p:nvGrpSpPr>
-        <p:cNvPr id="1" name=""/>
-        <p:cNvGrpSpPr/>
-        <p:nvPr/>
-      </p:nvGrpSpPr>
-      <p:grpSpPr>
-        <a:xfrm>
-          <a:off x="0" y="0"/>
-          <a:ext cx="0" cy="0"/>
-          <a:chOff x="0" y="0"/>
-          <a:chExt cx="0" cy="0"/>
-        </a:xfrm>
-      </p:grpSpPr>
-      <p:sp>
-        <p:nvSpPr>
-          <p:cNvPr id="2" name="Slide Image Placeholder 1"/>
-          <p:cNvSpPr>
-            <a:spLocks noGrp="1" noRot="1" noChangeAspect="1"/>
-          </p:cNvSpPr>
-          <p:nvPr>
-            <p:ph type="sldImg"/>
-          </p:nvPr>
-        </p:nvSpPr>
-        <p:spPr/>
-      </p:sp>
-      <p:sp>
-        <p:nvSpPr>
-          <p:cNvPr id="3" name="Notes Placeholder 2"/>
-          <p:cNvSpPr>
-            <a:spLocks noGrp="1"/>
-          </p:cNvSpPr>
-          <p:nvPr>
-            <p:ph type="body" idx="1"/>
-          </p:nvPr>
-        </p:nvSpPr>
-        <p:spPr/>
-        <p:txBody>
-          <a:bodyPr/>
-          <a:lstStyle/>
-          <a:p>
-            <a:endParaRPr lang="en-US"/>
-          </a:p>
-        </p:txBody>
-      </p:sp>
-      <p:sp>
-        <p:nvSpPr>
-          <p:cNvPr id="4" name="Slide Number Placeholder 3"/>
-          <p:cNvSpPr>
-            <a:spLocks noGrp="1"/>
-          </p:cNvSpPr>
-          <p:nvPr>
-            <p:ph type="sldNum" sz="quarter" idx="5"/>
-          </p:nvPr>
-        </p:nvSpPr>
-        <p:spPr/>
-        <p:txBody>
-          <a:bodyPr/>
-          <a:lstStyle/>
-          <a:p>
-            <a:fld id="{698B4DAF-D1B8-4388-AE59-FC5D6E6C8709}" type="slidenum">
-              <a:rPr lang="en-US" smtClean="0"/>
               <a:t>45</a:t>
             </a:fld>
             <a:endParaRPr lang="en-US"/>
@@ -9180,7 +9096,7 @@
           <a:p>
             <a:fld id="{02AC24A9-CCB6-4F8D-B8DB-C2F3692CFA5A}" type="datetimeFigureOut">
               <a:rPr lang="en-US" smtClean="0"/>
-              <a:t>31/03/2023</a:t>
+              <a:t>3/28/2023</a:t>
             </a:fld>
             <a:endParaRPr lang="en-US"/>
           </a:p>
@@ -9378,7 +9294,7 @@
           <a:p>
             <a:fld id="{02AC24A9-CCB6-4F8D-B8DB-C2F3692CFA5A}" type="datetimeFigureOut">
               <a:rPr lang="en-US" smtClean="0"/>
-              <a:t>31/03/2023</a:t>
+              <a:t>3/28/2023</a:t>
             </a:fld>
             <a:endParaRPr lang="en-US"/>
           </a:p>
@@ -9586,7 +9502,7 @@
           <a:p>
             <a:fld id="{02AC24A9-CCB6-4F8D-B8DB-C2F3692CFA5A}" type="datetimeFigureOut">
               <a:rPr lang="en-US" smtClean="0"/>
-              <a:t>31/03/2023</a:t>
+              <a:t>3/28/2023</a:t>
             </a:fld>
             <a:endParaRPr lang="en-US"/>
           </a:p>
@@ -9784,7 +9700,7 @@
           <a:p>
             <a:fld id="{02AC24A9-CCB6-4F8D-B8DB-C2F3692CFA5A}" type="datetimeFigureOut">
               <a:rPr lang="en-US" smtClean="0"/>
-              <a:t>31/03/2023</a:t>
+              <a:t>3/28/2023</a:t>
             </a:fld>
             <a:endParaRPr lang="en-US"/>
           </a:p>
@@ -10059,7 +9975,7 @@
           <a:p>
             <a:fld id="{02AC24A9-CCB6-4F8D-B8DB-C2F3692CFA5A}" type="datetimeFigureOut">
               <a:rPr lang="en-US" smtClean="0"/>
-              <a:t>31/03/2023</a:t>
+              <a:t>3/28/2023</a:t>
             </a:fld>
             <a:endParaRPr lang="en-US"/>
           </a:p>
@@ -10324,7 +10240,7 @@
           <a:p>
             <a:fld id="{02AC24A9-CCB6-4F8D-B8DB-C2F3692CFA5A}" type="datetimeFigureOut">
               <a:rPr lang="en-US" smtClean="0"/>
-              <a:t>31/03/2023</a:t>
+              <a:t>3/28/2023</a:t>
             </a:fld>
             <a:endParaRPr lang="en-US"/>
           </a:p>
@@ -10736,7 +10652,7 @@
           <a:p>
             <a:fld id="{02AC24A9-CCB6-4F8D-B8DB-C2F3692CFA5A}" type="datetimeFigureOut">
               <a:rPr lang="en-US" smtClean="0"/>
-              <a:t>31/03/2023</a:t>
+              <a:t>3/28/2023</a:t>
             </a:fld>
             <a:endParaRPr lang="en-US"/>
           </a:p>
@@ -10877,7 +10793,7 @@
           <a:p>
             <a:fld id="{02AC24A9-CCB6-4F8D-B8DB-C2F3692CFA5A}" type="datetimeFigureOut">
               <a:rPr lang="en-US" smtClean="0"/>
-              <a:t>31/03/2023</a:t>
+              <a:t>3/28/2023</a:t>
             </a:fld>
             <a:endParaRPr lang="en-US"/>
           </a:p>
@@ -10990,7 +10906,7 @@
           <a:p>
             <a:fld id="{02AC24A9-CCB6-4F8D-B8DB-C2F3692CFA5A}" type="datetimeFigureOut">
               <a:rPr lang="en-US" smtClean="0"/>
-              <a:t>31/03/2023</a:t>
+              <a:t>3/28/2023</a:t>
             </a:fld>
             <a:endParaRPr lang="en-US"/>
           </a:p>
@@ -11301,7 +11217,7 @@
           <a:p>
             <a:fld id="{02AC24A9-CCB6-4F8D-B8DB-C2F3692CFA5A}" type="datetimeFigureOut">
               <a:rPr lang="en-US" smtClean="0"/>
-              <a:t>31/03/2023</a:t>
+              <a:t>3/28/2023</a:t>
             </a:fld>
             <a:endParaRPr lang="en-US"/>
           </a:p>
@@ -11589,7 +11505,7 @@
           <a:p>
             <a:fld id="{02AC24A9-CCB6-4F8D-B8DB-C2F3692CFA5A}" type="datetimeFigureOut">
               <a:rPr lang="en-US" smtClean="0"/>
-              <a:t>31/03/2023</a:t>
+              <a:t>3/28/2023</a:t>
             </a:fld>
             <a:endParaRPr lang="en-US"/>
           </a:p>
@@ -11830,7 +11746,7 @@
           <a:p>
             <a:fld id="{02AC24A9-CCB6-4F8D-B8DB-C2F3692CFA5A}" type="datetimeFigureOut">
               <a:rPr lang="en-US" smtClean="0"/>
-              <a:t>31/03/2023</a:t>
+              <a:t>3/28/2023</a:t>
             </a:fld>
             <a:endParaRPr lang="en-US"/>
           </a:p>
@@ -12366,7 +12282,7 @@
           <p:nvPr/>
         </p:nvPicPr>
         <p:blipFill rotWithShape="1">
-          <a:blip r:embed="rId3"/>
+          <a:blip r:embed="rId2"/>
           <a:srcRect l="9487" r="3567"/>
           <a:stretch/>
         </p:blipFill>
@@ -30362,6 +30278,12 @@
 </file>
 
 <file path=customXml/item2.xml><?xml version="1.0" encoding="utf-8"?>
+<p:properties xmlns:p="http://schemas.microsoft.com/office/2006/metadata/properties" xmlns:xsi="http://www.w3.org/2001/XMLSchema-instance" xmlns:pc="http://schemas.microsoft.com/office/infopath/2007/PartnerControls">
+  <documentManagement/>
+</p:properties>
+</file>
+
+<file path=customXml/item3.xml><?xml version="1.0" encoding="utf-8"?>
 <ct:contentTypeSchema xmlns:ct="http://schemas.microsoft.com/office/2006/metadata/contentType" xmlns:ma="http://schemas.microsoft.com/office/2006/metadata/properties/metaAttributes" ct:_="" ma:_="" ma:contentTypeName="Document" ma:contentTypeID="0x0101000A2BC8D8AB7C1B41A8A1D3BBE914830F" ma:contentTypeVersion="2" ma:contentTypeDescription="Create a new document." ma:contentTypeScope="" ma:versionID="29d7097b9fb09687a01c25087ddbd41b">
   <xsd:schema xmlns:xsd="http://www.w3.org/2001/XMLSchema" xmlns:xs="http://www.w3.org/2001/XMLSchema" xmlns:p="http://schemas.microsoft.com/office/2006/metadata/properties" xmlns:ns2="18f18bd6-ba77-4928-9087-e1af9560551f" targetNamespace="http://schemas.microsoft.com/office/2006/metadata/properties" ma:root="true" ma:fieldsID="33b86bc76281b468f4745d5ec1c1ae30" ns2:_="">
     <xsd:import namespace="18f18bd6-ba77-4928-9087-e1af9560551f"/>
@@ -30493,12 +30415,6 @@
 </ct:contentTypeSchema>
 </file>
 
-<file path=customXml/item3.xml><?xml version="1.0" encoding="utf-8"?>
-<p:properties xmlns:p="http://schemas.microsoft.com/office/2006/metadata/properties" xmlns:xsi="http://www.w3.org/2001/XMLSchema-instance" xmlns:pc="http://schemas.microsoft.com/office/infopath/2007/PartnerControls">
-  <documentManagement/>
-</p:properties>
-</file>
-
 <file path=customXml/itemProps1.xml><?xml version="1.0" encoding="utf-8"?>
 <ds:datastoreItem xmlns:ds="http://schemas.openxmlformats.org/officeDocument/2006/customXml" ds:itemID="{96AC4CF2-E983-48E2-A827-EFB4DEC5DA16}">
   <ds:schemaRefs>
@@ -30508,6 +30424,22 @@
 </file>
 
 <file path=customXml/itemProps2.xml><?xml version="1.0" encoding="utf-8"?>
+<ds:datastoreItem xmlns:ds="http://schemas.openxmlformats.org/officeDocument/2006/customXml" ds:itemID="{EF0D2373-B57D-46EA-A08C-A4D491501D42}">
+  <ds:schemaRefs>
+    <ds:schemaRef ds:uri="18f18bd6-ba77-4928-9087-e1af9560551f"/>
+    <ds:schemaRef ds:uri="http://purl.org/dc/dcmitype/"/>
+    <ds:schemaRef ds:uri="http://purl.org/dc/elements/1.1/"/>
+    <ds:schemaRef ds:uri="http://purl.org/dc/terms/"/>
+    <ds:schemaRef ds:uri="http://schemas.microsoft.com/office/2006/documentManagement/types"/>
+    <ds:schemaRef ds:uri="http://schemas.microsoft.com/office/2006/metadata/properties"/>
+    <ds:schemaRef ds:uri="http://schemas.microsoft.com/office/infopath/2007/PartnerControls"/>
+    <ds:schemaRef ds:uri="http://schemas.openxmlformats.org/package/2006/metadata/core-properties"/>
+    <ds:schemaRef ds:uri="http://www.w3.org/XML/1998/namespace"/>
+  </ds:schemaRefs>
+</ds:datastoreItem>
+</file>
+
+<file path=customXml/itemProps3.xml><?xml version="1.0" encoding="utf-8"?>
 <ds:datastoreItem xmlns:ds="http://schemas.openxmlformats.org/officeDocument/2006/customXml" ds:itemID="{669FAC04-E4CC-4C52-9B74-615C4AD4AFDE}">
   <ds:schemaRefs>
     <ds:schemaRef ds:uri="18f18bd6-ba77-4928-9087-e1af9560551f"/>
@@ -30523,20 +30455,4 @@
     <ds:schemaRef ds:uri="http://www.w3.org/2001/XMLSchema"/>
   </ds:schemaRefs>
 </ds:datastoreItem>
-</file>
-
-<file path=customXml/itemProps3.xml><?xml version="1.0" encoding="utf-8"?>
-<ds:datastoreItem xmlns:ds="http://schemas.openxmlformats.org/officeDocument/2006/customXml" ds:itemID="{EF0D2373-B57D-46EA-A08C-A4D491501D42}">
-  <ds:schemaRefs>
-    <ds:schemaRef ds:uri="18f18bd6-ba77-4928-9087-e1af9560551f"/>
-    <ds:schemaRef ds:uri="http://purl.org/dc/dcmitype/"/>
-    <ds:schemaRef ds:uri="http://purl.org/dc/elements/1.1/"/>
-    <ds:schemaRef ds:uri="http://purl.org/dc/terms/"/>
-    <ds:schemaRef ds:uri="http://schemas.microsoft.com/office/2006/documentManagement/types"/>
-    <ds:schemaRef ds:uri="http://schemas.microsoft.com/office/2006/metadata/properties"/>
-    <ds:schemaRef ds:uri="http://schemas.microsoft.com/office/infopath/2007/PartnerControls"/>
-    <ds:schemaRef ds:uri="http://schemas.openxmlformats.org/package/2006/metadata/core-properties"/>
-    <ds:schemaRef ds:uri="http://www.w3.org/XML/1998/namespace"/>
-  </ds:schemaRefs>
-</ds:datastoreItem>
 </file>